--- a/domkratas-ta1/domkratas-ta1.pptx
+++ b/domkratas-ta1/domkratas-ta1.pptx
@@ -14,6 +14,7 @@
     <p:sldId id="262" r:id="rId14"/>
     <p:sldId id="263" r:id="rId15"/>
     <p:sldId id="264" r:id="rId16"/>
+    <p:sldId id="265" r:id="rId17"/>
   </p:sldIdLst>
   <p:sldSz cx="12191695" cy="6858000" type="screen4x3"/>
   <p:notesSz cx="6858000" cy="9144000"/>
@@ -510,7 +511,7 @@
           <a:lstStyle/>
           <a:p>
             <a:r>
-              <a:t>Laba diena. Mūsų tema – domkratas. Parodysime, kaip domkratai vystėsi, kokias problemas jie turi šiandien ir kaip siūlome patobulinti automobilio žirklinį domkratą.</a:t>
+              <a:t>Laba diena. Mūsų tema – domkratas. Parodysime, kaip domkratai vystėsi, kokių problemų jie turi šiandien ir kaip siūlome patobulinti automobilio žirklinį domkratą.</a:t>
             </a:r>
           </a:p>
         </p:txBody>
@@ -580,7 +581,7 @@
           <a:lstStyle/>
           <a:p>
             <a:r>
-              <a:t>Domkratą turi beveik kiekvienas automobilis, o jame susitinka pavaros, medžiagos, sauga ir ergonomika.</a:t>
+              <a:t>Žirklinį domkratą gamintojai deda į naujus automobilius, todėl su juo susiduria beveik kiekvienas vairuotojas. Domkratas veikia pagal sverto arba Paskalio dėsnį: nedidele jėga pakeliamas didelis krovinys.</a:t>
             </a:r>
           </a:p>
         </p:txBody>
@@ -650,7 +651,7 @@
           <a:lstStyle/>
           <a:p>
             <a:r>
-              <a:t>Raida: nuo sverto ir sraigto per hidrauliką iki elektrinių domkratų. Pagrindinė tendencija – nuo jėgos laimėjimo link greičio, saugos ir patogumo.</a:t>
+              <a:t>Raida: nuo Archimedo sverto ir antikinių sraigtinių presų per Bramah ir Dudgeon hidrauliką iki žirklinių ir elektrinių domkratų. Tendencija – nuo jėgos laimėjimo link greičio, saugos ir patogumo.</a:t>
             </a:r>
           </a:p>
         </p:txBody>
@@ -720,7 +721,7 @@
           <a:lstStyle/>
           <a:p>
             <a:r>
-              <a:t>Palyginome penkis pagrindinius tipus. Pasiteisino savistabdis sriegis ir hidraulika, o silpnybės – lėtumas, nestabilumas ir sauga. Gilinsimės į žirklinį, nes jis yra kiekvieno automobilio komplekte.</a:t>
+              <a:t>Palyginome penkis pagrindinius tipus. Pasiteisino savistabdis sraigtas ir hidraulika, o silpnybės – lėtumas, nestabilumas ir sauga. Gilinsimės į žirklinį, nes jis yra automobilio komplekte.</a:t>
             </a:r>
           </a:p>
         </p:txBody>
@@ -790,7 +791,7 @@
           <a:lstStyle/>
           <a:p>
             <a:r>
-              <a:t>Žirklinis domkratas lėtas ir sunkiai sukamas, ypač pradžioje, nes jėga sraigte F = Q / tg θ. Todėl formuluojame uždavinį – greitesnis, lengviau valdomas ir stabilesnis domkratas.</a:t>
+              <a:t>Žirklinis domkratas lėtas ir sunkiai sukamas, ypač pradžioje. Jėga sraigte F = Q / tg θ, todėl žemoje padėtyje ji kelis kartus didesnė už krovinį. Todėl formuluojame uždavinį.</a:t>
             </a:r>
           </a:p>
         </p:txBody>
@@ -930,7 +931,7 @@
           <a:lstStyle/>
           <a:p>
             <a:r>
-              <a:t>Laimime greitį, jėgą ir stabilumą. Kompromisai – didesnė masė ir kaina. Preliminariai variklio galia apie 100 W, todėl užtenka automobilio 12 V lizdo.</a:t>
+              <a:t>Laimime greitį, jėgą ir stabilumą. Kompromisai – didesnė masė ir kaina. Pagal mūsų skaičiavimą variklio galia apie 100 W, todėl užtenka automobilio 12 V lizdo.</a:t>
             </a:r>
           </a:p>
         </p:txBody>
@@ -1000,7 +1001,7 @@
           <a:lstStyle/>
           <a:p>
             <a:r>
-              <a:t>Apibendrinant: žirklinį domkratą siūlome elektrifikuoti ir sustiprinti. TA2 etape atliksime skaičiavimus, patentų analizę ir įvertinsime atitiktį standartams. Ačiū, laukiame klausimų.</a:t>
+              <a:t>Apibendrinant: domkratai vystėsi nuo jėgos laimėjimo iki saugos ir patogumo. Žirklinį domkratą siūlome elektrifikuoti ir sustiprinti. Ačiū, laukiame klausimų.</a:t>
             </a:r>
           </a:p>
         </p:txBody>
@@ -4207,7 +4208,7 @@
 </p:sld>
 </file>
 
-<file path=ppt/slides/slide2.xml><?xml version="1.0" encoding="utf-8"?>
+<file path=ppt/slides/slide10.xml><?xml version="1.0" encoding="utf-8"?>
 <p:sld xmlns:a="http://schemas.openxmlformats.org/drawingml/2006/main" xmlns:p="http://schemas.openxmlformats.org/presentationml/2006/main" xmlns:r="http://schemas.openxmlformats.org/officeDocument/2006/relationships">
   <p:cSld>
     <p:spTree>
@@ -4251,7 +4252,7 @@
                 </a:solidFill>
                 <a:latin typeface="Calibri"/>
               </a:rPr>
-              <a:t>Kodėl pasirinkome domkratą?</a:t>
+              <a:t>Šaltiniai (2/2)</a:t>
             </a:r>
           </a:p>
         </p:txBody>
@@ -4276,6 +4277,7 @@
           <a:ln>
             <a:noFill/>
           </a:ln>
+          <a:effectLst/>
         </p:spPr>
         <p:style>
           <a:lnRef idx="1">
@@ -4333,7 +4335,7 @@
                 </a:solidFill>
                 <a:latin typeface="Calibri"/>
               </a:rPr>
-              <a:t>2 / 9</a:t>
+              <a:t>10 / 10</a:t>
             </a:r>
           </a:p>
         </p:txBody>
@@ -4372,7 +4374,7 @@
                 </a:solidFill>
                 <a:latin typeface="Calibri"/>
               </a:rPr>
-              <a:t>PBL TA1 · Domkratas</a:t>
+              <a:t>PBL · Domkratas</a:t>
             </a:r>
           </a:p>
         </p:txBody>
@@ -4385,8 +4387,8 @@
         </p:nvSpPr>
         <p:spPr>
           <a:xfrm>
-            <a:off x="640080" y="1554480"/>
-            <a:ext cx="10972800" cy="4389120"/>
+            <a:off x="640080" y="1463040"/>
+            <a:ext cx="10881360" cy="4754880"/>
           </a:xfrm>
           <a:prstGeom prst="rect">
             <a:avLst/>
@@ -4401,11 +4403,553 @@
           <a:p>
             <a:pPr algn="l">
               <a:spcAft>
+                <a:spcPts val="700"/>
+              </a:spcAft>
+            </a:pPr>
+            <a:r>
+              <a:rPr sz="1400" b="0">
+                <a:solidFill>
+                  <a:srgbClr val="222222"/>
+                </a:solidFill>
+                <a:latin typeface="Calibri"/>
+              </a:rPr>
+              <a:t>Pro-Lift-Montagetechnik. (n.d.). </a:t>
+            </a:r>
+            <a:r>
+              <a:rPr sz="1400" b="0" i="1">
+                <a:solidFill>
+                  <a:srgbClr val="222222"/>
+                </a:solidFill>
+                <a:latin typeface="Calibri"/>
+              </a:rPr>
+              <a:t>12V electric scissor jack, car jack, 123 mm – 345 mm</a:t>
+            </a:r>
+            <a:r>
+              <a:rPr sz="1400" b="0" i="0">
+                <a:solidFill>
+                  <a:srgbClr val="222222"/>
+                </a:solidFill>
+                <a:latin typeface="Calibri"/>
+              </a:rPr>
+              <a:t>. https://www.pro-lift-montagetechnik.com/12-volt-electric-scissor-jack-car-jack-123mm-345mm-002</a:t>
+            </a:r>
+          </a:p>
+          <a:p>
+            <a:pPr>
+              <a:spcAft>
+                <a:spcPts val="700"/>
+              </a:spcAft>
+            </a:pPr>
+            <a:r>
+              <a:rPr sz="1400" b="0">
+                <a:solidFill>
+                  <a:srgbClr val="222222"/>
+                </a:solidFill>
+                <a:latin typeface="Calibri"/>
+              </a:rPr>
+              <a:t>Redline Stands. (n.d.). </a:t>
+            </a:r>
+            <a:r>
+              <a:rPr sz="1400" b="0" i="1">
+                <a:solidFill>
+                  <a:srgbClr val="222222"/>
+                </a:solidFill>
+                <a:latin typeface="Calibri"/>
+              </a:rPr>
+              <a:t>Bottle jack vs. floor jack: Differences, pros, and cons</a:t>
+            </a:r>
+            <a:r>
+              <a:rPr sz="1400" b="0" i="0">
+                <a:solidFill>
+                  <a:srgbClr val="222222"/>
+                </a:solidFill>
+                <a:latin typeface="Calibri"/>
+              </a:rPr>
+              <a:t>. https://www.redlinestands.com/blog/bottle-jack-vs-floor-jack/</a:t>
+            </a:r>
+          </a:p>
+          <a:p>
+            <a:pPr>
+              <a:spcAft>
+                <a:spcPts val="700"/>
+              </a:spcAft>
+            </a:pPr>
+            <a:r>
+              <a:rPr sz="1400" b="0">
+                <a:solidFill>
+                  <a:srgbClr val="222222"/>
+                </a:solidFill>
+                <a:latin typeface="Calibri"/>
+              </a:rPr>
+              <a:t>Rorres, C. (n.d.). </a:t>
+            </a:r>
+            <a:r>
+              <a:rPr sz="1400" b="0" i="1">
+                <a:solidFill>
+                  <a:srgbClr val="222222"/>
+                </a:solidFill>
+                <a:latin typeface="Calibri"/>
+              </a:rPr>
+              <a:t>Quotations about Archimedes' lever</a:t>
+            </a:r>
+            <a:r>
+              <a:rPr sz="1400" b="0" i="0">
+                <a:solidFill>
+                  <a:srgbClr val="222222"/>
+                </a:solidFill>
+                <a:latin typeface="Calibri"/>
+              </a:rPr>
+              <a:t>. New York University. https://math.nyu.edu/Archimedes/Lever/LeverQuotes.html</a:t>
+            </a:r>
+          </a:p>
+          <a:p>
+            <a:pPr>
+              <a:spcAft>
+                <a:spcPts val="700"/>
+              </a:spcAft>
+            </a:pPr>
+            <a:r>
+              <a:rPr sz="1400" b="0">
+                <a:solidFill>
+                  <a:srgbClr val="222222"/>
+                </a:solidFill>
+                <a:latin typeface="Calibri"/>
+              </a:rPr>
+              <a:t>Roton Products. (n.d.). </a:t>
+            </a:r>
+            <a:r>
+              <a:rPr sz="1400" b="0" i="1">
+                <a:solidFill>
+                  <a:srgbClr val="222222"/>
+                </a:solidFill>
+                <a:latin typeface="Calibri"/>
+              </a:rPr>
+              <a:t>Trapezoidal lead screws: General information</a:t>
+            </a:r>
+            <a:r>
+              <a:rPr sz="1400" b="0" i="0">
+                <a:solidFill>
+                  <a:srgbClr val="222222"/>
+                </a:solidFill>
+                <a:latin typeface="Calibri"/>
+              </a:rPr>
+              <a:t>. https://www.roton.com/products/trapezoidal-lead-screws-nuts/general-information/</a:t>
+            </a:r>
+          </a:p>
+          <a:p>
+            <a:pPr>
+              <a:spcAft>
+                <a:spcPts val="700"/>
+              </a:spcAft>
+            </a:pPr>
+            <a:r>
+              <a:rPr sz="1400" b="0">
+                <a:solidFill>
+                  <a:srgbClr val="222222"/>
+                </a:solidFill>
+                <a:latin typeface="Calibri"/>
+              </a:rPr>
+              <a:t>Sider Ticino. (n.d.). </a:t>
+            </a:r>
+            <a:r>
+              <a:rPr sz="1400" b="0" i="1">
+                <a:solidFill>
+                  <a:srgbClr val="222222"/>
+                </a:solidFill>
+                <a:latin typeface="Calibri"/>
+              </a:rPr>
+              <a:t>42CrMo4 technical specifications</a:t>
+            </a:r>
+            <a:r>
+              <a:rPr sz="1400" b="0" i="0">
+                <a:solidFill>
+                  <a:srgbClr val="222222"/>
+                </a:solidFill>
+                <a:latin typeface="Calibri"/>
+              </a:rPr>
+              <a:t>. https://siderticino.it/en/steel-datasheets/42crmo4/</a:t>
+            </a:r>
+          </a:p>
+          <a:p>
+            <a:pPr>
+              <a:spcAft>
+                <a:spcPts val="700"/>
+              </a:spcAft>
+            </a:pPr>
+            <a:r>
+              <a:rPr sz="1400" b="0">
+                <a:solidFill>
+                  <a:srgbClr val="222222"/>
+                </a:solidFill>
+                <a:latin typeface="Calibri"/>
+              </a:rPr>
+              <a:t>The World Material. (n.d.). </a:t>
+            </a:r>
+            <a:r>
+              <a:rPr sz="1400" b="0" i="1">
+                <a:solidFill>
+                  <a:srgbClr val="222222"/>
+                </a:solidFill>
+                <a:latin typeface="Calibri"/>
+              </a:rPr>
+              <a:t>EN 10025-2 S235 steel properties</a:t>
+            </a:r>
+            <a:r>
+              <a:rPr sz="1400" b="0" i="0">
+                <a:solidFill>
+                  <a:srgbClr val="222222"/>
+                </a:solidFill>
+                <a:latin typeface="Calibri"/>
+              </a:rPr>
+              <a:t>. https://www.theworldmaterial.com/en-10025-2-material-s235-steel/</a:t>
+            </a:r>
+          </a:p>
+          <a:p>
+            <a:pPr>
+              <a:spcAft>
+                <a:spcPts val="700"/>
+              </a:spcAft>
+            </a:pPr>
+            <a:r>
+              <a:rPr sz="1400" b="0">
+                <a:solidFill>
+                  <a:srgbClr val="222222"/>
+                </a:solidFill>
+                <a:latin typeface="Calibri"/>
+              </a:rPr>
+              <a:t>Wikipedia. (n.d.-a). </a:t>
+            </a:r>
+            <a:r>
+              <a:rPr sz="1400" b="0" i="1">
+                <a:solidFill>
+                  <a:srgbClr val="222222"/>
+                </a:solidFill>
+                <a:latin typeface="Calibri"/>
+              </a:rPr>
+              <a:t>Joseph Bramah</a:t>
+            </a:r>
+            <a:r>
+              <a:rPr sz="1400" b="0" i="0">
+                <a:solidFill>
+                  <a:srgbClr val="222222"/>
+                </a:solidFill>
+                <a:latin typeface="Calibri"/>
+              </a:rPr>
+              <a:t>. https://en.wikipedia.org/wiki/Joseph_Bramah</a:t>
+            </a:r>
+          </a:p>
+          <a:p>
+            <a:pPr>
+              <a:spcAft>
+                <a:spcPts val="700"/>
+              </a:spcAft>
+            </a:pPr>
+            <a:r>
+              <a:rPr sz="1400" b="0">
+                <a:solidFill>
+                  <a:srgbClr val="222222"/>
+                </a:solidFill>
+                <a:latin typeface="Calibri"/>
+              </a:rPr>
+              <a:t>Wikipedia. (n.d.-b). </a:t>
+            </a:r>
+            <a:r>
+              <a:rPr sz="1400" b="0" i="1">
+                <a:solidFill>
+                  <a:srgbClr val="222222"/>
+                </a:solidFill>
+                <a:latin typeface="Calibri"/>
+              </a:rPr>
+              <a:t>Richard Dudgeon</a:t>
+            </a:r>
+            <a:r>
+              <a:rPr sz="1400" b="0" i="0">
+                <a:solidFill>
+                  <a:srgbClr val="222222"/>
+                </a:solidFill>
+                <a:latin typeface="Calibri"/>
+              </a:rPr>
+              <a:t>. https://en.wikipedia.org/wiki/Richard_Dudgeon</a:t>
+            </a:r>
+          </a:p>
+          <a:p>
+            <a:pPr>
+              <a:spcAft>
+                <a:spcPts val="700"/>
+              </a:spcAft>
+            </a:pPr>
+            <a:r>
+              <a:rPr sz="1400" b="0">
+                <a:solidFill>
+                  <a:srgbClr val="222222"/>
+                </a:solidFill>
+                <a:latin typeface="Calibri"/>
+              </a:rPr>
+              <a:t>Wikipedia. (n.d.-c). </a:t>
+            </a:r>
+            <a:r>
+              <a:rPr sz="1400" b="0" i="1">
+                <a:solidFill>
+                  <a:srgbClr val="222222"/>
+                </a:solidFill>
+                <a:latin typeface="Calibri"/>
+              </a:rPr>
+              <a:t>Jack (device)</a:t>
+            </a:r>
+            <a:r>
+              <a:rPr sz="1400" b="0" i="0">
+                <a:solidFill>
+                  <a:srgbClr val="222222"/>
+                </a:solidFill>
+                <a:latin typeface="Calibri"/>
+              </a:rPr>
+              <a:t>. https://en.wikipedia.org/wiki/Jack_(device)</a:t>
+            </a:r>
+          </a:p>
+          <a:p>
+            <a:pPr>
+              <a:spcAft>
+                <a:spcPts val="700"/>
+              </a:spcAft>
+            </a:pPr>
+            <a:r>
+              <a:rPr sz="1400" b="0">
+                <a:solidFill>
+                  <a:srgbClr val="222222"/>
+                </a:solidFill>
+                <a:latin typeface="Calibri"/>
+              </a:rPr>
+              <a:t>Wikipedia. (n.d.-d). </a:t>
+            </a:r>
+            <a:r>
+              <a:rPr sz="1400" b="0" i="1">
+                <a:solidFill>
+                  <a:srgbClr val="222222"/>
+                </a:solidFill>
+                <a:latin typeface="Calibri"/>
+              </a:rPr>
+              <a:t>Jackscrew</a:t>
+            </a:r>
+            <a:r>
+              <a:rPr sz="1400" b="0" i="0">
+                <a:solidFill>
+                  <a:srgbClr val="222222"/>
+                </a:solidFill>
+                <a:latin typeface="Calibri"/>
+              </a:rPr>
+              <a:t>. https://en.wikipedia.org/wiki/Jackscrew</a:t>
+            </a:r>
+          </a:p>
+        </p:txBody>
+      </p:sp>
+    </p:spTree>
+  </p:cSld>
+  <p:clrMapOvr>
+    <a:masterClrMapping/>
+  </p:clrMapOvr>
+</p:sld>
+</file>
+
+<file path=ppt/slides/slide2.xml><?xml version="1.0" encoding="utf-8"?>
+<p:sld xmlns:a="http://schemas.openxmlformats.org/drawingml/2006/main" xmlns:p="http://schemas.openxmlformats.org/presentationml/2006/main" xmlns:r="http://schemas.openxmlformats.org/officeDocument/2006/relationships">
+  <p:cSld>
+    <p:spTree>
+      <p:nvGrpSpPr>
+        <p:cNvPr id="1" name=""/>
+        <p:cNvGrpSpPr/>
+        <p:nvPr/>
+      </p:nvGrpSpPr>
+      <p:grpSpPr/>
+      <p:sp>
+        <p:nvSpPr>
+          <p:cNvPr id="2" name="TextBox 1"/>
+          <p:cNvSpPr txBox="1"/>
+          <p:nvPr/>
+        </p:nvSpPr>
+        <p:spPr>
+          <a:xfrm>
+            <a:off x="548640" y="320040"/>
+            <a:ext cx="11064240" cy="822960"/>
+          </a:xfrm>
+          <a:prstGeom prst="rect">
+            <a:avLst/>
+          </a:prstGeom>
+          <a:noFill/>
+        </p:spPr>
+        <p:txBody>
+          <a:bodyPr wrap="square" anchor="b" lIns="45720" rIns="45720">
+            <a:spAutoFit/>
+          </a:bodyPr>
+          <a:lstStyle/>
+          <a:p>
+            <a:pPr algn="l">
+              <a:spcAft>
+                <a:spcPts val="600"/>
+              </a:spcAft>
+            </a:pPr>
+            <a:r>
+              <a:rPr sz="3200" b="1">
+                <a:solidFill>
+                  <a:srgbClr val="1F4E79"/>
+                </a:solidFill>
+                <a:latin typeface="Calibri"/>
+              </a:rPr>
+              <a:t>Kodėl pasirinkome domkratą?</a:t>
+            </a:r>
+          </a:p>
+        </p:txBody>
+      </p:sp>
+      <p:sp>
+        <p:nvSpPr>
+          <p:cNvPr id="3" name="Rectangle 2"/>
+          <p:cNvSpPr/>
+          <p:nvPr/>
+        </p:nvSpPr>
+        <p:spPr>
+          <a:xfrm>
+            <a:off x="594360" y="1207008"/>
+            <a:ext cx="10972800" cy="27432"/>
+          </a:xfrm>
+          <a:prstGeom prst="rect">
+            <a:avLst/>
+          </a:prstGeom>
+          <a:solidFill>
+            <a:srgbClr val="1F4E79"/>
+          </a:solidFill>
+          <a:ln>
+            <a:noFill/>
+          </a:ln>
+          <a:effectLst/>
+        </p:spPr>
+        <p:style>
+          <a:lnRef idx="1">
+            <a:schemeClr val="accent1"/>
+          </a:lnRef>
+          <a:fillRef idx="3">
+            <a:schemeClr val="accent1"/>
+          </a:fillRef>
+          <a:effectRef idx="2">
+            <a:schemeClr val="accent1"/>
+          </a:effectRef>
+          <a:fontRef idx="minor">
+            <a:schemeClr val="lt1"/>
+          </a:fontRef>
+        </p:style>
+        <p:txBody>
+          <a:bodyPr rtlCol="0" anchor="ctr"/>
+          <a:lstStyle/>
+          <a:p>
+            <a:pPr algn="ctr"/>
+          </a:p>
+        </p:txBody>
+      </p:sp>
+      <p:sp>
+        <p:nvSpPr>
+          <p:cNvPr id="4" name="TextBox 3"/>
+          <p:cNvSpPr txBox="1"/>
+          <p:nvPr/>
+        </p:nvSpPr>
+        <p:spPr>
+          <a:xfrm>
+            <a:off x="10698480" y="6355080"/>
+            <a:ext cx="1005840" cy="365760"/>
+          </a:xfrm>
+          <a:prstGeom prst="rect">
+            <a:avLst/>
+          </a:prstGeom>
+          <a:noFill/>
+        </p:spPr>
+        <p:txBody>
+          <a:bodyPr wrap="square" anchor="t" lIns="45720" rIns="45720">
+            <a:spAutoFit/>
+          </a:bodyPr>
+          <a:lstStyle/>
+          <a:p>
+            <a:pPr algn="r">
+              <a:spcAft>
+                <a:spcPts val="600"/>
+              </a:spcAft>
+            </a:pPr>
+            <a:r>
+              <a:rPr sz="1200" b="0">
+                <a:solidFill>
+                  <a:srgbClr val="595959"/>
+                </a:solidFill>
+                <a:latin typeface="Calibri"/>
+              </a:rPr>
+              <a:t>2 / 10</a:t>
+            </a:r>
+          </a:p>
+        </p:txBody>
+      </p:sp>
+      <p:sp>
+        <p:nvSpPr>
+          <p:cNvPr id="5" name="TextBox 4"/>
+          <p:cNvSpPr txBox="1"/>
+          <p:nvPr/>
+        </p:nvSpPr>
+        <p:spPr>
+          <a:xfrm>
+            <a:off x="548640" y="6355080"/>
+            <a:ext cx="7315200" cy="365760"/>
+          </a:xfrm>
+          <a:prstGeom prst="rect">
+            <a:avLst/>
+          </a:prstGeom>
+          <a:noFill/>
+        </p:spPr>
+        <p:txBody>
+          <a:bodyPr wrap="square" anchor="t" lIns="45720" rIns="45720">
+            <a:spAutoFit/>
+          </a:bodyPr>
+          <a:lstStyle/>
+          <a:p>
+            <a:pPr algn="l">
+              <a:spcAft>
+                <a:spcPts val="600"/>
+              </a:spcAft>
+            </a:pPr>
+            <a:r>
+              <a:rPr sz="1200" b="0">
+                <a:solidFill>
+                  <a:srgbClr val="595959"/>
+                </a:solidFill>
+                <a:latin typeface="Calibri"/>
+              </a:rPr>
+              <a:t>PBL · Domkratas</a:t>
+            </a:r>
+          </a:p>
+        </p:txBody>
+      </p:sp>
+      <p:sp>
+        <p:nvSpPr>
+          <p:cNvPr id="6" name="TextBox 5"/>
+          <p:cNvSpPr txBox="1"/>
+          <p:nvPr/>
+        </p:nvSpPr>
+        <p:spPr>
+          <a:xfrm>
+            <a:off x="640080" y="1554480"/>
+            <a:ext cx="10972800" cy="4206240"/>
+          </a:xfrm>
+          <a:prstGeom prst="rect">
+            <a:avLst/>
+          </a:prstGeom>
+          <a:noFill/>
+        </p:spPr>
+        <p:txBody>
+          <a:bodyPr wrap="square" anchor="t" lIns="45720" rIns="45720">
+            <a:spAutoFit/>
+          </a:bodyPr>
+          <a:lstStyle/>
+          <a:p>
+            <a:pPr algn="l">
+              <a:spcAft>
                 <a:spcPts val="1600"/>
               </a:spcAft>
             </a:pPr>
             <a:r>
-              <a:rPr sz="2200" b="1">
+              <a:rPr sz="2100" b="1">
                 <a:solidFill>
                   <a:srgbClr val="222222"/>
                 </a:solidFill>
@@ -4414,13 +4958,22 @@
               <a:t>• Kasdienis įrenginys</a:t>
             </a:r>
             <a:r>
-              <a:rPr sz="2200">
+              <a:rPr sz="2100" b="0" i="0">
                 <a:solidFill>
                   <a:srgbClr val="222222"/>
                 </a:solidFill>
                 <a:latin typeface="Calibri"/>
               </a:rPr>
-              <a:t> – domkratą turi beveik kiekvienas automobilis (ratų keitimas).</a:t>
+              <a:t> – žirklinį domkratą gamintojai dažnai deda į naujus automobilius.</a:t>
+            </a:r>
+            <a:r>
+              <a:rPr sz="1700" b="0" i="0">
+                <a:solidFill>
+                  <a:srgbClr val="595959"/>
+                </a:solidFill>
+                <a:latin typeface="Calibri"/>
+              </a:rPr>
+              <a:t> (CJ Pony Parts, n.d.)</a:t>
             </a:r>
           </a:p>
           <a:p>
@@ -4430,7 +4983,7 @@
               </a:spcAft>
             </a:pPr>
             <a:r>
-              <a:rPr sz="2200" b="1">
+              <a:rPr sz="2100" b="1">
                 <a:solidFill>
                   <a:srgbClr val="222222"/>
                 </a:solidFill>
@@ -4439,13 +4992,22 @@
               <a:t>• Platus taikymas</a:t>
             </a:r>
             <a:r>
-              <a:rPr sz="2200">
+              <a:rPr sz="2100" b="0" i="0">
                 <a:solidFill>
                   <a:srgbClr val="222222"/>
                 </a:solidFill>
                 <a:latin typeface="Calibri"/>
               </a:rPr>
-              <a:t> – autoservisai, statyba, geležinkelis, gelbėjimo tarnybos.</a:t>
+              <a:t> – automobilių remontas, ūkiai, statyba, geležinkelis.</a:t>
+            </a:r>
+            <a:r>
+              <a:rPr sz="1700" b="0" i="0">
+                <a:solidFill>
+                  <a:srgbClr val="595959"/>
+                </a:solidFill>
+                <a:latin typeface="Calibri"/>
+              </a:rPr>
+              <a:t> (Hi-Lift Jack Company, n.d.-a; Wikipedia, n.d.-b)</a:t>
             </a:r>
           </a:p>
           <a:p>
@@ -4455,7 +5017,7 @@
               </a:spcAft>
             </a:pPr>
             <a:r>
-              <a:rPr sz="2200" b="1">
+              <a:rPr sz="2100" b="1">
                 <a:solidFill>
                   <a:srgbClr val="222222"/>
                 </a:solidFill>
@@ -4464,7 +5026,7 @@
               <a:t>• Daug mechanikos vienoje vietoje</a:t>
             </a:r>
             <a:r>
-              <a:rPr sz="2200">
+              <a:rPr sz="2100" b="0" i="0">
                 <a:solidFill>
                   <a:srgbClr val="222222"/>
                 </a:solidFill>
@@ -4480,22 +5042,31 @@
               </a:spcAft>
             </a:pPr>
             <a:r>
-              <a:rPr sz="2200" b="1">
+              <a:rPr sz="2100" b="1">
                 <a:solidFill>
                   <a:srgbClr val="222222"/>
                 </a:solidFill>
                 <a:latin typeface="Calibri"/>
               </a:rPr>
-              <a:t>• Svarbi sauga</a:t>
-            </a:r>
-            <a:r>
-              <a:rPr sz="2200">
+              <a:t>• Mechaninis principas</a:t>
+            </a:r>
+            <a:r>
+              <a:rPr sz="2100" b="0" i="0">
                 <a:solidFill>
                   <a:srgbClr val="222222"/>
                 </a:solidFill>
                 <a:latin typeface="Calibri"/>
               </a:rPr>
-              <a:t> – domkratas laiko šimtus kilogramų šalia žmogaus; vienam automobilio kampui tenka apie 0,4–0,5 t.</a:t>
+              <a:t> – svertas ir sraigtas: maža jėga ilgu keliu pakelia didelį krovinį.</a:t>
+            </a:r>
+            <a:r>
+              <a:rPr sz="1700" b="0" i="0">
+                <a:solidFill>
+                  <a:srgbClr val="595959"/>
+                </a:solidFill>
+                <a:latin typeface="Calibri"/>
+              </a:rPr>
+              <a:t> (Rorres, n.d.)</a:t>
             </a:r>
           </a:p>
           <a:p>
@@ -4505,22 +5076,31 @@
               </a:spcAft>
             </a:pPr>
             <a:r>
-              <a:rPr sz="2200" b="1">
+              <a:rPr sz="2100" b="1">
                 <a:solidFill>
                   <a:srgbClr val="222222"/>
                 </a:solidFill>
                 <a:latin typeface="Calibri"/>
               </a:rPr>
-              <a:t>• Veikimo principas</a:t>
-            </a:r>
-            <a:r>
-              <a:rPr sz="2200">
+              <a:t>• Hidraulinis principas</a:t>
+            </a:r>
+            <a:r>
+              <a:rPr sz="2100" b="0" i="0">
                 <a:solidFill>
                   <a:srgbClr val="222222"/>
                 </a:solidFill>
                 <a:latin typeface="Calibri"/>
               </a:rPr>
-              <a:t> – nedidele jėga pakeliamas didelis krovinys: sraigtu (svertu) arba hidraulika (Paskalio dėsnis).</a:t>
+              <a:t> – Paskalio dėsnis: F₁ / A₁ = F₂ / A₂, todėl didesnis stūmoklis duoda didesnę jėgą.</a:t>
+            </a:r>
+            <a:r>
+              <a:rPr sz="1700" b="0" i="0">
+                <a:solidFill>
+                  <a:srgbClr val="595959"/>
+                </a:solidFill>
+                <a:latin typeface="Calibri"/>
+              </a:rPr>
+              <a:t> (LibreTexts, n.d.)</a:t>
             </a:r>
           </a:p>
         </p:txBody>
@@ -4602,6 +5182,7 @@
           <a:ln>
             <a:noFill/>
           </a:ln>
+          <a:effectLst/>
         </p:spPr>
         <p:style>
           <a:lnRef idx="1">
@@ -4659,7 +5240,7 @@
                 </a:solidFill>
                 <a:latin typeface="Calibri"/>
               </a:rPr>
-              <a:t>3 / 9</a:t>
+              <a:t>3 / 10</a:t>
             </a:r>
           </a:p>
         </p:txBody>
@@ -4698,7 +5279,7 @@
                 </a:solidFill>
                 <a:latin typeface="Calibri"/>
               </a:rPr>
-              <a:t>PBL TA1 · Domkratas</a:t>
+              <a:t>PBL · Domkratas</a:t>
             </a:r>
           </a:p>
         </p:txBody>
@@ -4712,8 +5293,8 @@
           <p:nvPr/>
         </p:nvGraphicFramePr>
         <p:xfrm>
-          <a:off x="640080" y="1554480"/>
-          <a:ext cx="10881360" cy="3968496"/>
+          <a:off x="640080" y="1463040"/>
+          <a:ext cx="10881360" cy="4279392"/>
         </p:xfrm>
         <a:graphic>
           <a:graphicData uri="http://schemas.openxmlformats.org/drawingml/2006/table">
@@ -4722,17 +5303,17 @@
                 <a:tableStyleId>{5C22544A-7EE6-4342-B048-85BDC9FD1C3A}</a:tableStyleId>
               </a:tblPr>
               <a:tblGrid>
-                <a:gridCol w="2377440"/>
-                <a:gridCol w="8503920"/>
+                <a:gridCol w="2011680"/>
+                <a:gridCol w="8869680"/>
               </a:tblGrid>
-              <a:tr h="566928">
+              <a:tr h="475488">
                 <a:tc>
                   <a:txBody>
                     <a:bodyPr/>
                     <a:lstStyle/>
                     <a:p>
                       <a:r>
-                        <a:rPr sz="1700" b="1">
+                        <a:rPr sz="1600" b="1" i="0">
                           <a:solidFill>
                             <a:srgbClr val="FFFFFF"/>
                           </a:solidFill>
@@ -4754,7 +5335,7 @@
                     <a:lstStyle/>
                     <a:p>
                       <a:r>
-                        <a:rPr sz="1700" b="1">
+                        <a:rPr sz="1600" b="1" i="0">
                           <a:solidFill>
                             <a:srgbClr val="FFFFFF"/>
                           </a:solidFill>
@@ -4771,14 +5352,14 @@
                   </a:tcPr>
                 </a:tc>
               </a:tr>
-              <a:tr h="566928">
+              <a:tr h="475488">
                 <a:tc>
                   <a:txBody>
                     <a:bodyPr/>
                     <a:lstStyle/>
                     <a:p>
                       <a:r>
-                        <a:rPr sz="1700" b="1">
+                        <a:rPr sz="1600" b="1" i="0">
                           <a:solidFill>
                             <a:srgbClr val="222222"/>
                           </a:solidFill>
@@ -4800,13 +5381,13 @@
                     <a:lstStyle/>
                     <a:p>
                       <a:r>
-                        <a:rPr sz="1700" b="0">
+                        <a:rPr sz="1600" b="0" i="0">
                           <a:solidFill>
                             <a:srgbClr val="222222"/>
                           </a:solidFill>
                           <a:latin typeface="Calibri"/>
                         </a:rPr>
-                        <a:t>Archimedas aprašo sverto principą – jėgos laimėjimo pagrindą</a:t>
+                        <a:t>Archimedas aiškina sverto principą („Duokite man atramos tašką…“)</a:t>
                       </a:r>
                     </a:p>
                   </a:txBody>
@@ -4817,20 +5398,20 @@
                   </a:tcPr>
                 </a:tc>
               </a:tr>
-              <a:tr h="566928">
+              <a:tr h="475488">
                 <a:tc>
                   <a:txBody>
                     <a:bodyPr/>
                     <a:lstStyle/>
                     <a:p>
                       <a:r>
-                        <a:rPr sz="1700" b="1">
+                        <a:rPr sz="1600" b="1" i="0">
                           <a:solidFill>
                             <a:srgbClr val="222222"/>
                           </a:solidFill>
                           <a:latin typeface="Calibri"/>
                         </a:rPr>
-                        <a:t>XV–XVI a.</a:t>
+                        <a:t>I a.</a:t>
                       </a:r>
                     </a:p>
                   </a:txBody>
@@ -4846,13 +5427,13 @@
                     <a:lstStyle/>
                     <a:p>
                       <a:r>
-                        <a:rPr sz="1700" b="0">
+                        <a:rPr sz="1600" b="0" i="0">
                           <a:solidFill>
                             <a:srgbClr val="222222"/>
                           </a:solidFill>
                           <a:latin typeface="Calibri"/>
                         </a:rPr>
-                        <a:t>Sraigtiniai kėlikliai (sraigtas su veržle), Leonardo da Vinci eskizai</a:t>
+                        <a:t>Graikai ir romėnai naudoja sraigtinius presus alyvuogėms ir vynuogėms spausti</a:t>
                       </a:r>
                     </a:p>
                   </a:txBody>
@@ -4863,14 +5444,14 @@
                   </a:tcPr>
                 </a:tc>
               </a:tr>
-              <a:tr h="566928">
+              <a:tr h="475488">
                 <a:tc>
                   <a:txBody>
                     <a:bodyPr/>
                     <a:lstStyle/>
                     <a:p>
                       <a:r>
-                        <a:rPr sz="1700" b="1">
+                        <a:rPr sz="1600" b="1" i="0">
                           <a:solidFill>
                             <a:srgbClr val="222222"/>
                           </a:solidFill>
@@ -4892,13 +5473,13 @@
                     <a:lstStyle/>
                     <a:p>
                       <a:r>
-                        <a:rPr sz="1700" b="0">
+                        <a:rPr sz="1600" b="0" i="0">
                           <a:solidFill>
                             <a:srgbClr val="222222"/>
                           </a:solidFill>
                           <a:latin typeface="Calibri"/>
                         </a:rPr>
-                        <a:t>J. Bramah patentuoja hidraulinį presą (Paskalio dėsnis)</a:t>
+                        <a:t>J. Bramah patentuoja hidraulinį presą, veikiantį pagal Paskalio dėsnį</a:t>
                       </a:r>
                     </a:p>
                   </a:txBody>
@@ -4909,14 +5490,14 @@
                   </a:tcPr>
                 </a:tc>
               </a:tr>
-              <a:tr h="566928">
+              <a:tr h="475488">
                 <a:tc>
                   <a:txBody>
                     <a:bodyPr/>
                     <a:lstStyle/>
                     <a:p>
                       <a:r>
-                        <a:rPr sz="1700" b="1">
+                        <a:rPr sz="1600" b="1" i="0">
                           <a:solidFill>
                             <a:srgbClr val="222222"/>
                           </a:solidFill>
@@ -4938,13 +5519,13 @@
                     <a:lstStyle/>
                     <a:p>
                       <a:r>
-                        <a:rPr sz="1700" b="0">
+                        <a:rPr sz="1600" b="0" i="0">
                           <a:solidFill>
                             <a:srgbClr val="222222"/>
                           </a:solidFill>
                           <a:latin typeface="Calibri"/>
                         </a:rPr>
-                        <a:t>R. Dudgeon – nešiojamas hidraulinis domkratas</a:t>
+                        <a:t>R. Dudgeon patentuoja nešiojamą hidraulinį domkratą</a:t>
                       </a:r>
                     </a:p>
                   </a:txBody>
@@ -4955,20 +5536,20 @@
                   </a:tcPr>
                 </a:tc>
               </a:tr>
-              <a:tr h="566928">
+              <a:tr h="475488">
                 <a:tc>
                   <a:txBody>
                     <a:bodyPr/>
                     <a:lstStyle/>
                     <a:p>
                       <a:r>
-                        <a:rPr sz="1700" b="1">
+                        <a:rPr sz="1600" b="1" i="0">
                           <a:solidFill>
                             <a:srgbClr val="222222"/>
                           </a:solidFill>
                           <a:latin typeface="Calibri"/>
                         </a:rPr>
-                        <a:t>XX a.</a:t>
+                        <a:t>1905 m.</a:t>
                       </a:r>
                     </a:p>
                   </a:txBody>
@@ -4984,13 +5565,13 @@
                     <a:lstStyle/>
                     <a:p>
                       <a:r>
-                        <a:rPr sz="1700" b="0">
+                        <a:rPr sz="1600" b="0" i="0">
                           <a:solidFill>
                             <a:srgbClr val="222222"/>
                           </a:solidFill>
                           <a:latin typeface="Calibri"/>
                         </a:rPr>
-                        <a:t>„Hi-Lift“ krumpliastiebinis (1905 m.), žirklinis – automobilio komplekte, vežimėliniai – servisuose</a:t>
+                        <a:t>P. J. Harrah patentuoja krumpliastiebinį „Hi-Lift“ domkratą</a:t>
                       </a:r>
                     </a:p>
                   </a:txBody>
@@ -5001,20 +5582,20 @@
                   </a:tcPr>
                 </a:tc>
               </a:tr>
-              <a:tr h="566928">
+              <a:tr h="475488">
                 <a:tc>
                   <a:txBody>
                     <a:bodyPr/>
                     <a:lstStyle/>
                     <a:p>
                       <a:r>
-                        <a:rPr sz="1700" b="1">
+                        <a:rPr sz="1600" b="1" i="0">
                           <a:solidFill>
                             <a:srgbClr val="222222"/>
                           </a:solidFill>
                           <a:latin typeface="Calibri"/>
                         </a:rPr>
-                        <a:t>XXI a.</a:t>
+                        <a:t>1920 m.</a:t>
                       </a:r>
                     </a:p>
                   </a:txBody>
@@ -5030,13 +5611,105 @@
                     <a:lstStyle/>
                     <a:p>
                       <a:r>
-                        <a:rPr sz="1700" b="0">
+                        <a:rPr sz="1600" b="0" i="0">
                           <a:solidFill>
                             <a:srgbClr val="222222"/>
                           </a:solidFill>
                           <a:latin typeface="Calibri"/>
                         </a:rPr>
-                        <a:t>12 V elektriniai, elektrohidrauliniai domkratai, pneumatinės pagalvės</a:t>
+                        <a:t>J. LaFrance pateikia rombo formos (žirklinio) domkrato patento paraišką</a:t>
+                      </a:r>
+                    </a:p>
+                  </a:txBody>
+                  <a:tcPr marL="73152" marR="73152" anchor="ctr">
+                    <a:solidFill>
+                      <a:srgbClr val="FFFFFF"/>
+                    </a:solidFill>
+                  </a:tcPr>
+                </a:tc>
+              </a:tr>
+              <a:tr h="475488">
+                <a:tc>
+                  <a:txBody>
+                    <a:bodyPr/>
+                    <a:lstStyle/>
+                    <a:p>
+                      <a:r>
+                        <a:rPr sz="1600" b="1" i="0">
+                          <a:solidFill>
+                            <a:srgbClr val="222222"/>
+                          </a:solidFill>
+                          <a:latin typeface="Calibri"/>
+                        </a:rPr>
+                        <a:t>1949 m.</a:t>
+                      </a:r>
+                    </a:p>
+                  </a:txBody>
+                  <a:tcPr marL="73152" marR="73152" anchor="ctr">
+                    <a:solidFill>
+                      <a:srgbClr val="FFFFFF"/>
+                    </a:solidFill>
+                  </a:tcPr>
+                </a:tc>
+                <a:tc>
+                  <a:txBody>
+                    <a:bodyPr/>
+                    <a:lstStyle/>
+                    <a:p>
+                      <a:r>
+                        <a:rPr sz="1600" b="0" i="0">
+                          <a:solidFill>
+                            <a:srgbClr val="222222"/>
+                          </a:solidFill>
+                          <a:latin typeface="Calibri"/>
+                        </a:rPr>
+                        <a:t>W. Watson patobulina žirklinį domkratą – jis tampa sudedamas ir kompaktiškas</a:t>
+                      </a:r>
+                    </a:p>
+                  </a:txBody>
+                  <a:tcPr marL="73152" marR="73152" anchor="ctr">
+                    <a:solidFill>
+                      <a:srgbClr val="FFFFFF"/>
+                    </a:solidFill>
+                  </a:tcPr>
+                </a:tc>
+              </a:tr>
+              <a:tr h="475488">
+                <a:tc>
+                  <a:txBody>
+                    <a:bodyPr/>
+                    <a:lstStyle/>
+                    <a:p>
+                      <a:r>
+                        <a:rPr sz="1600" b="1" i="0">
+                          <a:solidFill>
+                            <a:srgbClr val="222222"/>
+                          </a:solidFill>
+                          <a:latin typeface="Calibri"/>
+                        </a:rPr>
+                        <a:t>Šiandien</a:t>
+                      </a:r>
+                    </a:p>
+                  </a:txBody>
+                  <a:tcPr marL="73152" marR="73152" anchor="ctr">
+                    <a:solidFill>
+                      <a:srgbClr val="FFFFFF"/>
+                    </a:solidFill>
+                  </a:tcPr>
+                </a:tc>
+                <a:tc>
+                  <a:txBody>
+                    <a:bodyPr/>
+                    <a:lstStyle/>
+                    <a:p>
+                      <a:r>
+                        <a:rPr sz="1600" b="0" i="0">
+                          <a:solidFill>
+                            <a:srgbClr val="222222"/>
+                          </a:solidFill>
+                          <a:latin typeface="Calibri"/>
+                        </a:rPr>
+                        <a:t>Gaminami 12 V elektriniai žirkliniai domkratai</a:t>
                       </a:r>
                     </a:p>
                   </a:txBody>
@@ -5059,7 +5732,7 @@
         </p:nvSpPr>
         <p:spPr>
           <a:xfrm>
-            <a:off x="640080" y="5760720"/>
+            <a:off x="640080" y="5897880"/>
             <a:ext cx="10881360" cy="457200"/>
           </a:xfrm>
           <a:prstGeom prst="rect">
@@ -5079,13 +5752,13 @@
               </a:spcAft>
             </a:pPr>
             <a:r>
-              <a:rPr sz="1400" b="0">
+              <a:rPr sz="1300" b="0">
                 <a:solidFill>
                   <a:srgbClr val="595959"/>
                 </a:solidFill>
                 <a:latin typeface="Calibri"/>
               </a:rPr>
-              <a:t>Šaltiniai: Encyclopaedia Britannica (n.d.); Hi-Lift Jack Company (n.d.).</a:t>
+              <a:t>Šaltiniai: Rorres (n.d.); Wikipedia (n.d.-a, n.d.-b, n.d.-c); Hi-Lift Jack Company (n.d.-a); AutoIndustriya (n.d.); Pro-Lift-Montagetechnik (n.d.).</a:t>
             </a:r>
           </a:p>
         </p:txBody>
@@ -5167,6 +5840,7 @@
           <a:ln>
             <a:noFill/>
           </a:ln>
+          <a:effectLst/>
         </p:spPr>
         <p:style>
           <a:lnRef idx="1">
@@ -5224,7 +5898,7 @@
                 </a:solidFill>
                 <a:latin typeface="Calibri"/>
               </a:rPr>
-              <a:t>4 / 9</a:t>
+              <a:t>4 / 10</a:t>
             </a:r>
           </a:p>
         </p:txBody>
@@ -5263,7 +5937,7 @@
                 </a:solidFill>
                 <a:latin typeface="Calibri"/>
               </a:rPr>
-              <a:t>PBL TA1 · Domkratas</a:t>
+              <a:t>PBL · Domkratas</a:t>
             </a:r>
           </a:p>
         </p:txBody>
@@ -5278,7 +5952,7 @@
         </p:nvGraphicFramePr>
         <p:xfrm>
           <a:off x="640080" y="1463040"/>
-          <a:ext cx="10881360" cy="4279392"/>
+          <a:ext cx="10881360" cy="4059936"/>
         </p:xfrm>
         <a:graphic>
           <a:graphicData uri="http://schemas.openxmlformats.org/drawingml/2006/table">
@@ -5292,14 +5966,14 @@
                 <a:gridCol w="2834640"/>
                 <a:gridCol w="2926080"/>
               </a:tblGrid>
-              <a:tr h="713232">
+              <a:tr h="676656">
                 <a:tc>
                   <a:txBody>
                     <a:bodyPr/>
                     <a:lstStyle/>
                     <a:p>
                       <a:r>
-                        <a:rPr sz="1600" b="1">
+                        <a:rPr sz="1500" b="1" i="0">
                           <a:solidFill>
                             <a:srgbClr val="FFFFFF"/>
                           </a:solidFill>
@@ -5321,7 +5995,7 @@
                     <a:lstStyle/>
                     <a:p>
                       <a:r>
-                        <a:rPr sz="1600" b="1">
+                        <a:rPr sz="1500" b="1" i="0">
                           <a:solidFill>
                             <a:srgbClr val="FFFFFF"/>
                           </a:solidFill>
@@ -5343,7 +6017,7 @@
                     <a:lstStyle/>
                     <a:p>
                       <a:r>
-                        <a:rPr sz="1600" b="1">
+                        <a:rPr sz="1500" b="1" i="0">
                           <a:solidFill>
                             <a:srgbClr val="FFFFFF"/>
                           </a:solidFill>
@@ -5365,7 +6039,7 @@
                     <a:lstStyle/>
                     <a:p>
                       <a:r>
-                        <a:rPr sz="1600" b="1">
+                        <a:rPr sz="1500" b="1" i="0">
                           <a:solidFill>
                             <a:srgbClr val="FFFFFF"/>
                           </a:solidFill>
@@ -5382,14 +6056,14 @@
                   </a:tcPr>
                 </a:tc>
               </a:tr>
-              <a:tr h="713232">
+              <a:tr h="676656">
                 <a:tc>
                   <a:txBody>
                     <a:bodyPr/>
                     <a:lstStyle/>
                     <a:p>
                       <a:r>
-                        <a:rPr sz="1600" b="1">
+                        <a:rPr sz="1500" b="1" i="0">
                           <a:solidFill>
                             <a:srgbClr val="222222"/>
                           </a:solidFill>
@@ -5411,7 +6085,7 @@
                     <a:lstStyle/>
                     <a:p>
                       <a:r>
-                        <a:rPr sz="1600" b="0">
+                        <a:rPr sz="1500" b="0" i="0">
                           <a:solidFill>
                             <a:srgbClr val="222222"/>
                           </a:solidFill>
@@ -5433,13 +6107,13 @@
                     <a:lstStyle/>
                     <a:p>
                       <a:r>
-                        <a:rPr sz="1600" b="0">
+                        <a:rPr sz="1500" b="0" i="0">
                           <a:solidFill>
                             <a:srgbClr val="222222"/>
                           </a:solidFill>
                           <a:latin typeface="Calibri"/>
                         </a:rPr>
-                        <a:t>Savistabdis, patikimas</a:t>
+                        <a:t>Savistabdis – krovinys nenusileidžia savaime</a:t>
                       </a:r>
                     </a:p>
                   </a:txBody>
@@ -5455,13 +6129,13 @@
                     <a:lstStyle/>
                     <a:p>
                       <a:r>
-                        <a:rPr sz="1600" b="0">
+                        <a:rPr sz="1500" b="0" i="0">
                           <a:solidFill>
                             <a:srgbClr val="222222"/>
                           </a:solidFill>
                           <a:latin typeface="Calibri"/>
                         </a:rPr>
-                        <a:t>Lėtas, mažas kėlimo aukštis</a:t>
+                        <a:t>Mažas naudingumo koeficientas (30–40 %), lėtas</a:t>
                       </a:r>
                     </a:p>
                   </a:txBody>
@@ -5472,14 +6146,14 @@
                   </a:tcPr>
                 </a:tc>
               </a:tr>
-              <a:tr h="713232">
+              <a:tr h="676656">
                 <a:tc>
                   <a:txBody>
                     <a:bodyPr/>
                     <a:lstStyle/>
                     <a:p>
                       <a:r>
-                        <a:rPr sz="1600" b="1">
+                        <a:rPr sz="1500" b="1" i="0">
                           <a:solidFill>
                             <a:srgbClr val="222222"/>
                           </a:solidFill>
@@ -5501,13 +6175,13 @@
                     <a:lstStyle/>
                     <a:p>
                       <a:r>
-                        <a:rPr sz="1600" b="0">
+                        <a:rPr sz="1500" b="0" i="0">
                           <a:solidFill>
                             <a:srgbClr val="222222"/>
                           </a:solidFill>
                           <a:latin typeface="Calibri"/>
                         </a:rPr>
-                        <a:t>Svirtis su skląsčiu kopia krumpliastiebiu</a:t>
+                        <a:t>Svirtis su skląsčiu kyla krumpliastiebiu</a:t>
                       </a:r>
                     </a:p>
                   </a:txBody>
@@ -5523,13 +6197,13 @@
                     <a:lstStyle/>
                     <a:p>
                       <a:r>
-                        <a:rPr sz="1600" b="0">
+                        <a:rPr sz="1500" b="0" i="0">
                           <a:solidFill>
                             <a:srgbClr val="222222"/>
                           </a:solidFill>
                           <a:latin typeface="Calibri"/>
                         </a:rPr>
-                        <a:t>Labai didelis kėlimo aukštis</a:t>
+                        <a:t>Didelis kėlimo aukštis (iki ~1,5 m)</a:t>
                       </a:r>
                     </a:p>
                   </a:txBody>
@@ -5545,13 +6219,13 @@
                     <a:lstStyle/>
                     <a:p>
                       <a:r>
-                        <a:rPr sz="1600" b="0">
+                        <a:rPr sz="1500" b="0" i="0">
                           <a:solidFill>
                             <a:srgbClr val="222222"/>
                           </a:solidFill>
                           <a:latin typeface="Calibri"/>
                         </a:rPr>
-                        <a:t>Nestabilus, pavojinga rankenos atatranka</a:t>
+                        <a:t>Pavojinga rankenos atatranka</a:t>
                       </a:r>
                     </a:p>
                   </a:txBody>
@@ -5562,14 +6236,14 @@
                   </a:tcPr>
                 </a:tc>
               </a:tr>
-              <a:tr h="713232">
+              <a:tr h="676656">
                 <a:tc>
                   <a:txBody>
                     <a:bodyPr/>
                     <a:lstStyle/>
                     <a:p>
                       <a:r>
-                        <a:rPr sz="1600" b="1">
+                        <a:rPr sz="1500" b="1" i="0">
                           <a:solidFill>
                             <a:srgbClr val="222222"/>
                           </a:solidFill>
@@ -5591,7 +6265,7 @@
                     <a:lstStyle/>
                     <a:p>
                       <a:r>
-                        <a:rPr sz="1600" b="0">
+                        <a:rPr sz="1500" b="0" i="0">
                           <a:solidFill>
                             <a:srgbClr val="222222"/>
                           </a:solidFill>
@@ -5613,13 +6287,13 @@
                     <a:lstStyle/>
                     <a:p>
                       <a:r>
-                        <a:rPr sz="1600" b="0">
+                        <a:rPr sz="1500" b="0" i="0">
                           <a:solidFill>
                             <a:srgbClr val="222222"/>
                           </a:solidFill>
                           <a:latin typeface="Calibri"/>
                         </a:rPr>
-                        <a:t>Kompaktiškas, lengvas, pigus</a:t>
+                        <a:t>Lengvas, pigus, telpa automobilyje</a:t>
                       </a:r>
                     </a:p>
                   </a:txBody>
@@ -5635,13 +6309,13 @@
                     <a:lstStyle/>
                     <a:p>
                       <a:r>
-                        <a:rPr sz="1600" b="0">
+                        <a:rPr sz="1500" b="0" i="0">
                           <a:solidFill>
                             <a:srgbClr val="222222"/>
                           </a:solidFill>
                           <a:latin typeface="Calibri"/>
                         </a:rPr>
-                        <a:t>Lėtas, sunku sukti, siauras pagrindas</a:t>
+                        <a:t>Lėtas, siauras pagrindas, nestabilus</a:t>
                       </a:r>
                     </a:p>
                   </a:txBody>
@@ -5652,14 +6326,14 @@
                   </a:tcPr>
                 </a:tc>
               </a:tr>
-              <a:tr h="713232">
+              <a:tr h="676656">
                 <a:tc>
                   <a:txBody>
                     <a:bodyPr/>
                     <a:lstStyle/>
                     <a:p>
                       <a:r>
-                        <a:rPr sz="1600" b="1">
+                        <a:rPr sz="1500" b="1" i="0">
                           <a:solidFill>
                             <a:srgbClr val="222222"/>
                           </a:solidFill>
@@ -5681,7 +6355,7 @@
                     <a:lstStyle/>
                     <a:p>
                       <a:r>
-                        <a:rPr sz="1600" b="0">
+                        <a:rPr sz="1500" b="0" i="0">
                           <a:solidFill>
                             <a:srgbClr val="222222"/>
                           </a:solidFill>
@@ -5703,13 +6377,13 @@
                     <a:lstStyle/>
                     <a:p>
                       <a:r>
-                        <a:rPr sz="1600" b="0">
+                        <a:rPr sz="1500" b="0" i="0">
                           <a:solidFill>
                             <a:srgbClr val="222222"/>
                           </a:solidFill>
                           <a:latin typeface="Calibri"/>
                         </a:rPr>
-                        <a:t>Didelė jėga mažame tūryje</a:t>
+                        <a:t>Didelė keliamoji galia (3–50 t)</a:t>
                       </a:r>
                     </a:p>
                   </a:txBody>
@@ -5725,13 +6399,13 @@
                     <a:lstStyle/>
                     <a:p>
                       <a:r>
-                        <a:rPr sz="1600" b="0">
+                        <a:rPr sz="1500" b="0" i="0">
                           <a:solidFill>
                             <a:srgbClr val="222222"/>
                           </a:solidFill>
                           <a:latin typeface="Calibri"/>
                         </a:rPr>
-                        <a:t>Didelis pradinis aukštis, nutekėjimai</a:t>
+                        <a:t>Mažas pagrindas, didelis pradinis aukštis</a:t>
                       </a:r>
                     </a:p>
                   </a:txBody>
@@ -5742,14 +6416,14 @@
                   </a:tcPr>
                 </a:tc>
               </a:tr>
-              <a:tr h="713232">
+              <a:tr h="676656">
                 <a:tc>
                   <a:txBody>
                     <a:bodyPr/>
                     <a:lstStyle/>
                     <a:p>
                       <a:r>
-                        <a:rPr sz="1600" b="1">
+                        <a:rPr sz="1500" b="1" i="0">
                           <a:solidFill>
                             <a:srgbClr val="222222"/>
                           </a:solidFill>
@@ -5771,7 +6445,7 @@
                     <a:lstStyle/>
                     <a:p>
                       <a:r>
-                        <a:rPr sz="1600" b="0">
+                        <a:rPr sz="1500" b="0" i="0">
                           <a:solidFill>
                             <a:srgbClr val="222222"/>
                           </a:solidFill>
@@ -5793,13 +6467,13 @@
                     <a:lstStyle/>
                     <a:p>
                       <a:r>
-                        <a:rPr sz="1600" b="0">
+                        <a:rPr sz="1500" b="0" i="0">
                           <a:solidFill>
                             <a:srgbClr val="222222"/>
                           </a:solidFill>
                           <a:latin typeface="Calibri"/>
                         </a:rPr>
-                        <a:t>Greitas, stabilus</a:t>
+                        <a:t>Greitas ir stabilus (2–4 t)</a:t>
                       </a:r>
                     </a:p>
                   </a:txBody>
@@ -5815,13 +6489,13 @@
                     <a:lstStyle/>
                     <a:p>
                       <a:r>
-                        <a:rPr sz="1600" b="0">
+                        <a:rPr sz="1500" b="0" i="0">
                           <a:solidFill>
                             <a:srgbClr val="222222"/>
                           </a:solidFill>
                           <a:latin typeface="Calibri"/>
                         </a:rPr>
-                        <a:t>Sunkus, nenešiojamas, brangus</a:t>
+                        <a:t>Didelis, sunku perkelti</a:t>
                       </a:r>
                     </a:p>
                   </a:txBody>
@@ -5836,6 +6510,45 @@
           </a:graphicData>
         </a:graphic>
       </p:graphicFrame>
+      <p:sp>
+        <p:nvSpPr>
+          <p:cNvPr id="7" name="TextBox 6"/>
+          <p:cNvSpPr txBox="1"/>
+          <p:nvPr/>
+        </p:nvSpPr>
+        <p:spPr>
+          <a:xfrm>
+            <a:off x="640080" y="5897880"/>
+            <a:ext cx="10881360" cy="457200"/>
+          </a:xfrm>
+          <a:prstGeom prst="rect">
+            <a:avLst/>
+          </a:prstGeom>
+          <a:noFill/>
+        </p:spPr>
+        <p:txBody>
+          <a:bodyPr wrap="square" anchor="t" lIns="45720" rIns="45720">
+            <a:spAutoFit/>
+          </a:bodyPr>
+          <a:lstStyle/>
+          <a:p>
+            <a:pPr algn="l">
+              <a:spcAft>
+                <a:spcPts val="600"/>
+              </a:spcAft>
+            </a:pPr>
+            <a:r>
+              <a:rPr sz="1300" b="0">
+                <a:solidFill>
+                  <a:srgbClr val="595959"/>
+                </a:solidFill>
+                <a:latin typeface="Calibri"/>
+              </a:rPr>
+              <a:t>Šaltiniai: Wikipedia (n.d.-d); Joyce/Dayton (n.d.); CJ Pony Parts (n.d.); Hi-Lift Jack Company (n.d.-b); CN Trailer Parts (n.d.); Redline Stands (n.d.).</a:t>
+            </a:r>
+          </a:p>
+        </p:txBody>
+      </p:sp>
     </p:spTree>
   </p:cSld>
   <p:clrMapOvr>
@@ -5913,6 +6626,7 @@
           <a:ln>
             <a:noFill/>
           </a:ln>
+          <a:effectLst/>
         </p:spPr>
         <p:style>
           <a:lnRef idx="1">
@@ -5970,7 +6684,7 @@
                 </a:solidFill>
                 <a:latin typeface="Calibri"/>
               </a:rPr>
-              <a:t>5 / 9</a:t>
+              <a:t>5 / 10</a:t>
             </a:r>
           </a:p>
         </p:txBody>
@@ -6009,7 +6723,7 @@
                 </a:solidFill>
                 <a:latin typeface="Calibri"/>
               </a:rPr>
-              <a:t>PBL TA1 · Domkratas</a:t>
+              <a:t>PBL · Domkratas</a:t>
             </a:r>
           </a:p>
         </p:txBody>
@@ -6062,7 +6776,7 @@
         <p:spPr>
           <a:xfrm>
             <a:off x="640080" y="2011680"/>
-            <a:ext cx="5486400" cy="3931920"/>
+            <a:ext cx="5577840" cy="3749039"/>
           </a:xfrm>
           <a:prstGeom prst="rect">
             <a:avLst/>
@@ -6090,13 +6804,13 @@
               <a:t>• Lėtas</a:t>
             </a:r>
             <a:r>
-              <a:rPr sz="1900">
+              <a:rPr sz="1900" b="0" i="0">
                 <a:solidFill>
                   <a:srgbClr val="222222"/>
                 </a:solidFill>
                 <a:latin typeface="Calibri"/>
               </a:rPr>
-              <a:t> – reikia apie 60–100 rankenos apsisukimų (2–4 min).</a:t>
+              <a:t> – reikia daug rankenos apsisukimų (mūsų įvertinimu, 60–100).</a:t>
             </a:r>
           </a:p>
           <a:p>
@@ -6115,13 +6829,13 @@
               <a:t>• Sunku sukti</a:t>
             </a:r>
             <a:r>
-              <a:rPr sz="1900">
+              <a:rPr sz="1900" b="0" i="0">
                 <a:solidFill>
                   <a:srgbClr val="222222"/>
                 </a:solidFill>
                 <a:latin typeface="Calibri"/>
               </a:rPr>
-              <a:t> – žemoje padėtyje jėga sraigte kelis kartus didesnė už krovinį.</a:t>
+              <a:t> – žemoje padėtyje jėga sraigte kelis kartus didesnė už krovinį (F = Q / tg θ).</a:t>
             </a:r>
           </a:p>
           <a:p>
@@ -6140,13 +6854,13 @@
               <a:t>• Nestabilus</a:t>
             </a:r>
             <a:r>
-              <a:rPr sz="1900">
+              <a:rPr sz="1900" b="0" i="0">
                 <a:solidFill>
                   <a:srgbClr val="222222"/>
                 </a:solidFill>
                 <a:latin typeface="Calibri"/>
               </a:rPr>
-              <a:t> – mažas pagrindas slysta ar smenga į minkštą gruntą.</a:t>
+              <a:t> – siauras pagrindas, ypač ant nelygaus ar minkšto paviršiaus.</a:t>
             </a:r>
           </a:p>
           <a:p>
@@ -6165,13 +6879,13 @@
               <a:t>• Nepatogus</a:t>
             </a:r>
             <a:r>
-              <a:rPr sz="1900">
+              <a:rPr sz="1900" b="0" i="0">
                 <a:solidFill>
                   <a:srgbClr val="222222"/>
                 </a:solidFill>
                 <a:latin typeface="Calibri"/>
               </a:rPr>
-              <a:t> – žmogus dirba pasilenkęs, ilgai būna prie kelio.</a:t>
+              <a:t> – sukti tenka nepatogioje padėtyje.</a:t>
             </a:r>
           </a:p>
         </p:txBody>
@@ -6185,7 +6899,7 @@
         <p:spPr>
           <a:xfrm>
             <a:off x="6492240" y="1508760"/>
-            <a:ext cx="5029200" cy="4297680"/>
+            <a:ext cx="5029200" cy="4206240"/>
           </a:xfrm>
           <a:prstGeom prst="rect">
             <a:avLst/>
@@ -6229,7 +6943,7 @@
         <p:spPr>
           <a:xfrm>
             <a:off x="6720840" y="1691640"/>
-            <a:ext cx="4572000" cy="4023360"/>
+            <a:ext cx="4572000" cy="3931920"/>
           </a:xfrm>
           <a:prstGeom prst="rect">
             <a:avLst/>
@@ -6379,8 +7093,8 @@
         </p:nvSpPr>
         <p:spPr>
           <a:xfrm>
-            <a:off x="640080" y="5852160"/>
-            <a:ext cx="5486400" cy="457200"/>
+            <a:off x="640080" y="5897880"/>
+            <a:ext cx="10881360" cy="457200"/>
           </a:xfrm>
           <a:prstGeom prst="rect">
             <a:avLst/>
@@ -6399,13 +7113,13 @@
               </a:spcAft>
             </a:pPr>
             <a:r>
-              <a:rPr sz="1400" b="0">
+              <a:rPr sz="1300" b="0">
                 <a:solidFill>
                   <a:srgbClr val="595959"/>
                 </a:solidFill>
                 <a:latin typeface="Calibri"/>
               </a:rPr>
-              <a:t>Apsisukimų skaičius – mūsų įvertinimas.</a:t>
+              <a:t>Šaltiniai: CN Trailer Parts (n.d.). Skaičiai ir tikslai – mūsų įvertinimai.</a:t>
             </a:r>
           </a:p>
         </p:txBody>
@@ -6487,6 +7201,7 @@
           <a:ln>
             <a:noFill/>
           </a:ln>
+          <a:effectLst/>
         </p:spPr>
         <p:style>
           <a:lnRef idx="1">
@@ -6544,7 +7259,7 @@
                 </a:solidFill>
                 <a:latin typeface="Calibri"/>
               </a:rPr>
-              <a:t>6 / 9</a:t>
+              <a:t>6 / 10</a:t>
             </a:r>
           </a:p>
         </p:txBody>
@@ -6583,7 +7298,7 @@
                 </a:solidFill>
                 <a:latin typeface="Calibri"/>
               </a:rPr>
-              <a:t>PBL TA1 · Domkratas</a:t>
+              <a:t>PBL · Domkratas</a:t>
             </a:r>
           </a:p>
         </p:txBody>
@@ -6598,7 +7313,7 @@
         </p:nvGraphicFramePr>
         <p:xfrm>
           <a:off x="640080" y="1463040"/>
-          <a:ext cx="10881360" cy="4352544"/>
+          <a:ext cx="10881360" cy="4096512"/>
         </p:xfrm>
         <a:graphic>
           <a:graphicData uri="http://schemas.openxmlformats.org/drawingml/2006/table">
@@ -6608,18 +7323,18 @@
               </a:tblPr>
               <a:tblGrid>
                 <a:gridCol w="1737360"/>
-                <a:gridCol w="2651760"/>
+                <a:gridCol w="2560320"/>
                 <a:gridCol w="3291840"/>
-                <a:gridCol w="3200400"/>
+                <a:gridCol w="3291840"/>
               </a:tblGrid>
-              <a:tr h="621792">
+              <a:tr h="585216">
                 <a:tc>
                   <a:txBody>
                     <a:bodyPr/>
                     <a:lstStyle/>
                     <a:p>
                       <a:r>
-                        <a:rPr sz="1600" b="1">
+                        <a:rPr sz="1500" b="1" i="0">
                           <a:solidFill>
                             <a:srgbClr val="FFFFFF"/>
                           </a:solidFill>
@@ -6641,7 +7356,7 @@
                     <a:lstStyle/>
                     <a:p>
                       <a:r>
-                        <a:rPr sz="1600" b="1">
+                        <a:rPr sz="1500" b="1" i="0">
                           <a:solidFill>
                             <a:srgbClr val="FFFFFF"/>
                           </a:solidFill>
@@ -6663,7 +7378,7 @@
                     <a:lstStyle/>
                     <a:p>
                       <a:r>
-                        <a:rPr sz="1600" b="1">
+                        <a:rPr sz="1500" b="1" i="0">
                           <a:solidFill>
                             <a:srgbClr val="FFFFFF"/>
                           </a:solidFill>
@@ -6685,7 +7400,7 @@
                     <a:lstStyle/>
                     <a:p>
                       <a:r>
-                        <a:rPr sz="1600" b="1">
+                        <a:rPr sz="1500" b="1" i="0">
                           <a:solidFill>
                             <a:srgbClr val="FFFFFF"/>
                           </a:solidFill>
@@ -6702,14 +7417,14 @@
                   </a:tcPr>
                 </a:tc>
               </a:tr>
-              <a:tr h="621792">
+              <a:tr h="585216">
                 <a:tc>
                   <a:txBody>
                     <a:bodyPr/>
                     <a:lstStyle/>
                     <a:p>
                       <a:r>
-                        <a:rPr sz="1600" b="1">
+                        <a:rPr sz="1500" b="1" i="0">
                           <a:solidFill>
                             <a:srgbClr val="222222"/>
                           </a:solidFill>
@@ -6731,7 +7446,7 @@
                     <a:lstStyle/>
                     <a:p>
                       <a:r>
-                        <a:rPr sz="1600" b="0">
+                        <a:rPr sz="1500" b="0" i="0">
                           <a:solidFill>
                             <a:srgbClr val="222222"/>
                           </a:solidFill>
@@ -6753,13 +7468,13 @@
                     <a:lstStyle/>
                     <a:p>
                       <a:r>
-                        <a:rPr sz="1600" b="0">
+                        <a:rPr sz="1500" b="0" i="0">
                           <a:solidFill>
                             <a:srgbClr val="222222"/>
                           </a:solidFill>
                           <a:latin typeface="Calibri"/>
                         </a:rPr>
-                        <a:t>12 V variklis (~100 W) + reduktorius</a:t>
+                        <a:t>12 V variklis (~100 W) su reduktoriumi</a:t>
                       </a:r>
                     </a:p>
                   </a:txBody>
@@ -6775,13 +7490,13 @@
                     <a:lstStyle/>
                     <a:p>
                       <a:r>
-                        <a:rPr sz="1600" b="0">
+                        <a:rPr sz="1500" b="0" i="0">
                           <a:solidFill>
                             <a:srgbClr val="222222"/>
                           </a:solidFill>
                           <a:latin typeface="Calibri"/>
                         </a:rPr>
-                        <a:t>Greitai, be fizinių pastangų</a:t>
+                        <a:t>Greitai ir be fizinių pastangų</a:t>
                       </a:r>
                     </a:p>
                   </a:txBody>
@@ -6792,14 +7507,14 @@
                   </a:tcPr>
                 </a:tc>
               </a:tr>
-              <a:tr h="621792">
+              <a:tr h="585216">
                 <a:tc>
                   <a:txBody>
                     <a:bodyPr/>
                     <a:lstStyle/>
                     <a:p>
                       <a:r>
-                        <a:rPr sz="1600" b="1">
+                        <a:rPr sz="1500" b="1" i="0">
                           <a:solidFill>
                             <a:srgbClr val="222222"/>
                           </a:solidFill>
@@ -6821,13 +7536,13 @@
                     <a:lstStyle/>
                     <a:p>
                       <a:r>
-                        <a:rPr sz="1600" b="0">
+                        <a:rPr sz="1500" b="0" i="0">
                           <a:solidFill>
                             <a:srgbClr val="222222"/>
                           </a:solidFill>
                           <a:latin typeface="Calibri"/>
                         </a:rPr>
-                        <a:t>Paprastas plienas, metrinis sriegis</a:t>
+                        <a:t>Paprastas plienas</a:t>
                       </a:r>
                     </a:p>
                   </a:txBody>
@@ -6843,13 +7558,13 @@
                     <a:lstStyle/>
                     <a:p>
                       <a:r>
-                        <a:rPr sz="1600" b="0">
+                        <a:rPr sz="1500" b="0" i="0">
                           <a:solidFill>
                             <a:srgbClr val="222222"/>
                           </a:solidFill>
                           <a:latin typeface="Calibri"/>
                         </a:rPr>
-                        <a:t>Trapecinis Tr18×4, plienas 42CrMo4</a:t>
+                        <a:t>Trapecinis sraigtas, plienas 42CrMo4</a:t>
                       </a:r>
                     </a:p>
                   </a:txBody>
@@ -6865,13 +7580,13 @@
                     <a:lstStyle/>
                     <a:p>
                       <a:r>
-                        <a:rPr sz="1600" b="0">
+                        <a:rPr sz="1500" b="0" i="0">
                           <a:solidFill>
                             <a:srgbClr val="222222"/>
                           </a:solidFill>
                           <a:latin typeface="Calibri"/>
                         </a:rPr>
-                        <a:t>Savistabdis, atsparus dilimui</a:t>
+                        <a:t>Savistabdis; plienas stiprus ir atsparus nuovargiui</a:t>
                       </a:r>
                     </a:p>
                   </a:txBody>
@@ -6882,14 +7597,14 @@
                   </a:tcPr>
                 </a:tc>
               </a:tr>
-              <a:tr h="621792">
+              <a:tr h="585216">
                 <a:tc>
                   <a:txBody>
                     <a:bodyPr/>
                     <a:lstStyle/>
                     <a:p>
                       <a:r>
-                        <a:rPr sz="1600" b="1">
+                        <a:rPr sz="1500" b="1" i="0">
                           <a:solidFill>
                             <a:srgbClr val="222222"/>
                           </a:solidFill>
@@ -6911,7 +7626,7 @@
                     <a:lstStyle/>
                     <a:p>
                       <a:r>
-                        <a:rPr sz="1600" b="0">
+                        <a:rPr sz="1500" b="0" i="0">
                           <a:solidFill>
                             <a:srgbClr val="222222"/>
                           </a:solidFill>
@@ -6933,7 +7648,7 @@
                     <a:lstStyle/>
                     <a:p>
                       <a:r>
-                        <a:rPr sz="1600" b="0">
+                        <a:rPr sz="1500" b="0" i="0">
                           <a:solidFill>
                             <a:srgbClr val="222222"/>
                           </a:solidFill>
@@ -6955,13 +7670,13 @@
                     <a:lstStyle/>
                     <a:p>
                       <a:r>
-                        <a:rPr sz="1600" b="0">
+                        <a:rPr sz="1500" b="0" i="0">
                           <a:solidFill>
                             <a:srgbClr val="222222"/>
                           </a:solidFill>
                           <a:latin typeface="Calibri"/>
                         </a:rPr>
-                        <a:t>Mažesnė trintis, mažiau dyla</a:t>
+                        <a:t>Maža trintis, atspari dilimui</a:t>
                       </a:r>
                     </a:p>
                   </a:txBody>
@@ -6972,14 +7687,14 @@
                   </a:tcPr>
                 </a:tc>
               </a:tr>
-              <a:tr h="621792">
+              <a:tr h="585216">
                 <a:tc>
                   <a:txBody>
                     <a:bodyPr/>
                     <a:lstStyle/>
                     <a:p>
                       <a:r>
-                        <a:rPr sz="1600" b="1">
+                        <a:rPr sz="1500" b="1" i="0">
                           <a:solidFill>
                             <a:srgbClr val="222222"/>
                           </a:solidFill>
@@ -7001,13 +7716,13 @@
                     <a:lstStyle/>
                     <a:p>
                       <a:r>
-                        <a:rPr sz="1600" b="0">
+                        <a:rPr sz="1500" b="0" i="0">
                           <a:solidFill>
                             <a:srgbClr val="222222"/>
                           </a:solidFill>
                           <a:latin typeface="Calibri"/>
                         </a:rPr>
-                        <a:t>Plienas S235</a:t>
+                        <a:t>Plienas S235 (235 MPa)</a:t>
                       </a:r>
                     </a:p>
                   </a:txBody>
@@ -7023,13 +7738,13 @@
                     <a:lstStyle/>
                     <a:p>
                       <a:r>
-                        <a:rPr sz="1600" b="0">
+                        <a:rPr sz="1500" b="0" i="0">
                           <a:solidFill>
                             <a:srgbClr val="222222"/>
                           </a:solidFill>
                           <a:latin typeface="Calibri"/>
                         </a:rPr>
-                        <a:t>Plienas S420MC</a:t>
+                        <a:t>Plienas S420MC (420 MPa)</a:t>
                       </a:r>
                     </a:p>
                   </a:txBody>
@@ -7045,13 +7760,13 @@
                     <a:lstStyle/>
                     <a:p>
                       <a:r>
-                        <a:rPr sz="1600" b="0">
+                        <a:rPr sz="1500" b="0" i="0">
                           <a:solidFill>
                             <a:srgbClr val="222222"/>
                           </a:solidFill>
                           <a:latin typeface="Calibri"/>
                         </a:rPr>
-                        <a:t>~1,8 karto stipresnės, ta pati masė</a:t>
+                        <a:t>Takumo riba ~1,8 karto didesnė</a:t>
                       </a:r>
                     </a:p>
                   </a:txBody>
@@ -7062,14 +7777,14 @@
                   </a:tcPr>
                 </a:tc>
               </a:tr>
-              <a:tr h="621792">
+              <a:tr h="585216">
                 <a:tc>
                   <a:txBody>
                     <a:bodyPr/>
                     <a:lstStyle/>
                     <a:p>
                       <a:r>
-                        <a:rPr sz="1600" b="1">
+                        <a:rPr sz="1500" b="1" i="0">
                           <a:solidFill>
                             <a:srgbClr val="222222"/>
                           </a:solidFill>
@@ -7091,13 +7806,13 @@
                     <a:lstStyle/>
                     <a:p>
                       <a:r>
-                        <a:rPr sz="1600" b="0">
+                        <a:rPr sz="1500" b="0" i="0">
                           <a:solidFill>
                             <a:srgbClr val="222222"/>
                           </a:solidFill>
                           <a:latin typeface="Calibri"/>
                         </a:rPr>
-                        <a:t>~130×80 mm</a:t>
+                        <a:t>Siauras</a:t>
                       </a:r>
                     </a:p>
                   </a:txBody>
@@ -7113,13 +7828,13 @@
                     <a:lstStyle/>
                     <a:p>
                       <a:r>
-                        <a:rPr sz="1600" b="0">
+                        <a:rPr sz="1500" b="0" i="0">
                           <a:solidFill>
                             <a:srgbClr val="222222"/>
                           </a:solidFill>
                           <a:latin typeface="Calibri"/>
                         </a:rPr>
-                        <a:t>~200×120 mm su guminiu padu</a:t>
+                        <a:t>Platesnis, su guminiu padu</a:t>
                       </a:r>
                     </a:p>
                   </a:txBody>
@@ -7135,7 +7850,7 @@
                     <a:lstStyle/>
                     <a:p>
                       <a:r>
-                        <a:rPr sz="1600" b="0">
+                        <a:rPr sz="1500" b="0" i="0">
                           <a:solidFill>
                             <a:srgbClr val="222222"/>
                           </a:solidFill>
@@ -7152,14 +7867,14 @@
                   </a:tcPr>
                 </a:tc>
               </a:tr>
-              <a:tr h="621792">
+              <a:tr h="585216">
                 <a:tc>
                   <a:txBody>
                     <a:bodyPr/>
                     <a:lstStyle/>
                     <a:p>
                       <a:r>
-                        <a:rPr sz="1600" b="1">
+                        <a:rPr sz="1500" b="1" i="0">
                           <a:solidFill>
                             <a:srgbClr val="222222"/>
                           </a:solidFill>
@@ -7181,7 +7896,7 @@
                     <a:lstStyle/>
                     <a:p>
                       <a:r>
-                        <a:rPr sz="1600" b="0">
+                        <a:rPr sz="1500" b="0" i="0">
                           <a:solidFill>
                             <a:srgbClr val="222222"/>
                           </a:solidFill>
@@ -7203,13 +7918,13 @@
                     <a:lstStyle/>
                     <a:p>
                       <a:r>
-                        <a:rPr sz="1600" b="0">
+                        <a:rPr sz="1500" b="0" i="0">
                           <a:solidFill>
                             <a:srgbClr val="222222"/>
                           </a:solidFill>
                           <a:latin typeface="Calibri"/>
                         </a:rPr>
-                        <a:t>Galiniai jungikliai, perkrovos apsauga, avarinis rankinis sukimas</a:t>
+                        <a:t>Galiniai jungikliai, avarinis rankinis sukimas</a:t>
                       </a:r>
                     </a:p>
                   </a:txBody>
@@ -7225,13 +7940,13 @@
                     <a:lstStyle/>
                     <a:p>
                       <a:r>
-                        <a:rPr sz="1600" b="0">
+                        <a:rPr sz="1500" b="0" i="0">
                           <a:solidFill>
                             <a:srgbClr val="222222"/>
                           </a:solidFill>
                           <a:latin typeface="Calibri"/>
                         </a:rPr>
-                        <a:t>Veikia ir dingus elektrai</a:t>
+                        <a:t>Variklis sustoja kraštinėse padėtyse</a:t>
                       </a:r>
                     </a:p>
                   </a:txBody>
@@ -7246,6 +7961,45 @@
           </a:graphicData>
         </a:graphic>
       </p:graphicFrame>
+      <p:sp>
+        <p:nvSpPr>
+          <p:cNvPr id="7" name="TextBox 6"/>
+          <p:cNvSpPr txBox="1"/>
+          <p:nvPr/>
+        </p:nvSpPr>
+        <p:spPr>
+          <a:xfrm>
+            <a:off x="640080" y="5760720"/>
+            <a:ext cx="10881360" cy="457200"/>
+          </a:xfrm>
+          <a:prstGeom prst="rect">
+            <a:avLst/>
+          </a:prstGeom>
+          <a:noFill/>
+        </p:spPr>
+        <p:txBody>
+          <a:bodyPr wrap="square" anchor="t" lIns="45720" rIns="45720">
+            <a:spAutoFit/>
+          </a:bodyPr>
+          <a:lstStyle/>
+          <a:p>
+            <a:pPr algn="l">
+              <a:spcAft>
+                <a:spcPts val="600"/>
+              </a:spcAft>
+            </a:pPr>
+            <a:r>
+              <a:rPr sz="1300" b="0">
+                <a:solidFill>
+                  <a:srgbClr val="595959"/>
+                </a:solidFill>
+                <a:latin typeface="Calibri"/>
+              </a:rPr>
+              <a:t>Šaltiniai: Roton Products (n.d.); Sider Ticino (n.d.); Hengli Automation (n.d.); The World Material (n.d.); Gnee Steel (n.d.); Mickael (2004). Variklio galia – mūsų skaičiavimas.</a:t>
+            </a:r>
+          </a:p>
+        </p:txBody>
+      </p:sp>
     </p:spTree>
   </p:cSld>
   <p:clrMapOvr>
@@ -7323,6 +8077,7 @@
           <a:ln>
             <a:noFill/>
           </a:ln>
+          <a:effectLst/>
         </p:spPr>
         <p:style>
           <a:lnRef idx="1">
@@ -7380,7 +8135,7 @@
                 </a:solidFill>
                 <a:latin typeface="Calibri"/>
               </a:rPr>
-              <a:t>7 / 9</a:t>
+              <a:t>7 / 10</a:t>
             </a:r>
           </a:p>
         </p:txBody>
@@ -7419,7 +8174,7 @@
                 </a:solidFill>
                 <a:latin typeface="Calibri"/>
               </a:rPr>
-              <a:t>PBL TA1 · Domkratas</a:t>
+              <a:t>PBL · Domkratas</a:t>
             </a:r>
           </a:p>
         </p:txBody>
@@ -7454,7 +8209,7 @@
                     <a:lstStyle/>
                     <a:p>
                       <a:r>
-                        <a:rPr sz="1700" b="1">
+                        <a:rPr sz="1700" b="1" i="0">
                           <a:solidFill>
                             <a:srgbClr val="FFFFFF"/>
                           </a:solidFill>
@@ -7476,7 +8231,7 @@
                     <a:lstStyle/>
                     <a:p>
                       <a:r>
-                        <a:rPr sz="1700" b="1">
+                        <a:rPr sz="1700" b="1" i="0">
                           <a:solidFill>
                             <a:srgbClr val="FFFFFF"/>
                           </a:solidFill>
@@ -7498,7 +8253,7 @@
                     <a:lstStyle/>
                     <a:p>
                       <a:r>
-                        <a:rPr sz="1700" b="1">
+                        <a:rPr sz="1700" b="1" i="0">
                           <a:solidFill>
                             <a:srgbClr val="FFFFFF"/>
                           </a:solidFill>
@@ -7522,7 +8277,7 @@
                     <a:lstStyle/>
                     <a:p>
                       <a:r>
-                        <a:rPr sz="1700" b="1">
+                        <a:rPr sz="1700" b="1" i="0">
                           <a:solidFill>
                             <a:srgbClr val="222222"/>
                           </a:solidFill>
@@ -7544,7 +8299,7 @@
                     <a:lstStyle/>
                     <a:p>
                       <a:r>
-                        <a:rPr sz="1700" b="0">
+                        <a:rPr sz="1700" b="0" i="0">
                           <a:solidFill>
                             <a:srgbClr val="222222"/>
                           </a:solidFill>
@@ -7566,7 +8321,7 @@
                     <a:lstStyle/>
                     <a:p>
                       <a:r>
-                        <a:rPr sz="1700" b="0">
+                        <a:rPr sz="1700" b="0" i="0">
                           <a:solidFill>
                             <a:srgbClr val="222222"/>
                           </a:solidFill>
@@ -7590,7 +8345,7 @@
                     <a:lstStyle/>
                     <a:p>
                       <a:r>
-                        <a:rPr sz="1700" b="1">
+                        <a:rPr sz="1700" b="1" i="0">
                           <a:solidFill>
                             <a:srgbClr val="222222"/>
                           </a:solidFill>
@@ -7612,7 +8367,7 @@
                     <a:lstStyle/>
                     <a:p>
                       <a:r>
-                        <a:rPr sz="1700" b="0">
+                        <a:rPr sz="1700" b="0" i="0">
                           <a:solidFill>
                             <a:srgbClr val="222222"/>
                           </a:solidFill>
@@ -7634,7 +8389,7 @@
                     <a:lstStyle/>
                     <a:p>
                       <a:r>
-                        <a:rPr sz="1700" b="0">
+                        <a:rPr sz="1700" b="0" i="0">
                           <a:solidFill>
                             <a:srgbClr val="222222"/>
                           </a:solidFill>
@@ -7658,7 +8413,7 @@
                     <a:lstStyle/>
                     <a:p>
                       <a:r>
-                        <a:rPr sz="1700" b="1">
+                        <a:rPr sz="1700" b="1" i="0">
                           <a:solidFill>
                             <a:srgbClr val="222222"/>
                           </a:solidFill>
@@ -7680,7 +8435,7 @@
                     <a:lstStyle/>
                     <a:p>
                       <a:r>
-                        <a:rPr sz="1700" b="0">
+                        <a:rPr sz="1700" b="0" i="0">
                           <a:solidFill>
                             <a:srgbClr val="222222"/>
                           </a:solidFill>
@@ -7702,7 +8457,7 @@
                     <a:lstStyle/>
                     <a:p>
                       <a:r>
-                        <a:rPr sz="1700" b="0">
+                        <a:rPr sz="1700" b="0" i="0">
                           <a:solidFill>
                             <a:srgbClr val="222222"/>
                           </a:solidFill>
@@ -7726,7 +8481,7 @@
                     <a:lstStyle/>
                     <a:p>
                       <a:r>
-                        <a:rPr sz="1700" b="1">
+                        <a:rPr sz="1700" b="1" i="0">
                           <a:solidFill>
                             <a:srgbClr val="222222"/>
                           </a:solidFill>
@@ -7748,7 +8503,7 @@
                     <a:lstStyle/>
                     <a:p>
                       <a:r>
-                        <a:rPr sz="1700" b="0">
+                        <a:rPr sz="1700" b="0" i="0">
                           <a:solidFill>
                             <a:srgbClr val="222222"/>
                           </a:solidFill>
@@ -7770,7 +8525,7 @@
                     <a:lstStyle/>
                     <a:p>
                       <a:r>
-                        <a:rPr sz="1700" b="0">
+                        <a:rPr sz="1700" b="0" i="0">
                           <a:solidFill>
                             <a:srgbClr val="222222"/>
                           </a:solidFill>
@@ -7794,7 +8549,7 @@
                     <a:lstStyle/>
                     <a:p>
                       <a:r>
-                        <a:rPr sz="1700" b="1">
+                        <a:rPr sz="1700" b="1" i="0">
                           <a:solidFill>
                             <a:srgbClr val="222222"/>
                           </a:solidFill>
@@ -7816,7 +8571,7 @@
                     <a:lstStyle/>
                     <a:p>
                       <a:r>
-                        <a:rPr sz="1700" b="0">
+                        <a:rPr sz="1700" b="0" i="0">
                           <a:solidFill>
                             <a:srgbClr val="222222"/>
                           </a:solidFill>
@@ -7838,7 +8593,7 @@
                     <a:lstStyle/>
                     <a:p>
                       <a:r>
-                        <a:rPr sz="1700" b="0">
+                        <a:rPr sz="1700" b="0" i="0">
                           <a:solidFill>
                             <a:srgbClr val="222222"/>
                           </a:solidFill>
@@ -7957,7 +8712,7 @@
                 </a:solidFill>
                 <a:latin typeface="Calibri"/>
               </a:rPr>
-              <a:t>≈ 8 A (saugiklis 15 A)</a:t>
+              <a:t>I = P / U ≈ 93 / 12 ≈ 8 A</a:t>
             </a:r>
           </a:p>
           <a:p>
@@ -7973,7 +8728,7 @@
                 </a:solidFill>
                 <a:latin typeface="Calibri"/>
               </a:rPr>
-              <a:t>Savistabdumas:</a:t>
+              <a:t>Savistabdumo sąlyga:</a:t>
             </a:r>
           </a:p>
           <a:p>
@@ -7989,7 +8744,7 @@
                 </a:solidFill>
                 <a:latin typeface="Calibri"/>
               </a:rPr>
-              <a:t>kėlimo kampas ψ = 4,5° &lt; trinties kampas φ′ ≈ 5,9° – krovinys nenusileidžia savaime.</a:t>
+              <a:t>sriegio pakilimo kampas turi būti mažesnis už trinties kampą – tada krovinys nenusileidžia savaime.</a:t>
             </a:r>
           </a:p>
         </p:txBody>
@@ -8002,7 +8757,7 @@
         </p:nvSpPr>
         <p:spPr>
           <a:xfrm>
-            <a:off x="640080" y="5760720"/>
+            <a:off x="640080" y="5897880"/>
             <a:ext cx="10881360" cy="457200"/>
           </a:xfrm>
           <a:prstGeom prst="rect">
@@ -8022,13 +8777,13 @@
               </a:spcAft>
             </a:pPr>
             <a:r>
-              <a:rPr sz="1400" b="0">
+              <a:rPr sz="1300" b="0">
                 <a:solidFill>
                   <a:srgbClr val="595959"/>
                 </a:solidFill>
                 <a:latin typeface="Calibri"/>
               </a:rPr>
-              <a:t>Visos vertės apytikslės; tikslūs skaičiavimai bus TA2 etape.</a:t>
+              <a:t>Šaltiniai: Roton Products (n.d.) – savistabdumo sąlyga. Lentelės vertės ir skaičiavimas – mūsų apytiksliai įvertinimai.</a:t>
             </a:r>
           </a:p>
         </p:txBody>
@@ -8085,7 +8840,7 @@
                 </a:solidFill>
                 <a:latin typeface="Calibri"/>
               </a:rPr>
-              <a:t>Išvados ir tolesni darbai</a:t>
+              <a:t>Išvados</a:t>
             </a:r>
           </a:p>
         </p:txBody>
@@ -8110,6 +8865,7 @@
           <a:ln>
             <a:noFill/>
           </a:ln>
+          <a:effectLst/>
         </p:spPr>
         <p:style>
           <a:lnRef idx="1">
@@ -8167,7 +8923,7 @@
                 </a:solidFill>
                 <a:latin typeface="Calibri"/>
               </a:rPr>
-              <a:t>8 / 9</a:t>
+              <a:t>8 / 10</a:t>
             </a:r>
           </a:p>
         </p:txBody>
@@ -8206,7 +8962,7 @@
                 </a:solidFill>
                 <a:latin typeface="Calibri"/>
               </a:rPr>
-              <a:t>PBL TA1 · Domkratas</a:t>
+              <a:t>PBL · Domkratas</a:t>
             </a:r>
           </a:p>
         </p:txBody>
@@ -8220,7 +8976,7 @@
         <p:spPr>
           <a:xfrm>
             <a:off x="640080" y="1554480"/>
-            <a:ext cx="6400800" cy="4206240"/>
+            <a:ext cx="6766560" cy="4206240"/>
           </a:xfrm>
           <a:prstGeom prst="rect">
             <a:avLst/>
@@ -8235,65 +8991,101 @@
           <a:p>
             <a:pPr algn="l">
               <a:spcAft>
-                <a:spcPts val="1600"/>
+                <a:spcPts val="1800"/>
               </a:spcAft>
             </a:pPr>
             <a:r>
-              <a:rPr sz="2000" b="0">
+              <a:rPr sz="2100" b="1">
                 <a:solidFill>
                   <a:srgbClr val="222222"/>
                 </a:solidFill>
                 <a:latin typeface="Calibri"/>
               </a:rPr>
-              <a:t>• Domkratai vystėsi nuo jėgos laimėjimo (svertas, sraigtas) per hidrauliką iki saugos ir patogumo.</a:t>
+              <a:t>• Raida</a:t>
+            </a:r>
+            <a:r>
+              <a:rPr sz="2100" b="0" i="0">
+                <a:solidFill>
+                  <a:srgbClr val="222222"/>
+                </a:solidFill>
+                <a:latin typeface="Calibri"/>
+              </a:rPr>
+              <a:t> – nuo jėgos laimėjimo (svertas, sraigtas) per hidrauliką iki elektrinių domkratų.</a:t>
             </a:r>
           </a:p>
           <a:p>
             <a:pPr>
               <a:spcAft>
-                <a:spcPts val="1600"/>
+                <a:spcPts val="1800"/>
               </a:spcAft>
             </a:pPr>
             <a:r>
-              <a:rPr sz="2000" b="0">
+              <a:rPr sz="2100" b="1">
                 <a:solidFill>
                   <a:srgbClr val="222222"/>
                 </a:solidFill>
                 <a:latin typeface="Calibri"/>
               </a:rPr>
-              <a:t>• Žirklinis domkratas kompaktiškas ir savistabdis, bet lėtas, sunkiai sukamas ir nestabilus.</a:t>
+              <a:t>• Problema</a:t>
+            </a:r>
+            <a:r>
+              <a:rPr sz="2100" b="0" i="0">
+                <a:solidFill>
+                  <a:srgbClr val="222222"/>
+                </a:solidFill>
+                <a:latin typeface="Calibri"/>
+              </a:rPr>
+              <a:t> – žirklinis domkratas kompaktiškas ir savistabdis, bet lėtas, sunkiai sukamas ir nestabilus.</a:t>
             </a:r>
           </a:p>
           <a:p>
             <a:pPr>
               <a:spcAft>
-                <a:spcPts val="1600"/>
+                <a:spcPts val="1800"/>
               </a:spcAft>
             </a:pPr>
             <a:r>
-              <a:rPr sz="2000" b="0">
+              <a:rPr sz="2100" b="1">
                 <a:solidFill>
                   <a:srgbClr val="222222"/>
                 </a:solidFill>
                 <a:latin typeface="Calibri"/>
               </a:rPr>
-              <a:t>• Siūlome 12 V elektrinę pavarą, Tr18×4 sraigtą su bronzine veržle, stipresnes svirtis ir platesnį pagrindą.</a:t>
+              <a:t>• Sprendimas</a:t>
+            </a:r>
+            <a:r>
+              <a:rPr sz="2100" b="0" i="0">
+                <a:solidFill>
+                  <a:srgbClr val="222222"/>
+                </a:solidFill>
+                <a:latin typeface="Calibri"/>
+              </a:rPr>
+              <a:t> – 12 V elektrinė pavara, trapecinis sraigtas su bronzine veržle, stipresnės svirtys, platesnis pagrindas.</a:t>
             </a:r>
           </a:p>
           <a:p>
             <a:pPr>
               <a:spcAft>
-                <a:spcPts val="1600"/>
+                <a:spcPts val="1800"/>
               </a:spcAft>
             </a:pPr>
             <a:r>
-              <a:rPr sz="2000" b="0">
+              <a:rPr sz="2100" b="1">
                 <a:solidFill>
                   <a:srgbClr val="222222"/>
                 </a:solidFill>
                 <a:latin typeface="Calibri"/>
               </a:rPr>
-              <a:t>• Kompromisas – šiek tiek didesnė masė ir kaina.</a:t>
+              <a:t>• Kompromisas</a:t>
+            </a:r>
+            <a:r>
+              <a:rPr sz="2100" b="0" i="0">
+                <a:solidFill>
+                  <a:srgbClr val="222222"/>
+                </a:solidFill>
+                <a:latin typeface="Calibri"/>
+              </a:rPr>
+              <a:t> – šiek tiek didesnė masė ir kaina.</a:t>
             </a:r>
           </a:p>
         </p:txBody>
@@ -8306,8 +9098,8 @@
         </p:nvSpPr>
         <p:spPr>
           <a:xfrm>
-            <a:off x="7406640" y="1600200"/>
-            <a:ext cx="4114800" cy="3108960"/>
+            <a:off x="7772400" y="2377440"/>
+            <a:ext cx="3749039" cy="1828800"/>
           </a:xfrm>
           <a:prstGeom prst="rect">
             <a:avLst/>
@@ -8350,8 +9142,8 @@
         </p:nvSpPr>
         <p:spPr>
           <a:xfrm>
-            <a:off x="7635240" y="1737360"/>
-            <a:ext cx="3657600" cy="2834640"/>
+            <a:off x="7772400" y="2377440"/>
+            <a:ext cx="3749039" cy="1828800"/>
           </a:xfrm>
           <a:prstGeom prst="rect">
             <a:avLst/>
@@ -8359,110 +9151,7 @@
           <a:noFill/>
         </p:spPr>
         <p:txBody>
-          <a:bodyPr wrap="square" anchor="t" lIns="45720" rIns="45720">
-            <a:spAutoFit/>
-          </a:bodyPr>
-          <a:lstStyle/>
-          <a:p>
-            <a:pPr algn="l">
-              <a:spcAft>
-                <a:spcPts val="800"/>
-              </a:spcAft>
-            </a:pPr>
-            <a:r>
-              <a:rPr sz="2100" b="1">
-                <a:solidFill>
-                  <a:srgbClr val="1F4E79"/>
-                </a:solidFill>
-                <a:latin typeface="Calibri"/>
-              </a:rPr>
-              <a:t>TA2 etape</a:t>
-            </a:r>
-          </a:p>
-          <a:p>
-            <a:pPr>
-              <a:spcAft>
-                <a:spcPts val="600"/>
-              </a:spcAft>
-            </a:pPr>
-            <a:r>
-              <a:rPr sz="1800" b="0">
-                <a:solidFill>
-                  <a:srgbClr val="222222"/>
-                </a:solidFill>
-                <a:latin typeface="Calibri"/>
-              </a:rPr>
-              <a:t>• naujausių patentų ir straipsnių analizė</a:t>
-            </a:r>
-          </a:p>
-          <a:p>
-            <a:pPr>
-              <a:spcAft>
-                <a:spcPts val="600"/>
-              </a:spcAft>
-            </a:pPr>
-            <a:r>
-              <a:rPr sz="1800" b="0">
-                <a:solidFill>
-                  <a:srgbClr val="222222"/>
-                </a:solidFill>
-                <a:latin typeface="Calibri"/>
-              </a:rPr>
-              <a:t>• sraigto ir veržlės stiprumo skaičiavimai</a:t>
-            </a:r>
-          </a:p>
-          <a:p>
-            <a:pPr>
-              <a:spcAft>
-                <a:spcPts val="600"/>
-              </a:spcAft>
-            </a:pPr>
-            <a:r>
-              <a:rPr sz="1800" b="0">
-                <a:solidFill>
-                  <a:srgbClr val="222222"/>
-                </a:solidFill>
-                <a:latin typeface="Calibri"/>
-              </a:rPr>
-              <a:t>• variklio ir reduktoriaus parinkimas</a:t>
-            </a:r>
-          </a:p>
-          <a:p>
-            <a:pPr>
-              <a:spcAft>
-                <a:spcPts val="600"/>
-              </a:spcAft>
-            </a:pPr>
-            <a:r>
-              <a:rPr sz="1800" b="0">
-                <a:solidFill>
-                  <a:srgbClr val="222222"/>
-                </a:solidFill>
-                <a:latin typeface="Calibri"/>
-              </a:rPr>
-              <a:t>• atitiktis standartui EN 1494, sauga</a:t>
-            </a:r>
-          </a:p>
-        </p:txBody>
-      </p:sp>
-      <p:sp>
-        <p:nvSpPr>
-          <p:cNvPr id="9" name="TextBox 8"/>
-          <p:cNvSpPr txBox="1"/>
-          <p:nvPr/>
-        </p:nvSpPr>
-        <p:spPr>
-          <a:xfrm>
-            <a:off x="7406640" y="4937760"/>
-            <a:ext cx="4114800" cy="731520"/>
-          </a:xfrm>
-          <a:prstGeom prst="rect">
-            <a:avLst/>
-          </a:prstGeom>
-          <a:noFill/>
-        </p:spPr>
-        <p:txBody>
-          <a:bodyPr wrap="square" anchor="t" lIns="45720" rIns="45720">
+          <a:bodyPr wrap="square" anchor="ctr" lIns="45720" rIns="45720">
             <a:spAutoFit/>
           </a:bodyPr>
           <a:lstStyle/>
@@ -8473,7 +9162,7 @@
               </a:spcAft>
             </a:pPr>
             <a:r>
-              <a:rPr sz="3200" b="1">
+              <a:rPr sz="3600" b="1">
                 <a:solidFill>
                   <a:srgbClr val="1F4E79"/>
                 </a:solidFill>
@@ -8536,7 +9225,7 @@
                 </a:solidFill>
                 <a:latin typeface="Calibri"/>
               </a:rPr>
-              <a:t>Šaltiniai</a:t>
+              <a:t>Šaltiniai (1/2)</a:t>
             </a:r>
           </a:p>
         </p:txBody>
@@ -8561,6 +9250,7 @@
           <a:ln>
             <a:noFill/>
           </a:ln>
+          <a:effectLst/>
         </p:spPr>
         <p:style>
           <a:lnRef idx="1">
@@ -8618,7 +9308,7 @@
                 </a:solidFill>
                 <a:latin typeface="Calibri"/>
               </a:rPr>
-              <a:t>9 / 9</a:t>
+              <a:t>9 / 10</a:t>
             </a:r>
           </a:p>
         </p:txBody>
@@ -8657,7 +9347,7 @@
                 </a:solidFill>
                 <a:latin typeface="Calibri"/>
               </a:rPr>
-              <a:t>PBL TA1 · Domkratas</a:t>
+              <a:t>PBL · Domkratas</a:t>
             </a:r>
           </a:p>
         </p:txBody>
@@ -8670,8 +9360,8 @@
         </p:nvSpPr>
         <p:spPr>
           <a:xfrm>
-            <a:off x="640080" y="1554480"/>
-            <a:ext cx="10881360" cy="4389120"/>
+            <a:off x="640080" y="1463040"/>
+            <a:ext cx="10881360" cy="4754880"/>
           </a:xfrm>
           <a:prstGeom prst="rect">
             <a:avLst/>
@@ -8686,190 +9376,190 @@
           <a:p>
             <a:pPr algn="l">
               <a:spcAft>
-                <a:spcPts val="1400"/>
+                <a:spcPts val="700"/>
               </a:spcAft>
             </a:pPr>
             <a:r>
-              <a:rPr sz="1800" b="0">
+              <a:rPr sz="1400" b="0">
                 <a:solidFill>
                   <a:srgbClr val="222222"/>
                 </a:solidFill>
                 <a:latin typeface="Calibri"/>
               </a:rPr>
-              <a:t>Budynas, R. G., &amp; Nisbett, J. K. (2020). </a:t>
-            </a:r>
-            <a:r>
-              <a:rPr sz="1800" i="1">
+              <a:t>AutoIndustriya. (n.d.). </a:t>
+            </a:r>
+            <a:r>
+              <a:rPr sz="1400" b="0" i="1">
                 <a:solidFill>
                   <a:srgbClr val="222222"/>
                 </a:solidFill>
                 <a:latin typeface="Calibri"/>
               </a:rPr>
-              <a:t>Shigley's mechanical engineering design</a:t>
-            </a:r>
-            <a:r>
-              <a:rPr sz="1800" i="0">
+              <a:t>Auto essentials: The story of the humble car jack</a:t>
+            </a:r>
+            <a:r>
+              <a:rPr sz="1400" b="0" i="0">
                 <a:solidFill>
                   <a:srgbClr val="222222"/>
                 </a:solidFill>
                 <a:latin typeface="Calibri"/>
               </a:rPr>
-              <a:t> (11th ed.). McGraw-Hill Education.</a:t>
+              <a:t>. https://www.autoindustriya.com/features/auto-essentials-the-story-of-the-humble-car-jack.html</a:t>
             </a:r>
           </a:p>
           <a:p>
             <a:pPr>
               <a:spcAft>
-                <a:spcPts val="1400"/>
+                <a:spcPts val="700"/>
               </a:spcAft>
             </a:pPr>
             <a:r>
-              <a:rPr sz="1800" b="0">
+              <a:rPr sz="1400" b="0">
                 <a:solidFill>
                   <a:srgbClr val="222222"/>
                 </a:solidFill>
                 <a:latin typeface="Calibri"/>
               </a:rPr>
-              <a:t>Childs, P. R. N. (2014). </a:t>
-            </a:r>
-            <a:r>
-              <a:rPr sz="1800" i="1">
+              <a:t>CJ Pony Parts. (n.d.). </a:t>
+            </a:r>
+            <a:r>
+              <a:rPr sz="1400" b="0" i="1">
                 <a:solidFill>
                   <a:srgbClr val="222222"/>
                 </a:solidFill>
                 <a:latin typeface="Calibri"/>
               </a:rPr>
-              <a:t>Mechanical design engineering handbook</a:t>
-            </a:r>
-            <a:r>
-              <a:rPr sz="1800" i="0">
+              <a:t>Types of car jacks</a:t>
+            </a:r>
+            <a:r>
+              <a:rPr sz="1400" b="0" i="0">
                 <a:solidFill>
                   <a:srgbClr val="222222"/>
                 </a:solidFill>
                 <a:latin typeface="Calibri"/>
               </a:rPr>
-              <a:t>. Butterworth-Heinemann.</a:t>
+              <a:t>. https://www.cjponyparts.com/resources/types-of-car-jacks</a:t>
             </a:r>
           </a:p>
           <a:p>
             <a:pPr>
               <a:spcAft>
-                <a:spcPts val="1400"/>
+                <a:spcPts val="700"/>
               </a:spcAft>
             </a:pPr>
             <a:r>
-              <a:rPr sz="1800" b="0">
+              <a:rPr sz="1400" b="0">
                 <a:solidFill>
                   <a:srgbClr val="222222"/>
                 </a:solidFill>
                 <a:latin typeface="Calibri"/>
               </a:rPr>
-              <a:t>European Committee for Standardization. (2008). </a:t>
-            </a:r>
-            <a:r>
-              <a:rPr sz="1800" i="1">
+              <a:t>CN Trailer Parts. (n.d.). </a:t>
+            </a:r>
+            <a:r>
+              <a:rPr sz="1400" b="0" i="1">
                 <a:solidFill>
                   <a:srgbClr val="222222"/>
                 </a:solidFill>
                 <a:latin typeface="Calibri"/>
               </a:rPr>
-              <a:t>Mobile or movable jacks and associated lifting equipment</a:t>
-            </a:r>
-            <a:r>
-              <a:rPr sz="1800" i="0">
+              <a:t>What are the disadvantages of a scissor jack?</a:t>
+            </a:r>
+            <a:r>
+              <a:rPr sz="1400" b="0" i="0">
                 <a:solidFill>
                   <a:srgbClr val="222222"/>
                 </a:solidFill>
                 <a:latin typeface="Calibri"/>
               </a:rPr>
-              <a:t> (EN 1494:2000+A1:2008).</a:t>
+              <a:t> https://www.cntrailerparts.com/blog/what-are-the-disadvantages-of-a-scissor-jack-372667.html</a:t>
             </a:r>
           </a:p>
           <a:p>
             <a:pPr>
               <a:spcAft>
-                <a:spcPts val="1400"/>
+                <a:spcPts val="700"/>
               </a:spcAft>
             </a:pPr>
             <a:r>
-              <a:rPr sz="1800" b="0">
+              <a:rPr sz="1400" b="0">
                 <a:solidFill>
                   <a:srgbClr val="222222"/>
                 </a:solidFill>
                 <a:latin typeface="Calibri"/>
               </a:rPr>
-              <a:t>Europos Parlamentas ir Taryba. (2023). </a:t>
-            </a:r>
-            <a:r>
-              <a:rPr sz="1800" i="1">
+              <a:t>Gnee Steel. (n.d.). </a:t>
+            </a:r>
+            <a:r>
+              <a:rPr sz="1400" b="0" i="1">
                 <a:solidFill>
                   <a:srgbClr val="222222"/>
                 </a:solidFill>
                 <a:latin typeface="Calibri"/>
               </a:rPr>
-              <a:t>Reglamentas (ES) 2023/1230 dėl mašinų</a:t>
-            </a:r>
-            <a:r>
-              <a:rPr sz="1800" i="0">
+              <a:t>EN 10149-2 S420MC hot rolled automotive steel</a:t>
+            </a:r>
+            <a:r>
+              <a:rPr sz="1400" b="0" i="0">
                 <a:solidFill>
                   <a:srgbClr val="222222"/>
                 </a:solidFill>
                 <a:latin typeface="Calibri"/>
               </a:rPr>
-              <a:t>. Europos Sąjungos oficialusis leidinys.</a:t>
+              <a:t>. https://www.gneesteel.com/products/automotive-steel/en-10149-2-s420mc-hot-rolled-automotive-steel.html</a:t>
             </a:r>
           </a:p>
           <a:p>
             <a:pPr>
               <a:spcAft>
-                <a:spcPts val="1400"/>
+                <a:spcPts val="700"/>
               </a:spcAft>
             </a:pPr>
             <a:r>
-              <a:rPr sz="1800" b="0">
+              <a:rPr sz="1400" b="0">
                 <a:solidFill>
                   <a:srgbClr val="222222"/>
                 </a:solidFill>
                 <a:latin typeface="Calibri"/>
               </a:rPr>
-              <a:t>Encyclopaedia Britannica. (n.d.). </a:t>
-            </a:r>
-            <a:r>
-              <a:rPr sz="1800" i="1">
+              <a:t>Hengli Automation. (n.d.). </a:t>
+            </a:r>
+            <a:r>
+              <a:rPr sz="1400" b="0" i="1">
                 <a:solidFill>
                   <a:srgbClr val="222222"/>
                 </a:solidFill>
                 <a:latin typeface="Calibri"/>
               </a:rPr>
-              <a:t>Jack</a:t>
-            </a:r>
-            <a:r>
-              <a:rPr sz="1800" i="0">
+              <a:t>What is the material of the nut for a T lead screw?</a:t>
+            </a:r>
+            <a:r>
+              <a:rPr sz="1400" b="0" i="0">
                 <a:solidFill>
                   <a:srgbClr val="222222"/>
                 </a:solidFill>
                 <a:latin typeface="Calibri"/>
               </a:rPr>
-              <a:t>. Retrieved [data], from https://www.britannica.com</a:t>
+              <a:t> https://www.hlt-cnc.com/blog/what-is-the-material-of-the-nut-for-a-t-lead-screw-1318622.html</a:t>
             </a:r>
           </a:p>
           <a:p>
             <a:pPr>
               <a:spcAft>
-                <a:spcPts val="1400"/>
+                <a:spcPts val="700"/>
               </a:spcAft>
             </a:pPr>
             <a:r>
-              <a:rPr sz="1800" b="0">
+              <a:rPr sz="1400" b="0">
                 <a:solidFill>
                   <a:srgbClr val="222222"/>
                 </a:solidFill>
                 <a:latin typeface="Calibri"/>
               </a:rPr>
-              <a:t>Hi-Lift Jack Company. (n.d.). </a:t>
-            </a:r>
-            <a:r>
-              <a:rPr sz="1800" i="1">
+              <a:t>Hi-Lift Jack Company. (n.d.-a). </a:t>
+            </a:r>
+            <a:r>
+              <a:rPr sz="1400" b="0" i="1">
                 <a:solidFill>
                   <a:srgbClr val="222222"/>
                 </a:solidFill>
@@ -8878,13 +9568,149 @@
               <a:t>Our history</a:t>
             </a:r>
             <a:r>
-              <a:rPr sz="1800" i="0">
+              <a:rPr sz="1400" b="0" i="0">
                 <a:solidFill>
                   <a:srgbClr val="222222"/>
                 </a:solidFill>
                 <a:latin typeface="Calibri"/>
               </a:rPr>
-              <a:t>. Retrieved [data], from https://www.hi-lift.com</a:t>
+              <a:t>. https://hi-lift.com/company/our-history/</a:t>
+            </a:r>
+          </a:p>
+          <a:p>
+            <a:pPr>
+              <a:spcAft>
+                <a:spcPts val="700"/>
+              </a:spcAft>
+            </a:pPr>
+            <a:r>
+              <a:rPr sz="1400" b="0">
+                <a:solidFill>
+                  <a:srgbClr val="222222"/>
+                </a:solidFill>
+                <a:latin typeface="Calibri"/>
+              </a:rPr>
+              <a:t>Hi-Lift Jack Company. (n.d.-b). </a:t>
+            </a:r>
+            <a:r>
+              <a:rPr sz="1400" b="0" i="1">
+                <a:solidFill>
+                  <a:srgbClr val="222222"/>
+                </a:solidFill>
+                <a:latin typeface="Calibri"/>
+              </a:rPr>
+              <a:t>Hi-Lift jack instructions</a:t>
+            </a:r>
+            <a:r>
+              <a:rPr sz="1400" b="0" i="0">
+                <a:solidFill>
+                  <a:srgbClr val="222222"/>
+                </a:solidFill>
+                <a:latin typeface="Calibri"/>
+              </a:rPr>
+              <a:t> [PDF]. https://hi-lift.com/wp-content/uploads/2016/07/jack_instructions.pdf</a:t>
+            </a:r>
+          </a:p>
+          <a:p>
+            <a:pPr>
+              <a:spcAft>
+                <a:spcPts val="700"/>
+              </a:spcAft>
+            </a:pPr>
+            <a:r>
+              <a:rPr sz="1400" b="0">
+                <a:solidFill>
+                  <a:srgbClr val="222222"/>
+                </a:solidFill>
+                <a:latin typeface="Calibri"/>
+              </a:rPr>
+              <a:t>Joyce/Dayton. (n.d.). </a:t>
+            </a:r>
+            <a:r>
+              <a:rPr sz="1400" b="0" i="1">
+                <a:solidFill>
+                  <a:srgbClr val="222222"/>
+                </a:solidFill>
+                <a:latin typeface="Calibri"/>
+              </a:rPr>
+              <a:t>Machine screw jacks vs. ball screw jacks</a:t>
+            </a:r>
+            <a:r>
+              <a:rPr sz="1400" b="0" i="0">
+                <a:solidFill>
+                  <a:srgbClr val="222222"/>
+                </a:solidFill>
+                <a:latin typeface="Calibri"/>
+              </a:rPr>
+              <a:t>. https://www.joycedayton.com/blog/machine-screw-jacks-vs-ball-screw-jacks</a:t>
+            </a:r>
+          </a:p>
+          <a:p>
+            <a:pPr>
+              <a:spcAft>
+                <a:spcPts val="700"/>
+              </a:spcAft>
+            </a:pPr>
+            <a:r>
+              <a:rPr sz="1400" b="0">
+                <a:solidFill>
+                  <a:srgbClr val="222222"/>
+                </a:solidFill>
+                <a:latin typeface="Calibri"/>
+              </a:rPr>
+              <a:t>LibreTexts. (n.d.). </a:t>
+            </a:r>
+            <a:r>
+              <a:rPr sz="1400" b="0" i="1">
+                <a:solidFill>
+                  <a:srgbClr val="222222"/>
+                </a:solidFill>
+                <a:latin typeface="Calibri"/>
+              </a:rPr>
+              <a:t>10.2: Force multiplication</a:t>
+            </a:r>
+            <a:r>
+              <a:rPr sz="1400" b="0" i="0">
+                <a:solidFill>
+                  <a:srgbClr val="222222"/>
+                </a:solidFill>
+                <a:latin typeface="Calibri"/>
+              </a:rPr>
+              <a:t>. https://eng.libretexts.org/Courses/Northeast_Wisconsin_Technical_College/Fluids_1:_Fluid_Power_and_Pneumatics_(NWTC)/10:_Pascal's_Law/10.02:_Force_Multiplication</a:t>
+            </a:r>
+          </a:p>
+          <a:p>
+            <a:pPr>
+              <a:spcAft>
+                <a:spcPts val="700"/>
+              </a:spcAft>
+            </a:pPr>
+            <a:r>
+              <a:rPr sz="1400" b="0">
+                <a:solidFill>
+                  <a:srgbClr val="222222"/>
+                </a:solidFill>
+                <a:latin typeface="Calibri"/>
+              </a:rPr>
+              <a:t>Mickael, E. (2004). </a:t>
+            </a:r>
+            <a:r>
+              <a:rPr sz="1400" b="0" i="1">
+                <a:solidFill>
+                  <a:srgbClr val="222222"/>
+                </a:solidFill>
+                <a:latin typeface="Calibri"/>
+              </a:rPr>
+              <a:t>Motor driven scissor jack with limit switches</a:t>
+            </a:r>
+            <a:r>
+              <a:rPr sz="1400" b="0" i="0">
+                <a:solidFill>
+                  <a:srgbClr val="222222"/>
+                </a:solidFill>
+                <a:latin typeface="Calibri"/>
+              </a:rPr>
+              <a:t> (U.S. Patent No. 6,695,289). https://patents.google.com/patent/US6695289B1/en</a:t>
             </a:r>
           </a:p>
         </p:txBody>

--- a/domkratas-ta1/domkratas-ta1.pptx
+++ b/domkratas-ta1/domkratas-ta1.pptx
@@ -651,7 +651,7 @@
           <a:lstStyle/>
           <a:p>
             <a:r>
-              <a:t>Raida: nuo Archimedo sverto ir antikinių sraigtinių presų per Bramah ir Dudgeon hidrauliką iki žirklinių ir elektrinių domkratų. Tendencija – nuo jėgos laimėjimo link greičio, saugos ir patogumo.</a:t>
+              <a:t>Raida: nuo Archimedo sverto, antikinių sraigtinių presų, Herono kėlimo mechanizmų ir romėnų kranų per Bramah ir Dudgeon hidrauliką iki žirklinių ir elektrinių domkratų. Tendencija – nuo jėgos laimėjimo link greičio, saugos ir patogumo.</a:t>
             </a:r>
           </a:p>
         </p:txBody>
@@ -4413,7 +4413,7 @@
                 </a:solidFill>
                 <a:latin typeface="Calibri"/>
               </a:rPr>
-              <a:t>Pro-Lift-Montagetechnik. (n.d.). </a:t>
+              <a:t>Redline Stands. (n.d.). </a:t>
             </a:r>
             <a:r>
               <a:rPr sz="1400" b="0" i="1">
@@ -4422,7 +4422,7 @@
                 </a:solidFill>
                 <a:latin typeface="Calibri"/>
               </a:rPr>
-              <a:t>12V electric scissor jack, car jack, 123 mm – 345 mm</a:t>
+              <a:t>Bottle jack vs. floor jack: Differences, pros, and cons</a:t>
             </a:r>
             <a:r>
               <a:rPr sz="1400" b="0" i="0">
@@ -4431,7 +4431,7 @@
                 </a:solidFill>
                 <a:latin typeface="Calibri"/>
               </a:rPr>
-              <a:t>. https://www.pro-lift-montagetechnik.com/12-volt-electric-scissor-jack-car-jack-123mm-345mm-002</a:t>
+              <a:t>. https://www.redlinestands.com/blog/bottle-jack-vs-floor-jack/</a:t>
             </a:r>
           </a:p>
           <a:p>
@@ -4447,7 +4447,7 @@
                 </a:solidFill>
                 <a:latin typeface="Calibri"/>
               </a:rPr>
-              <a:t>Redline Stands. (n.d.). </a:t>
+              <a:t>Rorres, C. (n.d.). </a:t>
             </a:r>
             <a:r>
               <a:rPr sz="1400" b="0" i="1">
@@ -4456,7 +4456,7 @@
                 </a:solidFill>
                 <a:latin typeface="Calibri"/>
               </a:rPr>
-              <a:t>Bottle jack vs. floor jack: Differences, pros, and cons</a:t>
+              <a:t>Quotations about Archimedes' lever</a:t>
             </a:r>
             <a:r>
               <a:rPr sz="1400" b="0" i="0">
@@ -4465,7 +4465,7 @@
                 </a:solidFill>
                 <a:latin typeface="Calibri"/>
               </a:rPr>
-              <a:t>. https://www.redlinestands.com/blog/bottle-jack-vs-floor-jack/</a:t>
+              <a:t>. New York University. https://math.nyu.edu/Archimedes/Lever/LeverQuotes.html</a:t>
             </a:r>
           </a:p>
           <a:p>
@@ -4481,7 +4481,7 @@
                 </a:solidFill>
                 <a:latin typeface="Calibri"/>
               </a:rPr>
-              <a:t>Rorres, C. (n.d.). </a:t>
+              <a:t>Roton Products. (n.d.). </a:t>
             </a:r>
             <a:r>
               <a:rPr sz="1400" b="0" i="1">
@@ -4490,7 +4490,7 @@
                 </a:solidFill>
                 <a:latin typeface="Calibri"/>
               </a:rPr>
-              <a:t>Quotations about Archimedes' lever</a:t>
+              <a:t>Trapezoidal lead screws: General information</a:t>
             </a:r>
             <a:r>
               <a:rPr sz="1400" b="0" i="0">
@@ -4499,7 +4499,7 @@
                 </a:solidFill>
                 <a:latin typeface="Calibri"/>
               </a:rPr>
-              <a:t>. New York University. https://math.nyu.edu/Archimedes/Lever/LeverQuotes.html</a:t>
+              <a:t>. https://www.roton.com/products/trapezoidal-lead-screws-nuts/general-information/</a:t>
             </a:r>
           </a:p>
           <a:p>
@@ -4515,7 +4515,7 @@
                 </a:solidFill>
                 <a:latin typeface="Calibri"/>
               </a:rPr>
-              <a:t>Roton Products. (n.d.). </a:t>
+              <a:t>Sider Ticino. (n.d.). </a:t>
             </a:r>
             <a:r>
               <a:rPr sz="1400" b="0" i="1">
@@ -4524,7 +4524,7 @@
                 </a:solidFill>
                 <a:latin typeface="Calibri"/>
               </a:rPr>
-              <a:t>Trapezoidal lead screws: General information</a:t>
+              <a:t>42CrMo4 technical specifications</a:t>
             </a:r>
             <a:r>
               <a:rPr sz="1400" b="0" i="0">
@@ -4533,7 +4533,7 @@
                 </a:solidFill>
                 <a:latin typeface="Calibri"/>
               </a:rPr>
-              <a:t>. https://www.roton.com/products/trapezoidal-lead-screws-nuts/general-information/</a:t>
+              <a:t>. https://siderticino.it/en/steel-datasheets/42crmo4/</a:t>
             </a:r>
           </a:p>
           <a:p>
@@ -4549,7 +4549,7 @@
                 </a:solidFill>
                 <a:latin typeface="Calibri"/>
               </a:rPr>
-              <a:t>Sider Ticino. (n.d.). </a:t>
+              <a:t>The World Material. (n.d.). </a:t>
             </a:r>
             <a:r>
               <a:rPr sz="1400" b="0" i="1">
@@ -4558,7 +4558,7 @@
                 </a:solidFill>
                 <a:latin typeface="Calibri"/>
               </a:rPr>
-              <a:t>42CrMo4 technical specifications</a:t>
+              <a:t>EN 10025-2 S235 steel properties</a:t>
             </a:r>
             <a:r>
               <a:rPr sz="1400" b="0" i="0">
@@ -4567,7 +4567,7 @@
                 </a:solidFill>
                 <a:latin typeface="Calibri"/>
               </a:rPr>
-              <a:t>. https://siderticino.it/en/steel-datasheets/42crmo4/</a:t>
+              <a:t>. https://www.theworldmaterial.com/en-10025-2-material-s235-steel/</a:t>
             </a:r>
           </a:p>
           <a:p>
@@ -4583,7 +4583,7 @@
                 </a:solidFill>
                 <a:latin typeface="Calibri"/>
               </a:rPr>
-              <a:t>The World Material. (n.d.). </a:t>
+              <a:t>Wikipedia. (n.d.-a). </a:t>
             </a:r>
             <a:r>
               <a:rPr sz="1400" b="0" i="1">
@@ -4592,7 +4592,7 @@
                 </a:solidFill>
                 <a:latin typeface="Calibri"/>
               </a:rPr>
-              <a:t>EN 10025-2 S235 steel properties</a:t>
+              <a:t>Jack (device)</a:t>
             </a:r>
             <a:r>
               <a:rPr sz="1400" b="0" i="0">
@@ -4601,7 +4601,7 @@
                 </a:solidFill>
                 <a:latin typeface="Calibri"/>
               </a:rPr>
-              <a:t>. https://www.theworldmaterial.com/en-10025-2-material-s235-steel/</a:t>
+              <a:t>. https://en.wikipedia.org/wiki/Jack_(device)</a:t>
             </a:r>
           </a:p>
           <a:p>
@@ -4617,7 +4617,7 @@
                 </a:solidFill>
                 <a:latin typeface="Calibri"/>
               </a:rPr>
-              <a:t>Wikipedia. (n.d.-a). </a:t>
+              <a:t>Wikipedia. (n.d.-b). </a:t>
             </a:r>
             <a:r>
               <a:rPr sz="1400" b="0" i="1">
@@ -4626,7 +4626,7 @@
                 </a:solidFill>
                 <a:latin typeface="Calibri"/>
               </a:rPr>
-              <a:t>Joseph Bramah</a:t>
+              <a:t>Jackscrew</a:t>
             </a:r>
             <a:r>
               <a:rPr sz="1400" b="0" i="0">
@@ -4635,7 +4635,7 @@
                 </a:solidFill>
                 <a:latin typeface="Calibri"/>
               </a:rPr>
-              <a:t>. https://en.wikipedia.org/wiki/Joseph_Bramah</a:t>
+              <a:t>. https://en.wikipedia.org/wiki/Jackscrew</a:t>
             </a:r>
           </a:p>
           <a:p>
@@ -4651,7 +4651,7 @@
                 </a:solidFill>
                 <a:latin typeface="Calibri"/>
               </a:rPr>
-              <a:t>Wikipedia. (n.d.-b). </a:t>
+              <a:t>Wikipedia. (n.d.-c). </a:t>
             </a:r>
             <a:r>
               <a:rPr sz="1400" b="0" i="1">
@@ -4660,7 +4660,7 @@
                 </a:solidFill>
                 <a:latin typeface="Calibri"/>
               </a:rPr>
-              <a:t>Richard Dudgeon</a:t>
+              <a:t>Joseph Bramah</a:t>
             </a:r>
             <a:r>
               <a:rPr sz="1400" b="0" i="0">
@@ -4669,7 +4669,7 @@
                 </a:solidFill>
                 <a:latin typeface="Calibri"/>
               </a:rPr>
-              <a:t>. https://en.wikipedia.org/wiki/Richard_Dudgeon</a:t>
+              <a:t>. https://en.wikipedia.org/wiki/Joseph_Bramah</a:t>
             </a:r>
           </a:p>
           <a:p>
@@ -4685,7 +4685,7 @@
                 </a:solidFill>
                 <a:latin typeface="Calibri"/>
               </a:rPr>
-              <a:t>Wikipedia. (n.d.-c). </a:t>
+              <a:t>Wikipedia. (n.d.-d). </a:t>
             </a:r>
             <a:r>
               <a:rPr sz="1400" b="0" i="1">
@@ -4694,7 +4694,7 @@
                 </a:solidFill>
                 <a:latin typeface="Calibri"/>
               </a:rPr>
-              <a:t>Jack (device)</a:t>
+              <a:t>Richard Dudgeon</a:t>
             </a:r>
             <a:r>
               <a:rPr sz="1400" b="0" i="0">
@@ -4703,7 +4703,7 @@
                 </a:solidFill>
                 <a:latin typeface="Calibri"/>
               </a:rPr>
-              <a:t>. https://en.wikipedia.org/wiki/Jack_(device)</a:t>
+              <a:t>. https://en.wikipedia.org/wiki/Richard_Dudgeon</a:t>
             </a:r>
           </a:p>
           <a:p>
@@ -4719,7 +4719,7 @@
                 </a:solidFill>
                 <a:latin typeface="Calibri"/>
               </a:rPr>
-              <a:t>Wikipedia. (n.d.-d). </a:t>
+              <a:t>Wikipedia. (n.d.-e). </a:t>
             </a:r>
             <a:r>
               <a:rPr sz="1400" b="0" i="1">
@@ -4728,7 +4728,7 @@
                 </a:solidFill>
                 <a:latin typeface="Calibri"/>
               </a:rPr>
-              <a:t>Jackscrew</a:t>
+              <a:t>Simple machine</a:t>
             </a:r>
             <a:r>
               <a:rPr sz="1400" b="0" i="0">
@@ -4737,7 +4737,41 @@
                 </a:solidFill>
                 <a:latin typeface="Calibri"/>
               </a:rPr>
-              <a:t>. https://en.wikipedia.org/wiki/Jackscrew</a:t>
+              <a:t>. https://en.wikipedia.org/wiki/Simple_machine</a:t>
+            </a:r>
+          </a:p>
+          <a:p>
+            <a:pPr>
+              <a:spcAft>
+                <a:spcPts val="700"/>
+              </a:spcAft>
+            </a:pPr>
+            <a:r>
+              <a:rPr sz="1400" b="0">
+                <a:solidFill>
+                  <a:srgbClr val="222222"/>
+                </a:solidFill>
+                <a:latin typeface="Calibri"/>
+              </a:rPr>
+              <a:t>Wikipedia. (n.d.-f). </a:t>
+            </a:r>
+            <a:r>
+              <a:rPr sz="1400" b="0" i="1">
+                <a:solidFill>
+                  <a:srgbClr val="222222"/>
+                </a:solidFill>
+                <a:latin typeface="Calibri"/>
+              </a:rPr>
+              <a:t>Treadwheel crane</a:t>
+            </a:r>
+            <a:r>
+              <a:rPr sz="1400" b="0" i="0">
+                <a:solidFill>
+                  <a:srgbClr val="222222"/>
+                </a:solidFill>
+                <a:latin typeface="Calibri"/>
+              </a:rPr>
+              <a:t>. https://en.wikipedia.org/wiki/Treadwheel_crane</a:t>
             </a:r>
           </a:p>
         </p:txBody>
@@ -5007,7 +5041,7 @@
                 </a:solidFill>
                 <a:latin typeface="Calibri"/>
               </a:rPr>
-              <a:t> (Hi-Lift Jack Company, n.d.-a; Wikipedia, n.d.-b)</a:t>
+              <a:t> (Hi-Lift Jack Company, n.d.-a; Wikipedia, n.d.-d)</a:t>
             </a:r>
           </a:p>
           <a:p>
@@ -5294,7 +5328,7 @@
         </p:nvGraphicFramePr>
         <p:xfrm>
           <a:off x="640080" y="1463040"/>
-          <a:ext cx="10881360" cy="4279392"/>
+          <a:ext cx="10881360" cy="4325112"/>
         </p:xfrm>
         <a:graphic>
           <a:graphicData uri="http://schemas.openxmlformats.org/drawingml/2006/table">
@@ -5306,14 +5340,14 @@
                 <a:gridCol w="2011680"/>
                 <a:gridCol w="8869680"/>
               </a:tblGrid>
-              <a:tr h="475488">
+              <a:tr h="393192">
                 <a:tc>
                   <a:txBody>
                     <a:bodyPr/>
                     <a:lstStyle/>
                     <a:p>
                       <a:r>
-                        <a:rPr sz="1600" b="1" i="0">
+                        <a:rPr sz="1500" b="1" i="0">
                           <a:solidFill>
                             <a:srgbClr val="FFFFFF"/>
                           </a:solidFill>
@@ -5335,7 +5369,7 @@
                     <a:lstStyle/>
                     <a:p>
                       <a:r>
-                        <a:rPr sz="1600" b="1" i="0">
+                        <a:rPr sz="1500" b="1" i="0">
                           <a:solidFill>
                             <a:srgbClr val="FFFFFF"/>
                           </a:solidFill>
@@ -5352,14 +5386,14 @@
                   </a:tcPr>
                 </a:tc>
               </a:tr>
-              <a:tr h="475488">
+              <a:tr h="393192">
                 <a:tc>
                   <a:txBody>
                     <a:bodyPr/>
                     <a:lstStyle/>
                     <a:p>
                       <a:r>
-                        <a:rPr sz="1600" b="1" i="0">
+                        <a:rPr sz="1500" b="1" i="0">
                           <a:solidFill>
                             <a:srgbClr val="222222"/>
                           </a:solidFill>
@@ -5381,7 +5415,7 @@
                     <a:lstStyle/>
                     <a:p>
                       <a:r>
-                        <a:rPr sz="1600" b="0" i="0">
+                        <a:rPr sz="1500" b="0" i="0">
                           <a:solidFill>
                             <a:srgbClr val="222222"/>
                           </a:solidFill>
@@ -5398,14 +5432,14 @@
                   </a:tcPr>
                 </a:tc>
               </a:tr>
-              <a:tr h="475488">
+              <a:tr h="393192">
                 <a:tc>
                   <a:txBody>
                     <a:bodyPr/>
                     <a:lstStyle/>
                     <a:p>
                       <a:r>
-                        <a:rPr sz="1600" b="1" i="0">
+                        <a:rPr sz="1500" b="1" i="0">
                           <a:solidFill>
                             <a:srgbClr val="222222"/>
                           </a:solidFill>
@@ -5427,7 +5461,7 @@
                     <a:lstStyle/>
                     <a:p>
                       <a:r>
-                        <a:rPr sz="1600" b="0" i="0">
+                        <a:rPr sz="1500" b="0" i="0">
                           <a:solidFill>
                             <a:srgbClr val="222222"/>
                           </a:solidFill>
@@ -5444,14 +5478,106 @@
                   </a:tcPr>
                 </a:tc>
               </a:tr>
-              <a:tr h="475488">
+              <a:tr h="393192">
                 <a:tc>
                   <a:txBody>
                     <a:bodyPr/>
                     <a:lstStyle/>
                     <a:p>
                       <a:r>
-                        <a:rPr sz="1600" b="1" i="0">
+                        <a:rPr sz="1500" b="1" i="0">
+                          <a:solidFill>
+                            <a:srgbClr val="222222"/>
+                          </a:solidFill>
+                          <a:latin typeface="Calibri"/>
+                        </a:rPr>
+                        <a:t>~10–75 m.</a:t>
+                      </a:r>
+                    </a:p>
+                  </a:txBody>
+                  <a:tcPr marL="73152" marR="73152" anchor="ctr">
+                    <a:solidFill>
+                      <a:srgbClr val="FFFFFF"/>
+                    </a:solidFill>
+                  </a:tcPr>
+                </a:tc>
+                <a:tc>
+                  <a:txBody>
+                    <a:bodyPr/>
+                    <a:lstStyle/>
+                    <a:p>
+                      <a:r>
+                        <a:rPr sz="1500" b="0" i="0">
+                          <a:solidFill>
+                            <a:srgbClr val="222222"/>
+                          </a:solidFill>
+                          <a:latin typeface="Calibri"/>
+                        </a:rPr>
+                        <a:t>Heronas Aleksandrietis „Mechanikoje“ aprašo kėlimo mechanizmus: svertą, suktuvą, skridinį, pleištą ir sraigtą</a:t>
+                      </a:r>
+                    </a:p>
+                  </a:txBody>
+                  <a:tcPr marL="73152" marR="73152" anchor="ctr">
+                    <a:solidFill>
+                      <a:srgbClr val="FFFFFF"/>
+                    </a:solidFill>
+                  </a:tcPr>
+                </a:tc>
+              </a:tr>
+              <a:tr h="393192">
+                <a:tc>
+                  <a:txBody>
+                    <a:bodyPr/>
+                    <a:lstStyle/>
+                    <a:p>
+                      <a:r>
+                        <a:rPr sz="1500" b="1" i="0">
+                          <a:solidFill>
+                            <a:srgbClr val="222222"/>
+                          </a:solidFill>
+                          <a:latin typeface="Calibri"/>
+                        </a:rPr>
+                        <a:t>I a. pab.</a:t>
+                      </a:r>
+                    </a:p>
+                  </a:txBody>
+                  <a:tcPr marL="73152" marR="73152" anchor="ctr">
+                    <a:solidFill>
+                      <a:srgbClr val="FFFFFF"/>
+                    </a:solidFill>
+                  </a:tcPr>
+                </a:tc>
+                <a:tc>
+                  <a:txBody>
+                    <a:bodyPr/>
+                    <a:lstStyle/>
+                    <a:p>
+                      <a:r>
+                        <a:rPr sz="1500" b="0" i="0">
+                          <a:solidFill>
+                            <a:srgbClr val="222222"/>
+                          </a:solidFill>
+                          <a:latin typeface="Calibri"/>
+                        </a:rPr>
+                        <a:t>Romėnų kranas su mindomu ratu („polyspastos“) kelia iki ~6000 kg</a:t>
+                      </a:r>
+                    </a:p>
+                  </a:txBody>
+                  <a:tcPr marL="73152" marR="73152" anchor="ctr">
+                    <a:solidFill>
+                      <a:srgbClr val="FFFFFF"/>
+                    </a:solidFill>
+                  </a:tcPr>
+                </a:tc>
+              </a:tr>
+              <a:tr h="393192">
+                <a:tc>
+                  <a:txBody>
+                    <a:bodyPr/>
+                    <a:lstStyle/>
+                    <a:p>
+                      <a:r>
+                        <a:rPr sz="1500" b="1" i="0">
                           <a:solidFill>
                             <a:srgbClr val="222222"/>
                           </a:solidFill>
@@ -5473,7 +5599,7 @@
                     <a:lstStyle/>
                     <a:p>
                       <a:r>
-                        <a:rPr sz="1600" b="0" i="0">
+                        <a:rPr sz="1500" b="0" i="0">
                           <a:solidFill>
                             <a:srgbClr val="222222"/>
                           </a:solidFill>
@@ -5490,14 +5616,14 @@
                   </a:tcPr>
                 </a:tc>
               </a:tr>
-              <a:tr h="475488">
+              <a:tr h="393192">
                 <a:tc>
                   <a:txBody>
                     <a:bodyPr/>
                     <a:lstStyle/>
                     <a:p>
                       <a:r>
-                        <a:rPr sz="1600" b="1" i="0">
+                        <a:rPr sz="1500" b="1" i="0">
                           <a:solidFill>
                             <a:srgbClr val="222222"/>
                           </a:solidFill>
@@ -5519,7 +5645,7 @@
                     <a:lstStyle/>
                     <a:p>
                       <a:r>
-                        <a:rPr sz="1600" b="0" i="0">
+                        <a:rPr sz="1500" b="0" i="0">
                           <a:solidFill>
                             <a:srgbClr val="222222"/>
                           </a:solidFill>
@@ -5536,14 +5662,14 @@
                   </a:tcPr>
                 </a:tc>
               </a:tr>
-              <a:tr h="475488">
+              <a:tr h="393192">
                 <a:tc>
                   <a:txBody>
                     <a:bodyPr/>
                     <a:lstStyle/>
                     <a:p>
                       <a:r>
-                        <a:rPr sz="1600" b="1" i="0">
+                        <a:rPr sz="1500" b="1" i="0">
                           <a:solidFill>
                             <a:srgbClr val="222222"/>
                           </a:solidFill>
@@ -5565,7 +5691,7 @@
                     <a:lstStyle/>
                     <a:p>
                       <a:r>
-                        <a:rPr sz="1600" b="0" i="0">
+                        <a:rPr sz="1500" b="0" i="0">
                           <a:solidFill>
                             <a:srgbClr val="222222"/>
                           </a:solidFill>
@@ -5582,14 +5708,14 @@
                   </a:tcPr>
                 </a:tc>
               </a:tr>
-              <a:tr h="475488">
+              <a:tr h="393192">
                 <a:tc>
                   <a:txBody>
                     <a:bodyPr/>
                     <a:lstStyle/>
                     <a:p>
                       <a:r>
-                        <a:rPr sz="1600" b="1" i="0">
+                        <a:rPr sz="1500" b="1" i="0">
                           <a:solidFill>
                             <a:srgbClr val="222222"/>
                           </a:solidFill>
@@ -5611,7 +5737,7 @@
                     <a:lstStyle/>
                     <a:p>
                       <a:r>
-                        <a:rPr sz="1600" b="0" i="0">
+                        <a:rPr sz="1500" b="0" i="0">
                           <a:solidFill>
                             <a:srgbClr val="222222"/>
                           </a:solidFill>
@@ -5628,14 +5754,14 @@
                   </a:tcPr>
                 </a:tc>
               </a:tr>
-              <a:tr h="475488">
+              <a:tr h="393192">
                 <a:tc>
                   <a:txBody>
                     <a:bodyPr/>
                     <a:lstStyle/>
                     <a:p>
                       <a:r>
-                        <a:rPr sz="1600" b="1" i="0">
+                        <a:rPr sz="1500" b="1" i="0">
                           <a:solidFill>
                             <a:srgbClr val="222222"/>
                           </a:solidFill>
@@ -5657,7 +5783,7 @@
                     <a:lstStyle/>
                     <a:p>
                       <a:r>
-                        <a:rPr sz="1600" b="0" i="0">
+                        <a:rPr sz="1500" b="0" i="0">
                           <a:solidFill>
                             <a:srgbClr val="222222"/>
                           </a:solidFill>
@@ -5674,14 +5800,14 @@
                   </a:tcPr>
                 </a:tc>
               </a:tr>
-              <a:tr h="475488">
+              <a:tr h="393192">
                 <a:tc>
                   <a:txBody>
                     <a:bodyPr/>
                     <a:lstStyle/>
                     <a:p>
                       <a:r>
-                        <a:rPr sz="1600" b="1" i="0">
+                        <a:rPr sz="1500" b="1" i="0">
                           <a:solidFill>
                             <a:srgbClr val="222222"/>
                           </a:solidFill>
@@ -5703,7 +5829,7 @@
                     <a:lstStyle/>
                     <a:p>
                       <a:r>
-                        <a:rPr sz="1600" b="0" i="0">
+                        <a:rPr sz="1500" b="0" i="0">
                           <a:solidFill>
                             <a:srgbClr val="222222"/>
                           </a:solidFill>
@@ -5758,7 +5884,7 @@
                 </a:solidFill>
                 <a:latin typeface="Calibri"/>
               </a:rPr>
-              <a:t>Šaltiniai: Rorres (n.d.); Wikipedia (n.d.-a, n.d.-b, n.d.-c); Hi-Lift Jack Company (n.d.-a); AutoIndustriya (n.d.); Pro-Lift-Montagetechnik (n.d.).</a:t>
+              <a:t>Šaltiniai: Rorres (n.d.); Wikipedia (n.d.-a, n.d.-c, n.d.-d, n.d.-e, n.d.-f); Hi-Lift Jack Company (n.d.-a); AutoIndustriya (n.d.); Pro-Lift-Montagetechnik (n.d.).</a:t>
             </a:r>
           </a:p>
         </p:txBody>
@@ -6544,7 +6670,7 @@
                 </a:solidFill>
                 <a:latin typeface="Calibri"/>
               </a:rPr>
-              <a:t>Šaltiniai: Wikipedia (n.d.-d); Joyce/Dayton (n.d.); CJ Pony Parts (n.d.); Hi-Lift Jack Company (n.d.-b); CN Trailer Parts (n.d.); Redline Stands (n.d.).</a:t>
+              <a:t>Šaltiniai: Wikipedia (n.d.-b); Joyce/Dayton (n.d.); CJ Pony Parts (n.d.); Hi-Lift Jack Company (n.d.-b); CN Trailer Parts (n.d.); Redline Stands (n.d.).</a:t>
             </a:r>
           </a:p>
         </p:txBody>
@@ -9713,6 +9839,40 @@
               <a:t> (U.S. Patent No. 6,695,289). https://patents.google.com/patent/US6695289B1/en</a:t>
             </a:r>
           </a:p>
+          <a:p>
+            <a:pPr>
+              <a:spcAft>
+                <a:spcPts val="700"/>
+              </a:spcAft>
+            </a:pPr>
+            <a:r>
+              <a:rPr sz="1400" b="0">
+                <a:solidFill>
+                  <a:srgbClr val="222222"/>
+                </a:solidFill>
+                <a:latin typeface="Calibri"/>
+              </a:rPr>
+              <a:t>Pro-Lift-Montagetechnik. (n.d.). </a:t>
+            </a:r>
+            <a:r>
+              <a:rPr sz="1400" b="0" i="1">
+                <a:solidFill>
+                  <a:srgbClr val="222222"/>
+                </a:solidFill>
+                <a:latin typeface="Calibri"/>
+              </a:rPr>
+              <a:t>12V electric scissor jack, car jack, 123 mm – 345 mm</a:t>
+            </a:r>
+            <a:r>
+              <a:rPr sz="1400" b="0" i="0">
+                <a:solidFill>
+                  <a:srgbClr val="222222"/>
+                </a:solidFill>
+                <a:latin typeface="Calibri"/>
+              </a:rPr>
+              <a:t>. https://www.pro-lift-montagetechnik.com/12-volt-electric-scissor-jack-car-jack-123mm-345mm-002</a:t>
+            </a:r>
+          </a:p>
         </p:txBody>
       </p:sp>
     </p:spTree>

--- a/domkratas-ta1/domkratas-ta1.pptx
+++ b/domkratas-ta1/domkratas-ta1.pptx
@@ -15,6 +15,8 @@
     <p:sldId id="263" r:id="rId15"/>
     <p:sldId id="264" r:id="rId16"/>
     <p:sldId id="265" r:id="rId17"/>
+    <p:sldId id="266" r:id="rId18"/>
+    <p:sldId id="267" r:id="rId19"/>
   </p:sldIdLst>
   <p:sldSz cx="12191695" cy="6858000" type="screen4x3"/>
   <p:notesSz cx="6858000" cy="9144000"/>
@@ -511,7 +513,77 @@
           <a:lstStyle/>
           <a:p>
             <a:r>
-              <a:t>Laba diena. Mūsų tema – domkratas. Parodysime, kaip domkratai vystėsi, kokių problemų jie turi šiandien ir kaip siūlome patobulinti automobilio žirklinį domkratą.</a:t>
+              <a:t>Laba diena. Mūsų tema – automobilinis domkratas. Papasakosime, kodėl jo prireikė, kaip jis keitėsi per keturis žingsnius – kiekvienas iš mūsų pristatys vieną – ir ką siūlome patobulinti.</a:t>
+            </a:r>
+          </a:p>
+        </p:txBody>
+      </p:sp>
+      <p:sp>
+        <p:nvSpPr>
+          <p:cNvPr id="4" name="Slide Number Placeholder 3"/>
+          <p:cNvSpPr>
+            <a:spLocks noGrp="1"/>
+          </p:cNvSpPr>
+          <p:nvPr>
+            <p:ph type="sldNum" idx="5" sz="quarter"/>
+          </p:nvPr>
+        </p:nvSpPr>
+        <p:spPr/>
+      </p:sp>
+    </p:spTree>
+  </p:cSld>
+  <p:clrMapOvr>
+    <a:masterClrMapping/>
+  </p:clrMapOvr>
+</p:notes>
+</file>
+
+<file path=ppt/notesSlides/notesSlide10.xml><?xml version="1.0" encoding="utf-8"?>
+<p:notes xmlns:a="http://schemas.openxmlformats.org/drawingml/2006/main" xmlns:p="http://schemas.openxmlformats.org/presentationml/2006/main" xmlns:r="http://schemas.openxmlformats.org/officeDocument/2006/relationships">
+  <p:cSld>
+    <p:spTree>
+      <p:nvGrpSpPr>
+        <p:cNvPr id="1" name=""/>
+        <p:cNvGrpSpPr/>
+        <p:nvPr/>
+      </p:nvGrpSpPr>
+      <p:grpSpPr>
+        <a:xfrm>
+          <a:off x="0" y="0"/>
+          <a:ext cx="0" cy="0"/>
+          <a:chOff x="0" y="0"/>
+          <a:chExt cx="0" cy="0"/>
+        </a:xfrm>
+      </p:grpSpPr>
+      <p:sp>
+        <p:nvSpPr>
+          <p:cNvPr id="2" name="Slide Image Placeholder 1"/>
+          <p:cNvSpPr>
+            <a:spLocks noGrp="1"/>
+          </p:cNvSpPr>
+          <p:nvPr>
+            <p:ph type="sldImg" idx="2"/>
+          </p:nvPr>
+        </p:nvSpPr>
+        <p:spPr/>
+      </p:sp>
+      <p:sp>
+        <p:nvSpPr>
+          <p:cNvPr id="3" name="Notes Placeholder 2"/>
+          <p:cNvSpPr>
+            <a:spLocks noGrp="1"/>
+          </p:cNvSpPr>
+          <p:nvPr>
+            <p:ph type="body" idx="3" sz="quarter"/>
+          </p:nvPr>
+        </p:nvSpPr>
+        <p:spPr/>
+        <p:txBody>
+          <a:bodyPr/>
+          <a:lstStyle/>
+          <a:p>
+            <a:r>
+              <a:t>Apibendrinant: domkratas keitėsi nuo sraigtinio iki pneumohidraulinio, ir kiekvienas žingsnis sprendė ankstesniojo problemą. Mūsų idėja – stabilesnis ir patvaresnis žirklinis domkratas. Ačiū, laukiame klausimų.</a:t>
             </a:r>
           </a:p>
         </p:txBody>
@@ -581,7 +653,7 @@
           <a:lstStyle/>
           <a:p>
             <a:r>
-              <a:t>Žirklinį domkratą gamintojai deda į naujus automobilius, todėl su juo susiduria beveik kiekvienas vairuotojas. Domkratas veikia pagal sverto arba Paskalio dėsnį: nedidele jėga pakeliamas didelis krovinys.</a:t>
+              <a:t>Domkratai buvo naudojami dar vežimams. Atsiradus automobiliams, padangos prakiurdavo labai dažnai, nes keliuose buvo daug pasagų vinių. Kad pakeistum ar užklijuotum padangą, reikia pakelti automobilį – todėl gamintojai pradėjo į kiekvieną automobilį dėti nešiojamą domkratą.</a:t>
             </a:r>
           </a:p>
         </p:txBody>
@@ -651,7 +723,7 @@
           <a:lstStyle/>
           <a:p>
             <a:r>
-              <a:t>Raida: nuo Archimedo sverto, antikinių sraigtinių presų, Herono kėlimo mechanizmų ir romėnų kranų per Bramah ir Dudgeon hidrauliką iki žirklinių ir elektrinių domkratų. Tendencija – nuo jėgos laimėjimo link greičio, saugos ir patogumo.</a:t>
+              <a:t>Čia visi domkratų tipai surikiuoti pagal atsiradimo laiką. Paryškinti keturi, kuriuos pristatysime išsamiai – kiekvienas iš mūsų po vieną. Kiti trumpai aptarti bus pabaigoje.</a:t>
             </a:r>
           </a:p>
         </p:txBody>
@@ -721,7 +793,7 @@
           <a:lstStyle/>
           <a:p>
             <a:r>
-              <a:t>Palyginome penkis pagrindinius tipus. Pasiteisino savistabdis sraigtas ir hidraulika, o silpnybės – lėtumas, nestabilumas ir sauga. Gilinsimės į žirklinį, nes jis yra automobilio komplekte.</a:t>
+              <a:t>Pirmieji paplitę domkratai buvo sraigtiniai. Sukant rankeną sraigtas kyla ir kelia krovinį. Jie paprasti ir savistabdžiai, bet lėti ir sunkiai sukami, nes didelė trintis suvalgo daug energijos.</a:t>
             </a:r>
           </a:p>
         </p:txBody>
@@ -791,7 +863,7 @@
           <a:lstStyle/>
           <a:p>
             <a:r>
-              <a:t>Žirklinis domkratas lėtas ir sunkiai sukamas, ypač pradžioje. Jėga sraigte F = Q / tg θ, todėl žemoje padėtyje ji kelis kartus didesnė už krovinį. Todėl formuluojame uždavinį.</a:t>
+              <a:t>1851 m. Richardas Dudgeonas patentavo nešiojamą hidraulinį presą. Jis pats rašė, kad šis atliks darbą, kurį iki tol darė sraigtas. Hidraulika leido mažomis pastangomis kelti labai sunkius krovinius, tačiau butelinis domkratas yra aukštas ir netelpa po žemu automobiliu.</a:t>
             </a:r>
           </a:p>
         </p:txBody>
@@ -861,7 +933,7 @@
           <a:lstStyle/>
           <a:p>
             <a:r>
-              <a:t>Siūlome elektrinį žirklinį domkratą. Svarbiausi pakeitimai: 12 V variklis, trapecinis sraigtas iš grūdinto plieno su bronzine veržle, stipresnės svirtys ir platesnis pagrindas. Avarinis rankinis sukimas lieka.</a:t>
+              <a:t>1920 m. Joseph LaFrance patentavo domkratą, skirtą būtent automobiliams. Rombo formos svirtys leidžia jam būti žemam ir lengvam, todėl jis telpa bagažinėje. 1949 m. W. P. Brown patentavo patobulintą žirklinį domkratą. Tačiau sukti reikia ilgai, o siauras pagrindas ant minkšto grunto nestabilus.</a:t>
             </a:r>
           </a:p>
         </p:txBody>
@@ -931,7 +1003,7 @@
           <a:lstStyle/>
           <a:p>
             <a:r>
-              <a:t>Laimime greitį, jėgą ir stabilumą. Kompromisai – didesnė masė ir kaina. Pagal mūsų skaičiavimą variklio galia apie 100 W, todėl užtenka automobilio 12 V lizdo.</a:t>
+              <a:t>Hidraulinis domkratas sumažino reikiamą jėgą, bet pumpuoti rankena ilgai buvo varginanti. 1966 m. Donald Juds pateikė patentą kombinuotam domkratui: alyvą pumpuoja suslėgtas oras iš kompresoriaus, o dingus orui domkratas veikia rankiniu būdu. Tai greita ir patogu servise, bet kelyje kompresoriaus paprastai nėra.</a:t>
             </a:r>
           </a:p>
         </p:txBody>
@@ -1001,7 +1073,77 @@
           <a:lstStyle/>
           <a:p>
             <a:r>
-              <a:t>Apibendrinant: domkratai vystėsi nuo jėgos laimėjimo iki saugos ir patogumo. Žirklinį domkratą siūlome elektrifikuoti ir sustiprinti. Ačiū, laukiame klausimų.</a:t>
+              <a:t>Trumpai apie kitus domkratus, surikiuotus pagal laiką. Krumpliastiebinis kelia labai aukštai, bet pavojingas dėl rankenos atatrankos. Vežimėlinis – servisų domkratas: greitas, bet sunkus. Elektrinis žirklinis nereikalauja sukti rankos, bet reikia elektros.</a:t>
+            </a:r>
+          </a:p>
+        </p:txBody>
+      </p:sp>
+      <p:sp>
+        <p:nvSpPr>
+          <p:cNvPr id="4" name="Slide Number Placeholder 3"/>
+          <p:cNvSpPr>
+            <a:spLocks noGrp="1"/>
+          </p:cNvSpPr>
+          <p:nvPr>
+            <p:ph type="sldNum" idx="5" sz="quarter"/>
+          </p:nvPr>
+        </p:nvSpPr>
+        <p:spPr/>
+      </p:sp>
+    </p:spTree>
+  </p:cSld>
+  <p:clrMapOvr>
+    <a:masterClrMapping/>
+  </p:clrMapOvr>
+</p:notes>
+</file>
+
+<file path=ppt/notesSlides/notesSlide9.xml><?xml version="1.0" encoding="utf-8"?>
+<p:notes xmlns:a="http://schemas.openxmlformats.org/drawingml/2006/main" xmlns:p="http://schemas.openxmlformats.org/presentationml/2006/main" xmlns:r="http://schemas.openxmlformats.org/officeDocument/2006/relationships">
+  <p:cSld>
+    <p:spTree>
+      <p:nvGrpSpPr>
+        <p:cNvPr id="1" name=""/>
+        <p:cNvGrpSpPr/>
+        <p:nvPr/>
+      </p:nvGrpSpPr>
+      <p:grpSpPr>
+        <a:xfrm>
+          <a:off x="0" y="0"/>
+          <a:ext cx="0" cy="0"/>
+          <a:chOff x="0" y="0"/>
+          <a:chExt cx="0" cy="0"/>
+        </a:xfrm>
+      </p:grpSpPr>
+      <p:sp>
+        <p:nvSpPr>
+          <p:cNvPr id="2" name="Slide Image Placeholder 1"/>
+          <p:cNvSpPr>
+            <a:spLocks noGrp="1"/>
+          </p:cNvSpPr>
+          <p:nvPr>
+            <p:ph type="sldImg" idx="2"/>
+          </p:nvPr>
+        </p:nvSpPr>
+        <p:spPr/>
+      </p:sp>
+      <p:sp>
+        <p:nvSpPr>
+          <p:cNvPr id="3" name="Notes Placeholder 2"/>
+          <p:cNvSpPr>
+            <a:spLocks noGrp="1"/>
+          </p:cNvSpPr>
+          <p:nvPr>
+            <p:ph type="body" idx="3" sz="quarter"/>
+          </p:nvPr>
+        </p:nvSpPr>
+        <p:spPr/>
+        <p:txBody>
+          <a:bodyPr/>
+          <a:lstStyle/>
+          <a:p>
+            <a:r>
+              <a:t>Tobuliname žirklinį domkratą, nes jis yra kiekvieno automobilio komplekte. Jo problemos – siauras pagrindas, dylantis sraigtas ir nepatogus sukimas. Siūlome platesnį pagrindą su guminiu padu, savistabdį trapecinį sraigtą su bronzine veržle, stipresnes svirtis ir patogesnę rankeną.</a:t>
             </a:r>
           </a:p>
         </p:txBody>
@@ -4085,7 +4227,7 @@
                 </a:solidFill>
                 <a:latin typeface="Calibri"/>
               </a:rPr>
-              <a:t>Domkratas</a:t>
+              <a:t>Automobilinis domkratas</a:t>
             </a:r>
           </a:p>
         </p:txBody>
@@ -4124,7 +4266,7 @@
                 </a:solidFill>
                 <a:latin typeface="Calibri"/>
               </a:rPr>
-              <a:t>Raida, problemos ir patobulinimo kryptis</a:t>
+              <a:t>Kaip jis keitėsi ir ką galima patobulinti</a:t>
             </a:r>
           </a:p>
         </p:txBody>
@@ -4195,7 +4337,7 @@
                 </a:solidFill>
                 <a:latin typeface="Calibri"/>
               </a:rPr>
-              <a:t>Grupė: [Vardas Pavardė, …] · Dėstytojas: G. Viselga · 2026 m.</a:t>
+              <a:t>Grupė: [Vardas Pavardė ×4] · Dėstytojas: G. Viselga · 2026 m.</a:t>
             </a:r>
           </a:p>
         </p:txBody>
@@ -4252,7 +4394,7 @@
                 </a:solidFill>
                 <a:latin typeface="Calibri"/>
               </a:rPr>
-              <a:t>Šaltiniai (2/2)</a:t>
+              <a:t>Išvados</a:t>
             </a:r>
           </a:p>
         </p:txBody>
@@ -4335,7 +4477,7 @@
                 </a:solidFill>
                 <a:latin typeface="Calibri"/>
               </a:rPr>
-              <a:t>10 / 10</a:t>
+              <a:t>10 / 12</a:t>
             </a:r>
           </a:p>
         </p:txBody>
@@ -4374,7 +4516,7 @@
                 </a:solidFill>
                 <a:latin typeface="Calibri"/>
               </a:rPr>
-              <a:t>PBL · Domkratas</a:t>
+              <a:t>PBL · Automobilinis domkratas</a:t>
             </a:r>
           </a:p>
         </p:txBody>
@@ -4387,8 +4529,8 @@
         </p:nvSpPr>
         <p:spPr>
           <a:xfrm>
-            <a:off x="640080" y="1463040"/>
-            <a:ext cx="10881360" cy="4754880"/>
+            <a:off x="640080" y="1554480"/>
+            <a:ext cx="6766560" cy="4206240"/>
           </a:xfrm>
           <a:prstGeom prst="rect">
             <a:avLst/>
@@ -4403,20 +4545,1185 @@
           <a:p>
             <a:pPr algn="l">
               <a:spcAft>
-                <a:spcPts val="700"/>
-              </a:spcAft>
-            </a:pPr>
-            <a:r>
-              <a:rPr sz="1400" b="0">
+                <a:spcPts val="1800"/>
+              </a:spcAft>
+            </a:pPr>
+            <a:r>
+              <a:rPr sz="2100" b="1">
                 <a:solidFill>
                   <a:srgbClr val="222222"/>
                 </a:solidFill>
                 <a:latin typeface="Calibri"/>
               </a:rPr>
+              <a:t>• Poreikis</a:t>
+            </a:r>
+            <a:r>
+              <a:rPr sz="2100" b="0" i="0">
+                <a:solidFill>
+                  <a:srgbClr val="222222"/>
+                </a:solidFill>
+                <a:latin typeface="Calibri"/>
+              </a:rPr>
+              <a:t> – automobiliams reikėjo nešiojamo domkrato, nes padangos dažnai prakiurdavo.</a:t>
+            </a:r>
+          </a:p>
+          <a:p>
+            <a:pPr>
+              <a:spcAft>
+                <a:spcPts val="1800"/>
+              </a:spcAft>
+            </a:pPr>
+            <a:r>
+              <a:rPr sz="2100" b="1">
+                <a:solidFill>
+                  <a:srgbClr val="222222"/>
+                </a:solidFill>
+                <a:latin typeface="Calibri"/>
+              </a:rPr>
+              <a:t>• Raida</a:t>
+            </a:r>
+            <a:r>
+              <a:rPr sz="2100" b="0" i="0">
+                <a:solidFill>
+                  <a:srgbClr val="222222"/>
+                </a:solidFill>
+                <a:latin typeface="Calibri"/>
+              </a:rPr>
+              <a:t> – sraigtinis → hidraulinis → žirklinis → pneumohidraulinis.</a:t>
+            </a:r>
+          </a:p>
+          <a:p>
+            <a:pPr>
+              <a:spcAft>
+                <a:spcPts val="1800"/>
+              </a:spcAft>
+            </a:pPr>
+            <a:r>
+              <a:rPr sz="2100" b="1">
+                <a:solidFill>
+                  <a:srgbClr val="222222"/>
+                </a:solidFill>
+                <a:latin typeface="Calibri"/>
+              </a:rPr>
+              <a:t>• Dėsningumas</a:t>
+            </a:r>
+            <a:r>
+              <a:rPr sz="2100" b="0" i="0">
+                <a:solidFill>
+                  <a:srgbClr val="222222"/>
+                </a:solidFill>
+                <a:latin typeface="Calibri"/>
+              </a:rPr>
+              <a:t> – kiekvienas naujas domkratas išsprendė ankstesniojo problemą, bet atnešė naujų.</a:t>
+            </a:r>
+          </a:p>
+          <a:p>
+            <a:pPr>
+              <a:spcAft>
+                <a:spcPts val="1800"/>
+              </a:spcAft>
+            </a:pPr>
+            <a:r>
+              <a:rPr sz="2100" b="1">
+                <a:solidFill>
+                  <a:srgbClr val="222222"/>
+                </a:solidFill>
+                <a:latin typeface="Calibri"/>
+              </a:rPr>
+              <a:t>• Mūsų idėja</a:t>
+            </a:r>
+            <a:r>
+              <a:rPr sz="2100" b="0" i="0">
+                <a:solidFill>
+                  <a:srgbClr val="222222"/>
+                </a:solidFill>
+                <a:latin typeface="Calibri"/>
+              </a:rPr>
+              <a:t> – žirklinis domkratas su platesniu pagrindu, savistabdžiu sraigtu, bronzine veržle ir patogesne rankena.</a:t>
+            </a:r>
+          </a:p>
+        </p:txBody>
+      </p:sp>
+      <p:sp>
+        <p:nvSpPr>
+          <p:cNvPr id="7" name="Rectangle 6"/>
+          <p:cNvSpPr/>
+          <p:nvPr/>
+        </p:nvSpPr>
+        <p:spPr>
+          <a:xfrm>
+            <a:off x="7772400" y="2377440"/>
+            <a:ext cx="3749039" cy="1828800"/>
+          </a:xfrm>
+          <a:prstGeom prst="rect">
+            <a:avLst/>
+          </a:prstGeom>
+          <a:solidFill>
+            <a:srgbClr val="DEEAF6"/>
+          </a:solidFill>
+          <a:ln>
+            <a:noFill/>
+          </a:ln>
+          <a:effectLst/>
+        </p:spPr>
+        <p:style>
+          <a:lnRef idx="1">
+            <a:schemeClr val="accent1"/>
+          </a:lnRef>
+          <a:fillRef idx="3">
+            <a:schemeClr val="accent1"/>
+          </a:fillRef>
+          <a:effectRef idx="2">
+            <a:schemeClr val="accent1"/>
+          </a:effectRef>
+          <a:fontRef idx="minor">
+            <a:schemeClr val="lt1"/>
+          </a:fontRef>
+        </p:style>
+        <p:txBody>
+          <a:bodyPr rtlCol="0" anchor="ctr"/>
+          <a:lstStyle/>
+          <a:p>
+            <a:pPr algn="ctr"/>
+          </a:p>
+        </p:txBody>
+      </p:sp>
+      <p:sp>
+        <p:nvSpPr>
+          <p:cNvPr id="8" name="TextBox 7"/>
+          <p:cNvSpPr txBox="1"/>
+          <p:nvPr/>
+        </p:nvSpPr>
+        <p:spPr>
+          <a:xfrm>
+            <a:off x="7772400" y="2377440"/>
+            <a:ext cx="3749039" cy="1828800"/>
+          </a:xfrm>
+          <a:prstGeom prst="rect">
+            <a:avLst/>
+          </a:prstGeom>
+          <a:noFill/>
+        </p:spPr>
+        <p:txBody>
+          <a:bodyPr wrap="square" anchor="ctr" lIns="45720" rIns="45720">
+            <a:spAutoFit/>
+          </a:bodyPr>
+          <a:lstStyle/>
+          <a:p>
+            <a:pPr algn="ctr">
+              <a:spcAft>
+                <a:spcPts val="600"/>
+              </a:spcAft>
+            </a:pPr>
+            <a:r>
+              <a:rPr sz="3600" b="1">
+                <a:solidFill>
+                  <a:srgbClr val="1F4E79"/>
+                </a:solidFill>
+                <a:latin typeface="Calibri"/>
+              </a:rPr>
+              <a:t>Klausimai?</a:t>
+            </a:r>
+          </a:p>
+        </p:txBody>
+      </p:sp>
+    </p:spTree>
+  </p:cSld>
+  <p:clrMapOvr>
+    <a:masterClrMapping/>
+  </p:clrMapOvr>
+</p:sld>
+</file>
+
+<file path=ppt/slides/slide11.xml><?xml version="1.0" encoding="utf-8"?>
+<p:sld xmlns:a="http://schemas.openxmlformats.org/drawingml/2006/main" xmlns:p="http://schemas.openxmlformats.org/presentationml/2006/main" xmlns:r="http://schemas.openxmlformats.org/officeDocument/2006/relationships">
+  <p:cSld>
+    <p:spTree>
+      <p:nvGrpSpPr>
+        <p:cNvPr id="1" name=""/>
+        <p:cNvGrpSpPr/>
+        <p:nvPr/>
+      </p:nvGrpSpPr>
+      <p:grpSpPr/>
+      <p:sp>
+        <p:nvSpPr>
+          <p:cNvPr id="2" name="TextBox 1"/>
+          <p:cNvSpPr txBox="1"/>
+          <p:nvPr/>
+        </p:nvSpPr>
+        <p:spPr>
+          <a:xfrm>
+            <a:off x="548640" y="320040"/>
+            <a:ext cx="11064240" cy="822960"/>
+          </a:xfrm>
+          <a:prstGeom prst="rect">
+            <a:avLst/>
+          </a:prstGeom>
+          <a:noFill/>
+        </p:spPr>
+        <p:txBody>
+          <a:bodyPr wrap="square" anchor="b" lIns="45720" rIns="45720">
+            <a:spAutoFit/>
+          </a:bodyPr>
+          <a:lstStyle/>
+          <a:p>
+            <a:pPr algn="l">
+              <a:spcAft>
+                <a:spcPts val="600"/>
+              </a:spcAft>
+            </a:pPr>
+            <a:r>
+              <a:rPr sz="3200" b="1">
+                <a:solidFill>
+                  <a:srgbClr val="1F4E79"/>
+                </a:solidFill>
+                <a:latin typeface="Calibri"/>
+              </a:rPr>
+              <a:t>Šaltiniai (1/2)</a:t>
+            </a:r>
+          </a:p>
+        </p:txBody>
+      </p:sp>
+      <p:sp>
+        <p:nvSpPr>
+          <p:cNvPr id="3" name="Rectangle 2"/>
+          <p:cNvSpPr/>
+          <p:nvPr/>
+        </p:nvSpPr>
+        <p:spPr>
+          <a:xfrm>
+            <a:off x="594360" y="1207008"/>
+            <a:ext cx="10972800" cy="27432"/>
+          </a:xfrm>
+          <a:prstGeom prst="rect">
+            <a:avLst/>
+          </a:prstGeom>
+          <a:solidFill>
+            <a:srgbClr val="1F4E79"/>
+          </a:solidFill>
+          <a:ln>
+            <a:noFill/>
+          </a:ln>
+          <a:effectLst/>
+        </p:spPr>
+        <p:style>
+          <a:lnRef idx="1">
+            <a:schemeClr val="accent1"/>
+          </a:lnRef>
+          <a:fillRef idx="3">
+            <a:schemeClr val="accent1"/>
+          </a:fillRef>
+          <a:effectRef idx="2">
+            <a:schemeClr val="accent1"/>
+          </a:effectRef>
+          <a:fontRef idx="minor">
+            <a:schemeClr val="lt1"/>
+          </a:fontRef>
+        </p:style>
+        <p:txBody>
+          <a:bodyPr rtlCol="0" anchor="ctr"/>
+          <a:lstStyle/>
+          <a:p>
+            <a:pPr algn="ctr"/>
+          </a:p>
+        </p:txBody>
+      </p:sp>
+      <p:sp>
+        <p:nvSpPr>
+          <p:cNvPr id="4" name="TextBox 3"/>
+          <p:cNvSpPr txBox="1"/>
+          <p:nvPr/>
+        </p:nvSpPr>
+        <p:spPr>
+          <a:xfrm>
+            <a:off x="10698480" y="6355080"/>
+            <a:ext cx="1005840" cy="365760"/>
+          </a:xfrm>
+          <a:prstGeom prst="rect">
+            <a:avLst/>
+          </a:prstGeom>
+          <a:noFill/>
+        </p:spPr>
+        <p:txBody>
+          <a:bodyPr wrap="square" anchor="t" lIns="45720" rIns="45720">
+            <a:spAutoFit/>
+          </a:bodyPr>
+          <a:lstStyle/>
+          <a:p>
+            <a:pPr algn="r">
+              <a:spcAft>
+                <a:spcPts val="600"/>
+              </a:spcAft>
+            </a:pPr>
+            <a:r>
+              <a:rPr sz="1200" b="0">
+                <a:solidFill>
+                  <a:srgbClr val="595959"/>
+                </a:solidFill>
+                <a:latin typeface="Calibri"/>
+              </a:rPr>
+              <a:t>11 / 12</a:t>
+            </a:r>
+          </a:p>
+        </p:txBody>
+      </p:sp>
+      <p:sp>
+        <p:nvSpPr>
+          <p:cNvPr id="5" name="TextBox 4"/>
+          <p:cNvSpPr txBox="1"/>
+          <p:nvPr/>
+        </p:nvSpPr>
+        <p:spPr>
+          <a:xfrm>
+            <a:off x="548640" y="6355080"/>
+            <a:ext cx="7315200" cy="365760"/>
+          </a:xfrm>
+          <a:prstGeom prst="rect">
+            <a:avLst/>
+          </a:prstGeom>
+          <a:noFill/>
+        </p:spPr>
+        <p:txBody>
+          <a:bodyPr wrap="square" anchor="t" lIns="45720" rIns="45720">
+            <a:spAutoFit/>
+          </a:bodyPr>
+          <a:lstStyle/>
+          <a:p>
+            <a:pPr algn="l">
+              <a:spcAft>
+                <a:spcPts val="600"/>
+              </a:spcAft>
+            </a:pPr>
+            <a:r>
+              <a:rPr sz="1200" b="0">
+                <a:solidFill>
+                  <a:srgbClr val="595959"/>
+                </a:solidFill>
+                <a:latin typeface="Calibri"/>
+              </a:rPr>
+              <a:t>PBL · Automobilinis domkratas</a:t>
+            </a:r>
+          </a:p>
+        </p:txBody>
+      </p:sp>
+      <p:sp>
+        <p:nvSpPr>
+          <p:cNvPr id="6" name="TextBox 5"/>
+          <p:cNvSpPr txBox="1"/>
+          <p:nvPr/>
+        </p:nvSpPr>
+        <p:spPr>
+          <a:xfrm>
+            <a:off x="640080" y="1463040"/>
+            <a:ext cx="10881360" cy="4754880"/>
+          </a:xfrm>
+          <a:prstGeom prst="rect">
+            <a:avLst/>
+          </a:prstGeom>
+          <a:noFill/>
+        </p:spPr>
+        <p:txBody>
+          <a:bodyPr wrap="square" anchor="t" lIns="45720" rIns="45720">
+            <a:spAutoFit/>
+          </a:bodyPr>
+          <a:lstStyle/>
+          <a:p>
+            <a:pPr algn="l">
+              <a:spcAft>
+                <a:spcPts val="600"/>
+              </a:spcAft>
+            </a:pPr>
+            <a:r>
+              <a:rPr sz="1300" b="0">
+                <a:solidFill>
+                  <a:srgbClr val="222222"/>
+                </a:solidFill>
+                <a:latin typeface="Calibri"/>
+              </a:rPr>
+              <a:t>Bovey, G. O. (1882). </a:t>
+            </a:r>
+            <a:r>
+              <a:rPr sz="1300" b="0" i="1">
+                <a:solidFill>
+                  <a:srgbClr val="222222"/>
+                </a:solidFill>
+                <a:latin typeface="Calibri"/>
+              </a:rPr>
+              <a:t>Carriage-jack</a:t>
+            </a:r>
+            <a:r>
+              <a:rPr sz="1300" b="0" i="0">
+                <a:solidFill>
+                  <a:srgbClr val="222222"/>
+                </a:solidFill>
+                <a:latin typeface="Calibri"/>
+              </a:rPr>
+              <a:t> (U.S. Patent No. 260,276). https://patents.google.com/patent/US260276A/en</a:t>
+            </a:r>
+          </a:p>
+          <a:p>
+            <a:pPr>
+              <a:spcAft>
+                <a:spcPts val="600"/>
+              </a:spcAft>
+            </a:pPr>
+            <a:r>
+              <a:rPr sz="1300" b="0">
+                <a:solidFill>
+                  <a:srgbClr val="222222"/>
+                </a:solidFill>
+                <a:latin typeface="Calibri"/>
+              </a:rPr>
+              <a:t>Brown, W. P. (1949). </a:t>
+            </a:r>
+            <a:r>
+              <a:rPr sz="1300" b="0" i="1">
+                <a:solidFill>
+                  <a:srgbClr val="222222"/>
+                </a:solidFill>
+                <a:latin typeface="Calibri"/>
+              </a:rPr>
+              <a:t>Scissors jack</a:t>
+            </a:r>
+            <a:r>
+              <a:rPr sz="1300" b="0" i="0">
+                <a:solidFill>
+                  <a:srgbClr val="222222"/>
+                </a:solidFill>
+                <a:latin typeface="Calibri"/>
+              </a:rPr>
+              <a:t> (U.S. Patent No. 2,467,657). https://patents.google.com/patent/US2467657A/en</a:t>
+            </a:r>
+          </a:p>
+          <a:p>
+            <a:pPr>
+              <a:spcAft>
+                <a:spcPts val="600"/>
+              </a:spcAft>
+            </a:pPr>
+            <a:r>
+              <a:rPr sz="1300" b="0">
+                <a:solidFill>
+                  <a:srgbClr val="222222"/>
+                </a:solidFill>
+                <a:latin typeface="Calibri"/>
+              </a:rPr>
+              <a:t>Castle Equipment. (n.d.). </a:t>
+            </a:r>
+            <a:r>
+              <a:rPr sz="1300" b="0" i="1">
+                <a:solidFill>
+                  <a:srgbClr val="222222"/>
+                </a:solidFill>
+                <a:latin typeface="Calibri"/>
+              </a:rPr>
+              <a:t>Weaver hydraulic &amp; mechanical jacks history</a:t>
+            </a:r>
+            <a:r>
+              <a:rPr sz="1300" b="0" i="0">
+                <a:solidFill>
+                  <a:srgbClr val="222222"/>
+                </a:solidFill>
+                <a:latin typeface="Calibri"/>
+              </a:rPr>
+              <a:t>. http://www.castleequipment.com/Museum/jacks_weaver_history.htm</a:t>
+            </a:r>
+          </a:p>
+          <a:p>
+            <a:pPr>
+              <a:spcAft>
+                <a:spcPts val="600"/>
+              </a:spcAft>
+            </a:pPr>
+            <a:r>
+              <a:rPr sz="1300" b="0">
+                <a:solidFill>
+                  <a:srgbClr val="222222"/>
+                </a:solidFill>
+                <a:latin typeface="Calibri"/>
+              </a:rPr>
+              <a:t>CJ Pony Parts. (n.d.). </a:t>
+            </a:r>
+            <a:r>
+              <a:rPr sz="1300" b="0" i="1">
+                <a:solidFill>
+                  <a:srgbClr val="222222"/>
+                </a:solidFill>
+                <a:latin typeface="Calibri"/>
+              </a:rPr>
+              <a:t>Types of car jacks</a:t>
+            </a:r>
+            <a:r>
+              <a:rPr sz="1300" b="0" i="0">
+                <a:solidFill>
+                  <a:srgbClr val="222222"/>
+                </a:solidFill>
+                <a:latin typeface="Calibri"/>
+              </a:rPr>
+              <a:t>. https://www.cjponyparts.com/resources/types-of-car-jacks</a:t>
+            </a:r>
+          </a:p>
+          <a:p>
+            <a:pPr>
+              <a:spcAft>
+                <a:spcPts val="600"/>
+              </a:spcAft>
+            </a:pPr>
+            <a:r>
+              <a:rPr sz="1300" b="0">
+                <a:solidFill>
+                  <a:srgbClr val="222222"/>
+                </a:solidFill>
+                <a:latin typeface="Calibri"/>
+              </a:rPr>
+              <a:t>CN Trailer Parts. (n.d.). </a:t>
+            </a:r>
+            <a:r>
+              <a:rPr sz="1300" b="0" i="1">
+                <a:solidFill>
+                  <a:srgbClr val="222222"/>
+                </a:solidFill>
+                <a:latin typeface="Calibri"/>
+              </a:rPr>
+              <a:t>What are the disadvantages of a scissor jack?</a:t>
+            </a:r>
+            <a:r>
+              <a:rPr sz="1300" b="0" i="0">
+                <a:solidFill>
+                  <a:srgbClr val="222222"/>
+                </a:solidFill>
+                <a:latin typeface="Calibri"/>
+              </a:rPr>
+              <a:t> https://www.cntrailerparts.com/blog/what-are-the-disadvantages-of-a-scissor-jack-372667.html</a:t>
+            </a:r>
+          </a:p>
+          <a:p>
+            <a:pPr>
+              <a:spcAft>
+                <a:spcPts val="600"/>
+              </a:spcAft>
+            </a:pPr>
+            <a:r>
+              <a:rPr sz="1300" b="0">
+                <a:solidFill>
+                  <a:srgbClr val="222222"/>
+                </a:solidFill>
+                <a:latin typeface="Calibri"/>
+              </a:rPr>
+              <a:t>Dudgeon, R. (1851). </a:t>
+            </a:r>
+            <a:r>
+              <a:rPr sz="1300" b="0" i="1">
+                <a:solidFill>
+                  <a:srgbClr val="222222"/>
+                </a:solidFill>
+                <a:latin typeface="Calibri"/>
+              </a:rPr>
+              <a:t>Portable hydraulic press</a:t>
+            </a:r>
+            <a:r>
+              <a:rPr sz="1300" b="0" i="0">
+                <a:solidFill>
+                  <a:srgbClr val="222222"/>
+                </a:solidFill>
+                <a:latin typeface="Calibri"/>
+              </a:rPr>
+              <a:t> (U.S. Patent No. 8,203). https://patents.google.com/patent/US8203A/en</a:t>
+            </a:r>
+          </a:p>
+          <a:p>
+            <a:pPr>
+              <a:spcAft>
+                <a:spcPts val="600"/>
+              </a:spcAft>
+            </a:pPr>
+            <a:r>
+              <a:rPr sz="1300" b="0">
+                <a:solidFill>
+                  <a:srgbClr val="222222"/>
+                </a:solidFill>
+                <a:latin typeface="Calibri"/>
+              </a:rPr>
+              <a:t>Gnee Steel. (n.d.). </a:t>
+            </a:r>
+            <a:r>
+              <a:rPr sz="1300" b="0" i="1">
+                <a:solidFill>
+                  <a:srgbClr val="222222"/>
+                </a:solidFill>
+                <a:latin typeface="Calibri"/>
+              </a:rPr>
+              <a:t>EN 10149-2 S420MC hot rolled automotive steel</a:t>
+            </a:r>
+            <a:r>
+              <a:rPr sz="1300" b="0" i="0">
+                <a:solidFill>
+                  <a:srgbClr val="222222"/>
+                </a:solidFill>
+                <a:latin typeface="Calibri"/>
+              </a:rPr>
+              <a:t>. https://www.gneesteel.com/products/automotive-steel/en-10149-2-s420mc-hot-rolled-automotive-steel.html</a:t>
+            </a:r>
+          </a:p>
+          <a:p>
+            <a:pPr>
+              <a:spcAft>
+                <a:spcPts val="600"/>
+              </a:spcAft>
+            </a:pPr>
+            <a:r>
+              <a:rPr sz="1300" b="0">
+                <a:solidFill>
+                  <a:srgbClr val="222222"/>
+                </a:solidFill>
+                <a:latin typeface="Calibri"/>
+              </a:rPr>
+              <a:t>Hengli Automation. (n.d.). </a:t>
+            </a:r>
+            <a:r>
+              <a:rPr sz="1300" b="0" i="1">
+                <a:solidFill>
+                  <a:srgbClr val="222222"/>
+                </a:solidFill>
+                <a:latin typeface="Calibri"/>
+              </a:rPr>
+              <a:t>What is the material of the nut for a T lead screw?</a:t>
+            </a:r>
+            <a:r>
+              <a:rPr sz="1300" b="0" i="0">
+                <a:solidFill>
+                  <a:srgbClr val="222222"/>
+                </a:solidFill>
+                <a:latin typeface="Calibri"/>
+              </a:rPr>
+              <a:t> https://www.hlt-cnc.com/blog/what-is-the-material-of-the-nut-for-a-t-lead-screw-1318622.html</a:t>
+            </a:r>
+          </a:p>
+          <a:p>
+            <a:pPr>
+              <a:spcAft>
+                <a:spcPts val="600"/>
+              </a:spcAft>
+            </a:pPr>
+            <a:r>
+              <a:rPr sz="1300" b="0">
+                <a:solidFill>
+                  <a:srgbClr val="222222"/>
+                </a:solidFill>
+                <a:latin typeface="Calibri"/>
+              </a:rPr>
+              <a:t>Hi-Lift Jack Company. (n.d.-a). </a:t>
+            </a:r>
+            <a:r>
+              <a:rPr sz="1300" b="0" i="1">
+                <a:solidFill>
+                  <a:srgbClr val="222222"/>
+                </a:solidFill>
+                <a:latin typeface="Calibri"/>
+              </a:rPr>
+              <a:t>Our history</a:t>
+            </a:r>
+            <a:r>
+              <a:rPr sz="1300" b="0" i="0">
+                <a:solidFill>
+                  <a:srgbClr val="222222"/>
+                </a:solidFill>
+                <a:latin typeface="Calibri"/>
+              </a:rPr>
+              <a:t>. https://hi-lift.com/company/our-history/</a:t>
+            </a:r>
+          </a:p>
+          <a:p>
+            <a:pPr>
+              <a:spcAft>
+                <a:spcPts val="600"/>
+              </a:spcAft>
+            </a:pPr>
+            <a:r>
+              <a:rPr sz="1300" b="0">
+                <a:solidFill>
+                  <a:srgbClr val="222222"/>
+                </a:solidFill>
+                <a:latin typeface="Calibri"/>
+              </a:rPr>
+              <a:t>Hi-Lift Jack Company. (n.d.-b). </a:t>
+            </a:r>
+            <a:r>
+              <a:rPr sz="1300" b="0" i="1">
+                <a:solidFill>
+                  <a:srgbClr val="222222"/>
+                </a:solidFill>
+                <a:latin typeface="Calibri"/>
+              </a:rPr>
+              <a:t>Hi-Lift jack instructions</a:t>
+            </a:r>
+            <a:r>
+              <a:rPr sz="1300" b="0" i="0">
+                <a:solidFill>
+                  <a:srgbClr val="222222"/>
+                </a:solidFill>
+                <a:latin typeface="Calibri"/>
+              </a:rPr>
+              <a:t> [PDF]. https://hi-lift.com/wp-content/uploads/2016/07/jack_instructions.pdf</a:t>
+            </a:r>
+          </a:p>
+          <a:p>
+            <a:pPr>
+              <a:spcAft>
+                <a:spcPts val="600"/>
+              </a:spcAft>
+            </a:pPr>
+            <a:r>
+              <a:rPr sz="1300" b="0">
+                <a:solidFill>
+                  <a:srgbClr val="222222"/>
+                </a:solidFill>
+                <a:latin typeface="Calibri"/>
+              </a:rPr>
+              <a:t>Joyce/Dayton. (n.d.). </a:t>
+            </a:r>
+            <a:r>
+              <a:rPr sz="1300" b="0" i="1">
+                <a:solidFill>
+                  <a:srgbClr val="222222"/>
+                </a:solidFill>
+                <a:latin typeface="Calibri"/>
+              </a:rPr>
+              <a:t>Machine screw jacks vs. ball screw jacks</a:t>
+            </a:r>
+            <a:r>
+              <a:rPr sz="1300" b="0" i="0">
+                <a:solidFill>
+                  <a:srgbClr val="222222"/>
+                </a:solidFill>
+                <a:latin typeface="Calibri"/>
+              </a:rPr>
+              <a:t>. https://www.joycedayton.com/blog/machine-screw-jacks-vs-ball-screw-jacks</a:t>
+            </a:r>
+          </a:p>
+          <a:p>
+            <a:pPr>
+              <a:spcAft>
+                <a:spcPts val="600"/>
+              </a:spcAft>
+            </a:pPr>
+            <a:r>
+              <a:rPr sz="1300" b="0">
+                <a:solidFill>
+                  <a:srgbClr val="222222"/>
+                </a:solidFill>
+                <a:latin typeface="Calibri"/>
+              </a:rPr>
+              <a:t>Juds, D. H. (1967). </a:t>
+            </a:r>
+            <a:r>
+              <a:rPr sz="1300" b="0" i="1">
+                <a:solidFill>
+                  <a:srgbClr val="222222"/>
+                </a:solidFill>
+                <a:latin typeface="Calibri"/>
+              </a:rPr>
+              <a:t>Combination hydraulic and pneumatic jacks</a:t>
+            </a:r>
+            <a:r>
+              <a:rPr sz="1300" b="0" i="0">
+                <a:solidFill>
+                  <a:srgbClr val="222222"/>
+                </a:solidFill>
+                <a:latin typeface="Calibri"/>
+              </a:rPr>
+              <a:t> (U.S. Patent No. 3,329,403). https://patents.google.com/patent/US3329403</a:t>
+            </a:r>
+          </a:p>
+          <a:p>
+            <a:pPr>
+              <a:spcAft>
+                <a:spcPts val="600"/>
+              </a:spcAft>
+            </a:pPr>
+            <a:r>
+              <a:rPr sz="1300" b="0">
+                <a:solidFill>
+                  <a:srgbClr val="222222"/>
+                </a:solidFill>
+                <a:latin typeface="Calibri"/>
+              </a:rPr>
+              <a:t>Junkyard Mob. (n.d.). </a:t>
+            </a:r>
+            <a:r>
+              <a:rPr sz="1300" b="0" i="1">
+                <a:solidFill>
+                  <a:srgbClr val="222222"/>
+                </a:solidFill>
+                <a:latin typeface="Calibri"/>
+              </a:rPr>
+              <a:t>Car jack history and how to identify antique models</a:t>
+            </a:r>
+            <a:r>
+              <a:rPr sz="1300" b="0" i="0">
+                <a:solidFill>
+                  <a:srgbClr val="222222"/>
+                </a:solidFill>
+                <a:latin typeface="Calibri"/>
+              </a:rPr>
+              <a:t>. https://www.junkyardmob.com/misc/antique-car-jack-identification/</a:t>
+            </a:r>
+          </a:p>
+        </p:txBody>
+      </p:sp>
+    </p:spTree>
+  </p:cSld>
+  <p:clrMapOvr>
+    <a:masterClrMapping/>
+  </p:clrMapOvr>
+</p:sld>
+</file>
+
+<file path=ppt/slides/slide12.xml><?xml version="1.0" encoding="utf-8"?>
+<p:sld xmlns:a="http://schemas.openxmlformats.org/drawingml/2006/main" xmlns:p="http://schemas.openxmlformats.org/presentationml/2006/main" xmlns:r="http://schemas.openxmlformats.org/officeDocument/2006/relationships">
+  <p:cSld>
+    <p:spTree>
+      <p:nvGrpSpPr>
+        <p:cNvPr id="1" name=""/>
+        <p:cNvGrpSpPr/>
+        <p:nvPr/>
+      </p:nvGrpSpPr>
+      <p:grpSpPr/>
+      <p:sp>
+        <p:nvSpPr>
+          <p:cNvPr id="2" name="TextBox 1"/>
+          <p:cNvSpPr txBox="1"/>
+          <p:nvPr/>
+        </p:nvSpPr>
+        <p:spPr>
+          <a:xfrm>
+            <a:off x="548640" y="320040"/>
+            <a:ext cx="11064240" cy="822960"/>
+          </a:xfrm>
+          <a:prstGeom prst="rect">
+            <a:avLst/>
+          </a:prstGeom>
+          <a:noFill/>
+        </p:spPr>
+        <p:txBody>
+          <a:bodyPr wrap="square" anchor="b" lIns="45720" rIns="45720">
+            <a:spAutoFit/>
+          </a:bodyPr>
+          <a:lstStyle/>
+          <a:p>
+            <a:pPr algn="l">
+              <a:spcAft>
+                <a:spcPts val="600"/>
+              </a:spcAft>
+            </a:pPr>
+            <a:r>
+              <a:rPr sz="3200" b="1">
+                <a:solidFill>
+                  <a:srgbClr val="1F4E79"/>
+                </a:solidFill>
+                <a:latin typeface="Calibri"/>
+              </a:rPr>
+              <a:t>Šaltiniai (2/2)</a:t>
+            </a:r>
+          </a:p>
+        </p:txBody>
+      </p:sp>
+      <p:sp>
+        <p:nvSpPr>
+          <p:cNvPr id="3" name="Rectangle 2"/>
+          <p:cNvSpPr/>
+          <p:nvPr/>
+        </p:nvSpPr>
+        <p:spPr>
+          <a:xfrm>
+            <a:off x="594360" y="1207008"/>
+            <a:ext cx="10972800" cy="27432"/>
+          </a:xfrm>
+          <a:prstGeom prst="rect">
+            <a:avLst/>
+          </a:prstGeom>
+          <a:solidFill>
+            <a:srgbClr val="1F4E79"/>
+          </a:solidFill>
+          <a:ln>
+            <a:noFill/>
+          </a:ln>
+          <a:effectLst/>
+        </p:spPr>
+        <p:style>
+          <a:lnRef idx="1">
+            <a:schemeClr val="accent1"/>
+          </a:lnRef>
+          <a:fillRef idx="3">
+            <a:schemeClr val="accent1"/>
+          </a:fillRef>
+          <a:effectRef idx="2">
+            <a:schemeClr val="accent1"/>
+          </a:effectRef>
+          <a:fontRef idx="minor">
+            <a:schemeClr val="lt1"/>
+          </a:fontRef>
+        </p:style>
+        <p:txBody>
+          <a:bodyPr rtlCol="0" anchor="ctr"/>
+          <a:lstStyle/>
+          <a:p>
+            <a:pPr algn="ctr"/>
+          </a:p>
+        </p:txBody>
+      </p:sp>
+      <p:sp>
+        <p:nvSpPr>
+          <p:cNvPr id="4" name="TextBox 3"/>
+          <p:cNvSpPr txBox="1"/>
+          <p:nvPr/>
+        </p:nvSpPr>
+        <p:spPr>
+          <a:xfrm>
+            <a:off x="10698480" y="6355080"/>
+            <a:ext cx="1005840" cy="365760"/>
+          </a:xfrm>
+          <a:prstGeom prst="rect">
+            <a:avLst/>
+          </a:prstGeom>
+          <a:noFill/>
+        </p:spPr>
+        <p:txBody>
+          <a:bodyPr wrap="square" anchor="t" lIns="45720" rIns="45720">
+            <a:spAutoFit/>
+          </a:bodyPr>
+          <a:lstStyle/>
+          <a:p>
+            <a:pPr algn="r">
+              <a:spcAft>
+                <a:spcPts val="600"/>
+              </a:spcAft>
+            </a:pPr>
+            <a:r>
+              <a:rPr sz="1200" b="0">
+                <a:solidFill>
+                  <a:srgbClr val="595959"/>
+                </a:solidFill>
+                <a:latin typeface="Calibri"/>
+              </a:rPr>
+              <a:t>12 / 12</a:t>
+            </a:r>
+          </a:p>
+        </p:txBody>
+      </p:sp>
+      <p:sp>
+        <p:nvSpPr>
+          <p:cNvPr id="5" name="TextBox 4"/>
+          <p:cNvSpPr txBox="1"/>
+          <p:nvPr/>
+        </p:nvSpPr>
+        <p:spPr>
+          <a:xfrm>
+            <a:off x="548640" y="6355080"/>
+            <a:ext cx="7315200" cy="365760"/>
+          </a:xfrm>
+          <a:prstGeom prst="rect">
+            <a:avLst/>
+          </a:prstGeom>
+          <a:noFill/>
+        </p:spPr>
+        <p:txBody>
+          <a:bodyPr wrap="square" anchor="t" lIns="45720" rIns="45720">
+            <a:spAutoFit/>
+          </a:bodyPr>
+          <a:lstStyle/>
+          <a:p>
+            <a:pPr algn="l">
+              <a:spcAft>
+                <a:spcPts val="600"/>
+              </a:spcAft>
+            </a:pPr>
+            <a:r>
+              <a:rPr sz="1200" b="0">
+                <a:solidFill>
+                  <a:srgbClr val="595959"/>
+                </a:solidFill>
+                <a:latin typeface="Calibri"/>
+              </a:rPr>
+              <a:t>PBL · Automobilinis domkratas</a:t>
+            </a:r>
+          </a:p>
+        </p:txBody>
+      </p:sp>
+      <p:sp>
+        <p:nvSpPr>
+          <p:cNvPr id="6" name="TextBox 5"/>
+          <p:cNvSpPr txBox="1"/>
+          <p:nvPr/>
+        </p:nvSpPr>
+        <p:spPr>
+          <a:xfrm>
+            <a:off x="640080" y="1463040"/>
+            <a:ext cx="10881360" cy="4754880"/>
+          </a:xfrm>
+          <a:prstGeom prst="rect">
+            <a:avLst/>
+          </a:prstGeom>
+          <a:noFill/>
+        </p:spPr>
+        <p:txBody>
+          <a:bodyPr wrap="square" anchor="t" lIns="45720" rIns="45720">
+            <a:spAutoFit/>
+          </a:bodyPr>
+          <a:lstStyle/>
+          <a:p>
+            <a:pPr algn="l">
+              <a:spcAft>
+                <a:spcPts val="600"/>
+              </a:spcAft>
+            </a:pPr>
+            <a:r>
+              <a:rPr sz="1300" b="0">
+                <a:solidFill>
+                  <a:srgbClr val="222222"/>
+                </a:solidFill>
+                <a:latin typeface="Calibri"/>
+              </a:rPr>
+              <a:t>LaFrance, J. (1920). </a:t>
+            </a:r>
+            <a:r>
+              <a:rPr sz="1300" b="0" i="1">
+                <a:solidFill>
+                  <a:srgbClr val="222222"/>
+                </a:solidFill>
+                <a:latin typeface="Calibri"/>
+              </a:rPr>
+              <a:t>Jack</a:t>
+            </a:r>
+            <a:r>
+              <a:rPr sz="1300" b="0" i="0">
+                <a:solidFill>
+                  <a:srgbClr val="222222"/>
+                </a:solidFill>
+                <a:latin typeface="Calibri"/>
+              </a:rPr>
+              <a:t> (U.S. Patent No. 1,362,630). https://patents.google.com/patent/US1362630A/en</a:t>
+            </a:r>
+          </a:p>
+          <a:p>
+            <a:pPr>
+              <a:spcAft>
+                <a:spcPts val="600"/>
+              </a:spcAft>
+            </a:pPr>
+            <a:r>
+              <a:rPr sz="1300" b="0">
+                <a:solidFill>
+                  <a:srgbClr val="222222"/>
+                </a:solidFill>
+                <a:latin typeface="Calibri"/>
+              </a:rPr>
+              <a:t>LibreTexts. (n.d.). </a:t>
+            </a:r>
+            <a:r>
+              <a:rPr sz="1300" b="0" i="1">
+                <a:solidFill>
+                  <a:srgbClr val="222222"/>
+                </a:solidFill>
+                <a:latin typeface="Calibri"/>
+              </a:rPr>
+              <a:t>10.2: Force multiplication</a:t>
+            </a:r>
+            <a:r>
+              <a:rPr sz="1300" b="0" i="0">
+                <a:solidFill>
+                  <a:srgbClr val="222222"/>
+                </a:solidFill>
+                <a:latin typeface="Calibri"/>
+              </a:rPr>
+              <a:t>. https://eng.libretexts.org/Courses/Northeast_Wisconsin_Technical_College/Fluids_1:_Fluid_Power_and_Pneumatics_(NWTC)/10:_Pascal's_Law/10.02:_Force_Multiplication</a:t>
+            </a:r>
+          </a:p>
+          <a:p>
+            <a:pPr>
+              <a:spcAft>
+                <a:spcPts val="600"/>
+              </a:spcAft>
+            </a:pPr>
+            <a:r>
+              <a:rPr sz="1300" b="0">
+                <a:solidFill>
+                  <a:srgbClr val="222222"/>
+                </a:solidFill>
+                <a:latin typeface="Calibri"/>
+              </a:rPr>
+              <a:t>Mickael, E. (2004). </a:t>
+            </a:r>
+            <a:r>
+              <a:rPr sz="1300" b="0" i="1">
+                <a:solidFill>
+                  <a:srgbClr val="222222"/>
+                </a:solidFill>
+                <a:latin typeface="Calibri"/>
+              </a:rPr>
+              <a:t>Motor driven scissor jack with limit switches</a:t>
+            </a:r>
+            <a:r>
+              <a:rPr sz="1300" b="0" i="0">
+                <a:solidFill>
+                  <a:srgbClr val="222222"/>
+                </a:solidFill>
+                <a:latin typeface="Calibri"/>
+              </a:rPr>
+              <a:t> (U.S. Patent No. 6,695,289). https://patents.google.com/patent/US6695289B1/en</a:t>
+            </a:r>
+          </a:p>
+          <a:p>
+            <a:pPr>
+              <a:spcAft>
+                <a:spcPts val="600"/>
+              </a:spcAft>
+            </a:pPr>
+            <a:r>
+              <a:rPr sz="1300" b="0">
+                <a:solidFill>
+                  <a:srgbClr val="222222"/>
+                </a:solidFill>
+                <a:latin typeface="Calibri"/>
+              </a:rPr>
+              <a:t>Pro-Lift-Montagetechnik. (n.d.). </a:t>
+            </a:r>
+            <a:r>
+              <a:rPr sz="1300" b="0" i="1">
+                <a:solidFill>
+                  <a:srgbClr val="222222"/>
+                </a:solidFill>
+                <a:latin typeface="Calibri"/>
+              </a:rPr>
+              <a:t>12V electric scissor jack, car jack, 123 mm – 345 mm</a:t>
+            </a:r>
+            <a:r>
+              <a:rPr sz="1300" b="0" i="0">
+                <a:solidFill>
+                  <a:srgbClr val="222222"/>
+                </a:solidFill>
+                <a:latin typeface="Calibri"/>
+              </a:rPr>
+              <a:t>. https://www.pro-lift-montagetechnik.com/12-volt-electric-scissor-jack-car-jack-123mm-345mm-002</a:t>
+            </a:r>
+          </a:p>
+          <a:p>
+            <a:pPr>
+              <a:spcAft>
+                <a:spcPts val="600"/>
+              </a:spcAft>
+            </a:pPr>
+            <a:r>
+              <a:rPr sz="1300" b="0">
+                <a:solidFill>
+                  <a:srgbClr val="222222"/>
+                </a:solidFill>
+                <a:latin typeface="Calibri"/>
+              </a:rPr>
               <a:t>Redline Stands. (n.d.). </a:t>
             </a:r>
             <a:r>
-              <a:rPr sz="1400" b="0" i="1">
+              <a:rPr sz="1300" b="0" i="1">
                 <a:solidFill>
                   <a:srgbClr val="222222"/>
                 </a:solidFill>
@@ -4425,7 +5732,7 @@
               <a:t>Bottle jack vs. floor jack: Differences, pros, and cons</a:t>
             </a:r>
             <a:r>
-              <a:rPr sz="1400" b="0" i="0">
+              <a:rPr sz="1300" b="0" i="0">
                 <a:solidFill>
                   <a:srgbClr val="222222"/>
                 </a:solidFill>
@@ -4437,113 +5744,113 @@
           <a:p>
             <a:pPr>
               <a:spcAft>
-                <a:spcPts val="700"/>
-              </a:spcAft>
-            </a:pPr>
-            <a:r>
-              <a:rPr sz="1400" b="0">
+                <a:spcPts val="600"/>
+              </a:spcAft>
+            </a:pPr>
+            <a:r>
+              <a:rPr sz="1300" b="0">
                 <a:solidFill>
                   <a:srgbClr val="222222"/>
                 </a:solidFill>
                 <a:latin typeface="Calibri"/>
               </a:rPr>
-              <a:t>Rorres, C. (n.d.). </a:t>
-            </a:r>
-            <a:r>
-              <a:rPr sz="1400" b="0" i="1">
+              <a:t>Roton Products. (n.d.). </a:t>
+            </a:r>
+            <a:r>
+              <a:rPr sz="1300" b="0" i="1">
                 <a:solidFill>
                   <a:srgbClr val="222222"/>
                 </a:solidFill>
                 <a:latin typeface="Calibri"/>
               </a:rPr>
-              <a:t>Quotations about Archimedes' lever</a:t>
-            </a:r>
-            <a:r>
-              <a:rPr sz="1400" b="0" i="0">
+              <a:t>Trapezoidal lead screws: General information</a:t>
+            </a:r>
+            <a:r>
+              <a:rPr sz="1300" b="0" i="0">
                 <a:solidFill>
                   <a:srgbClr val="222222"/>
                 </a:solidFill>
                 <a:latin typeface="Calibri"/>
               </a:rPr>
-              <a:t>. New York University. https://math.nyu.edu/Archimedes/Lever/LeverQuotes.html</a:t>
+              <a:t>. https://www.roton.com/products/trapezoidal-lead-screws-nuts/general-information/</a:t>
             </a:r>
           </a:p>
           <a:p>
             <a:pPr>
               <a:spcAft>
-                <a:spcPts val="700"/>
-              </a:spcAft>
-            </a:pPr>
-            <a:r>
-              <a:rPr sz="1400" b="0">
+                <a:spcPts val="600"/>
+              </a:spcAft>
+            </a:pPr>
+            <a:r>
+              <a:rPr sz="1300" b="0">
                 <a:solidFill>
                   <a:srgbClr val="222222"/>
                 </a:solidFill>
                 <a:latin typeface="Calibri"/>
               </a:rPr>
-              <a:t>Roton Products. (n.d.). </a:t>
-            </a:r>
-            <a:r>
-              <a:rPr sz="1400" b="0" i="1">
+              <a:t>Sider Ticino. (n.d.). </a:t>
+            </a:r>
+            <a:r>
+              <a:rPr sz="1300" b="0" i="1">
                 <a:solidFill>
                   <a:srgbClr val="222222"/>
                 </a:solidFill>
                 <a:latin typeface="Calibri"/>
               </a:rPr>
-              <a:t>Trapezoidal lead screws: General information</a:t>
-            </a:r>
-            <a:r>
-              <a:rPr sz="1400" b="0" i="0">
+              <a:t>42CrMo4 technical specifications</a:t>
+            </a:r>
+            <a:r>
+              <a:rPr sz="1300" b="0" i="0">
                 <a:solidFill>
                   <a:srgbClr val="222222"/>
                 </a:solidFill>
                 <a:latin typeface="Calibri"/>
               </a:rPr>
-              <a:t>. https://www.roton.com/products/trapezoidal-lead-screws-nuts/general-information/</a:t>
+              <a:t>. https://siderticino.it/en/steel-datasheets/42crmo4/</a:t>
             </a:r>
           </a:p>
           <a:p>
             <a:pPr>
               <a:spcAft>
-                <a:spcPts val="700"/>
-              </a:spcAft>
-            </a:pPr>
-            <a:r>
-              <a:rPr sz="1400" b="0">
+                <a:spcPts val="600"/>
+              </a:spcAft>
+            </a:pPr>
+            <a:r>
+              <a:rPr sz="1300" b="0">
                 <a:solidFill>
                   <a:srgbClr val="222222"/>
                 </a:solidFill>
                 <a:latin typeface="Calibri"/>
               </a:rPr>
-              <a:t>Sider Ticino. (n.d.). </a:t>
-            </a:r>
-            <a:r>
-              <a:rPr sz="1400" b="0" i="1">
+              <a:t>Stevenson, H. M. (1898). </a:t>
+            </a:r>
+            <a:r>
+              <a:rPr sz="1300" b="0" i="1">
                 <a:solidFill>
                   <a:srgbClr val="222222"/>
                 </a:solidFill>
                 <a:latin typeface="Calibri"/>
               </a:rPr>
-              <a:t>42CrMo4 technical specifications</a:t>
-            </a:r>
-            <a:r>
-              <a:rPr sz="1400" b="0" i="0">
+              <a:t>Lifting-jack</a:t>
+            </a:r>
+            <a:r>
+              <a:rPr sz="1300" b="0" i="0">
                 <a:solidFill>
                   <a:srgbClr val="222222"/>
                 </a:solidFill>
                 <a:latin typeface="Calibri"/>
               </a:rPr>
-              <a:t>. https://siderticino.it/en/steel-datasheets/42crmo4/</a:t>
+              <a:t> (U.S. Patent No. 601,451). https://patents.google.com/patent/US601451A/en</a:t>
             </a:r>
           </a:p>
           <a:p>
             <a:pPr>
               <a:spcAft>
-                <a:spcPts val="700"/>
-              </a:spcAft>
-            </a:pPr>
-            <a:r>
-              <a:rPr sz="1400" b="0">
+                <a:spcPts val="600"/>
+              </a:spcAft>
+            </a:pPr>
+            <a:r>
+              <a:rPr sz="1300" b="0">
                 <a:solidFill>
                   <a:srgbClr val="222222"/>
                 </a:solidFill>
@@ -4552,7 +5859,7 @@
               <a:t>The World Material. (n.d.). </a:t>
             </a:r>
             <a:r>
-              <a:rPr sz="1400" b="0" i="1">
+              <a:rPr sz="1300" b="0" i="1">
                 <a:solidFill>
                   <a:srgbClr val="222222"/>
                 </a:solidFill>
@@ -4561,7 +5868,7 @@
               <a:t>EN 10025-2 S235 steel properties</a:t>
             </a:r>
             <a:r>
-              <a:rPr sz="1400" b="0" i="0">
+              <a:rPr sz="1300" b="0" i="0">
                 <a:solidFill>
                   <a:srgbClr val="222222"/>
                 </a:solidFill>
@@ -4573,45 +5880,113 @@
           <a:p>
             <a:pPr>
               <a:spcAft>
-                <a:spcPts val="700"/>
-              </a:spcAft>
-            </a:pPr>
-            <a:r>
-              <a:rPr sz="1400" b="0">
+                <a:spcPts val="600"/>
+              </a:spcAft>
+            </a:pPr>
+            <a:r>
+              <a:rPr sz="1300" b="0">
                 <a:solidFill>
                   <a:srgbClr val="222222"/>
                 </a:solidFill>
                 <a:latin typeface="Calibri"/>
               </a:rPr>
+              <a:t>TMG Industrial. (n.d.). </a:t>
+            </a:r>
+            <a:r>
+              <a:rPr sz="1300" b="0" i="1">
+                <a:solidFill>
+                  <a:srgbClr val="222222"/>
+                </a:solidFill>
+                <a:latin typeface="Calibri"/>
+              </a:rPr>
+              <a:t>Air hydraulic bottle jacks: How they work and safety tips for use</a:t>
+            </a:r>
+            <a:r>
+              <a:rPr sz="1300" b="0" i="0">
+                <a:solidFill>
+                  <a:srgbClr val="222222"/>
+                </a:solidFill>
+                <a:latin typeface="Calibri"/>
+              </a:rPr>
+              <a:t>. https://tmgindustrial.ca/blogs/news/air-hydraulic-bottle-jacks-how-they-work-and-safety-tips-for-use</a:t>
+            </a:r>
+          </a:p>
+          <a:p>
+            <a:pPr>
+              <a:spcAft>
+                <a:spcPts val="600"/>
+              </a:spcAft>
+            </a:pPr>
+            <a:r>
+              <a:rPr sz="1300" b="0">
+                <a:solidFill>
+                  <a:srgbClr val="222222"/>
+                </a:solidFill>
+                <a:latin typeface="Calibri"/>
+              </a:rPr>
+              <a:t>VEVOR. (n.d.). </a:t>
+            </a:r>
+            <a:r>
+              <a:rPr sz="1300" b="0" i="1">
+                <a:solidFill>
+                  <a:srgbClr val="222222"/>
+                </a:solidFill>
+                <a:latin typeface="Calibri"/>
+              </a:rPr>
+              <a:t>Things to know before buying a pneumatic bottle jack</a:t>
+            </a:r>
+            <a:r>
+              <a:rPr sz="1300" b="0" i="0">
+                <a:solidFill>
+                  <a:srgbClr val="222222"/>
+                </a:solidFill>
+                <a:latin typeface="Calibri"/>
+              </a:rPr>
+              <a:t>. https://www.vevor.com/diy-ideas/things-to-know-before-buying-a-pneumatic-bottle-jack/</a:t>
+            </a:r>
+          </a:p>
+          <a:p>
+            <a:pPr>
+              <a:spcAft>
+                <a:spcPts val="600"/>
+              </a:spcAft>
+            </a:pPr>
+            <a:r>
+              <a:rPr sz="1300" b="0">
+                <a:solidFill>
+                  <a:srgbClr val="222222"/>
+                </a:solidFill>
+                <a:latin typeface="Calibri"/>
+              </a:rPr>
               <a:t>Wikipedia. (n.d.-a). </a:t>
             </a:r>
             <a:r>
-              <a:rPr sz="1400" b="0" i="1">
+              <a:rPr sz="1300" b="0" i="1">
                 <a:solidFill>
                   <a:srgbClr val="222222"/>
                 </a:solidFill>
                 <a:latin typeface="Calibri"/>
               </a:rPr>
-              <a:t>Jack (device)</a:t>
-            </a:r>
-            <a:r>
-              <a:rPr sz="1400" b="0" i="0">
+              <a:t>Jackscrew</a:t>
+            </a:r>
+            <a:r>
+              <a:rPr sz="1300" b="0" i="0">
                 <a:solidFill>
                   <a:srgbClr val="222222"/>
                 </a:solidFill>
                 <a:latin typeface="Calibri"/>
               </a:rPr>
-              <a:t>. https://en.wikipedia.org/wiki/Jack_(device)</a:t>
+              <a:t>. https://en.wikipedia.org/wiki/Jackscrew</a:t>
             </a:r>
           </a:p>
           <a:p>
             <a:pPr>
               <a:spcAft>
-                <a:spcPts val="700"/>
-              </a:spcAft>
-            </a:pPr>
-            <a:r>
-              <a:rPr sz="1400" b="0">
+                <a:spcPts val="600"/>
+              </a:spcAft>
+            </a:pPr>
+            <a:r>
+              <a:rPr sz="1300" b="0">
                 <a:solidFill>
                   <a:srgbClr val="222222"/>
                 </a:solidFill>
@@ -4620,158 +5995,22 @@
               <a:t>Wikipedia. (n.d.-b). </a:t>
             </a:r>
             <a:r>
-              <a:rPr sz="1400" b="0" i="1">
+              <a:rPr sz="1300" b="0" i="1">
                 <a:solidFill>
                   <a:srgbClr val="222222"/>
                 </a:solidFill>
                 <a:latin typeface="Calibri"/>
               </a:rPr>
-              <a:t>Jackscrew</a:t>
-            </a:r>
-            <a:r>
-              <a:rPr sz="1400" b="0" i="0">
+              <a:t>Spare tire</a:t>
+            </a:r>
+            <a:r>
+              <a:rPr sz="1300" b="0" i="0">
                 <a:solidFill>
                   <a:srgbClr val="222222"/>
                 </a:solidFill>
                 <a:latin typeface="Calibri"/>
               </a:rPr>
-              <a:t>. https://en.wikipedia.org/wiki/Jackscrew</a:t>
-            </a:r>
-          </a:p>
-          <a:p>
-            <a:pPr>
-              <a:spcAft>
-                <a:spcPts val="700"/>
-              </a:spcAft>
-            </a:pPr>
-            <a:r>
-              <a:rPr sz="1400" b="0">
-                <a:solidFill>
-                  <a:srgbClr val="222222"/>
-                </a:solidFill>
-                <a:latin typeface="Calibri"/>
-              </a:rPr>
-              <a:t>Wikipedia. (n.d.-c). </a:t>
-            </a:r>
-            <a:r>
-              <a:rPr sz="1400" b="0" i="1">
-                <a:solidFill>
-                  <a:srgbClr val="222222"/>
-                </a:solidFill>
-                <a:latin typeface="Calibri"/>
-              </a:rPr>
-              <a:t>Joseph Bramah</a:t>
-            </a:r>
-            <a:r>
-              <a:rPr sz="1400" b="0" i="0">
-                <a:solidFill>
-                  <a:srgbClr val="222222"/>
-                </a:solidFill>
-                <a:latin typeface="Calibri"/>
-              </a:rPr>
-              <a:t>. https://en.wikipedia.org/wiki/Joseph_Bramah</a:t>
-            </a:r>
-          </a:p>
-          <a:p>
-            <a:pPr>
-              <a:spcAft>
-                <a:spcPts val="700"/>
-              </a:spcAft>
-            </a:pPr>
-            <a:r>
-              <a:rPr sz="1400" b="0">
-                <a:solidFill>
-                  <a:srgbClr val="222222"/>
-                </a:solidFill>
-                <a:latin typeface="Calibri"/>
-              </a:rPr>
-              <a:t>Wikipedia. (n.d.-d). </a:t>
-            </a:r>
-            <a:r>
-              <a:rPr sz="1400" b="0" i="1">
-                <a:solidFill>
-                  <a:srgbClr val="222222"/>
-                </a:solidFill>
-                <a:latin typeface="Calibri"/>
-              </a:rPr>
-              <a:t>Richard Dudgeon</a:t>
-            </a:r>
-            <a:r>
-              <a:rPr sz="1400" b="0" i="0">
-                <a:solidFill>
-                  <a:srgbClr val="222222"/>
-                </a:solidFill>
-                <a:latin typeface="Calibri"/>
-              </a:rPr>
-              <a:t>. https://en.wikipedia.org/wiki/Richard_Dudgeon</a:t>
-            </a:r>
-          </a:p>
-          <a:p>
-            <a:pPr>
-              <a:spcAft>
-                <a:spcPts val="700"/>
-              </a:spcAft>
-            </a:pPr>
-            <a:r>
-              <a:rPr sz="1400" b="0">
-                <a:solidFill>
-                  <a:srgbClr val="222222"/>
-                </a:solidFill>
-                <a:latin typeface="Calibri"/>
-              </a:rPr>
-              <a:t>Wikipedia. (n.d.-e). </a:t>
-            </a:r>
-            <a:r>
-              <a:rPr sz="1400" b="0" i="1">
-                <a:solidFill>
-                  <a:srgbClr val="222222"/>
-                </a:solidFill>
-                <a:latin typeface="Calibri"/>
-              </a:rPr>
-              <a:t>Simple machine</a:t>
-            </a:r>
-            <a:r>
-              <a:rPr sz="1400" b="0" i="0">
-                <a:solidFill>
-                  <a:srgbClr val="222222"/>
-                </a:solidFill>
-                <a:latin typeface="Calibri"/>
-              </a:rPr>
-              <a:t>. https://en.wikipedia.org/wiki/Simple_machine</a:t>
-            </a:r>
-          </a:p>
-          <a:p>
-            <a:pPr>
-              <a:spcAft>
-                <a:spcPts val="700"/>
-              </a:spcAft>
-            </a:pPr>
-            <a:r>
-              <a:rPr sz="1400" b="0">
-                <a:solidFill>
-                  <a:srgbClr val="222222"/>
-                </a:solidFill>
-                <a:latin typeface="Calibri"/>
-              </a:rPr>
-              <a:t>Wikipedia. (n.d.-f). </a:t>
-            </a:r>
-            <a:r>
-              <a:rPr sz="1400" b="0" i="1">
-                <a:solidFill>
-                  <a:srgbClr val="222222"/>
-                </a:solidFill>
-                <a:latin typeface="Calibri"/>
-              </a:rPr>
-              <a:t>Treadwheel crane</a:t>
-            </a:r>
-            <a:r>
-              <a:rPr sz="1400" b="0" i="0">
-                <a:solidFill>
-                  <a:srgbClr val="222222"/>
-                </a:solidFill>
-                <a:latin typeface="Calibri"/>
-              </a:rPr>
-              <a:t>. https://en.wikipedia.org/wiki/Treadwheel_crane</a:t>
+              <a:t>. https://en.wikipedia.org/wiki/Spare_tire</a:t>
             </a:r>
           </a:p>
         </p:txBody>
@@ -4828,7 +6067,7 @@
                 </a:solidFill>
                 <a:latin typeface="Calibri"/>
               </a:rPr>
-              <a:t>Kodėl pasirinkome domkratą?</a:t>
+              <a:t>Kodėl prireikė domkrato?</a:t>
             </a:r>
           </a:p>
         </p:txBody>
@@ -4911,7 +6150,7 @@
                 </a:solidFill>
                 <a:latin typeface="Calibri"/>
               </a:rPr>
-              <a:t>2 / 10</a:t>
+              <a:t>2 / 12</a:t>
             </a:r>
           </a:p>
         </p:txBody>
@@ -4950,7 +6189,7 @@
                 </a:solidFill>
                 <a:latin typeface="Calibri"/>
               </a:rPr>
-              <a:t>PBL · Domkratas</a:t>
+              <a:t>PBL · Automobilinis domkratas</a:t>
             </a:r>
           </a:p>
         </p:txBody>
@@ -4964,7 +6203,7 @@
         <p:spPr>
           <a:xfrm>
             <a:off x="640080" y="1554480"/>
-            <a:ext cx="10972800" cy="4206240"/>
+            <a:ext cx="6400800" cy="4206240"/>
           </a:xfrm>
           <a:prstGeom prst="rect">
             <a:avLst/>
@@ -4989,7 +6228,7 @@
                 </a:solidFill>
                 <a:latin typeface="Calibri"/>
               </a:rPr>
-              <a:t>• Kasdienis įrenginys</a:t>
+              <a:t>• Prieš automobilius</a:t>
             </a:r>
             <a:r>
               <a:rPr sz="2100" b="0" i="0">
@@ -4998,143 +6237,228 @@
                 </a:solidFill>
                 <a:latin typeface="Calibri"/>
               </a:rPr>
-              <a:t> – žirklinį domkratą gamintojai dažnai deda į naujus automobilius.</a:t>
-            </a:r>
-            <a:r>
-              <a:rPr sz="1700" b="0" i="0">
+              <a:t> – vežimams kelti naudoti paprasti svertiniai domkratai (dešinėje – 1882 m. vežimo domkratas).</a:t>
+            </a:r>
+          </a:p>
+          <a:p>
+            <a:pPr>
+              <a:spcAft>
+                <a:spcPts val="1600"/>
+              </a:spcAft>
+            </a:pPr>
+            <a:r>
+              <a:rPr sz="2100" b="1">
+                <a:solidFill>
+                  <a:srgbClr val="222222"/>
+                </a:solidFill>
+                <a:latin typeface="Calibri"/>
+              </a:rPr>
+              <a:t>• Pirmieji automobiliai</a:t>
+            </a:r>
+            <a:r>
+              <a:rPr sz="2100" b="0" i="0">
+                <a:solidFill>
+                  <a:srgbClr val="222222"/>
+                </a:solidFill>
+                <a:latin typeface="Calibri"/>
+              </a:rPr>
+              <a:t> – keliuose gulėjo daug pasagų vinių, todėl padangos prakiurdavo labai dažnai, kartais kelis kartus per vieną išvyką.</a:t>
+            </a:r>
+          </a:p>
+          <a:p>
+            <a:pPr>
+              <a:spcAft>
+                <a:spcPts val="1600"/>
+              </a:spcAft>
+            </a:pPr>
+            <a:r>
+              <a:rPr sz="2100" b="1">
+                <a:solidFill>
+                  <a:srgbClr val="222222"/>
+                </a:solidFill>
+                <a:latin typeface="Calibri"/>
+              </a:rPr>
+              <a:t>• Ką tekdavo daryti</a:t>
+            </a:r>
+            <a:r>
+              <a:rPr sz="2100" b="0" i="0">
+                <a:solidFill>
+                  <a:srgbClr val="222222"/>
+                </a:solidFill>
+                <a:latin typeface="Calibri"/>
+              </a:rPr>
+              <a:t> – pakelti automobilį, nuimti ratą, užklijuoti kamerą ir vėl viską surinkti.</a:t>
+            </a:r>
+          </a:p>
+          <a:p>
+            <a:pPr>
+              <a:spcAft>
+                <a:spcPts val="1600"/>
+              </a:spcAft>
+            </a:pPr>
+            <a:r>
+              <a:rPr sz="2100" b="1">
+                <a:solidFill>
+                  <a:srgbClr val="222222"/>
+                </a:solidFill>
+                <a:latin typeface="Calibri"/>
+              </a:rPr>
+              <a:t>• Išvada gamintojams</a:t>
+            </a:r>
+            <a:r>
+              <a:rPr sz="2100" b="0" i="0">
+                <a:solidFill>
+                  <a:srgbClr val="222222"/>
+                </a:solidFill>
+                <a:latin typeface="Calibri"/>
+              </a:rPr>
+              <a:t> – kiekviename automobilyje reikia nešiojamo, paprasto ir pakankamai stipraus domkrato.</a:t>
+            </a:r>
+          </a:p>
+        </p:txBody>
+      </p:sp>
+      <p:sp>
+        <p:nvSpPr>
+          <p:cNvPr id="7" name="Rectangle 6"/>
+          <p:cNvSpPr/>
+          <p:nvPr/>
+        </p:nvSpPr>
+        <p:spPr>
+          <a:xfrm>
+            <a:off x="7498079" y="1463040"/>
+            <a:ext cx="4023360" cy="4343400"/>
+          </a:xfrm>
+          <a:prstGeom prst="rect">
+            <a:avLst/>
+          </a:prstGeom>
+          <a:solidFill>
+            <a:srgbClr val="1F4E79"/>
+          </a:solidFill>
+          <a:ln>
+            <a:noFill/>
+          </a:ln>
+          <a:effectLst/>
+        </p:spPr>
+        <p:style>
+          <a:lnRef idx="1">
+            <a:schemeClr val="accent1"/>
+          </a:lnRef>
+          <a:fillRef idx="3">
+            <a:schemeClr val="accent1"/>
+          </a:fillRef>
+          <a:effectRef idx="2">
+            <a:schemeClr val="accent1"/>
+          </a:effectRef>
+          <a:fontRef idx="minor">
+            <a:schemeClr val="lt1"/>
+          </a:fontRef>
+        </p:style>
+        <p:txBody>
+          <a:bodyPr rtlCol="0" anchor="ctr"/>
+          <a:lstStyle/>
+          <a:p>
+            <a:pPr algn="ctr"/>
+          </a:p>
+        </p:txBody>
+      </p:sp>
+      <p:pic>
+        <p:nvPicPr>
+          <p:cNvPr id="8" name="Picture 7" descr="0-vezimo-bovey-1882.png"/>
+          <p:cNvPicPr>
+            <a:picLocks noChangeAspect="1"/>
+          </p:cNvPicPr>
+          <p:nvPr/>
+        </p:nvPicPr>
+        <p:blipFill>
+          <a:blip r:embed="rId3"/>
+          <a:stretch>
+            <a:fillRect/>
+          </a:stretch>
+        </p:blipFill>
+        <p:spPr>
+          <a:xfrm>
+            <a:off x="8304187" y="1554480"/>
+            <a:ext cx="2411145" cy="4160520"/>
+          </a:xfrm>
+          <a:prstGeom prst="rect">
+            <a:avLst/>
+          </a:prstGeom>
+        </p:spPr>
+      </p:pic>
+      <p:sp>
+        <p:nvSpPr>
+          <p:cNvPr id="9" name="TextBox 8"/>
+          <p:cNvSpPr txBox="1"/>
+          <p:nvPr/>
+        </p:nvSpPr>
+        <p:spPr>
+          <a:xfrm>
+            <a:off x="7498079" y="5833872"/>
+            <a:ext cx="4023360" cy="365760"/>
+          </a:xfrm>
+          <a:prstGeom prst="rect">
+            <a:avLst/>
+          </a:prstGeom>
+          <a:noFill/>
+        </p:spPr>
+        <p:txBody>
+          <a:bodyPr wrap="square" anchor="t" lIns="45720" rIns="45720">
+            <a:spAutoFit/>
+          </a:bodyPr>
+          <a:lstStyle/>
+          <a:p>
+            <a:pPr algn="l">
+              <a:spcAft>
+                <a:spcPts val="600"/>
+              </a:spcAft>
+            </a:pPr>
+            <a:r>
+              <a:rPr sz="1200" b="0">
                 <a:solidFill>
                   <a:srgbClr val="595959"/>
                 </a:solidFill>
                 <a:latin typeface="Calibri"/>
               </a:rPr>
-              <a:t> (CJ Pony Parts, n.d.)</a:t>
-            </a:r>
-          </a:p>
-          <a:p>
-            <a:pPr>
-              <a:spcAft>
-                <a:spcPts val="1600"/>
-              </a:spcAft>
-            </a:pPr>
-            <a:r>
-              <a:rPr sz="2100" b="1">
-                <a:solidFill>
-                  <a:srgbClr val="222222"/>
-                </a:solidFill>
-                <a:latin typeface="Calibri"/>
-              </a:rPr>
-              <a:t>• Platus taikymas</a:t>
-            </a:r>
-            <a:r>
-              <a:rPr sz="2100" b="0" i="0">
-                <a:solidFill>
-                  <a:srgbClr val="222222"/>
-                </a:solidFill>
-                <a:latin typeface="Calibri"/>
-              </a:rPr>
-              <a:t> – automobilių remontas, ūkiai, statyba, geležinkelis.</a:t>
-            </a:r>
-            <a:r>
-              <a:rPr sz="1700" b="0" i="0">
+              <a:t>Brėžinys: G. O. Bovey, JAV patentas Nr. 260,276 (1882)</a:t>
+            </a:r>
+          </a:p>
+        </p:txBody>
+      </p:sp>
+      <p:sp>
+        <p:nvSpPr>
+          <p:cNvPr id="10" name="TextBox 9"/>
+          <p:cNvSpPr txBox="1"/>
+          <p:nvPr/>
+        </p:nvSpPr>
+        <p:spPr>
+          <a:xfrm>
+            <a:off x="640080" y="5897880"/>
+            <a:ext cx="6400800" cy="457200"/>
+          </a:xfrm>
+          <a:prstGeom prst="rect">
+            <a:avLst/>
+          </a:prstGeom>
+          <a:noFill/>
+        </p:spPr>
+        <p:txBody>
+          <a:bodyPr wrap="square" anchor="t" lIns="45720" rIns="45720">
+            <a:spAutoFit/>
+          </a:bodyPr>
+          <a:lstStyle/>
+          <a:p>
+            <a:pPr algn="l">
+              <a:spcAft>
+                <a:spcPts val="600"/>
+              </a:spcAft>
+            </a:pPr>
+            <a:r>
+              <a:rPr sz="1300" b="0">
                 <a:solidFill>
                   <a:srgbClr val="595959"/>
                 </a:solidFill>
                 <a:latin typeface="Calibri"/>
               </a:rPr>
-              <a:t> (Hi-Lift Jack Company, n.d.-a; Wikipedia, n.d.-d)</a:t>
-            </a:r>
-          </a:p>
-          <a:p>
-            <a:pPr>
-              <a:spcAft>
-                <a:spcPts val="1600"/>
-              </a:spcAft>
-            </a:pPr>
-            <a:r>
-              <a:rPr sz="2100" b="1">
-                <a:solidFill>
-                  <a:srgbClr val="222222"/>
-                </a:solidFill>
-                <a:latin typeface="Calibri"/>
-              </a:rPr>
-              <a:t>• Daug mechanikos vienoje vietoje</a:t>
-            </a:r>
-            <a:r>
-              <a:rPr sz="2100" b="0" i="0">
-                <a:solidFill>
-                  <a:srgbClr val="222222"/>
-                </a:solidFill>
-                <a:latin typeface="Calibri"/>
-              </a:rPr>
-              <a:t> – sraigtinė, krumpliastiebinė ir hidraulinė pavaros, medžiagos, sauga.</a:t>
-            </a:r>
-          </a:p>
-          <a:p>
-            <a:pPr>
-              <a:spcAft>
-                <a:spcPts val="1600"/>
-              </a:spcAft>
-            </a:pPr>
-            <a:r>
-              <a:rPr sz="2100" b="1">
-                <a:solidFill>
-                  <a:srgbClr val="222222"/>
-                </a:solidFill>
-                <a:latin typeface="Calibri"/>
-              </a:rPr>
-              <a:t>• Mechaninis principas</a:t>
-            </a:r>
-            <a:r>
-              <a:rPr sz="2100" b="0" i="0">
-                <a:solidFill>
-                  <a:srgbClr val="222222"/>
-                </a:solidFill>
-                <a:latin typeface="Calibri"/>
-              </a:rPr>
-              <a:t> – svertas ir sraigtas: maža jėga ilgu keliu pakelia didelį krovinį.</a:t>
-            </a:r>
-            <a:r>
-              <a:rPr sz="1700" b="0" i="0">
-                <a:solidFill>
-                  <a:srgbClr val="595959"/>
-                </a:solidFill>
-                <a:latin typeface="Calibri"/>
-              </a:rPr>
-              <a:t> (Rorres, n.d.)</a:t>
-            </a:r>
-          </a:p>
-          <a:p>
-            <a:pPr>
-              <a:spcAft>
-                <a:spcPts val="1600"/>
-              </a:spcAft>
-            </a:pPr>
-            <a:r>
-              <a:rPr sz="2100" b="1">
-                <a:solidFill>
-                  <a:srgbClr val="222222"/>
-                </a:solidFill>
-                <a:latin typeface="Calibri"/>
-              </a:rPr>
-              <a:t>• Hidraulinis principas</a:t>
-            </a:r>
-            <a:r>
-              <a:rPr sz="2100" b="0" i="0">
-                <a:solidFill>
-                  <a:srgbClr val="222222"/>
-                </a:solidFill>
-                <a:latin typeface="Calibri"/>
-              </a:rPr>
-              <a:t> – Paskalio dėsnis: F₁ / A₁ = F₂ / A₂, todėl didesnis stūmoklis duoda didesnę jėgą.</a:t>
-            </a:r>
-            <a:r>
-              <a:rPr sz="1700" b="0" i="0">
-                <a:solidFill>
-                  <a:srgbClr val="595959"/>
-                </a:solidFill>
-                <a:latin typeface="Calibri"/>
-              </a:rPr>
-              <a:t> (LibreTexts, n.d.)</a:t>
+              <a:t>Šaltiniai: Bovey (1882); Wikipedia (n.d.-b); Junkyard Mob (n.d.).</a:t>
             </a:r>
           </a:p>
         </p:txBody>
@@ -5191,7 +6515,7 @@
                 </a:solidFill>
                 <a:latin typeface="Calibri"/>
               </a:rPr>
-              <a:t>Istorinė raida</a:t>
+              <a:t>Domkratų raida laiko juostoje</a:t>
             </a:r>
           </a:p>
         </p:txBody>
@@ -5274,7 +6598,7 @@
                 </a:solidFill>
                 <a:latin typeface="Calibri"/>
               </a:rPr>
-              <a:t>3 / 10</a:t>
+              <a:t>3 / 12</a:t>
             </a:r>
           </a:p>
         </p:txBody>
@@ -5313,7 +6637,7 @@
                 </a:solidFill>
                 <a:latin typeface="Calibri"/>
               </a:rPr>
-              <a:t>PBL · Domkratas</a:t>
+              <a:t>PBL · Automobilinis domkratas</a:t>
             </a:r>
           </a:p>
         </p:txBody>
@@ -5328,7 +6652,7 @@
         </p:nvGraphicFramePr>
         <p:xfrm>
           <a:off x="640080" y="1463040"/>
-          <a:ext cx="10881360" cy="4325112"/>
+          <a:ext cx="10881360" cy="4242816"/>
         </p:xfrm>
         <a:graphic>
           <a:graphicData uri="http://schemas.openxmlformats.org/drawingml/2006/table">
@@ -5337,10 +6661,12 @@
                 <a:tableStyleId>{5C22544A-7EE6-4342-B048-85BDC9FD1C3A}</a:tableStyleId>
               </a:tblPr>
               <a:tblGrid>
-                <a:gridCol w="2011680"/>
-                <a:gridCol w="8869680"/>
+                <a:gridCol w="1554480"/>
+                <a:gridCol w="2743200"/>
+                <a:gridCol w="3291840"/>
+                <a:gridCol w="3291840"/>
               </a:tblGrid>
-              <a:tr h="393192">
+              <a:tr h="530352">
                 <a:tc>
                   <a:txBody>
                     <a:bodyPr/>
@@ -5353,7 +6679,7 @@
                           </a:solidFill>
                           <a:latin typeface="Calibri"/>
                         </a:rPr>
-                        <a:t>Laikotarpis</a:t>
+                        <a:t>Laikas</a:t>
                       </a:r>
                     </a:p>
                   </a:txBody>
@@ -5375,7 +6701,51 @@
                           </a:solidFill>
                           <a:latin typeface="Calibri"/>
                         </a:rPr>
-                        <a:t>Sprendimas</a:t>
+                        <a:t>Tipas</a:t>
+                      </a:r>
+                    </a:p>
+                  </a:txBody>
+                  <a:tcPr marL="73152" marR="73152" anchor="ctr">
+                    <a:solidFill>
+                      <a:srgbClr val="1F4E79"/>
+                    </a:solidFill>
+                  </a:tcPr>
+                </a:tc>
+                <a:tc>
+                  <a:txBody>
+                    <a:bodyPr/>
+                    <a:lstStyle/>
+                    <a:p>
+                      <a:r>
+                        <a:rPr sz="1500" b="1" i="0">
+                          <a:solidFill>
+                            <a:srgbClr val="FFFFFF"/>
+                          </a:solidFill>
+                          <a:latin typeface="Calibri"/>
+                        </a:rPr>
+                        <a:t>Ką išsprendė</a:t>
+                      </a:r>
+                    </a:p>
+                  </a:txBody>
+                  <a:tcPr marL="73152" marR="73152" anchor="ctr">
+                    <a:solidFill>
+                      <a:srgbClr val="1F4E79"/>
+                    </a:solidFill>
+                  </a:tcPr>
+                </a:tc>
+                <a:tc>
+                  <a:txBody>
+                    <a:bodyPr/>
+                    <a:lstStyle/>
+                    <a:p>
+                      <a:r>
+                        <a:rPr sz="1500" b="1" i="0">
+                          <a:solidFill>
+                            <a:srgbClr val="FFFFFF"/>
+                          </a:solidFill>
+                          <a:latin typeface="Calibri"/>
+                        </a:rPr>
+                        <a:t>Kokia problema liko</a:t>
                       </a:r>
                     </a:p>
                   </a:txBody>
@@ -5386,7 +6756,7 @@
                   </a:tcPr>
                 </a:tc>
               </a:tr>
-              <a:tr h="393192">
+              <a:tr h="530352">
                 <a:tc>
                   <a:txBody>
                     <a:bodyPr/>
@@ -5399,40 +6769,16 @@
                           </a:solidFill>
                           <a:latin typeface="Calibri"/>
                         </a:rPr>
-                        <a:t>III a. pr. Kr.</a:t>
+                        <a:t>Iki 1851 m.</a:t>
                       </a:r>
                     </a:p>
                   </a:txBody>
                   <a:tcPr marL="73152" marR="73152" anchor="ctr">
                     <a:solidFill>
-                      <a:srgbClr val="FFFFFF"/>
+                      <a:srgbClr val="DEEAF6"/>
                     </a:solidFill>
                   </a:tcPr>
                 </a:tc>
-                <a:tc>
-                  <a:txBody>
-                    <a:bodyPr/>
-                    <a:lstStyle/>
-                    <a:p>
-                      <a:r>
-                        <a:rPr sz="1500" b="0" i="0">
-                          <a:solidFill>
-                            <a:srgbClr val="222222"/>
-                          </a:solidFill>
-                          <a:latin typeface="Calibri"/>
-                        </a:rPr>
-                        <a:t>Archimedas aiškina sverto principą („Duokite man atramos tašką…“)</a:t>
-                      </a:r>
-                    </a:p>
-                  </a:txBody>
-                  <a:tcPr marL="73152" marR="73152" anchor="ctr">
-                    <a:solidFill>
-                      <a:srgbClr val="FFFFFF"/>
-                    </a:solidFill>
-                  </a:tcPr>
-                </a:tc>
-              </a:tr>
-              <a:tr h="393192">
                 <a:tc>
                   <a:txBody>
                     <a:bodyPr/>
@@ -5445,40 +6791,16 @@
                           </a:solidFill>
                           <a:latin typeface="Calibri"/>
                         </a:rPr>
-                        <a:t>I a.</a:t>
+                        <a:t>1. Sraigtinis</a:t>
                       </a:r>
                     </a:p>
                   </a:txBody>
                   <a:tcPr marL="73152" marR="73152" anchor="ctr">
                     <a:solidFill>
-                      <a:srgbClr val="FFFFFF"/>
+                      <a:srgbClr val="DEEAF6"/>
                     </a:solidFill>
                   </a:tcPr>
                 </a:tc>
-                <a:tc>
-                  <a:txBody>
-                    <a:bodyPr/>
-                    <a:lstStyle/>
-                    <a:p>
-                      <a:r>
-                        <a:rPr sz="1500" b="0" i="0">
-                          <a:solidFill>
-                            <a:srgbClr val="222222"/>
-                          </a:solidFill>
-                          <a:latin typeface="Calibri"/>
-                        </a:rPr>
-                        <a:t>Graikai ir romėnai naudoja sraigtinius presus alyvuogėms ir vynuogėms spausti</a:t>
-                      </a:r>
-                    </a:p>
-                  </a:txBody>
-                  <a:tcPr marL="73152" marR="73152" anchor="ctr">
-                    <a:solidFill>
-                      <a:srgbClr val="FFFFFF"/>
-                    </a:solidFill>
-                  </a:tcPr>
-                </a:tc>
-              </a:tr>
-              <a:tr h="393192">
                 <a:tc>
                   <a:txBody>
                     <a:bodyPr/>
@@ -5491,40 +6813,16 @@
                           </a:solidFill>
                           <a:latin typeface="Calibri"/>
                         </a:rPr>
-                        <a:t>~10–75 m.</a:t>
+                        <a:t>Paprastas ir savistabdis</a:t>
                       </a:r>
                     </a:p>
                   </a:txBody>
                   <a:tcPr marL="73152" marR="73152" anchor="ctr">
                     <a:solidFill>
-                      <a:srgbClr val="FFFFFF"/>
+                      <a:srgbClr val="DEEAF6"/>
                     </a:solidFill>
                   </a:tcPr>
                 </a:tc>
-                <a:tc>
-                  <a:txBody>
-                    <a:bodyPr/>
-                    <a:lstStyle/>
-                    <a:p>
-                      <a:r>
-                        <a:rPr sz="1500" b="0" i="0">
-                          <a:solidFill>
-                            <a:srgbClr val="222222"/>
-                          </a:solidFill>
-                          <a:latin typeface="Calibri"/>
-                        </a:rPr>
-                        <a:t>Heronas Aleksandrietis „Mechanikoje“ aprašo kėlimo mechanizmus: svertą, suktuvą, skridinį, pleištą ir sraigtą</a:t>
-                      </a:r>
-                    </a:p>
-                  </a:txBody>
-                  <a:tcPr marL="73152" marR="73152" anchor="ctr">
-                    <a:solidFill>
-                      <a:srgbClr val="FFFFFF"/>
-                    </a:solidFill>
-                  </a:tcPr>
-                </a:tc>
-              </a:tr>
-              <a:tr h="393192">
                 <a:tc>
                   <a:txBody>
                     <a:bodyPr/>
@@ -5537,86 +6835,18 @@
                           </a:solidFill>
                           <a:latin typeface="Calibri"/>
                         </a:rPr>
-                        <a:t>I a. pab.</a:t>
+                        <a:t>Lėtas, reikia daug jėgos</a:t>
                       </a:r>
                     </a:p>
                   </a:txBody>
                   <a:tcPr marL="73152" marR="73152" anchor="ctr">
                     <a:solidFill>
-                      <a:srgbClr val="FFFFFF"/>
-                    </a:solidFill>
-                  </a:tcPr>
-                </a:tc>
-                <a:tc>
-                  <a:txBody>
-                    <a:bodyPr/>
-                    <a:lstStyle/>
-                    <a:p>
-                      <a:r>
-                        <a:rPr sz="1500" b="0" i="0">
-                          <a:solidFill>
-                            <a:srgbClr val="222222"/>
-                          </a:solidFill>
-                          <a:latin typeface="Calibri"/>
-                        </a:rPr>
-                        <a:t>Romėnų kranas su mindomu ratu („polyspastos“) kelia iki ~6000 kg</a:t>
-                      </a:r>
-                    </a:p>
-                  </a:txBody>
-                  <a:tcPr marL="73152" marR="73152" anchor="ctr">
-                    <a:solidFill>
-                      <a:srgbClr val="FFFFFF"/>
+                      <a:srgbClr val="DEEAF6"/>
                     </a:solidFill>
                   </a:tcPr>
                 </a:tc>
               </a:tr>
-              <a:tr h="393192">
-                <a:tc>
-                  <a:txBody>
-                    <a:bodyPr/>
-                    <a:lstStyle/>
-                    <a:p>
-                      <a:r>
-                        <a:rPr sz="1500" b="1" i="0">
-                          <a:solidFill>
-                            <a:srgbClr val="222222"/>
-                          </a:solidFill>
-                          <a:latin typeface="Calibri"/>
-                        </a:rPr>
-                        <a:t>1795 m.</a:t>
-                      </a:r>
-                    </a:p>
-                  </a:txBody>
-                  <a:tcPr marL="73152" marR="73152" anchor="ctr">
-                    <a:solidFill>
-                      <a:srgbClr val="FFFFFF"/>
-                    </a:solidFill>
-                  </a:tcPr>
-                </a:tc>
-                <a:tc>
-                  <a:txBody>
-                    <a:bodyPr/>
-                    <a:lstStyle/>
-                    <a:p>
-                      <a:r>
-                        <a:rPr sz="1500" b="0" i="0">
-                          <a:solidFill>
-                            <a:srgbClr val="222222"/>
-                          </a:solidFill>
-                          <a:latin typeface="Calibri"/>
-                        </a:rPr>
-                        <a:t>J. Bramah patentuoja hidraulinį presą, veikiantį pagal Paskalio dėsnį</a:t>
-                      </a:r>
-                    </a:p>
-                  </a:txBody>
-                  <a:tcPr marL="73152" marR="73152" anchor="ctr">
-                    <a:solidFill>
-                      <a:srgbClr val="FFFFFF"/>
-                    </a:solidFill>
-                  </a:tcPr>
-                </a:tc>
-              </a:tr>
-              <a:tr h="393192">
+              <a:tr h="530352">
                 <a:tc>
                   <a:txBody>
                     <a:bodyPr/>
@@ -5635,7 +6865,7 @@
                   </a:txBody>
                   <a:tcPr marL="73152" marR="73152" anchor="ctr">
                     <a:solidFill>
-                      <a:srgbClr val="FFFFFF"/>
+                      <a:srgbClr val="DEEAF6"/>
                     </a:solidFill>
                   </a:tcPr>
                 </a:tc>
@@ -5645,24 +6875,68 @@
                     <a:lstStyle/>
                     <a:p>
                       <a:r>
-                        <a:rPr sz="1500" b="0" i="0">
+                        <a:rPr sz="1500" b="1" i="0">
                           <a:solidFill>
                             <a:srgbClr val="222222"/>
                           </a:solidFill>
                           <a:latin typeface="Calibri"/>
                         </a:rPr>
-                        <a:t>R. Dudgeon patentuoja nešiojamą hidraulinį domkratą</a:t>
+                        <a:t>2. Hidraulinis (butelinis)</a:t>
                       </a:r>
                     </a:p>
                   </a:txBody>
                   <a:tcPr marL="73152" marR="73152" anchor="ctr">
                     <a:solidFill>
-                      <a:srgbClr val="FFFFFF"/>
+                      <a:srgbClr val="DEEAF6"/>
+                    </a:solidFill>
+                  </a:tcPr>
+                </a:tc>
+                <a:tc>
+                  <a:txBody>
+                    <a:bodyPr/>
+                    <a:lstStyle/>
+                    <a:p>
+                      <a:r>
+                        <a:rPr sz="1500" b="1" i="0">
+                          <a:solidFill>
+                            <a:srgbClr val="222222"/>
+                          </a:solidFill>
+                          <a:latin typeface="Calibri"/>
+                        </a:rPr>
+                        <a:t>Mažiau jėgos, kelia daugiau</a:t>
+                      </a:r>
+                    </a:p>
+                  </a:txBody>
+                  <a:tcPr marL="73152" marR="73152" anchor="ctr">
+                    <a:solidFill>
+                      <a:srgbClr val="DEEAF6"/>
+                    </a:solidFill>
+                  </a:tcPr>
+                </a:tc>
+                <a:tc>
+                  <a:txBody>
+                    <a:bodyPr/>
+                    <a:lstStyle/>
+                    <a:p>
+                      <a:r>
+                        <a:rPr sz="1500" b="1" i="0">
+                          <a:solidFill>
+                            <a:srgbClr val="222222"/>
+                          </a:solidFill>
+                          <a:latin typeface="Calibri"/>
+                        </a:rPr>
+                        <a:t>Per aukštas žemam automobiliui, varginantis pumpavimas</a:t>
+                      </a:r>
+                    </a:p>
+                  </a:txBody>
+                  <a:tcPr marL="73152" marR="73152" anchor="ctr">
+                    <a:solidFill>
+                      <a:srgbClr val="DEEAF6"/>
                     </a:solidFill>
                   </a:tcPr>
                 </a:tc>
               </a:tr>
-              <a:tr h="393192">
+              <a:tr h="530352">
                 <a:tc>
                   <a:txBody>
                     <a:bodyPr/>
@@ -5697,594 +6971,6 @@
                           </a:solidFill>
                           <a:latin typeface="Calibri"/>
                         </a:rPr>
-                        <a:t>P. J. Harrah patentuoja krumpliastiebinį „Hi-Lift“ domkratą</a:t>
-                      </a:r>
-                    </a:p>
-                  </a:txBody>
-                  <a:tcPr marL="73152" marR="73152" anchor="ctr">
-                    <a:solidFill>
-                      <a:srgbClr val="FFFFFF"/>
-                    </a:solidFill>
-                  </a:tcPr>
-                </a:tc>
-              </a:tr>
-              <a:tr h="393192">
-                <a:tc>
-                  <a:txBody>
-                    <a:bodyPr/>
-                    <a:lstStyle/>
-                    <a:p>
-                      <a:r>
-                        <a:rPr sz="1500" b="1" i="0">
-                          <a:solidFill>
-                            <a:srgbClr val="222222"/>
-                          </a:solidFill>
-                          <a:latin typeface="Calibri"/>
-                        </a:rPr>
-                        <a:t>1920 m.</a:t>
-                      </a:r>
-                    </a:p>
-                  </a:txBody>
-                  <a:tcPr marL="73152" marR="73152" anchor="ctr">
-                    <a:solidFill>
-                      <a:srgbClr val="FFFFFF"/>
-                    </a:solidFill>
-                  </a:tcPr>
-                </a:tc>
-                <a:tc>
-                  <a:txBody>
-                    <a:bodyPr/>
-                    <a:lstStyle/>
-                    <a:p>
-                      <a:r>
-                        <a:rPr sz="1500" b="0" i="0">
-                          <a:solidFill>
-                            <a:srgbClr val="222222"/>
-                          </a:solidFill>
-                          <a:latin typeface="Calibri"/>
-                        </a:rPr>
-                        <a:t>J. LaFrance pateikia rombo formos (žirklinio) domkrato patento paraišką</a:t>
-                      </a:r>
-                    </a:p>
-                  </a:txBody>
-                  <a:tcPr marL="73152" marR="73152" anchor="ctr">
-                    <a:solidFill>
-                      <a:srgbClr val="FFFFFF"/>
-                    </a:solidFill>
-                  </a:tcPr>
-                </a:tc>
-              </a:tr>
-              <a:tr h="393192">
-                <a:tc>
-                  <a:txBody>
-                    <a:bodyPr/>
-                    <a:lstStyle/>
-                    <a:p>
-                      <a:r>
-                        <a:rPr sz="1500" b="1" i="0">
-                          <a:solidFill>
-                            <a:srgbClr val="222222"/>
-                          </a:solidFill>
-                          <a:latin typeface="Calibri"/>
-                        </a:rPr>
-                        <a:t>1949 m.</a:t>
-                      </a:r>
-                    </a:p>
-                  </a:txBody>
-                  <a:tcPr marL="73152" marR="73152" anchor="ctr">
-                    <a:solidFill>
-                      <a:srgbClr val="FFFFFF"/>
-                    </a:solidFill>
-                  </a:tcPr>
-                </a:tc>
-                <a:tc>
-                  <a:txBody>
-                    <a:bodyPr/>
-                    <a:lstStyle/>
-                    <a:p>
-                      <a:r>
-                        <a:rPr sz="1500" b="0" i="0">
-                          <a:solidFill>
-                            <a:srgbClr val="222222"/>
-                          </a:solidFill>
-                          <a:latin typeface="Calibri"/>
-                        </a:rPr>
-                        <a:t>W. Watson patobulina žirklinį domkratą – jis tampa sudedamas ir kompaktiškas</a:t>
-                      </a:r>
-                    </a:p>
-                  </a:txBody>
-                  <a:tcPr marL="73152" marR="73152" anchor="ctr">
-                    <a:solidFill>
-                      <a:srgbClr val="FFFFFF"/>
-                    </a:solidFill>
-                  </a:tcPr>
-                </a:tc>
-              </a:tr>
-              <a:tr h="393192">
-                <a:tc>
-                  <a:txBody>
-                    <a:bodyPr/>
-                    <a:lstStyle/>
-                    <a:p>
-                      <a:r>
-                        <a:rPr sz="1500" b="1" i="0">
-                          <a:solidFill>
-                            <a:srgbClr val="222222"/>
-                          </a:solidFill>
-                          <a:latin typeface="Calibri"/>
-                        </a:rPr>
-                        <a:t>Šiandien</a:t>
-                      </a:r>
-                    </a:p>
-                  </a:txBody>
-                  <a:tcPr marL="73152" marR="73152" anchor="ctr">
-                    <a:solidFill>
-                      <a:srgbClr val="FFFFFF"/>
-                    </a:solidFill>
-                  </a:tcPr>
-                </a:tc>
-                <a:tc>
-                  <a:txBody>
-                    <a:bodyPr/>
-                    <a:lstStyle/>
-                    <a:p>
-                      <a:r>
-                        <a:rPr sz="1500" b="0" i="0">
-                          <a:solidFill>
-                            <a:srgbClr val="222222"/>
-                          </a:solidFill>
-                          <a:latin typeface="Calibri"/>
-                        </a:rPr>
-                        <a:t>Gaminami 12 V elektriniai žirkliniai domkratai</a:t>
-                      </a:r>
-                    </a:p>
-                  </a:txBody>
-                  <a:tcPr marL="73152" marR="73152" anchor="ctr">
-                    <a:solidFill>
-                      <a:srgbClr val="FFFFFF"/>
-                    </a:solidFill>
-                  </a:tcPr>
-                </a:tc>
-              </a:tr>
-            </a:tbl>
-          </a:graphicData>
-        </a:graphic>
-      </p:graphicFrame>
-      <p:sp>
-        <p:nvSpPr>
-          <p:cNvPr id="7" name="TextBox 6"/>
-          <p:cNvSpPr txBox="1"/>
-          <p:nvPr/>
-        </p:nvSpPr>
-        <p:spPr>
-          <a:xfrm>
-            <a:off x="640080" y="5897880"/>
-            <a:ext cx="10881360" cy="457200"/>
-          </a:xfrm>
-          <a:prstGeom prst="rect">
-            <a:avLst/>
-          </a:prstGeom>
-          <a:noFill/>
-        </p:spPr>
-        <p:txBody>
-          <a:bodyPr wrap="square" anchor="t" lIns="45720" rIns="45720">
-            <a:spAutoFit/>
-          </a:bodyPr>
-          <a:lstStyle/>
-          <a:p>
-            <a:pPr algn="l">
-              <a:spcAft>
-                <a:spcPts val="600"/>
-              </a:spcAft>
-            </a:pPr>
-            <a:r>
-              <a:rPr sz="1300" b="0">
-                <a:solidFill>
-                  <a:srgbClr val="595959"/>
-                </a:solidFill>
-                <a:latin typeface="Calibri"/>
-              </a:rPr>
-              <a:t>Šaltiniai: Rorres (n.d.); Wikipedia (n.d.-a, n.d.-c, n.d.-d, n.d.-e, n.d.-f); Hi-Lift Jack Company (n.d.-a); AutoIndustriya (n.d.); Pro-Lift-Montagetechnik (n.d.).</a:t>
-            </a:r>
-          </a:p>
-        </p:txBody>
-      </p:sp>
-    </p:spTree>
-  </p:cSld>
-  <p:clrMapOvr>
-    <a:masterClrMapping/>
-  </p:clrMapOvr>
-</p:sld>
-</file>
-
-<file path=ppt/slides/slide4.xml><?xml version="1.0" encoding="utf-8"?>
-<p:sld xmlns:a="http://schemas.openxmlformats.org/drawingml/2006/main" xmlns:p="http://schemas.openxmlformats.org/presentationml/2006/main" xmlns:r="http://schemas.openxmlformats.org/officeDocument/2006/relationships">
-  <p:cSld>
-    <p:spTree>
-      <p:nvGrpSpPr>
-        <p:cNvPr id="1" name=""/>
-        <p:cNvGrpSpPr/>
-        <p:nvPr/>
-      </p:nvGrpSpPr>
-      <p:grpSpPr/>
-      <p:sp>
-        <p:nvSpPr>
-          <p:cNvPr id="2" name="TextBox 1"/>
-          <p:cNvSpPr txBox="1"/>
-          <p:nvPr/>
-        </p:nvSpPr>
-        <p:spPr>
-          <a:xfrm>
-            <a:off x="548640" y="320040"/>
-            <a:ext cx="11064240" cy="822960"/>
-          </a:xfrm>
-          <a:prstGeom prst="rect">
-            <a:avLst/>
-          </a:prstGeom>
-          <a:noFill/>
-        </p:spPr>
-        <p:txBody>
-          <a:bodyPr wrap="square" anchor="b" lIns="45720" rIns="45720">
-            <a:spAutoFit/>
-          </a:bodyPr>
-          <a:lstStyle/>
-          <a:p>
-            <a:pPr algn="l">
-              <a:spcAft>
-                <a:spcPts val="600"/>
-              </a:spcAft>
-            </a:pPr>
-            <a:r>
-              <a:rPr sz="3200" b="1">
-                <a:solidFill>
-                  <a:srgbClr val="1F4E79"/>
-                </a:solidFill>
-                <a:latin typeface="Calibri"/>
-              </a:rPr>
-              <a:t>Domkratų tipai ir jų vertinimas</a:t>
-            </a:r>
-          </a:p>
-        </p:txBody>
-      </p:sp>
-      <p:sp>
-        <p:nvSpPr>
-          <p:cNvPr id="3" name="Rectangle 2"/>
-          <p:cNvSpPr/>
-          <p:nvPr/>
-        </p:nvSpPr>
-        <p:spPr>
-          <a:xfrm>
-            <a:off x="594360" y="1207008"/>
-            <a:ext cx="10972800" cy="27432"/>
-          </a:xfrm>
-          <a:prstGeom prst="rect">
-            <a:avLst/>
-          </a:prstGeom>
-          <a:solidFill>
-            <a:srgbClr val="1F4E79"/>
-          </a:solidFill>
-          <a:ln>
-            <a:noFill/>
-          </a:ln>
-          <a:effectLst/>
-        </p:spPr>
-        <p:style>
-          <a:lnRef idx="1">
-            <a:schemeClr val="accent1"/>
-          </a:lnRef>
-          <a:fillRef idx="3">
-            <a:schemeClr val="accent1"/>
-          </a:fillRef>
-          <a:effectRef idx="2">
-            <a:schemeClr val="accent1"/>
-          </a:effectRef>
-          <a:fontRef idx="minor">
-            <a:schemeClr val="lt1"/>
-          </a:fontRef>
-        </p:style>
-        <p:txBody>
-          <a:bodyPr rtlCol="0" anchor="ctr"/>
-          <a:lstStyle/>
-          <a:p>
-            <a:pPr algn="ctr"/>
-          </a:p>
-        </p:txBody>
-      </p:sp>
-      <p:sp>
-        <p:nvSpPr>
-          <p:cNvPr id="4" name="TextBox 3"/>
-          <p:cNvSpPr txBox="1"/>
-          <p:nvPr/>
-        </p:nvSpPr>
-        <p:spPr>
-          <a:xfrm>
-            <a:off x="10698480" y="6355080"/>
-            <a:ext cx="1005840" cy="365760"/>
-          </a:xfrm>
-          <a:prstGeom prst="rect">
-            <a:avLst/>
-          </a:prstGeom>
-          <a:noFill/>
-        </p:spPr>
-        <p:txBody>
-          <a:bodyPr wrap="square" anchor="t" lIns="45720" rIns="45720">
-            <a:spAutoFit/>
-          </a:bodyPr>
-          <a:lstStyle/>
-          <a:p>
-            <a:pPr algn="r">
-              <a:spcAft>
-                <a:spcPts val="600"/>
-              </a:spcAft>
-            </a:pPr>
-            <a:r>
-              <a:rPr sz="1200" b="0">
-                <a:solidFill>
-                  <a:srgbClr val="595959"/>
-                </a:solidFill>
-                <a:latin typeface="Calibri"/>
-              </a:rPr>
-              <a:t>4 / 10</a:t>
-            </a:r>
-          </a:p>
-        </p:txBody>
-      </p:sp>
-      <p:sp>
-        <p:nvSpPr>
-          <p:cNvPr id="5" name="TextBox 4"/>
-          <p:cNvSpPr txBox="1"/>
-          <p:nvPr/>
-        </p:nvSpPr>
-        <p:spPr>
-          <a:xfrm>
-            <a:off x="548640" y="6355080"/>
-            <a:ext cx="7315200" cy="365760"/>
-          </a:xfrm>
-          <a:prstGeom prst="rect">
-            <a:avLst/>
-          </a:prstGeom>
-          <a:noFill/>
-        </p:spPr>
-        <p:txBody>
-          <a:bodyPr wrap="square" anchor="t" lIns="45720" rIns="45720">
-            <a:spAutoFit/>
-          </a:bodyPr>
-          <a:lstStyle/>
-          <a:p>
-            <a:pPr algn="l">
-              <a:spcAft>
-                <a:spcPts val="600"/>
-              </a:spcAft>
-            </a:pPr>
-            <a:r>
-              <a:rPr sz="1200" b="0">
-                <a:solidFill>
-                  <a:srgbClr val="595959"/>
-                </a:solidFill>
-                <a:latin typeface="Calibri"/>
-              </a:rPr>
-              <a:t>PBL · Domkratas</a:t>
-            </a:r>
-          </a:p>
-        </p:txBody>
-      </p:sp>
-      <p:graphicFrame>
-        <p:nvGraphicFramePr>
-          <p:cNvPr id="6" name="Table 5"/>
-          <p:cNvGraphicFramePr>
-            <a:graphicFrameLocks noGrp="1"/>
-          </p:cNvGraphicFramePr>
-          <p:nvPr/>
-        </p:nvGraphicFramePr>
-        <p:xfrm>
-          <a:off x="640080" y="1463040"/>
-          <a:ext cx="10881360" cy="4059936"/>
-        </p:xfrm>
-        <a:graphic>
-          <a:graphicData uri="http://schemas.openxmlformats.org/drawingml/2006/table">
-            <a:tbl>
-              <a:tblPr firstRow="1" bandRow="1">
-                <a:tableStyleId>{5C22544A-7EE6-4342-B048-85BDC9FD1C3A}</a:tableStyleId>
-              </a:tblPr>
-              <a:tblGrid>
-                <a:gridCol w="2011680"/>
-                <a:gridCol w="3108960"/>
-                <a:gridCol w="2834640"/>
-                <a:gridCol w="2926080"/>
-              </a:tblGrid>
-              <a:tr h="676656">
-                <a:tc>
-                  <a:txBody>
-                    <a:bodyPr/>
-                    <a:lstStyle/>
-                    <a:p>
-                      <a:r>
-                        <a:rPr sz="1500" b="1" i="0">
-                          <a:solidFill>
-                            <a:srgbClr val="FFFFFF"/>
-                          </a:solidFill>
-                          <a:latin typeface="Calibri"/>
-                        </a:rPr>
-                        <a:t>Tipas</a:t>
-                      </a:r>
-                    </a:p>
-                  </a:txBody>
-                  <a:tcPr marL="73152" marR="73152" anchor="ctr">
-                    <a:solidFill>
-                      <a:srgbClr val="1F4E79"/>
-                    </a:solidFill>
-                  </a:tcPr>
-                </a:tc>
-                <a:tc>
-                  <a:txBody>
-                    <a:bodyPr/>
-                    <a:lstStyle/>
-                    <a:p>
-                      <a:r>
-                        <a:rPr sz="1500" b="1" i="0">
-                          <a:solidFill>
-                            <a:srgbClr val="FFFFFF"/>
-                          </a:solidFill>
-                          <a:latin typeface="Calibri"/>
-                        </a:rPr>
-                        <a:t>Veikimo principas</a:t>
-                      </a:r>
-                    </a:p>
-                  </a:txBody>
-                  <a:tcPr marL="73152" marR="73152" anchor="ctr">
-                    <a:solidFill>
-                      <a:srgbClr val="1F4E79"/>
-                    </a:solidFill>
-                  </a:tcPr>
-                </a:tc>
-                <a:tc>
-                  <a:txBody>
-                    <a:bodyPr/>
-                    <a:lstStyle/>
-                    <a:p>
-                      <a:r>
-                        <a:rPr sz="1500" b="1" i="0">
-                          <a:solidFill>
-                            <a:srgbClr val="FFFFFF"/>
-                          </a:solidFill>
-                          <a:latin typeface="Calibri"/>
-                        </a:rPr>
-                        <a:t>Pasiteisino</a:t>
-                      </a:r>
-                    </a:p>
-                  </a:txBody>
-                  <a:tcPr marL="73152" marR="73152" anchor="ctr">
-                    <a:solidFill>
-                      <a:srgbClr val="1F4E79"/>
-                    </a:solidFill>
-                  </a:tcPr>
-                </a:tc>
-                <a:tc>
-                  <a:txBody>
-                    <a:bodyPr/>
-                    <a:lstStyle/>
-                    <a:p>
-                      <a:r>
-                        <a:rPr sz="1500" b="1" i="0">
-                          <a:solidFill>
-                            <a:srgbClr val="FFFFFF"/>
-                          </a:solidFill>
-                          <a:latin typeface="Calibri"/>
-                        </a:rPr>
-                        <a:t>Trūkumai</a:t>
-                      </a:r>
-                    </a:p>
-                  </a:txBody>
-                  <a:tcPr marL="73152" marR="73152" anchor="ctr">
-                    <a:solidFill>
-                      <a:srgbClr val="1F4E79"/>
-                    </a:solidFill>
-                  </a:tcPr>
-                </a:tc>
-              </a:tr>
-              <a:tr h="676656">
-                <a:tc>
-                  <a:txBody>
-                    <a:bodyPr/>
-                    <a:lstStyle/>
-                    <a:p>
-                      <a:r>
-                        <a:rPr sz="1500" b="1" i="0">
-                          <a:solidFill>
-                            <a:srgbClr val="222222"/>
-                          </a:solidFill>
-                          <a:latin typeface="Calibri"/>
-                        </a:rPr>
-                        <a:t>Sraigtinis</a:t>
-                      </a:r>
-                    </a:p>
-                  </a:txBody>
-                  <a:tcPr marL="73152" marR="73152" anchor="ctr">
-                    <a:solidFill>
-                      <a:srgbClr val="FFFFFF"/>
-                    </a:solidFill>
-                  </a:tcPr>
-                </a:tc>
-                <a:tc>
-                  <a:txBody>
-                    <a:bodyPr/>
-                    <a:lstStyle/>
-                    <a:p>
-                      <a:r>
-                        <a:rPr sz="1500" b="0" i="0">
-                          <a:solidFill>
-                            <a:srgbClr val="222222"/>
-                          </a:solidFill>
-                          <a:latin typeface="Calibri"/>
-                        </a:rPr>
-                        <a:t>Sukamas sraigtas kelia stūmoklį</a:t>
-                      </a:r>
-                    </a:p>
-                  </a:txBody>
-                  <a:tcPr marL="73152" marR="73152" anchor="ctr">
-                    <a:solidFill>
-                      <a:srgbClr val="FFFFFF"/>
-                    </a:solidFill>
-                  </a:tcPr>
-                </a:tc>
-                <a:tc>
-                  <a:txBody>
-                    <a:bodyPr/>
-                    <a:lstStyle/>
-                    <a:p>
-                      <a:r>
-                        <a:rPr sz="1500" b="0" i="0">
-                          <a:solidFill>
-                            <a:srgbClr val="222222"/>
-                          </a:solidFill>
-                          <a:latin typeface="Calibri"/>
-                        </a:rPr>
-                        <a:t>Savistabdis – krovinys nenusileidžia savaime</a:t>
-                      </a:r>
-                    </a:p>
-                  </a:txBody>
-                  <a:tcPr marL="73152" marR="73152" anchor="ctr">
-                    <a:solidFill>
-                      <a:srgbClr val="FFFFFF"/>
-                    </a:solidFill>
-                  </a:tcPr>
-                </a:tc>
-                <a:tc>
-                  <a:txBody>
-                    <a:bodyPr/>
-                    <a:lstStyle/>
-                    <a:p>
-                      <a:r>
-                        <a:rPr sz="1500" b="0" i="0">
-                          <a:solidFill>
-                            <a:srgbClr val="222222"/>
-                          </a:solidFill>
-                          <a:latin typeface="Calibri"/>
-                        </a:rPr>
-                        <a:t>Mažas naudingumo koeficientas (30–40 %), lėtas</a:t>
-                      </a:r>
-                    </a:p>
-                  </a:txBody>
-                  <a:tcPr marL="73152" marR="73152" anchor="ctr">
-                    <a:solidFill>
-                      <a:srgbClr val="FFFFFF"/>
-                    </a:solidFill>
-                  </a:tcPr>
-                </a:tc>
-              </a:tr>
-              <a:tr h="676656">
-                <a:tc>
-                  <a:txBody>
-                    <a:bodyPr/>
-                    <a:lstStyle/>
-                    <a:p>
-                      <a:r>
-                        <a:rPr sz="1500" b="1" i="0">
-                          <a:solidFill>
-                            <a:srgbClr val="222222"/>
-                          </a:solidFill>
-                          <a:latin typeface="Calibri"/>
-                        </a:rPr>
                         <a:t>Krumpliastiebinis</a:t>
                       </a:r>
                     </a:p>
@@ -6307,29 +6993,7 @@
                           </a:solidFill>
                           <a:latin typeface="Calibri"/>
                         </a:rPr>
-                        <a:t>Svirtis su skląsčiu kyla krumpliastiebiu</a:t>
-                      </a:r>
-                    </a:p>
-                  </a:txBody>
-                  <a:tcPr marL="73152" marR="73152" anchor="ctr">
-                    <a:solidFill>
-                      <a:srgbClr val="FFFFFF"/>
-                    </a:solidFill>
-                  </a:tcPr>
-                </a:tc>
-                <a:tc>
-                  <a:txBody>
-                    <a:bodyPr/>
-                    <a:lstStyle/>
-                    <a:p>
-                      <a:r>
-                        <a:rPr sz="1500" b="0" i="0">
-                          <a:solidFill>
-                            <a:srgbClr val="222222"/>
-                          </a:solidFill>
-                          <a:latin typeface="Calibri"/>
-                        </a:rPr>
-                        <a:t>Didelis kėlimo aukštis (iki ~1,5 m)</a:t>
+                        <a:t>Kelia labai aukštai</a:t>
                       </a:r>
                     </a:p>
                   </a:txBody>
@@ -6362,7 +7026,7 @@
                   </a:tcPr>
                 </a:tc>
               </a:tr>
-              <a:tr h="676656">
+              <a:tr h="530352">
                 <a:tc>
                   <a:txBody>
                     <a:bodyPr/>
@@ -6375,97 +7039,7 @@
                           </a:solidFill>
                           <a:latin typeface="Calibri"/>
                         </a:rPr>
-                        <a:t>Žirklinis</a:t>
-                      </a:r>
-                    </a:p>
-                  </a:txBody>
-                  <a:tcPr marL="73152" marR="73152" anchor="ctr">
-                    <a:solidFill>
-                      <a:srgbClr val="DEEAF6"/>
-                    </a:solidFill>
-                  </a:tcPr>
-                </a:tc>
-                <a:tc>
-                  <a:txBody>
-                    <a:bodyPr/>
-                    <a:lstStyle/>
-                    <a:p>
-                      <a:r>
-                        <a:rPr sz="1500" b="0" i="0">
-                          <a:solidFill>
-                            <a:srgbClr val="222222"/>
-                          </a:solidFill>
-                          <a:latin typeface="Calibri"/>
-                        </a:rPr>
-                        <a:t>Horizontalus sraigtas suspaudžia rombo formos svirtis</a:t>
-                      </a:r>
-                    </a:p>
-                  </a:txBody>
-                  <a:tcPr marL="73152" marR="73152" anchor="ctr">
-                    <a:solidFill>
-                      <a:srgbClr val="DEEAF6"/>
-                    </a:solidFill>
-                  </a:tcPr>
-                </a:tc>
-                <a:tc>
-                  <a:txBody>
-                    <a:bodyPr/>
-                    <a:lstStyle/>
-                    <a:p>
-                      <a:r>
-                        <a:rPr sz="1500" b="0" i="0">
-                          <a:solidFill>
-                            <a:srgbClr val="222222"/>
-                          </a:solidFill>
-                          <a:latin typeface="Calibri"/>
-                        </a:rPr>
-                        <a:t>Lengvas, pigus, telpa automobilyje</a:t>
-                      </a:r>
-                    </a:p>
-                  </a:txBody>
-                  <a:tcPr marL="73152" marR="73152" anchor="ctr">
-                    <a:solidFill>
-                      <a:srgbClr val="DEEAF6"/>
-                    </a:solidFill>
-                  </a:tcPr>
-                </a:tc>
-                <a:tc>
-                  <a:txBody>
-                    <a:bodyPr/>
-                    <a:lstStyle/>
-                    <a:p>
-                      <a:r>
-                        <a:rPr sz="1500" b="0" i="0">
-                          <a:solidFill>
-                            <a:srgbClr val="222222"/>
-                          </a:solidFill>
-                          <a:latin typeface="Calibri"/>
-                        </a:rPr>
-                        <a:t>Lėtas, siauras pagrindas, nestabilus</a:t>
-                      </a:r>
-                    </a:p>
-                  </a:txBody>
-                  <a:tcPr marL="73152" marR="73152" anchor="ctr">
-                    <a:solidFill>
-                      <a:srgbClr val="DEEAF6"/>
-                    </a:solidFill>
-                  </a:tcPr>
-                </a:tc>
-              </a:tr>
-              <a:tr h="676656">
-                <a:tc>
-                  <a:txBody>
-                    <a:bodyPr/>
-                    <a:lstStyle/>
-                    <a:p>
-                      <a:r>
-                        <a:rPr sz="1500" b="1" i="0">
-                          <a:solidFill>
-                            <a:srgbClr val="222222"/>
-                          </a:solidFill>
-                          <a:latin typeface="Calibri"/>
-                        </a:rPr>
-                        <a:t>Hidraulinis butelinis</a:t>
+                        <a:t>1910 m.</a:t>
                       </a:r>
                     </a:p>
                   </a:txBody>
@@ -6487,7 +7061,7 @@
                           </a:solidFill>
                           <a:latin typeface="Calibri"/>
                         </a:rPr>
-                        <a:t>Maža pompa spaudžia alyvą po dideliu stūmokliu</a:t>
+                        <a:t>Vežimėlinis</a:t>
                       </a:r>
                     </a:p>
                   </a:txBody>
@@ -6509,7 +7083,7 @@
                           </a:solidFill>
                           <a:latin typeface="Calibri"/>
                         </a:rPr>
-                        <a:t>Didelė keliamoji galia (3–50 t)</a:t>
+                        <a:t>Greitas ir stabilus</a:t>
                       </a:r>
                     </a:p>
                   </a:txBody>
@@ -6531,7 +7105,7 @@
                           </a:solidFill>
                           <a:latin typeface="Calibri"/>
                         </a:rPr>
-                        <a:t>Mažas pagrindas, didelis pradinis aukštis</a:t>
+                        <a:t>Didelis ir sunkus</a:t>
                       </a:r>
                     </a:p>
                   </a:txBody>
@@ -6542,7 +7116,7 @@
                   </a:tcPr>
                 </a:tc>
               </a:tr>
-              <a:tr h="676656">
+              <a:tr h="530352">
                 <a:tc>
                   <a:txBody>
                     <a:bodyPr/>
@@ -6555,7 +7129,187 @@
                           </a:solidFill>
                           <a:latin typeface="Calibri"/>
                         </a:rPr>
-                        <a:t>Hidraulinis vežimėlinis</a:t>
+                        <a:t>1920 m.</a:t>
+                      </a:r>
+                    </a:p>
+                  </a:txBody>
+                  <a:tcPr marL="73152" marR="73152" anchor="ctr">
+                    <a:solidFill>
+                      <a:srgbClr val="DEEAF6"/>
+                    </a:solidFill>
+                  </a:tcPr>
+                </a:tc>
+                <a:tc>
+                  <a:txBody>
+                    <a:bodyPr/>
+                    <a:lstStyle/>
+                    <a:p>
+                      <a:r>
+                        <a:rPr sz="1500" b="1" i="0">
+                          <a:solidFill>
+                            <a:srgbClr val="222222"/>
+                          </a:solidFill>
+                          <a:latin typeface="Calibri"/>
+                        </a:rPr>
+                        <a:t>3. Žirklinis</a:t>
+                      </a:r>
+                    </a:p>
+                  </a:txBody>
+                  <a:tcPr marL="73152" marR="73152" anchor="ctr">
+                    <a:solidFill>
+                      <a:srgbClr val="DEEAF6"/>
+                    </a:solidFill>
+                  </a:tcPr>
+                </a:tc>
+                <a:tc>
+                  <a:txBody>
+                    <a:bodyPr/>
+                    <a:lstStyle/>
+                    <a:p>
+                      <a:r>
+                        <a:rPr sz="1500" b="1" i="0">
+                          <a:solidFill>
+                            <a:srgbClr val="222222"/>
+                          </a:solidFill>
+                          <a:latin typeface="Calibri"/>
+                        </a:rPr>
+                        <a:t>Žemas, lengvas, telpa bagažinėje</a:t>
+                      </a:r>
+                    </a:p>
+                  </a:txBody>
+                  <a:tcPr marL="73152" marR="73152" anchor="ctr">
+                    <a:solidFill>
+                      <a:srgbClr val="DEEAF6"/>
+                    </a:solidFill>
+                  </a:tcPr>
+                </a:tc>
+                <a:tc>
+                  <a:txBody>
+                    <a:bodyPr/>
+                    <a:lstStyle/>
+                    <a:p>
+                      <a:r>
+                        <a:rPr sz="1500" b="1" i="0">
+                          <a:solidFill>
+                            <a:srgbClr val="222222"/>
+                          </a:solidFill>
+                          <a:latin typeface="Calibri"/>
+                        </a:rPr>
+                        <a:t>Lėtas, siauras pagrindas</a:t>
+                      </a:r>
+                    </a:p>
+                  </a:txBody>
+                  <a:tcPr marL="73152" marR="73152" anchor="ctr">
+                    <a:solidFill>
+                      <a:srgbClr val="DEEAF6"/>
+                    </a:solidFill>
+                  </a:tcPr>
+                </a:tc>
+              </a:tr>
+              <a:tr h="530352">
+                <a:tc>
+                  <a:txBody>
+                    <a:bodyPr/>
+                    <a:lstStyle/>
+                    <a:p>
+                      <a:r>
+                        <a:rPr sz="1500" b="1" i="0">
+                          <a:solidFill>
+                            <a:srgbClr val="222222"/>
+                          </a:solidFill>
+                          <a:latin typeface="Calibri"/>
+                        </a:rPr>
+                        <a:t>1966 m.</a:t>
+                      </a:r>
+                    </a:p>
+                  </a:txBody>
+                  <a:tcPr marL="73152" marR="73152" anchor="ctr">
+                    <a:solidFill>
+                      <a:srgbClr val="DEEAF6"/>
+                    </a:solidFill>
+                  </a:tcPr>
+                </a:tc>
+                <a:tc>
+                  <a:txBody>
+                    <a:bodyPr/>
+                    <a:lstStyle/>
+                    <a:p>
+                      <a:r>
+                        <a:rPr sz="1500" b="1" i="0">
+                          <a:solidFill>
+                            <a:srgbClr val="222222"/>
+                          </a:solidFill>
+                          <a:latin typeface="Calibri"/>
+                        </a:rPr>
+                        <a:t>4. Pneumohidraulinis</a:t>
+                      </a:r>
+                    </a:p>
+                  </a:txBody>
+                  <a:tcPr marL="73152" marR="73152" anchor="ctr">
+                    <a:solidFill>
+                      <a:srgbClr val="DEEAF6"/>
+                    </a:solidFill>
+                  </a:tcPr>
+                </a:tc>
+                <a:tc>
+                  <a:txBody>
+                    <a:bodyPr/>
+                    <a:lstStyle/>
+                    <a:p>
+                      <a:r>
+                        <a:rPr sz="1500" b="1" i="0">
+                          <a:solidFill>
+                            <a:srgbClr val="222222"/>
+                          </a:solidFill>
+                          <a:latin typeface="Calibri"/>
+                        </a:rPr>
+                        <a:t>Nereikia pumpuoti rankomis</a:t>
+                      </a:r>
+                    </a:p>
+                  </a:txBody>
+                  <a:tcPr marL="73152" marR="73152" anchor="ctr">
+                    <a:solidFill>
+                      <a:srgbClr val="DEEAF6"/>
+                    </a:solidFill>
+                  </a:tcPr>
+                </a:tc>
+                <a:tc>
+                  <a:txBody>
+                    <a:bodyPr/>
+                    <a:lstStyle/>
+                    <a:p>
+                      <a:r>
+                        <a:rPr sz="1500" b="1" i="0">
+                          <a:solidFill>
+                            <a:srgbClr val="222222"/>
+                          </a:solidFill>
+                          <a:latin typeface="Calibri"/>
+                        </a:rPr>
+                        <a:t>Reikia kompresoriaus</a:t>
+                      </a:r>
+                    </a:p>
+                  </a:txBody>
+                  <a:tcPr marL="73152" marR="73152" anchor="ctr">
+                    <a:solidFill>
+                      <a:srgbClr val="DEEAF6"/>
+                    </a:solidFill>
+                  </a:tcPr>
+                </a:tc>
+              </a:tr>
+              <a:tr h="530352">
+                <a:tc>
+                  <a:txBody>
+                    <a:bodyPr/>
+                    <a:lstStyle/>
+                    <a:p>
+                      <a:r>
+                        <a:rPr sz="1500" b="1" i="0">
+                          <a:solidFill>
+                            <a:srgbClr val="222222"/>
+                          </a:solidFill>
+                          <a:latin typeface="Calibri"/>
+                        </a:rPr>
+                        <a:t>2004 m.</a:t>
                       </a:r>
                     </a:p>
                   </a:txBody>
@@ -6577,7 +7331,7 @@
                           </a:solidFill>
                           <a:latin typeface="Calibri"/>
                         </a:rPr>
-                        <a:t>Hidrocilindras kelia ilgą svirtį</a:t>
+                        <a:t>Elektrinis žirklinis</a:t>
                       </a:r>
                     </a:p>
                   </a:txBody>
@@ -6599,7 +7353,7 @@
                           </a:solidFill>
                           <a:latin typeface="Calibri"/>
                         </a:rPr>
-                        <a:t>Greitas ir stabilus (2–4 t)</a:t>
+                        <a:t>Nereikia sukti rankos</a:t>
                       </a:r>
                     </a:p>
                   </a:txBody>
@@ -6621,7 +7375,7 @@
                           </a:solidFill>
                           <a:latin typeface="Calibri"/>
                         </a:rPr>
-                        <a:t>Didelis, sunku perkelti</a:t>
+                        <a:t>Reikia elektros, brangesnis</a:t>
                       </a:r>
                     </a:p>
                   </a:txBody>
@@ -6644,7 +7398,7 @@
         </p:nvSpPr>
         <p:spPr>
           <a:xfrm>
-            <a:off x="640080" y="5897880"/>
+            <a:off x="640080" y="5806440"/>
             <a:ext cx="10881360" cy="457200"/>
           </a:xfrm>
           <a:prstGeom prst="rect">
@@ -6664,13 +7418,528 @@
               </a:spcAft>
             </a:pPr>
             <a:r>
+              <a:rPr sz="1500" b="1">
+                <a:solidFill>
+                  <a:srgbClr val="1F4E79"/>
+                </a:solidFill>
+                <a:latin typeface="Calibri"/>
+              </a:rPr>
+              <a:t>Paryškinti – keturi tipai, kuriuos pristatome išsamiai. Datos – patentų ar pirmųjų gaminių metai.</a:t>
+            </a:r>
+          </a:p>
+        </p:txBody>
+      </p:sp>
+    </p:spTree>
+  </p:cSld>
+  <p:clrMapOvr>
+    <a:masterClrMapping/>
+  </p:clrMapOvr>
+</p:sld>
+</file>
+
+<file path=ppt/slides/slide4.xml><?xml version="1.0" encoding="utf-8"?>
+<p:sld xmlns:a="http://schemas.openxmlformats.org/drawingml/2006/main" xmlns:p="http://schemas.openxmlformats.org/presentationml/2006/main" xmlns:r="http://schemas.openxmlformats.org/officeDocument/2006/relationships">
+  <p:cSld>
+    <p:spTree>
+      <p:nvGrpSpPr>
+        <p:cNvPr id="1" name=""/>
+        <p:cNvGrpSpPr/>
+        <p:nvPr/>
+      </p:nvGrpSpPr>
+      <p:grpSpPr/>
+      <p:sp>
+        <p:nvSpPr>
+          <p:cNvPr id="2" name="TextBox 1"/>
+          <p:cNvSpPr txBox="1"/>
+          <p:nvPr/>
+        </p:nvSpPr>
+        <p:spPr>
+          <a:xfrm>
+            <a:off x="548640" y="320040"/>
+            <a:ext cx="11064240" cy="822960"/>
+          </a:xfrm>
+          <a:prstGeom prst="rect">
+            <a:avLst/>
+          </a:prstGeom>
+          <a:noFill/>
+        </p:spPr>
+        <p:txBody>
+          <a:bodyPr wrap="square" anchor="b" lIns="45720" rIns="45720">
+            <a:spAutoFit/>
+          </a:bodyPr>
+          <a:lstStyle/>
+          <a:p>
+            <a:pPr algn="l">
+              <a:spcAft>
+                <a:spcPts val="600"/>
+              </a:spcAft>
+            </a:pPr>
+            <a:r>
+              <a:rPr sz="3200" b="1">
+                <a:solidFill>
+                  <a:srgbClr val="1F4E79"/>
+                </a:solidFill>
+                <a:latin typeface="Calibri"/>
+              </a:rPr>
+              <a:t>Sraigtinis domkratas</a:t>
+            </a:r>
+          </a:p>
+        </p:txBody>
+      </p:sp>
+      <p:sp>
+        <p:nvSpPr>
+          <p:cNvPr id="3" name="Rectangle 2"/>
+          <p:cNvSpPr/>
+          <p:nvPr/>
+        </p:nvSpPr>
+        <p:spPr>
+          <a:xfrm>
+            <a:off x="594360" y="1207008"/>
+            <a:ext cx="10972800" cy="27432"/>
+          </a:xfrm>
+          <a:prstGeom prst="rect">
+            <a:avLst/>
+          </a:prstGeom>
+          <a:solidFill>
+            <a:srgbClr val="1F4E79"/>
+          </a:solidFill>
+          <a:ln>
+            <a:noFill/>
+          </a:ln>
+          <a:effectLst/>
+        </p:spPr>
+        <p:style>
+          <a:lnRef idx="1">
+            <a:schemeClr val="accent1"/>
+          </a:lnRef>
+          <a:fillRef idx="3">
+            <a:schemeClr val="accent1"/>
+          </a:fillRef>
+          <a:effectRef idx="2">
+            <a:schemeClr val="accent1"/>
+          </a:effectRef>
+          <a:fontRef idx="minor">
+            <a:schemeClr val="lt1"/>
+          </a:fontRef>
+        </p:style>
+        <p:txBody>
+          <a:bodyPr rtlCol="0" anchor="ctr"/>
+          <a:lstStyle/>
+          <a:p>
+            <a:pPr algn="ctr"/>
+          </a:p>
+        </p:txBody>
+      </p:sp>
+      <p:sp>
+        <p:nvSpPr>
+          <p:cNvPr id="4" name="TextBox 3"/>
+          <p:cNvSpPr txBox="1"/>
+          <p:nvPr/>
+        </p:nvSpPr>
+        <p:spPr>
+          <a:xfrm>
+            <a:off x="10698480" y="6355080"/>
+            <a:ext cx="1005840" cy="365760"/>
+          </a:xfrm>
+          <a:prstGeom prst="rect">
+            <a:avLst/>
+          </a:prstGeom>
+          <a:noFill/>
+        </p:spPr>
+        <p:txBody>
+          <a:bodyPr wrap="square" anchor="t" lIns="45720" rIns="45720">
+            <a:spAutoFit/>
+          </a:bodyPr>
+          <a:lstStyle/>
+          <a:p>
+            <a:pPr algn="r">
+              <a:spcAft>
+                <a:spcPts val="600"/>
+              </a:spcAft>
+            </a:pPr>
+            <a:r>
+              <a:rPr sz="1200" b="0">
+                <a:solidFill>
+                  <a:srgbClr val="595959"/>
+                </a:solidFill>
+                <a:latin typeface="Calibri"/>
+              </a:rPr>
+              <a:t>4 / 12</a:t>
+            </a:r>
+          </a:p>
+        </p:txBody>
+      </p:sp>
+      <p:sp>
+        <p:nvSpPr>
+          <p:cNvPr id="5" name="TextBox 4"/>
+          <p:cNvSpPr txBox="1"/>
+          <p:nvPr/>
+        </p:nvSpPr>
+        <p:spPr>
+          <a:xfrm>
+            <a:off x="548640" y="6355080"/>
+            <a:ext cx="7315200" cy="365760"/>
+          </a:xfrm>
+          <a:prstGeom prst="rect">
+            <a:avLst/>
+          </a:prstGeom>
+          <a:noFill/>
+        </p:spPr>
+        <p:txBody>
+          <a:bodyPr wrap="square" anchor="t" lIns="45720" rIns="45720">
+            <a:spAutoFit/>
+          </a:bodyPr>
+          <a:lstStyle/>
+          <a:p>
+            <a:pPr algn="l">
+              <a:spcAft>
+                <a:spcPts val="600"/>
+              </a:spcAft>
+            </a:pPr>
+            <a:r>
+              <a:rPr sz="1200" b="0">
+                <a:solidFill>
+                  <a:srgbClr val="595959"/>
+                </a:solidFill>
+                <a:latin typeface="Calibri"/>
+              </a:rPr>
+              <a:t>PBL · Automobilinis domkratas</a:t>
+            </a:r>
+          </a:p>
+        </p:txBody>
+      </p:sp>
+      <p:sp>
+        <p:nvSpPr>
+          <p:cNvPr id="6" name="Rectangle 5"/>
+          <p:cNvSpPr/>
+          <p:nvPr/>
+        </p:nvSpPr>
+        <p:spPr>
+          <a:xfrm>
+            <a:off x="640080" y="1463040"/>
+            <a:ext cx="4572000" cy="4343400"/>
+          </a:xfrm>
+          <a:prstGeom prst="rect">
+            <a:avLst/>
+          </a:prstGeom>
+          <a:solidFill>
+            <a:srgbClr val="1F4E79"/>
+          </a:solidFill>
+          <a:ln>
+            <a:noFill/>
+          </a:ln>
+          <a:effectLst/>
+        </p:spPr>
+        <p:style>
+          <a:lnRef idx="1">
+            <a:schemeClr val="accent1"/>
+          </a:lnRef>
+          <a:fillRef idx="3">
+            <a:schemeClr val="accent1"/>
+          </a:fillRef>
+          <a:effectRef idx="2">
+            <a:schemeClr val="accent1"/>
+          </a:effectRef>
+          <a:fontRef idx="minor">
+            <a:schemeClr val="lt1"/>
+          </a:fontRef>
+        </p:style>
+        <p:txBody>
+          <a:bodyPr rtlCol="0" anchor="ctr"/>
+          <a:lstStyle/>
+          <a:p>
+            <a:pPr algn="ctr"/>
+          </a:p>
+        </p:txBody>
+      </p:sp>
+      <p:pic>
+        <p:nvPicPr>
+          <p:cNvPr id="7" name="Picture 6" descr="1-sraigtinis-stevenson-1898.png"/>
+          <p:cNvPicPr>
+            <a:picLocks noChangeAspect="1"/>
+          </p:cNvPicPr>
+          <p:nvPr/>
+        </p:nvPicPr>
+        <p:blipFill>
+          <a:blip r:embed="rId3"/>
+          <a:stretch>
+            <a:fillRect/>
+          </a:stretch>
+        </p:blipFill>
+        <p:spPr>
+          <a:xfrm>
+            <a:off x="1757934" y="1554480"/>
+            <a:ext cx="2336291" cy="4160520"/>
+          </a:xfrm>
+          <a:prstGeom prst="rect">
+            <a:avLst/>
+          </a:prstGeom>
+        </p:spPr>
+      </p:pic>
+      <p:sp>
+        <p:nvSpPr>
+          <p:cNvPr id="8" name="TextBox 7"/>
+          <p:cNvSpPr txBox="1"/>
+          <p:nvPr/>
+        </p:nvSpPr>
+        <p:spPr>
+          <a:xfrm>
+            <a:off x="640080" y="5833872"/>
+            <a:ext cx="4572000" cy="365760"/>
+          </a:xfrm>
+          <a:prstGeom prst="rect">
+            <a:avLst/>
+          </a:prstGeom>
+          <a:noFill/>
+        </p:spPr>
+        <p:txBody>
+          <a:bodyPr wrap="square" anchor="t" lIns="45720" rIns="45720">
+            <a:spAutoFit/>
+          </a:bodyPr>
+          <a:lstStyle/>
+          <a:p>
+            <a:pPr algn="l">
+              <a:spcAft>
+                <a:spcPts val="600"/>
+              </a:spcAft>
+            </a:pPr>
+            <a:r>
+              <a:rPr sz="1200" b="0">
+                <a:solidFill>
+                  <a:srgbClr val="595959"/>
+                </a:solidFill>
+                <a:latin typeface="Calibri"/>
+              </a:rPr>
+              <a:t>Brėžinys: H. M. Stevenson, JAV patentas Nr. 601,451 (1898)</a:t>
+            </a:r>
+          </a:p>
+        </p:txBody>
+      </p:sp>
+      <p:sp>
+        <p:nvSpPr>
+          <p:cNvPr id="9" name="TextBox 8"/>
+          <p:cNvSpPr txBox="1"/>
+          <p:nvPr/>
+        </p:nvSpPr>
+        <p:spPr>
+          <a:xfrm>
+            <a:off x="5577840" y="1417320"/>
+            <a:ext cx="6035040" cy="411480"/>
+          </a:xfrm>
+          <a:prstGeom prst="rect">
+            <a:avLst/>
+          </a:prstGeom>
+          <a:noFill/>
+        </p:spPr>
+        <p:txBody>
+          <a:bodyPr wrap="square" anchor="t" lIns="45720" rIns="45720">
+            <a:spAutoFit/>
+          </a:bodyPr>
+          <a:lstStyle/>
+          <a:p>
+            <a:pPr algn="l">
+              <a:spcAft>
+                <a:spcPts val="600"/>
+              </a:spcAft>
+            </a:pPr>
+            <a:r>
+              <a:rPr sz="1500" b="1">
+                <a:solidFill>
+                  <a:srgbClr val="1F4E79"/>
+                </a:solidFill>
+                <a:latin typeface="Calibri"/>
+              </a:rPr>
+              <a:t>1 žingsnis · XIX a. · Pristato: [vardas]</a:t>
+            </a:r>
+          </a:p>
+        </p:txBody>
+      </p:sp>
+      <p:sp>
+        <p:nvSpPr>
+          <p:cNvPr id="10" name="TextBox 9"/>
+          <p:cNvSpPr txBox="1"/>
+          <p:nvPr/>
+        </p:nvSpPr>
+        <p:spPr>
+          <a:xfrm>
+            <a:off x="5577840" y="1783080"/>
+            <a:ext cx="6035040" cy="3977639"/>
+          </a:xfrm>
+          <a:prstGeom prst="rect">
+            <a:avLst/>
+          </a:prstGeom>
+          <a:noFill/>
+        </p:spPr>
+        <p:txBody>
+          <a:bodyPr wrap="square" anchor="t" lIns="45720" rIns="45720">
+            <a:spAutoFit/>
+          </a:bodyPr>
+          <a:lstStyle/>
+          <a:p>
+            <a:pPr algn="l">
+              <a:spcAft>
+                <a:spcPts val="100"/>
+              </a:spcAft>
+            </a:pPr>
+            <a:r>
+              <a:rPr sz="1700" b="1">
+                <a:solidFill>
+                  <a:srgbClr val="1F4E79"/>
+                </a:solidFill>
+                <a:latin typeface="Calibri"/>
+              </a:rPr>
+              <a:t>Tipas</a:t>
+            </a:r>
+          </a:p>
+          <a:p>
+            <a:pPr>
+              <a:spcAft>
+                <a:spcPts val="800"/>
+              </a:spcAft>
+            </a:pPr>
+            <a:r>
+              <a:rPr sz="1600" b="0">
+                <a:solidFill>
+                  <a:srgbClr val="222222"/>
+                </a:solidFill>
+                <a:latin typeface="Calibri"/>
+              </a:rPr>
+              <a:t>Mechaninis domkratas.</a:t>
+            </a:r>
+          </a:p>
+          <a:p>
+            <a:pPr>
+              <a:spcAft>
+                <a:spcPts val="100"/>
+              </a:spcAft>
+            </a:pPr>
+            <a:r>
+              <a:rPr sz="1700" b="1">
+                <a:solidFill>
+                  <a:srgbClr val="1F4E79"/>
+                </a:solidFill>
+                <a:latin typeface="Calibri"/>
+              </a:rPr>
+              <a:t>Kaip veikia</a:t>
+            </a:r>
+          </a:p>
+          <a:p>
+            <a:pPr>
+              <a:spcAft>
+                <a:spcPts val="800"/>
+              </a:spcAft>
+            </a:pPr>
+            <a:r>
+              <a:rPr sz="1600" b="0">
+                <a:solidFill>
+                  <a:srgbClr val="222222"/>
+                </a:solidFill>
+                <a:latin typeface="Calibri"/>
+              </a:rPr>
+              <a:t>Sukant rankeną, sraigtas išsisuka iš korpuso ir stumia krovinį aukštyn.</a:t>
+            </a:r>
+          </a:p>
+          <a:p>
+            <a:pPr>
+              <a:spcAft>
+                <a:spcPts val="100"/>
+              </a:spcAft>
+            </a:pPr>
+            <a:r>
+              <a:rPr sz="1700" b="1">
+                <a:solidFill>
+                  <a:srgbClr val="1F4E79"/>
+                </a:solidFill>
+                <a:latin typeface="Calibri"/>
+              </a:rPr>
+              <a:t>Kuo geras</a:t>
+            </a:r>
+          </a:p>
+          <a:p>
+            <a:pPr>
+              <a:spcAft>
+                <a:spcPts val="800"/>
+              </a:spcAft>
+            </a:pPr>
+            <a:r>
+              <a:rPr sz="1600" b="0">
+                <a:solidFill>
+                  <a:srgbClr val="222222"/>
+                </a:solidFill>
+                <a:latin typeface="Calibri"/>
+              </a:rPr>
+              <a:t>Paprastas ir savistabdis – paleidus rankeną krovinys nenukrenta.</a:t>
+            </a:r>
+          </a:p>
+          <a:p>
+            <a:pPr>
+              <a:spcAft>
+                <a:spcPts val="100"/>
+              </a:spcAft>
+            </a:pPr>
+            <a:r>
+              <a:rPr sz="1700" b="1">
+                <a:solidFill>
+                  <a:srgbClr val="1F4E79"/>
+                </a:solidFill>
+                <a:latin typeface="Calibri"/>
+              </a:rPr>
+              <a:t>Problemos</a:t>
+            </a:r>
+          </a:p>
+          <a:p>
+            <a:pPr>
+              <a:spcAft>
+                <a:spcPts val="800"/>
+              </a:spcAft>
+            </a:pPr>
+            <a:r>
+              <a:rPr sz="1600" b="0">
+                <a:solidFill>
+                  <a:srgbClr val="222222"/>
+                </a:solidFill>
+                <a:latin typeface="Calibri"/>
+              </a:rPr>
+              <a:t>Lėtas ir reikalauja daug jėgos: dėl didelės trinties naudingumo koeficientas tik 30–40 %.</a:t>
+            </a:r>
+          </a:p>
+        </p:txBody>
+      </p:sp>
+      <p:sp>
+        <p:nvSpPr>
+          <p:cNvPr id="11" name="TextBox 10"/>
+          <p:cNvSpPr txBox="1"/>
+          <p:nvPr/>
+        </p:nvSpPr>
+        <p:spPr>
+          <a:xfrm>
+            <a:off x="5577840" y="5833872"/>
+            <a:ext cx="6035040" cy="457200"/>
+          </a:xfrm>
+          <a:prstGeom prst="rect">
+            <a:avLst/>
+          </a:prstGeom>
+          <a:noFill/>
+        </p:spPr>
+        <p:txBody>
+          <a:bodyPr wrap="square" anchor="t" lIns="45720" rIns="45720">
+            <a:spAutoFit/>
+          </a:bodyPr>
+          <a:lstStyle/>
+          <a:p>
+            <a:pPr algn="l">
+              <a:spcAft>
+                <a:spcPts val="600"/>
+              </a:spcAft>
+            </a:pPr>
+            <a:r>
               <a:rPr sz="1300" b="0">
                 <a:solidFill>
                   <a:srgbClr val="595959"/>
                 </a:solidFill>
                 <a:latin typeface="Calibri"/>
               </a:rPr>
-              <a:t>Šaltiniai: Wikipedia (n.d.-b); Joyce/Dayton (n.d.); CJ Pony Parts (n.d.); Hi-Lift Jack Company (n.d.-b); CN Trailer Parts (n.d.); Redline Stands (n.d.).</a:t>
+              <a:t>Šaltiniai: Stevenson (1898); Wikipedia (n.d.-a); Joyce/Dayton (n.d.).</a:t>
             </a:r>
           </a:p>
         </p:txBody>
@@ -6727,7 +7996,7 @@
                 </a:solidFill>
                 <a:latin typeface="Calibri"/>
               </a:rPr>
-              <a:t>Šiuolaikinė problema ir inžinerinis uždavinys</a:t>
+              <a:t>Hidraulinis (butelinis) domkratas</a:t>
             </a:r>
           </a:p>
         </p:txBody>
@@ -6810,7 +8079,7 @@
                 </a:solidFill>
                 <a:latin typeface="Calibri"/>
               </a:rPr>
-              <a:t>5 / 10</a:t>
+              <a:t>5 / 12</a:t>
             </a:r>
           </a:p>
         </p:txBody>
@@ -6849,189 +8118,27 @@
                 </a:solidFill>
                 <a:latin typeface="Calibri"/>
               </a:rPr>
-              <a:t>PBL · Domkratas</a:t>
-            </a:r>
-          </a:p>
-        </p:txBody>
-      </p:sp>
-      <p:sp>
-        <p:nvSpPr>
-          <p:cNvPr id="6" name="TextBox 5"/>
-          <p:cNvSpPr txBox="1"/>
-          <p:nvPr/>
-        </p:nvSpPr>
-        <p:spPr>
-          <a:xfrm>
-            <a:off x="640080" y="1463040"/>
-            <a:ext cx="5486400" cy="457200"/>
-          </a:xfrm>
-          <a:prstGeom prst="rect">
-            <a:avLst/>
-          </a:prstGeom>
-          <a:noFill/>
-        </p:spPr>
-        <p:txBody>
-          <a:bodyPr wrap="square" anchor="t" lIns="45720" rIns="45720">
-            <a:spAutoFit/>
-          </a:bodyPr>
-          <a:lstStyle/>
-          <a:p>
-            <a:pPr algn="l">
-              <a:spcAft>
-                <a:spcPts val="600"/>
-              </a:spcAft>
-            </a:pPr>
-            <a:r>
-              <a:rPr sz="2200" b="1">
-                <a:solidFill>
-                  <a:srgbClr val="1F4E79"/>
-                </a:solidFill>
-                <a:latin typeface="Calibri"/>
-              </a:rPr>
-              <a:t>Automobilio žirklinio domkrato problemos</a:t>
-            </a:r>
-          </a:p>
-        </p:txBody>
-      </p:sp>
-      <p:sp>
-        <p:nvSpPr>
-          <p:cNvPr id="7" name="TextBox 6"/>
-          <p:cNvSpPr txBox="1"/>
-          <p:nvPr/>
-        </p:nvSpPr>
-        <p:spPr>
-          <a:xfrm>
-            <a:off x="640080" y="2011680"/>
-            <a:ext cx="5577840" cy="3749039"/>
-          </a:xfrm>
-          <a:prstGeom prst="rect">
-            <a:avLst/>
-          </a:prstGeom>
-          <a:noFill/>
-        </p:spPr>
-        <p:txBody>
-          <a:bodyPr wrap="square" anchor="t" lIns="45720" rIns="45720">
-            <a:spAutoFit/>
-          </a:bodyPr>
-          <a:lstStyle/>
-          <a:p>
-            <a:pPr algn="l">
-              <a:spcAft>
-                <a:spcPts val="1200"/>
-              </a:spcAft>
-            </a:pPr>
-            <a:r>
-              <a:rPr sz="1900" b="1">
-                <a:solidFill>
-                  <a:srgbClr val="222222"/>
-                </a:solidFill>
-                <a:latin typeface="Calibri"/>
-              </a:rPr>
-              <a:t>• Lėtas</a:t>
-            </a:r>
-            <a:r>
-              <a:rPr sz="1900" b="0" i="0">
-                <a:solidFill>
-                  <a:srgbClr val="222222"/>
-                </a:solidFill>
-                <a:latin typeface="Calibri"/>
-              </a:rPr>
-              <a:t> – reikia daug rankenos apsisukimų (mūsų įvertinimu, 60–100).</a:t>
-            </a:r>
-          </a:p>
-          <a:p>
-            <a:pPr>
-              <a:spcAft>
-                <a:spcPts val="1200"/>
-              </a:spcAft>
-            </a:pPr>
-            <a:r>
-              <a:rPr sz="1900" b="1">
-                <a:solidFill>
-                  <a:srgbClr val="222222"/>
-                </a:solidFill>
-                <a:latin typeface="Calibri"/>
-              </a:rPr>
-              <a:t>• Sunku sukti</a:t>
-            </a:r>
-            <a:r>
-              <a:rPr sz="1900" b="0" i="0">
-                <a:solidFill>
-                  <a:srgbClr val="222222"/>
-                </a:solidFill>
-                <a:latin typeface="Calibri"/>
-              </a:rPr>
-              <a:t> – žemoje padėtyje jėga sraigte kelis kartus didesnė už krovinį (F = Q / tg θ).</a:t>
-            </a:r>
-          </a:p>
-          <a:p>
-            <a:pPr>
-              <a:spcAft>
-                <a:spcPts val="1200"/>
-              </a:spcAft>
-            </a:pPr>
-            <a:r>
-              <a:rPr sz="1900" b="1">
-                <a:solidFill>
-                  <a:srgbClr val="222222"/>
-                </a:solidFill>
-                <a:latin typeface="Calibri"/>
-              </a:rPr>
-              <a:t>• Nestabilus</a:t>
-            </a:r>
-            <a:r>
-              <a:rPr sz="1900" b="0" i="0">
-                <a:solidFill>
-                  <a:srgbClr val="222222"/>
-                </a:solidFill>
-                <a:latin typeface="Calibri"/>
-              </a:rPr>
-              <a:t> – siauras pagrindas, ypač ant nelygaus ar minkšto paviršiaus.</a:t>
-            </a:r>
-          </a:p>
-          <a:p>
-            <a:pPr>
-              <a:spcAft>
-                <a:spcPts val="1200"/>
-              </a:spcAft>
-            </a:pPr>
-            <a:r>
-              <a:rPr sz="1900" b="1">
-                <a:solidFill>
-                  <a:srgbClr val="222222"/>
-                </a:solidFill>
-                <a:latin typeface="Calibri"/>
-              </a:rPr>
-              <a:t>• Nepatogus</a:t>
-            </a:r>
-            <a:r>
-              <a:rPr sz="1900" b="0" i="0">
-                <a:solidFill>
-                  <a:srgbClr val="222222"/>
-                </a:solidFill>
-                <a:latin typeface="Calibri"/>
-              </a:rPr>
-              <a:t> – sukti tenka nepatogioje padėtyje.</a:t>
-            </a:r>
-          </a:p>
-        </p:txBody>
-      </p:sp>
-      <p:sp>
-        <p:nvSpPr>
-          <p:cNvPr id="8" name="Rectangle 7"/>
+              <a:t>PBL · Automobilinis domkratas</a:t>
+            </a:r>
+          </a:p>
+        </p:txBody>
+      </p:sp>
+      <p:sp>
+        <p:nvSpPr>
+          <p:cNvPr id="6" name="Rectangle 5"/>
           <p:cNvSpPr/>
           <p:nvPr/>
         </p:nvSpPr>
         <p:spPr>
           <a:xfrm>
-            <a:off x="6492240" y="1508760"/>
-            <a:ext cx="5029200" cy="4206240"/>
+            <a:off x="640080" y="1463040"/>
+            <a:ext cx="4572000" cy="4343400"/>
           </a:xfrm>
           <a:prstGeom prst="rect">
             <a:avLst/>
           </a:prstGeom>
           <a:solidFill>
-            <a:srgbClr val="DEEAF6"/>
+            <a:srgbClr val="1F4E79"/>
           </a:solidFill>
           <a:ln>
             <a:noFill/>
@@ -7060,16 +8167,40 @@
           </a:p>
         </p:txBody>
       </p:sp>
-      <p:sp>
-        <p:nvSpPr>
-          <p:cNvPr id="9" name="TextBox 8"/>
+      <p:pic>
+        <p:nvPicPr>
+          <p:cNvPr id="7" name="Picture 6" descr="2-hidraulinis-dudgeon-1851.png"/>
+          <p:cNvPicPr>
+            <a:picLocks noChangeAspect="1"/>
+          </p:cNvPicPr>
+          <p:nvPr/>
+        </p:nvPicPr>
+        <p:blipFill>
+          <a:blip r:embed="rId3"/>
+          <a:stretch>
+            <a:fillRect/>
+          </a:stretch>
+        </p:blipFill>
+        <p:spPr>
+          <a:xfrm>
+            <a:off x="1486397" y="1554480"/>
+            <a:ext cx="2879364" cy="4160520"/>
+          </a:xfrm>
+          <a:prstGeom prst="rect">
+            <a:avLst/>
+          </a:prstGeom>
+        </p:spPr>
+      </p:pic>
+      <p:sp>
+        <p:nvSpPr>
+          <p:cNvPr id="8" name="TextBox 7"/>
           <p:cNvSpPr txBox="1"/>
           <p:nvPr/>
         </p:nvSpPr>
         <p:spPr>
           <a:xfrm>
-            <a:off x="6720840" y="1691640"/>
-            <a:ext cx="4572000" cy="3931920"/>
+            <a:off x="640080" y="5833872"/>
+            <a:ext cx="4572000" cy="365760"/>
           </a:xfrm>
           <a:prstGeom prst="rect">
             <a:avLst/>
@@ -7088,139 +8219,27 @@
               </a:spcAft>
             </a:pPr>
             <a:r>
-              <a:rPr sz="2200" b="1">
-                <a:solidFill>
-                  <a:srgbClr val="1F4E79"/>
-                </a:solidFill>
-                <a:latin typeface="Calibri"/>
-              </a:rPr>
-              <a:t>Uždavinys</a:t>
-            </a:r>
-          </a:p>
-          <a:p>
-            <a:pPr>
-              <a:spcAft>
-                <a:spcPts val="1400"/>
-              </a:spcAft>
-            </a:pPr>
-            <a:r>
-              <a:rPr sz="1900" b="0">
-                <a:solidFill>
-                  <a:srgbClr val="222222"/>
-                </a:solidFill>
-                <a:latin typeface="Calibri"/>
-              </a:rPr>
-              <a:t>Patobulinti žirklinį domkratą, kad jis 1,5 t automobilį pakeltų greičiau nei per 60 s, be didelių fizinių pastangų ir stabiliai, išlaikant kompaktiškumą ir saugumą.</a:t>
-            </a:r>
-          </a:p>
-          <a:p>
-            <a:pPr>
-              <a:spcAft>
-                <a:spcPts val="400"/>
-              </a:spcAft>
-            </a:pPr>
-            <a:r>
-              <a:rPr sz="1900" b="1">
-                <a:solidFill>
-                  <a:srgbClr val="222222"/>
-                </a:solidFill>
-                <a:latin typeface="Calibri"/>
-              </a:rPr>
-              <a:t>Tikslai:</a:t>
-            </a:r>
-          </a:p>
-          <a:p>
-            <a:pPr>
-              <a:spcAft>
-                <a:spcPts val="200"/>
-              </a:spcAft>
-            </a:pPr>
-            <a:r>
-              <a:rPr sz="1800" b="0">
-                <a:solidFill>
-                  <a:srgbClr val="222222"/>
-                </a:solidFill>
-                <a:latin typeface="Calibri"/>
-              </a:rPr>
-              <a:t>• keliamoji galia ≥ 1500 kg</a:t>
-            </a:r>
-          </a:p>
-          <a:p>
-            <a:pPr>
-              <a:spcAft>
-                <a:spcPts val="200"/>
-              </a:spcAft>
-            </a:pPr>
-            <a:r>
-              <a:rPr sz="1800" b="0">
-                <a:solidFill>
-                  <a:srgbClr val="222222"/>
-                </a:solidFill>
-                <a:latin typeface="Calibri"/>
-              </a:rPr>
-              <a:t>• kėlimo aukštis 100–400 mm</a:t>
-            </a:r>
-          </a:p>
-          <a:p>
-            <a:pPr>
-              <a:spcAft>
-                <a:spcPts val="200"/>
-              </a:spcAft>
-            </a:pPr>
-            <a:r>
-              <a:rPr sz="1800" b="0">
-                <a:solidFill>
-                  <a:srgbClr val="222222"/>
-                </a:solidFill>
-                <a:latin typeface="Calibri"/>
-              </a:rPr>
-              <a:t>• kėlimo laikas ≤ 60 s</a:t>
-            </a:r>
-          </a:p>
-          <a:p>
-            <a:pPr>
-              <a:spcAft>
-                <a:spcPts val="200"/>
-              </a:spcAft>
-            </a:pPr>
-            <a:r>
-              <a:rPr sz="1800" b="0">
-                <a:solidFill>
-                  <a:srgbClr val="222222"/>
-                </a:solidFill>
-                <a:latin typeface="Calibri"/>
-              </a:rPr>
-              <a:t>• maitinimas iš 12 V automobilio lizdo</a:t>
-            </a:r>
-          </a:p>
-          <a:p>
-            <a:pPr>
-              <a:spcAft>
-                <a:spcPts val="200"/>
-              </a:spcAft>
-            </a:pPr>
-            <a:r>
-              <a:rPr sz="1800" b="0">
-                <a:solidFill>
-                  <a:srgbClr val="222222"/>
-                </a:solidFill>
-                <a:latin typeface="Calibri"/>
-              </a:rPr>
-              <a:t>• masė ≤ 4,5 kg</a:t>
-            </a:r>
-          </a:p>
-        </p:txBody>
-      </p:sp>
-      <p:sp>
-        <p:nvSpPr>
-          <p:cNvPr id="10" name="TextBox 9"/>
+              <a:rPr sz="1200" b="0">
+                <a:solidFill>
+                  <a:srgbClr val="595959"/>
+                </a:solidFill>
+                <a:latin typeface="Calibri"/>
+              </a:rPr>
+              <a:t>Brėžinys: R. Dudgeon, JAV patentas Nr. 8,203 (1851)</a:t>
+            </a:r>
+          </a:p>
+        </p:txBody>
+      </p:sp>
+      <p:sp>
+        <p:nvSpPr>
+          <p:cNvPr id="9" name="TextBox 8"/>
           <p:cNvSpPr txBox="1"/>
           <p:nvPr/>
         </p:nvSpPr>
         <p:spPr>
           <a:xfrm>
-            <a:off x="640080" y="5897880"/>
-            <a:ext cx="10881360" cy="457200"/>
+            <a:off x="5577840" y="1417320"/>
+            <a:ext cx="6035040" cy="411480"/>
           </a:xfrm>
           <a:prstGeom prst="rect">
             <a:avLst/>
@@ -7239,13 +8258,203 @@
               </a:spcAft>
             </a:pPr>
             <a:r>
+              <a:rPr sz="1500" b="1">
+                <a:solidFill>
+                  <a:srgbClr val="1F4E79"/>
+                </a:solidFill>
+                <a:latin typeface="Calibri"/>
+              </a:rPr>
+              <a:t>2 žingsnis · 1851 m. · Pristato: [vardas]</a:t>
+            </a:r>
+          </a:p>
+        </p:txBody>
+      </p:sp>
+      <p:sp>
+        <p:nvSpPr>
+          <p:cNvPr id="10" name="TextBox 9"/>
+          <p:cNvSpPr txBox="1"/>
+          <p:nvPr/>
+        </p:nvSpPr>
+        <p:spPr>
+          <a:xfrm>
+            <a:off x="5577840" y="1783080"/>
+            <a:ext cx="6035040" cy="3977639"/>
+          </a:xfrm>
+          <a:prstGeom prst="rect">
+            <a:avLst/>
+          </a:prstGeom>
+          <a:noFill/>
+        </p:spPr>
+        <p:txBody>
+          <a:bodyPr wrap="square" anchor="t" lIns="45720" rIns="45720">
+            <a:spAutoFit/>
+          </a:bodyPr>
+          <a:lstStyle/>
+          <a:p>
+            <a:pPr algn="l">
+              <a:spcAft>
+                <a:spcPts val="100"/>
+              </a:spcAft>
+            </a:pPr>
+            <a:r>
+              <a:rPr sz="1700" b="1">
+                <a:solidFill>
+                  <a:srgbClr val="1F4E79"/>
+                </a:solidFill>
+                <a:latin typeface="Calibri"/>
+              </a:rPr>
+              <a:t>Tipas</a:t>
+            </a:r>
+          </a:p>
+          <a:p>
+            <a:pPr>
+              <a:spcAft>
+                <a:spcPts val="800"/>
+              </a:spcAft>
+            </a:pPr>
+            <a:r>
+              <a:rPr sz="1600" b="0">
+                <a:solidFill>
+                  <a:srgbClr val="222222"/>
+                </a:solidFill>
+                <a:latin typeface="Calibri"/>
+              </a:rPr>
+              <a:t>Hidraulinis domkratas.</a:t>
+            </a:r>
+          </a:p>
+          <a:p>
+            <a:pPr>
+              <a:spcAft>
+                <a:spcPts val="100"/>
+              </a:spcAft>
+            </a:pPr>
+            <a:r>
+              <a:rPr sz="1700" b="1">
+                <a:solidFill>
+                  <a:srgbClr val="1F4E79"/>
+                </a:solidFill>
+                <a:latin typeface="Calibri"/>
+              </a:rPr>
+              <a:t>Kaip veikia</a:t>
+            </a:r>
+          </a:p>
+          <a:p>
+            <a:pPr>
+              <a:spcAft>
+                <a:spcPts val="800"/>
+              </a:spcAft>
+            </a:pPr>
+            <a:r>
+              <a:rPr sz="1600" b="0">
+                <a:solidFill>
+                  <a:srgbClr val="222222"/>
+                </a:solidFill>
+                <a:latin typeface="Calibri"/>
+              </a:rPr>
+              <a:t>Svirtimi pumpuojamas skystis iš mažo cilindro po dideliu stūmokliu. Pagal Paskalio dėsnį jėga padidėja. Dudgeon naudojo vandenį.</a:t>
+            </a:r>
+          </a:p>
+          <a:p>
+            <a:pPr>
+              <a:spcAft>
+                <a:spcPts val="100"/>
+              </a:spcAft>
+            </a:pPr>
+            <a:r>
+              <a:rPr sz="1700" b="1">
+                <a:solidFill>
+                  <a:srgbClr val="1F4E79"/>
+                </a:solidFill>
+                <a:latin typeface="Calibri"/>
+              </a:rPr>
+              <a:t>Ką išsprendė</a:t>
+            </a:r>
+          </a:p>
+          <a:p>
+            <a:pPr>
+              <a:spcAft>
+                <a:spcPts val="800"/>
+              </a:spcAft>
+            </a:pPr>
+            <a:r>
+              <a:rPr sz="1600" b="0">
+                <a:solidFill>
+                  <a:srgbClr val="222222"/>
+                </a:solidFill>
+                <a:latin typeface="Calibri"/>
+              </a:rPr>
+              <a:t>Dudgeon rašė, kad jo presas atliks didžiąją dalį darbo, kurį iki tol atlikdavo sraigtas. Reikia mažiau jėgos, o pakeliami kroviniai iki 50 t.</a:t>
+            </a:r>
+          </a:p>
+          <a:p>
+            <a:pPr>
+              <a:spcAft>
+                <a:spcPts val="100"/>
+              </a:spcAft>
+            </a:pPr>
+            <a:r>
+              <a:rPr sz="1700" b="1">
+                <a:solidFill>
+                  <a:srgbClr val="1F4E79"/>
+                </a:solidFill>
+                <a:latin typeface="Calibri"/>
+              </a:rPr>
+              <a:t>Problemos</a:t>
+            </a:r>
+          </a:p>
+          <a:p>
+            <a:pPr>
+              <a:spcAft>
+                <a:spcPts val="800"/>
+              </a:spcAft>
+            </a:pPr>
+            <a:r>
+              <a:rPr sz="1600" b="0">
+                <a:solidFill>
+                  <a:srgbClr val="222222"/>
+                </a:solidFill>
+                <a:latin typeface="Calibri"/>
+              </a:rPr>
+              <a:t>Didelis pradinis aukštis – netelpa po žemu automobiliu. Mažas pagrindas, todėl mažiau stabilus. Ilgai pumpuoti rankena varginanti.</a:t>
+            </a:r>
+          </a:p>
+        </p:txBody>
+      </p:sp>
+      <p:sp>
+        <p:nvSpPr>
+          <p:cNvPr id="11" name="TextBox 10"/>
+          <p:cNvSpPr txBox="1"/>
+          <p:nvPr/>
+        </p:nvSpPr>
+        <p:spPr>
+          <a:xfrm>
+            <a:off x="5577840" y="5833872"/>
+            <a:ext cx="6035040" cy="457200"/>
+          </a:xfrm>
+          <a:prstGeom prst="rect">
+            <a:avLst/>
+          </a:prstGeom>
+          <a:noFill/>
+        </p:spPr>
+        <p:txBody>
+          <a:bodyPr wrap="square" anchor="t" lIns="45720" rIns="45720">
+            <a:spAutoFit/>
+          </a:bodyPr>
+          <a:lstStyle/>
+          <a:p>
+            <a:pPr algn="l">
+              <a:spcAft>
+                <a:spcPts val="600"/>
+              </a:spcAft>
+            </a:pPr>
+            <a:r>
               <a:rPr sz="1300" b="0">
                 <a:solidFill>
                   <a:srgbClr val="595959"/>
                 </a:solidFill>
                 <a:latin typeface="Calibri"/>
               </a:rPr>
-              <a:t>Šaltiniai: CN Trailer Parts (n.d.). Skaičiai ir tikslai – mūsų įvertinimai.</a:t>
+              <a:t>Šaltiniai: Dudgeon (1851); LibreTexts (n.d.); CJ Pony Parts (n.d.); Redline Stands (n.d.); Juds (1967).</a:t>
             </a:r>
           </a:p>
         </p:txBody>
@@ -7302,7 +8511,7 @@
                 </a:solidFill>
                 <a:latin typeface="Calibri"/>
               </a:rPr>
-              <a:t>Sprendimas: keičiami elementai ir medžiagos</a:t>
+              <a:t>Žirklinis domkratas</a:t>
             </a:r>
           </a:p>
         </p:txBody>
@@ -7385,7 +8594,7 @@
                 </a:solidFill>
                 <a:latin typeface="Calibri"/>
               </a:rPr>
-              <a:t>6 / 10</a:t>
+              <a:t>6 / 12</a:t>
             </a:r>
           </a:p>
         </p:txBody>
@@ -7424,7 +8633,1037 @@
                 </a:solidFill>
                 <a:latin typeface="Calibri"/>
               </a:rPr>
-              <a:t>PBL · Domkratas</a:t>
+              <a:t>PBL · Automobilinis domkratas</a:t>
+            </a:r>
+          </a:p>
+        </p:txBody>
+      </p:sp>
+      <p:sp>
+        <p:nvSpPr>
+          <p:cNvPr id="6" name="Rectangle 5"/>
+          <p:cNvSpPr/>
+          <p:nvPr/>
+        </p:nvSpPr>
+        <p:spPr>
+          <a:xfrm>
+            <a:off x="640080" y="1463040"/>
+            <a:ext cx="4572000" cy="4343400"/>
+          </a:xfrm>
+          <a:prstGeom prst="rect">
+            <a:avLst/>
+          </a:prstGeom>
+          <a:solidFill>
+            <a:srgbClr val="1F4E79"/>
+          </a:solidFill>
+          <a:ln>
+            <a:noFill/>
+          </a:ln>
+          <a:effectLst/>
+        </p:spPr>
+        <p:style>
+          <a:lnRef idx="1">
+            <a:schemeClr val="accent1"/>
+          </a:lnRef>
+          <a:fillRef idx="3">
+            <a:schemeClr val="accent1"/>
+          </a:fillRef>
+          <a:effectRef idx="2">
+            <a:schemeClr val="accent1"/>
+          </a:effectRef>
+          <a:fontRef idx="minor">
+            <a:schemeClr val="lt1"/>
+          </a:fontRef>
+        </p:style>
+        <p:txBody>
+          <a:bodyPr rtlCol="0" anchor="ctr"/>
+          <a:lstStyle/>
+          <a:p>
+            <a:pPr algn="ctr"/>
+          </a:p>
+        </p:txBody>
+      </p:sp>
+      <p:pic>
+        <p:nvPicPr>
+          <p:cNvPr id="7" name="Picture 6" descr="3-zirklinis-lafrance-1920.png"/>
+          <p:cNvPicPr>
+            <a:picLocks noChangeAspect="1"/>
+          </p:cNvPicPr>
+          <p:nvPr/>
+        </p:nvPicPr>
+        <p:blipFill>
+          <a:blip r:embed="rId3"/>
+          <a:stretch>
+            <a:fillRect/>
+          </a:stretch>
+        </p:blipFill>
+        <p:spPr>
+          <a:xfrm>
+            <a:off x="1510947" y="1554480"/>
+            <a:ext cx="2830264" cy="4160520"/>
+          </a:xfrm>
+          <a:prstGeom prst="rect">
+            <a:avLst/>
+          </a:prstGeom>
+        </p:spPr>
+      </p:pic>
+      <p:sp>
+        <p:nvSpPr>
+          <p:cNvPr id="8" name="TextBox 7"/>
+          <p:cNvSpPr txBox="1"/>
+          <p:nvPr/>
+        </p:nvSpPr>
+        <p:spPr>
+          <a:xfrm>
+            <a:off x="640080" y="5833872"/>
+            <a:ext cx="4572000" cy="365760"/>
+          </a:xfrm>
+          <a:prstGeom prst="rect">
+            <a:avLst/>
+          </a:prstGeom>
+          <a:noFill/>
+        </p:spPr>
+        <p:txBody>
+          <a:bodyPr wrap="square" anchor="t" lIns="45720" rIns="45720">
+            <a:spAutoFit/>
+          </a:bodyPr>
+          <a:lstStyle/>
+          <a:p>
+            <a:pPr algn="l">
+              <a:spcAft>
+                <a:spcPts val="600"/>
+              </a:spcAft>
+            </a:pPr>
+            <a:r>
+              <a:rPr sz="1200" b="0">
+                <a:solidFill>
+                  <a:srgbClr val="595959"/>
+                </a:solidFill>
+                <a:latin typeface="Calibri"/>
+              </a:rPr>
+              <a:t>Brėžinys: J. LaFrance, JAV patentas Nr. 1,362,630 (1920)</a:t>
+            </a:r>
+          </a:p>
+        </p:txBody>
+      </p:sp>
+      <p:sp>
+        <p:nvSpPr>
+          <p:cNvPr id="9" name="TextBox 8"/>
+          <p:cNvSpPr txBox="1"/>
+          <p:nvPr/>
+        </p:nvSpPr>
+        <p:spPr>
+          <a:xfrm>
+            <a:off x="5577840" y="1417320"/>
+            <a:ext cx="6035040" cy="411480"/>
+          </a:xfrm>
+          <a:prstGeom prst="rect">
+            <a:avLst/>
+          </a:prstGeom>
+          <a:noFill/>
+        </p:spPr>
+        <p:txBody>
+          <a:bodyPr wrap="square" anchor="t" lIns="45720" rIns="45720">
+            <a:spAutoFit/>
+          </a:bodyPr>
+          <a:lstStyle/>
+          <a:p>
+            <a:pPr algn="l">
+              <a:spcAft>
+                <a:spcPts val="600"/>
+              </a:spcAft>
+            </a:pPr>
+            <a:r>
+              <a:rPr sz="1500" b="1">
+                <a:solidFill>
+                  <a:srgbClr val="1F4E79"/>
+                </a:solidFill>
+                <a:latin typeface="Calibri"/>
+              </a:rPr>
+              <a:t>3 žingsnis · 1920 m. · Pristato: [vardas]</a:t>
+            </a:r>
+          </a:p>
+        </p:txBody>
+      </p:sp>
+      <p:sp>
+        <p:nvSpPr>
+          <p:cNvPr id="10" name="TextBox 9"/>
+          <p:cNvSpPr txBox="1"/>
+          <p:nvPr/>
+        </p:nvSpPr>
+        <p:spPr>
+          <a:xfrm>
+            <a:off x="5577840" y="1783080"/>
+            <a:ext cx="6035040" cy="3977639"/>
+          </a:xfrm>
+          <a:prstGeom prst="rect">
+            <a:avLst/>
+          </a:prstGeom>
+          <a:noFill/>
+        </p:spPr>
+        <p:txBody>
+          <a:bodyPr wrap="square" anchor="t" lIns="45720" rIns="45720">
+            <a:spAutoFit/>
+          </a:bodyPr>
+          <a:lstStyle/>
+          <a:p>
+            <a:pPr algn="l">
+              <a:spcAft>
+                <a:spcPts val="100"/>
+              </a:spcAft>
+            </a:pPr>
+            <a:r>
+              <a:rPr sz="1700" b="1">
+                <a:solidFill>
+                  <a:srgbClr val="1F4E79"/>
+                </a:solidFill>
+                <a:latin typeface="Calibri"/>
+              </a:rPr>
+              <a:t>Tipas</a:t>
+            </a:r>
+          </a:p>
+          <a:p>
+            <a:pPr>
+              <a:spcAft>
+                <a:spcPts val="800"/>
+              </a:spcAft>
+            </a:pPr>
+            <a:r>
+              <a:rPr sz="1600" b="0">
+                <a:solidFill>
+                  <a:srgbClr val="222222"/>
+                </a:solidFill>
+                <a:latin typeface="Calibri"/>
+              </a:rPr>
+              <a:t>Mechaninis domkratas: sraigtas ir rombo formos svirtys.</a:t>
+            </a:r>
+          </a:p>
+          <a:p>
+            <a:pPr>
+              <a:spcAft>
+                <a:spcPts val="100"/>
+              </a:spcAft>
+            </a:pPr>
+            <a:r>
+              <a:rPr sz="1700" b="1">
+                <a:solidFill>
+                  <a:srgbClr val="1F4E79"/>
+                </a:solidFill>
+                <a:latin typeface="Calibri"/>
+              </a:rPr>
+              <a:t>Kaip veikia</a:t>
+            </a:r>
+          </a:p>
+          <a:p>
+            <a:pPr>
+              <a:spcAft>
+                <a:spcPts val="800"/>
+              </a:spcAft>
+            </a:pPr>
+            <a:r>
+              <a:rPr sz="1600" b="0">
+                <a:solidFill>
+                  <a:srgbClr val="222222"/>
+                </a:solidFill>
+                <a:latin typeface="Calibri"/>
+              </a:rPr>
+              <a:t>Sukamas horizontalus sraigtas traukia rombo šonines jungtis vieną prie kitos, todėl viršus kyla.</a:t>
+            </a:r>
+          </a:p>
+          <a:p>
+            <a:pPr>
+              <a:spcAft>
+                <a:spcPts val="100"/>
+              </a:spcAft>
+            </a:pPr>
+            <a:r>
+              <a:rPr sz="1700" b="1">
+                <a:solidFill>
+                  <a:srgbClr val="1F4E79"/>
+                </a:solidFill>
+                <a:latin typeface="Calibri"/>
+              </a:rPr>
+              <a:t>Ką išsprendė</a:t>
+            </a:r>
+          </a:p>
+          <a:p>
+            <a:pPr>
+              <a:spcAft>
+                <a:spcPts val="800"/>
+              </a:spcAft>
+            </a:pPr>
+            <a:r>
+              <a:rPr sz="1600" b="0">
+                <a:solidFill>
+                  <a:srgbClr val="222222"/>
+                </a:solidFill>
+                <a:latin typeface="Calibri"/>
+              </a:rPr>
+              <a:t>Žemas ir lengvas – telpa po automobiliu ir bagažinėje. LaFrance norėjo, kad jis būtų tvirtas, lengvai valdomas, paprastas ir pigus. Todėl jį deda į naujus automobilius.</a:t>
+            </a:r>
+          </a:p>
+          <a:p>
+            <a:pPr>
+              <a:spcAft>
+                <a:spcPts val="100"/>
+              </a:spcAft>
+            </a:pPr>
+            <a:r>
+              <a:rPr sz="1700" b="1">
+                <a:solidFill>
+                  <a:srgbClr val="1F4E79"/>
+                </a:solidFill>
+                <a:latin typeface="Calibri"/>
+              </a:rPr>
+              <a:t>Problemos</a:t>
+            </a:r>
+          </a:p>
+          <a:p>
+            <a:pPr>
+              <a:spcAft>
+                <a:spcPts val="800"/>
+              </a:spcAft>
+            </a:pPr>
+            <a:r>
+              <a:rPr sz="1600" b="0">
+                <a:solidFill>
+                  <a:srgbClr val="222222"/>
+                </a:solidFill>
+                <a:latin typeface="Calibri"/>
+              </a:rPr>
+              <a:t>Lėtas – reikia daug rankenos apsisukimų. Siauras pagrindas, nestabilus ant minkšto ar nelygaus paviršiaus.</a:t>
+            </a:r>
+          </a:p>
+        </p:txBody>
+      </p:sp>
+      <p:sp>
+        <p:nvSpPr>
+          <p:cNvPr id="11" name="TextBox 10"/>
+          <p:cNvSpPr txBox="1"/>
+          <p:nvPr/>
+        </p:nvSpPr>
+        <p:spPr>
+          <a:xfrm>
+            <a:off x="5577840" y="5833872"/>
+            <a:ext cx="6035040" cy="457200"/>
+          </a:xfrm>
+          <a:prstGeom prst="rect">
+            <a:avLst/>
+          </a:prstGeom>
+          <a:noFill/>
+        </p:spPr>
+        <p:txBody>
+          <a:bodyPr wrap="square" anchor="t" lIns="45720" rIns="45720">
+            <a:spAutoFit/>
+          </a:bodyPr>
+          <a:lstStyle/>
+          <a:p>
+            <a:pPr algn="l">
+              <a:spcAft>
+                <a:spcPts val="600"/>
+              </a:spcAft>
+            </a:pPr>
+            <a:r>
+              <a:rPr sz="1300" b="0">
+                <a:solidFill>
+                  <a:srgbClr val="595959"/>
+                </a:solidFill>
+                <a:latin typeface="Calibri"/>
+              </a:rPr>
+              <a:t>Šaltiniai: LaFrance (1920); Brown (1949); CJ Pony Parts (n.d.); CN Trailer Parts (n.d.).</a:t>
+            </a:r>
+          </a:p>
+        </p:txBody>
+      </p:sp>
+    </p:spTree>
+  </p:cSld>
+  <p:clrMapOvr>
+    <a:masterClrMapping/>
+  </p:clrMapOvr>
+</p:sld>
+</file>
+
+<file path=ppt/slides/slide7.xml><?xml version="1.0" encoding="utf-8"?>
+<p:sld xmlns:a="http://schemas.openxmlformats.org/drawingml/2006/main" xmlns:p="http://schemas.openxmlformats.org/presentationml/2006/main" xmlns:r="http://schemas.openxmlformats.org/officeDocument/2006/relationships">
+  <p:cSld>
+    <p:spTree>
+      <p:nvGrpSpPr>
+        <p:cNvPr id="1" name=""/>
+        <p:cNvGrpSpPr/>
+        <p:nvPr/>
+      </p:nvGrpSpPr>
+      <p:grpSpPr/>
+      <p:sp>
+        <p:nvSpPr>
+          <p:cNvPr id="2" name="TextBox 1"/>
+          <p:cNvSpPr txBox="1"/>
+          <p:nvPr/>
+        </p:nvSpPr>
+        <p:spPr>
+          <a:xfrm>
+            <a:off x="548640" y="320040"/>
+            <a:ext cx="11064240" cy="822960"/>
+          </a:xfrm>
+          <a:prstGeom prst="rect">
+            <a:avLst/>
+          </a:prstGeom>
+          <a:noFill/>
+        </p:spPr>
+        <p:txBody>
+          <a:bodyPr wrap="square" anchor="b" lIns="45720" rIns="45720">
+            <a:spAutoFit/>
+          </a:bodyPr>
+          <a:lstStyle/>
+          <a:p>
+            <a:pPr algn="l">
+              <a:spcAft>
+                <a:spcPts val="600"/>
+              </a:spcAft>
+            </a:pPr>
+            <a:r>
+              <a:rPr sz="3200" b="1">
+                <a:solidFill>
+                  <a:srgbClr val="1F4E79"/>
+                </a:solidFill>
+                <a:latin typeface="Calibri"/>
+              </a:rPr>
+              <a:t>Pneumohidraulinis domkratas</a:t>
+            </a:r>
+          </a:p>
+        </p:txBody>
+      </p:sp>
+      <p:sp>
+        <p:nvSpPr>
+          <p:cNvPr id="3" name="Rectangle 2"/>
+          <p:cNvSpPr/>
+          <p:nvPr/>
+        </p:nvSpPr>
+        <p:spPr>
+          <a:xfrm>
+            <a:off x="594360" y="1207008"/>
+            <a:ext cx="10972800" cy="27432"/>
+          </a:xfrm>
+          <a:prstGeom prst="rect">
+            <a:avLst/>
+          </a:prstGeom>
+          <a:solidFill>
+            <a:srgbClr val="1F4E79"/>
+          </a:solidFill>
+          <a:ln>
+            <a:noFill/>
+          </a:ln>
+          <a:effectLst/>
+        </p:spPr>
+        <p:style>
+          <a:lnRef idx="1">
+            <a:schemeClr val="accent1"/>
+          </a:lnRef>
+          <a:fillRef idx="3">
+            <a:schemeClr val="accent1"/>
+          </a:fillRef>
+          <a:effectRef idx="2">
+            <a:schemeClr val="accent1"/>
+          </a:effectRef>
+          <a:fontRef idx="minor">
+            <a:schemeClr val="lt1"/>
+          </a:fontRef>
+        </p:style>
+        <p:txBody>
+          <a:bodyPr rtlCol="0" anchor="ctr"/>
+          <a:lstStyle/>
+          <a:p>
+            <a:pPr algn="ctr"/>
+          </a:p>
+        </p:txBody>
+      </p:sp>
+      <p:sp>
+        <p:nvSpPr>
+          <p:cNvPr id="4" name="TextBox 3"/>
+          <p:cNvSpPr txBox="1"/>
+          <p:nvPr/>
+        </p:nvSpPr>
+        <p:spPr>
+          <a:xfrm>
+            <a:off x="10698480" y="6355080"/>
+            <a:ext cx="1005840" cy="365760"/>
+          </a:xfrm>
+          <a:prstGeom prst="rect">
+            <a:avLst/>
+          </a:prstGeom>
+          <a:noFill/>
+        </p:spPr>
+        <p:txBody>
+          <a:bodyPr wrap="square" anchor="t" lIns="45720" rIns="45720">
+            <a:spAutoFit/>
+          </a:bodyPr>
+          <a:lstStyle/>
+          <a:p>
+            <a:pPr algn="r">
+              <a:spcAft>
+                <a:spcPts val="600"/>
+              </a:spcAft>
+            </a:pPr>
+            <a:r>
+              <a:rPr sz="1200" b="0">
+                <a:solidFill>
+                  <a:srgbClr val="595959"/>
+                </a:solidFill>
+                <a:latin typeface="Calibri"/>
+              </a:rPr>
+              <a:t>7 / 12</a:t>
+            </a:r>
+          </a:p>
+        </p:txBody>
+      </p:sp>
+      <p:sp>
+        <p:nvSpPr>
+          <p:cNvPr id="5" name="TextBox 4"/>
+          <p:cNvSpPr txBox="1"/>
+          <p:nvPr/>
+        </p:nvSpPr>
+        <p:spPr>
+          <a:xfrm>
+            <a:off x="548640" y="6355080"/>
+            <a:ext cx="7315200" cy="365760"/>
+          </a:xfrm>
+          <a:prstGeom prst="rect">
+            <a:avLst/>
+          </a:prstGeom>
+          <a:noFill/>
+        </p:spPr>
+        <p:txBody>
+          <a:bodyPr wrap="square" anchor="t" lIns="45720" rIns="45720">
+            <a:spAutoFit/>
+          </a:bodyPr>
+          <a:lstStyle/>
+          <a:p>
+            <a:pPr algn="l">
+              <a:spcAft>
+                <a:spcPts val="600"/>
+              </a:spcAft>
+            </a:pPr>
+            <a:r>
+              <a:rPr sz="1200" b="0">
+                <a:solidFill>
+                  <a:srgbClr val="595959"/>
+                </a:solidFill>
+                <a:latin typeface="Calibri"/>
+              </a:rPr>
+              <a:t>PBL · Automobilinis domkratas</a:t>
+            </a:r>
+          </a:p>
+        </p:txBody>
+      </p:sp>
+      <p:sp>
+        <p:nvSpPr>
+          <p:cNvPr id="6" name="Rectangle 5"/>
+          <p:cNvSpPr/>
+          <p:nvPr/>
+        </p:nvSpPr>
+        <p:spPr>
+          <a:xfrm>
+            <a:off x="640080" y="1463040"/>
+            <a:ext cx="4572000" cy="4343400"/>
+          </a:xfrm>
+          <a:prstGeom prst="rect">
+            <a:avLst/>
+          </a:prstGeom>
+          <a:solidFill>
+            <a:srgbClr val="1F4E79"/>
+          </a:solidFill>
+          <a:ln>
+            <a:noFill/>
+          </a:ln>
+          <a:effectLst/>
+        </p:spPr>
+        <p:style>
+          <a:lnRef idx="1">
+            <a:schemeClr val="accent1"/>
+          </a:lnRef>
+          <a:fillRef idx="3">
+            <a:schemeClr val="accent1"/>
+          </a:fillRef>
+          <a:effectRef idx="2">
+            <a:schemeClr val="accent1"/>
+          </a:effectRef>
+          <a:fontRef idx="minor">
+            <a:schemeClr val="lt1"/>
+          </a:fontRef>
+        </p:style>
+        <p:txBody>
+          <a:bodyPr rtlCol="0" anchor="ctr"/>
+          <a:lstStyle/>
+          <a:p>
+            <a:pPr algn="ctr"/>
+          </a:p>
+        </p:txBody>
+      </p:sp>
+      <p:pic>
+        <p:nvPicPr>
+          <p:cNvPr id="7" name="Picture 6" descr="4-pneumohidraulinis-juds-1967.png"/>
+          <p:cNvPicPr>
+            <a:picLocks noChangeAspect="1"/>
+          </p:cNvPicPr>
+          <p:nvPr/>
+        </p:nvPicPr>
+        <p:blipFill>
+          <a:blip r:embed="rId3"/>
+          <a:stretch>
+            <a:fillRect/>
+          </a:stretch>
+        </p:blipFill>
+        <p:spPr>
+          <a:xfrm>
+            <a:off x="1618530" y="1554480"/>
+            <a:ext cx="2615099" cy="4160520"/>
+          </a:xfrm>
+          <a:prstGeom prst="rect">
+            <a:avLst/>
+          </a:prstGeom>
+        </p:spPr>
+      </p:pic>
+      <p:sp>
+        <p:nvSpPr>
+          <p:cNvPr id="8" name="TextBox 7"/>
+          <p:cNvSpPr txBox="1"/>
+          <p:nvPr/>
+        </p:nvSpPr>
+        <p:spPr>
+          <a:xfrm>
+            <a:off x="640080" y="5833872"/>
+            <a:ext cx="4572000" cy="365760"/>
+          </a:xfrm>
+          <a:prstGeom prst="rect">
+            <a:avLst/>
+          </a:prstGeom>
+          <a:noFill/>
+        </p:spPr>
+        <p:txBody>
+          <a:bodyPr wrap="square" anchor="t" lIns="45720" rIns="45720">
+            <a:spAutoFit/>
+          </a:bodyPr>
+          <a:lstStyle/>
+          <a:p>
+            <a:pPr algn="l">
+              <a:spcAft>
+                <a:spcPts val="600"/>
+              </a:spcAft>
+            </a:pPr>
+            <a:r>
+              <a:rPr sz="1200" b="0">
+                <a:solidFill>
+                  <a:srgbClr val="595959"/>
+                </a:solidFill>
+                <a:latin typeface="Calibri"/>
+              </a:rPr>
+              <a:t>Brėžinys: D. H. Juds, JAV patentas Nr. 3,329,403 (1967)</a:t>
+            </a:r>
+          </a:p>
+        </p:txBody>
+      </p:sp>
+      <p:sp>
+        <p:nvSpPr>
+          <p:cNvPr id="9" name="TextBox 8"/>
+          <p:cNvSpPr txBox="1"/>
+          <p:nvPr/>
+        </p:nvSpPr>
+        <p:spPr>
+          <a:xfrm>
+            <a:off x="5577840" y="1417320"/>
+            <a:ext cx="6035040" cy="411480"/>
+          </a:xfrm>
+          <a:prstGeom prst="rect">
+            <a:avLst/>
+          </a:prstGeom>
+          <a:noFill/>
+        </p:spPr>
+        <p:txBody>
+          <a:bodyPr wrap="square" anchor="t" lIns="45720" rIns="45720">
+            <a:spAutoFit/>
+          </a:bodyPr>
+          <a:lstStyle/>
+          <a:p>
+            <a:pPr algn="l">
+              <a:spcAft>
+                <a:spcPts val="600"/>
+              </a:spcAft>
+            </a:pPr>
+            <a:r>
+              <a:rPr sz="1500" b="1">
+                <a:solidFill>
+                  <a:srgbClr val="1F4E79"/>
+                </a:solidFill>
+                <a:latin typeface="Calibri"/>
+              </a:rPr>
+              <a:t>4 žingsnis · 1966 m. · Pristato: [vardas]</a:t>
+            </a:r>
+          </a:p>
+        </p:txBody>
+      </p:sp>
+      <p:sp>
+        <p:nvSpPr>
+          <p:cNvPr id="10" name="TextBox 9"/>
+          <p:cNvSpPr txBox="1"/>
+          <p:nvPr/>
+        </p:nvSpPr>
+        <p:spPr>
+          <a:xfrm>
+            <a:off x="5577840" y="1783080"/>
+            <a:ext cx="6035040" cy="3977639"/>
+          </a:xfrm>
+          <a:prstGeom prst="rect">
+            <a:avLst/>
+          </a:prstGeom>
+          <a:noFill/>
+        </p:spPr>
+        <p:txBody>
+          <a:bodyPr wrap="square" anchor="t" lIns="45720" rIns="45720">
+            <a:spAutoFit/>
+          </a:bodyPr>
+          <a:lstStyle/>
+          <a:p>
+            <a:pPr algn="l">
+              <a:spcAft>
+                <a:spcPts val="100"/>
+              </a:spcAft>
+            </a:pPr>
+            <a:r>
+              <a:rPr sz="1700" b="1">
+                <a:solidFill>
+                  <a:srgbClr val="1F4E79"/>
+                </a:solidFill>
+                <a:latin typeface="Calibri"/>
+              </a:rPr>
+              <a:t>Tipas</a:t>
+            </a:r>
+          </a:p>
+          <a:p>
+            <a:pPr>
+              <a:spcAft>
+                <a:spcPts val="800"/>
+              </a:spcAft>
+            </a:pPr>
+            <a:r>
+              <a:rPr sz="1600" b="0">
+                <a:solidFill>
+                  <a:srgbClr val="222222"/>
+                </a:solidFill>
+                <a:latin typeface="Calibri"/>
+              </a:rPr>
+              <a:t>Pneumohidraulinis domkratas: suslėgtas oras + hidraulika.</a:t>
+            </a:r>
+          </a:p>
+          <a:p>
+            <a:pPr>
+              <a:spcAft>
+                <a:spcPts val="100"/>
+              </a:spcAft>
+            </a:pPr>
+            <a:r>
+              <a:rPr sz="1700" b="1">
+                <a:solidFill>
+                  <a:srgbClr val="1F4E79"/>
+                </a:solidFill>
+                <a:latin typeface="Calibri"/>
+              </a:rPr>
+              <a:t>Kaip veikia</a:t>
+            </a:r>
+          </a:p>
+          <a:p>
+            <a:pPr>
+              <a:spcAft>
+                <a:spcPts val="800"/>
+              </a:spcAft>
+            </a:pPr>
+            <a:r>
+              <a:rPr sz="1600" b="0">
+                <a:solidFill>
+                  <a:srgbClr val="222222"/>
+                </a:solidFill>
+                <a:latin typeface="Calibri"/>
+              </a:rPr>
+              <a:t>Suslėgtas oras iš kompresoriaus varo siurblio stūmoklį, kuris spaudžia alyvą į pagrindinį cilindrą, ir stūmoklis kyla.</a:t>
+            </a:r>
+          </a:p>
+          <a:p>
+            <a:pPr>
+              <a:spcAft>
+                <a:spcPts val="100"/>
+              </a:spcAft>
+            </a:pPr>
+            <a:r>
+              <a:rPr sz="1700" b="1">
+                <a:solidFill>
+                  <a:srgbClr val="1F4E79"/>
+                </a:solidFill>
+                <a:latin typeface="Calibri"/>
+              </a:rPr>
+              <a:t>Ką išsprendė</a:t>
+            </a:r>
+          </a:p>
+          <a:p>
+            <a:pPr>
+              <a:spcAft>
+                <a:spcPts val="800"/>
+              </a:spcAft>
+            </a:pPr>
+            <a:r>
+              <a:rPr sz="1600" b="0">
+                <a:solidFill>
+                  <a:srgbClr val="222222"/>
+                </a:solidFill>
+                <a:latin typeface="Calibri"/>
+              </a:rPr>
+              <a:t>Juds rašė, kad rankinis pumpavimas hidrauliniame domkrate tampa varginantis, o pneumatiniai domkratai greiti ir jį pašalina. Dingus orui, krovinys lieka stovėti ant alyvos ir galima pumpuoti rankomis.</a:t>
+            </a:r>
+          </a:p>
+          <a:p>
+            <a:pPr>
+              <a:spcAft>
+                <a:spcPts val="100"/>
+              </a:spcAft>
+            </a:pPr>
+            <a:r>
+              <a:rPr sz="1700" b="1">
+                <a:solidFill>
+                  <a:srgbClr val="1F4E79"/>
+                </a:solidFill>
+                <a:latin typeface="Calibri"/>
+              </a:rPr>
+              <a:t>Problemos</a:t>
+            </a:r>
+          </a:p>
+          <a:p>
+            <a:pPr>
+              <a:spcAft>
+                <a:spcPts val="800"/>
+              </a:spcAft>
+            </a:pPr>
+            <a:r>
+              <a:rPr sz="1600" b="0">
+                <a:solidFill>
+                  <a:srgbClr val="222222"/>
+                </a:solidFill>
+                <a:latin typeface="Calibri"/>
+              </a:rPr>
+              <a:t>Reikia kompresoriaus su pakankamu slėgiu (dažniausiai apie 8–10 bar), o kelyje jo paprastai nėra. Brangesnis.</a:t>
+            </a:r>
+          </a:p>
+        </p:txBody>
+      </p:sp>
+      <p:sp>
+        <p:nvSpPr>
+          <p:cNvPr id="11" name="TextBox 10"/>
+          <p:cNvSpPr txBox="1"/>
+          <p:nvPr/>
+        </p:nvSpPr>
+        <p:spPr>
+          <a:xfrm>
+            <a:off x="5577840" y="5833872"/>
+            <a:ext cx="6035040" cy="457200"/>
+          </a:xfrm>
+          <a:prstGeom prst="rect">
+            <a:avLst/>
+          </a:prstGeom>
+          <a:noFill/>
+        </p:spPr>
+        <p:txBody>
+          <a:bodyPr wrap="square" anchor="t" lIns="45720" rIns="45720">
+            <a:spAutoFit/>
+          </a:bodyPr>
+          <a:lstStyle/>
+          <a:p>
+            <a:pPr algn="l">
+              <a:spcAft>
+                <a:spcPts val="600"/>
+              </a:spcAft>
+            </a:pPr>
+            <a:r>
+              <a:rPr sz="1300" b="0">
+                <a:solidFill>
+                  <a:srgbClr val="595959"/>
+                </a:solidFill>
+                <a:latin typeface="Calibri"/>
+              </a:rPr>
+              <a:t>Šaltiniai: Juds (1967); TMG Industrial (n.d.); VEVOR (n.d.).</a:t>
+            </a:r>
+          </a:p>
+        </p:txBody>
+      </p:sp>
+    </p:spTree>
+  </p:cSld>
+  <p:clrMapOvr>
+    <a:masterClrMapping/>
+  </p:clrMapOvr>
+</p:sld>
+</file>
+
+<file path=ppt/slides/slide8.xml><?xml version="1.0" encoding="utf-8"?>
+<p:sld xmlns:a="http://schemas.openxmlformats.org/drawingml/2006/main" xmlns:p="http://schemas.openxmlformats.org/presentationml/2006/main" xmlns:r="http://schemas.openxmlformats.org/officeDocument/2006/relationships">
+  <p:cSld>
+    <p:spTree>
+      <p:nvGrpSpPr>
+        <p:cNvPr id="1" name=""/>
+        <p:cNvGrpSpPr/>
+        <p:nvPr/>
+      </p:nvGrpSpPr>
+      <p:grpSpPr/>
+      <p:sp>
+        <p:nvSpPr>
+          <p:cNvPr id="2" name="TextBox 1"/>
+          <p:cNvSpPr txBox="1"/>
+          <p:nvPr/>
+        </p:nvSpPr>
+        <p:spPr>
+          <a:xfrm>
+            <a:off x="548640" y="320040"/>
+            <a:ext cx="11064240" cy="822960"/>
+          </a:xfrm>
+          <a:prstGeom prst="rect">
+            <a:avLst/>
+          </a:prstGeom>
+          <a:noFill/>
+        </p:spPr>
+        <p:txBody>
+          <a:bodyPr wrap="square" anchor="b" lIns="45720" rIns="45720">
+            <a:spAutoFit/>
+          </a:bodyPr>
+          <a:lstStyle/>
+          <a:p>
+            <a:pPr algn="l">
+              <a:spcAft>
+                <a:spcPts val="600"/>
+              </a:spcAft>
+            </a:pPr>
+            <a:r>
+              <a:rPr sz="3200" b="1">
+                <a:solidFill>
+                  <a:srgbClr val="1F4E79"/>
+                </a:solidFill>
+                <a:latin typeface="Calibri"/>
+              </a:rPr>
+              <a:t>Kiti domkratų tipai</a:t>
+            </a:r>
+          </a:p>
+        </p:txBody>
+      </p:sp>
+      <p:sp>
+        <p:nvSpPr>
+          <p:cNvPr id="3" name="Rectangle 2"/>
+          <p:cNvSpPr/>
+          <p:nvPr/>
+        </p:nvSpPr>
+        <p:spPr>
+          <a:xfrm>
+            <a:off x="594360" y="1207008"/>
+            <a:ext cx="10972800" cy="27432"/>
+          </a:xfrm>
+          <a:prstGeom prst="rect">
+            <a:avLst/>
+          </a:prstGeom>
+          <a:solidFill>
+            <a:srgbClr val="1F4E79"/>
+          </a:solidFill>
+          <a:ln>
+            <a:noFill/>
+          </a:ln>
+          <a:effectLst/>
+        </p:spPr>
+        <p:style>
+          <a:lnRef idx="1">
+            <a:schemeClr val="accent1"/>
+          </a:lnRef>
+          <a:fillRef idx="3">
+            <a:schemeClr val="accent1"/>
+          </a:fillRef>
+          <a:effectRef idx="2">
+            <a:schemeClr val="accent1"/>
+          </a:effectRef>
+          <a:fontRef idx="minor">
+            <a:schemeClr val="lt1"/>
+          </a:fontRef>
+        </p:style>
+        <p:txBody>
+          <a:bodyPr rtlCol="0" anchor="ctr"/>
+          <a:lstStyle/>
+          <a:p>
+            <a:pPr algn="ctr"/>
+          </a:p>
+        </p:txBody>
+      </p:sp>
+      <p:sp>
+        <p:nvSpPr>
+          <p:cNvPr id="4" name="TextBox 3"/>
+          <p:cNvSpPr txBox="1"/>
+          <p:nvPr/>
+        </p:nvSpPr>
+        <p:spPr>
+          <a:xfrm>
+            <a:off x="10698480" y="6355080"/>
+            <a:ext cx="1005840" cy="365760"/>
+          </a:xfrm>
+          <a:prstGeom prst="rect">
+            <a:avLst/>
+          </a:prstGeom>
+          <a:noFill/>
+        </p:spPr>
+        <p:txBody>
+          <a:bodyPr wrap="square" anchor="t" lIns="45720" rIns="45720">
+            <a:spAutoFit/>
+          </a:bodyPr>
+          <a:lstStyle/>
+          <a:p>
+            <a:pPr algn="r">
+              <a:spcAft>
+                <a:spcPts val="600"/>
+              </a:spcAft>
+            </a:pPr>
+            <a:r>
+              <a:rPr sz="1200" b="0">
+                <a:solidFill>
+                  <a:srgbClr val="595959"/>
+                </a:solidFill>
+                <a:latin typeface="Calibri"/>
+              </a:rPr>
+              <a:t>8 / 12</a:t>
+            </a:r>
+          </a:p>
+        </p:txBody>
+      </p:sp>
+      <p:sp>
+        <p:nvSpPr>
+          <p:cNvPr id="5" name="TextBox 4"/>
+          <p:cNvSpPr txBox="1"/>
+          <p:nvPr/>
+        </p:nvSpPr>
+        <p:spPr>
+          <a:xfrm>
+            <a:off x="548640" y="6355080"/>
+            <a:ext cx="7315200" cy="365760"/>
+          </a:xfrm>
+          <a:prstGeom prst="rect">
+            <a:avLst/>
+          </a:prstGeom>
+          <a:noFill/>
+        </p:spPr>
+        <p:txBody>
+          <a:bodyPr wrap="square" anchor="t" lIns="45720" rIns="45720">
+            <a:spAutoFit/>
+          </a:bodyPr>
+          <a:lstStyle/>
+          <a:p>
+            <a:pPr algn="l">
+              <a:spcAft>
+                <a:spcPts val="600"/>
+              </a:spcAft>
+            </a:pPr>
+            <a:r>
+              <a:rPr sz="1200" b="0">
+                <a:solidFill>
+                  <a:srgbClr val="595959"/>
+                </a:solidFill>
+                <a:latin typeface="Calibri"/>
+              </a:rPr>
+              <a:t>PBL · Automobilinis domkratas</a:t>
             </a:r>
           </a:p>
         </p:txBody>
@@ -7438,8 +9677,8 @@
           <p:nvPr/>
         </p:nvGraphicFramePr>
         <p:xfrm>
-          <a:off x="640080" y="1463040"/>
-          <a:ext cx="10881360" cy="4096512"/>
+          <a:off x="640080" y="1554480"/>
+          <a:ext cx="10881360" cy="3474720"/>
         </p:xfrm>
         <a:graphic>
           <a:graphicData uri="http://schemas.openxmlformats.org/drawingml/2006/table">
@@ -7448,19 +9687,716 @@
                 <a:tableStyleId>{5C22544A-7EE6-4342-B048-85BDC9FD1C3A}</a:tableStyleId>
               </a:tblPr>
               <a:tblGrid>
+                <a:gridCol w="2377440"/>
                 <a:gridCol w="1737360"/>
-                <a:gridCol w="2560320"/>
-                <a:gridCol w="3291840"/>
-                <a:gridCol w="3291840"/>
+                <a:gridCol w="3383280"/>
+                <a:gridCol w="3383280"/>
               </a:tblGrid>
-              <a:tr h="585216">
+              <a:tr h="868680">
                 <a:tc>
                   <a:txBody>
                     <a:bodyPr/>
                     <a:lstStyle/>
                     <a:p>
                       <a:r>
-                        <a:rPr sz="1500" b="1" i="0">
+                        <a:rPr sz="1700" b="1" i="0">
+                          <a:solidFill>
+                            <a:srgbClr val="FFFFFF"/>
+                          </a:solidFill>
+                          <a:latin typeface="Calibri"/>
+                        </a:rPr>
+                        <a:t>Tipas</a:t>
+                      </a:r>
+                    </a:p>
+                  </a:txBody>
+                  <a:tcPr marL="73152" marR="73152" anchor="ctr">
+                    <a:solidFill>
+                      <a:srgbClr val="1F4E79"/>
+                    </a:solidFill>
+                  </a:tcPr>
+                </a:tc>
+                <a:tc>
+                  <a:txBody>
+                    <a:bodyPr/>
+                    <a:lstStyle/>
+                    <a:p>
+                      <a:r>
+                        <a:rPr sz="1700" b="1" i="0">
+                          <a:solidFill>
+                            <a:srgbClr val="FFFFFF"/>
+                          </a:solidFill>
+                          <a:latin typeface="Calibri"/>
+                        </a:rPr>
+                        <a:t>Atsiradimas</a:t>
+                      </a:r>
+                    </a:p>
+                  </a:txBody>
+                  <a:tcPr marL="73152" marR="73152" anchor="ctr">
+                    <a:solidFill>
+                      <a:srgbClr val="1F4E79"/>
+                    </a:solidFill>
+                  </a:tcPr>
+                </a:tc>
+                <a:tc>
+                  <a:txBody>
+                    <a:bodyPr/>
+                    <a:lstStyle/>
+                    <a:p>
+                      <a:r>
+                        <a:rPr sz="1700" b="1" i="0">
+                          <a:solidFill>
+                            <a:srgbClr val="FFFFFF"/>
+                          </a:solidFill>
+                          <a:latin typeface="Calibri"/>
+                        </a:rPr>
+                        <a:t>Privalumai</a:t>
+                      </a:r>
+                    </a:p>
+                  </a:txBody>
+                  <a:tcPr marL="73152" marR="73152" anchor="ctr">
+                    <a:solidFill>
+                      <a:srgbClr val="1F4E79"/>
+                    </a:solidFill>
+                  </a:tcPr>
+                </a:tc>
+                <a:tc>
+                  <a:txBody>
+                    <a:bodyPr/>
+                    <a:lstStyle/>
+                    <a:p>
+                      <a:r>
+                        <a:rPr sz="1700" b="1" i="0">
+                          <a:solidFill>
+                            <a:srgbClr val="FFFFFF"/>
+                          </a:solidFill>
+                          <a:latin typeface="Calibri"/>
+                        </a:rPr>
+                        <a:t>Trūkumai</a:t>
+                      </a:r>
+                    </a:p>
+                  </a:txBody>
+                  <a:tcPr marL="73152" marR="73152" anchor="ctr">
+                    <a:solidFill>
+                      <a:srgbClr val="1F4E79"/>
+                    </a:solidFill>
+                  </a:tcPr>
+                </a:tc>
+              </a:tr>
+              <a:tr h="868680">
+                <a:tc>
+                  <a:txBody>
+                    <a:bodyPr/>
+                    <a:lstStyle/>
+                    <a:p>
+                      <a:r>
+                        <a:rPr sz="1700" b="1" i="0">
+                          <a:solidFill>
+                            <a:srgbClr val="222222"/>
+                          </a:solidFill>
+                          <a:latin typeface="Calibri"/>
+                        </a:rPr>
+                        <a:t>Krumpliastiebinis („Hi-Lift“)</a:t>
+                      </a:r>
+                    </a:p>
+                  </a:txBody>
+                  <a:tcPr marL="73152" marR="73152" anchor="ctr">
+                    <a:solidFill>
+                      <a:srgbClr val="FFFFFF"/>
+                    </a:solidFill>
+                  </a:tcPr>
+                </a:tc>
+                <a:tc>
+                  <a:txBody>
+                    <a:bodyPr/>
+                    <a:lstStyle/>
+                    <a:p>
+                      <a:r>
+                        <a:rPr sz="1700" b="0" i="0">
+                          <a:solidFill>
+                            <a:srgbClr val="222222"/>
+                          </a:solidFill>
+                          <a:latin typeface="Calibri"/>
+                        </a:rPr>
+                        <a:t>1905 m.</a:t>
+                      </a:r>
+                    </a:p>
+                  </a:txBody>
+                  <a:tcPr marL="73152" marR="73152" anchor="ctr">
+                    <a:solidFill>
+                      <a:srgbClr val="FFFFFF"/>
+                    </a:solidFill>
+                  </a:tcPr>
+                </a:tc>
+                <a:tc>
+                  <a:txBody>
+                    <a:bodyPr/>
+                    <a:lstStyle/>
+                    <a:p>
+                      <a:r>
+                        <a:rPr sz="1700" b="0" i="0">
+                          <a:solidFill>
+                            <a:srgbClr val="222222"/>
+                          </a:solidFill>
+                          <a:latin typeface="Calibri"/>
+                        </a:rPr>
+                        <a:t>Kelia labai aukštai (iki ~1,5 m), tinka ir traukti, spausti</a:t>
+                      </a:r>
+                    </a:p>
+                  </a:txBody>
+                  <a:tcPr marL="73152" marR="73152" anchor="ctr">
+                    <a:solidFill>
+                      <a:srgbClr val="FFFFFF"/>
+                    </a:solidFill>
+                  </a:tcPr>
+                </a:tc>
+                <a:tc>
+                  <a:txBody>
+                    <a:bodyPr/>
+                    <a:lstStyle/>
+                    <a:p>
+                      <a:r>
+                        <a:rPr sz="1700" b="0" i="0">
+                          <a:solidFill>
+                            <a:srgbClr val="222222"/>
+                          </a:solidFill>
+                          <a:latin typeface="Calibri"/>
+                        </a:rPr>
+                        <a:t>Pavojinga rankenos atatranka, mažiau stabilus</a:t>
+                      </a:r>
+                    </a:p>
+                  </a:txBody>
+                  <a:tcPr marL="73152" marR="73152" anchor="ctr">
+                    <a:solidFill>
+                      <a:srgbClr val="FFFFFF"/>
+                    </a:solidFill>
+                  </a:tcPr>
+                </a:tc>
+              </a:tr>
+              <a:tr h="868680">
+                <a:tc>
+                  <a:txBody>
+                    <a:bodyPr/>
+                    <a:lstStyle/>
+                    <a:p>
+                      <a:r>
+                        <a:rPr sz="1700" b="1" i="0">
+                          <a:solidFill>
+                            <a:srgbClr val="222222"/>
+                          </a:solidFill>
+                          <a:latin typeface="Calibri"/>
+                        </a:rPr>
+                        <a:t>Vežimėlinis (garažinis)</a:t>
+                      </a:r>
+                    </a:p>
+                  </a:txBody>
+                  <a:tcPr marL="73152" marR="73152" anchor="ctr">
+                    <a:solidFill>
+                      <a:srgbClr val="FFFFFF"/>
+                    </a:solidFill>
+                  </a:tcPr>
+                </a:tc>
+                <a:tc>
+                  <a:txBody>
+                    <a:bodyPr/>
+                    <a:lstStyle/>
+                    <a:p>
+                      <a:r>
+                        <a:rPr sz="1700" b="0" i="0">
+                          <a:solidFill>
+                            <a:srgbClr val="222222"/>
+                          </a:solidFill>
+                          <a:latin typeface="Calibri"/>
+                        </a:rPr>
+                        <a:t>1910 m. mechaninis, 1928 m. hidraulinis</a:t>
+                      </a:r>
+                    </a:p>
+                  </a:txBody>
+                  <a:tcPr marL="73152" marR="73152" anchor="ctr">
+                    <a:solidFill>
+                      <a:srgbClr val="FFFFFF"/>
+                    </a:solidFill>
+                  </a:tcPr>
+                </a:tc>
+                <a:tc>
+                  <a:txBody>
+                    <a:bodyPr/>
+                    <a:lstStyle/>
+                    <a:p>
+                      <a:r>
+                        <a:rPr sz="1700" b="0" i="0">
+                          <a:solidFill>
+                            <a:srgbClr val="222222"/>
+                          </a:solidFill>
+                          <a:latin typeface="Calibri"/>
+                        </a:rPr>
+                        <a:t>Greitas ir stabilus, platus pagrindas</a:t>
+                      </a:r>
+                    </a:p>
+                  </a:txBody>
+                  <a:tcPr marL="73152" marR="73152" anchor="ctr">
+                    <a:solidFill>
+                      <a:srgbClr val="FFFFFF"/>
+                    </a:solidFill>
+                  </a:tcPr>
+                </a:tc>
+                <a:tc>
+                  <a:txBody>
+                    <a:bodyPr/>
+                    <a:lstStyle/>
+                    <a:p>
+                      <a:r>
+                        <a:rPr sz="1700" b="0" i="0">
+                          <a:solidFill>
+                            <a:srgbClr val="222222"/>
+                          </a:solidFill>
+                          <a:latin typeface="Calibri"/>
+                        </a:rPr>
+                        <a:t>Didelis ir sunkus, sunku pernešti</a:t>
+                      </a:r>
+                    </a:p>
+                  </a:txBody>
+                  <a:tcPr marL="73152" marR="73152" anchor="ctr">
+                    <a:solidFill>
+                      <a:srgbClr val="FFFFFF"/>
+                    </a:solidFill>
+                  </a:tcPr>
+                </a:tc>
+              </a:tr>
+              <a:tr h="868680">
+                <a:tc>
+                  <a:txBody>
+                    <a:bodyPr/>
+                    <a:lstStyle/>
+                    <a:p>
+                      <a:r>
+                        <a:rPr sz="1700" b="1" i="0">
+                          <a:solidFill>
+                            <a:srgbClr val="222222"/>
+                          </a:solidFill>
+                          <a:latin typeface="Calibri"/>
+                        </a:rPr>
+                        <a:t>Elektrinis žirklinis</a:t>
+                      </a:r>
+                    </a:p>
+                  </a:txBody>
+                  <a:tcPr marL="73152" marR="73152" anchor="ctr">
+                    <a:solidFill>
+                      <a:srgbClr val="FFFFFF"/>
+                    </a:solidFill>
+                  </a:tcPr>
+                </a:tc>
+                <a:tc>
+                  <a:txBody>
+                    <a:bodyPr/>
+                    <a:lstStyle/>
+                    <a:p>
+                      <a:r>
+                        <a:rPr sz="1700" b="0" i="0">
+                          <a:solidFill>
+                            <a:srgbClr val="222222"/>
+                          </a:solidFill>
+                          <a:latin typeface="Calibri"/>
+                        </a:rPr>
+                        <a:t>2004 m. (patentas)</a:t>
+                      </a:r>
+                    </a:p>
+                  </a:txBody>
+                  <a:tcPr marL="73152" marR="73152" anchor="ctr">
+                    <a:solidFill>
+                      <a:srgbClr val="FFFFFF"/>
+                    </a:solidFill>
+                  </a:tcPr>
+                </a:tc>
+                <a:tc>
+                  <a:txBody>
+                    <a:bodyPr/>
+                    <a:lstStyle/>
+                    <a:p>
+                      <a:r>
+                        <a:rPr sz="1700" b="0" i="0">
+                          <a:solidFill>
+                            <a:srgbClr val="222222"/>
+                          </a:solidFill>
+                          <a:latin typeface="Calibri"/>
+                        </a:rPr>
+                        <a:t>Kyla paspaudus mygtuką, maitinamas iš 12 V lizdo</a:t>
+                      </a:r>
+                    </a:p>
+                  </a:txBody>
+                  <a:tcPr marL="73152" marR="73152" anchor="ctr">
+                    <a:solidFill>
+                      <a:srgbClr val="FFFFFF"/>
+                    </a:solidFill>
+                  </a:tcPr>
+                </a:tc>
+                <a:tc>
+                  <a:txBody>
+                    <a:bodyPr/>
+                    <a:lstStyle/>
+                    <a:p>
+                      <a:r>
+                        <a:rPr sz="1700" b="0" i="0">
+                          <a:solidFill>
+                            <a:srgbClr val="222222"/>
+                          </a:solidFill>
+                          <a:latin typeface="Calibri"/>
+                        </a:rPr>
+                        <a:t>Reikia elektros, brangesnis ir sunkesnis</a:t>
+                      </a:r>
+                    </a:p>
+                  </a:txBody>
+                  <a:tcPr marL="73152" marR="73152" anchor="ctr">
+                    <a:solidFill>
+                      <a:srgbClr val="FFFFFF"/>
+                    </a:solidFill>
+                  </a:tcPr>
+                </a:tc>
+              </a:tr>
+            </a:tbl>
+          </a:graphicData>
+        </a:graphic>
+      </p:graphicFrame>
+      <p:sp>
+        <p:nvSpPr>
+          <p:cNvPr id="7" name="TextBox 6"/>
+          <p:cNvSpPr txBox="1"/>
+          <p:nvPr/>
+        </p:nvSpPr>
+        <p:spPr>
+          <a:xfrm>
+            <a:off x="640080" y="5760720"/>
+            <a:ext cx="10881360" cy="457200"/>
+          </a:xfrm>
+          <a:prstGeom prst="rect">
+            <a:avLst/>
+          </a:prstGeom>
+          <a:noFill/>
+        </p:spPr>
+        <p:txBody>
+          <a:bodyPr wrap="square" anchor="t" lIns="45720" rIns="45720">
+            <a:spAutoFit/>
+          </a:bodyPr>
+          <a:lstStyle/>
+          <a:p>
+            <a:pPr algn="l">
+              <a:spcAft>
+                <a:spcPts val="600"/>
+              </a:spcAft>
+            </a:pPr>
+            <a:r>
+              <a:rPr sz="1300" b="0">
+                <a:solidFill>
+                  <a:srgbClr val="595959"/>
+                </a:solidFill>
+                <a:latin typeface="Calibri"/>
+              </a:rPr>
+              <a:t>Šaltiniai: Hi-Lift Jack Company (n.d.-a, n.d.-b); CJ Pony Parts (n.d.); Castle Equipment (n.d.); Redline Stands (n.d.); Mickael (2004); Pro-Lift-Montagetechnik (n.d.).</a:t>
+            </a:r>
+          </a:p>
+        </p:txBody>
+      </p:sp>
+    </p:spTree>
+  </p:cSld>
+  <p:clrMapOvr>
+    <a:masterClrMapping/>
+  </p:clrMapOvr>
+</p:sld>
+</file>
+
+<file path=ppt/slides/slide9.xml><?xml version="1.0" encoding="utf-8"?>
+<p:sld xmlns:a="http://schemas.openxmlformats.org/drawingml/2006/main" xmlns:p="http://schemas.openxmlformats.org/presentationml/2006/main" xmlns:r="http://schemas.openxmlformats.org/officeDocument/2006/relationships">
+  <p:cSld>
+    <p:spTree>
+      <p:nvGrpSpPr>
+        <p:cNvPr id="1" name=""/>
+        <p:cNvGrpSpPr/>
+        <p:nvPr/>
+      </p:nvGrpSpPr>
+      <p:grpSpPr/>
+      <p:sp>
+        <p:nvSpPr>
+          <p:cNvPr id="2" name="TextBox 1"/>
+          <p:cNvSpPr txBox="1"/>
+          <p:nvPr/>
+        </p:nvSpPr>
+        <p:spPr>
+          <a:xfrm>
+            <a:off x="548640" y="320040"/>
+            <a:ext cx="11064240" cy="822960"/>
+          </a:xfrm>
+          <a:prstGeom prst="rect">
+            <a:avLst/>
+          </a:prstGeom>
+          <a:noFill/>
+        </p:spPr>
+        <p:txBody>
+          <a:bodyPr wrap="square" anchor="b" lIns="45720" rIns="45720">
+            <a:spAutoFit/>
+          </a:bodyPr>
+          <a:lstStyle/>
+          <a:p>
+            <a:pPr algn="l">
+              <a:spcAft>
+                <a:spcPts val="600"/>
+              </a:spcAft>
+            </a:pPr>
+            <a:r>
+              <a:rPr sz="3200" b="1">
+                <a:solidFill>
+                  <a:srgbClr val="1F4E79"/>
+                </a:solidFill>
+                <a:latin typeface="Calibri"/>
+              </a:rPr>
+              <a:t>Ką siūlome patobulinti</a:t>
+            </a:r>
+          </a:p>
+        </p:txBody>
+      </p:sp>
+      <p:sp>
+        <p:nvSpPr>
+          <p:cNvPr id="3" name="Rectangle 2"/>
+          <p:cNvSpPr/>
+          <p:nvPr/>
+        </p:nvSpPr>
+        <p:spPr>
+          <a:xfrm>
+            <a:off x="594360" y="1207008"/>
+            <a:ext cx="10972800" cy="27432"/>
+          </a:xfrm>
+          <a:prstGeom prst="rect">
+            <a:avLst/>
+          </a:prstGeom>
+          <a:solidFill>
+            <a:srgbClr val="1F4E79"/>
+          </a:solidFill>
+          <a:ln>
+            <a:noFill/>
+          </a:ln>
+          <a:effectLst/>
+        </p:spPr>
+        <p:style>
+          <a:lnRef idx="1">
+            <a:schemeClr val="accent1"/>
+          </a:lnRef>
+          <a:fillRef idx="3">
+            <a:schemeClr val="accent1"/>
+          </a:fillRef>
+          <a:effectRef idx="2">
+            <a:schemeClr val="accent1"/>
+          </a:effectRef>
+          <a:fontRef idx="minor">
+            <a:schemeClr val="lt1"/>
+          </a:fontRef>
+        </p:style>
+        <p:txBody>
+          <a:bodyPr rtlCol="0" anchor="ctr"/>
+          <a:lstStyle/>
+          <a:p>
+            <a:pPr algn="ctr"/>
+          </a:p>
+        </p:txBody>
+      </p:sp>
+      <p:sp>
+        <p:nvSpPr>
+          <p:cNvPr id="4" name="TextBox 3"/>
+          <p:cNvSpPr txBox="1"/>
+          <p:nvPr/>
+        </p:nvSpPr>
+        <p:spPr>
+          <a:xfrm>
+            <a:off x="10698480" y="6355080"/>
+            <a:ext cx="1005840" cy="365760"/>
+          </a:xfrm>
+          <a:prstGeom prst="rect">
+            <a:avLst/>
+          </a:prstGeom>
+          <a:noFill/>
+        </p:spPr>
+        <p:txBody>
+          <a:bodyPr wrap="square" anchor="t" lIns="45720" rIns="45720">
+            <a:spAutoFit/>
+          </a:bodyPr>
+          <a:lstStyle/>
+          <a:p>
+            <a:pPr algn="r">
+              <a:spcAft>
+                <a:spcPts val="600"/>
+              </a:spcAft>
+            </a:pPr>
+            <a:r>
+              <a:rPr sz="1200" b="0">
+                <a:solidFill>
+                  <a:srgbClr val="595959"/>
+                </a:solidFill>
+                <a:latin typeface="Calibri"/>
+              </a:rPr>
+              <a:t>9 / 12</a:t>
+            </a:r>
+          </a:p>
+        </p:txBody>
+      </p:sp>
+      <p:sp>
+        <p:nvSpPr>
+          <p:cNvPr id="5" name="TextBox 4"/>
+          <p:cNvSpPr txBox="1"/>
+          <p:nvPr/>
+        </p:nvSpPr>
+        <p:spPr>
+          <a:xfrm>
+            <a:off x="548640" y="6355080"/>
+            <a:ext cx="7315200" cy="365760"/>
+          </a:xfrm>
+          <a:prstGeom prst="rect">
+            <a:avLst/>
+          </a:prstGeom>
+          <a:noFill/>
+        </p:spPr>
+        <p:txBody>
+          <a:bodyPr wrap="square" anchor="t" lIns="45720" rIns="45720">
+            <a:spAutoFit/>
+          </a:bodyPr>
+          <a:lstStyle/>
+          <a:p>
+            <a:pPr algn="l">
+              <a:spcAft>
+                <a:spcPts val="600"/>
+              </a:spcAft>
+            </a:pPr>
+            <a:r>
+              <a:rPr sz="1200" b="0">
+                <a:solidFill>
+                  <a:srgbClr val="595959"/>
+                </a:solidFill>
+                <a:latin typeface="Calibri"/>
+              </a:rPr>
+              <a:t>PBL · Automobilinis domkratas</a:t>
+            </a:r>
+          </a:p>
+        </p:txBody>
+      </p:sp>
+      <p:sp>
+        <p:nvSpPr>
+          <p:cNvPr id="6" name="Rectangle 5"/>
+          <p:cNvSpPr/>
+          <p:nvPr/>
+        </p:nvSpPr>
+        <p:spPr>
+          <a:xfrm>
+            <a:off x="640080" y="1463040"/>
+            <a:ext cx="10881360" cy="914400"/>
+          </a:xfrm>
+          <a:prstGeom prst="rect">
+            <a:avLst/>
+          </a:prstGeom>
+          <a:solidFill>
+            <a:srgbClr val="DEEAF6"/>
+          </a:solidFill>
+          <a:ln>
+            <a:noFill/>
+          </a:ln>
+          <a:effectLst/>
+        </p:spPr>
+        <p:style>
+          <a:lnRef idx="1">
+            <a:schemeClr val="accent1"/>
+          </a:lnRef>
+          <a:fillRef idx="3">
+            <a:schemeClr val="accent1"/>
+          </a:fillRef>
+          <a:effectRef idx="2">
+            <a:schemeClr val="accent1"/>
+          </a:effectRef>
+          <a:fontRef idx="minor">
+            <a:schemeClr val="lt1"/>
+          </a:fontRef>
+        </p:style>
+        <p:txBody>
+          <a:bodyPr rtlCol="0" anchor="ctr"/>
+          <a:lstStyle/>
+          <a:p>
+            <a:pPr algn="ctr"/>
+          </a:p>
+        </p:txBody>
+      </p:sp>
+      <p:sp>
+        <p:nvSpPr>
+          <p:cNvPr id="7" name="TextBox 6"/>
+          <p:cNvSpPr txBox="1"/>
+          <p:nvPr/>
+        </p:nvSpPr>
+        <p:spPr>
+          <a:xfrm>
+            <a:off x="822960" y="1508760"/>
+            <a:ext cx="10515600" cy="822960"/>
+          </a:xfrm>
+          <a:prstGeom prst="rect">
+            <a:avLst/>
+          </a:prstGeom>
+          <a:noFill/>
+        </p:spPr>
+        <p:txBody>
+          <a:bodyPr wrap="square" anchor="ctr" lIns="45720" rIns="45720">
+            <a:spAutoFit/>
+          </a:bodyPr>
+          <a:lstStyle/>
+          <a:p>
+            <a:pPr algn="l">
+              <a:spcAft>
+                <a:spcPts val="600"/>
+              </a:spcAft>
+            </a:pPr>
+            <a:r>
+              <a:rPr sz="1900" b="1">
+                <a:solidFill>
+                  <a:srgbClr val="1F4E79"/>
+                </a:solidFill>
+                <a:latin typeface="Calibri"/>
+              </a:rPr>
+              <a:t>Tikslas: </a:t>
+            </a:r>
+            <a:r>
+              <a:rPr sz="1900" b="0" i="0">
+                <a:solidFill>
+                  <a:srgbClr val="222222"/>
+                </a:solidFill>
+                <a:latin typeface="Calibri"/>
+              </a:rPr>
+              <a:t>žirklinis domkratas, kuris stabiliai stovi ant nelygaus pagrindo, mažiau dyla ir yra patogiau sukamas.</a:t>
+            </a:r>
+          </a:p>
+        </p:txBody>
+      </p:sp>
+      <p:graphicFrame>
+        <p:nvGraphicFramePr>
+          <p:cNvPr id="8" name="Table 7"/>
+          <p:cNvGraphicFramePr>
+            <a:graphicFrameLocks noGrp="1"/>
+          </p:cNvGraphicFramePr>
+          <p:nvPr/>
+        </p:nvGraphicFramePr>
+        <p:xfrm>
+          <a:off x="640080" y="2606040"/>
+          <a:ext cx="10881360" cy="2834640"/>
+        </p:xfrm>
+        <a:graphic>
+          <a:graphicData uri="http://schemas.openxmlformats.org/drawingml/2006/table">
+            <a:tbl>
+              <a:tblPr firstRow="1" bandRow="1">
+                <a:tableStyleId>{5C22544A-7EE6-4342-B048-85BDC9FD1C3A}</a:tableStyleId>
+              </a:tblPr>
+              <a:tblGrid>
+                <a:gridCol w="2194560"/>
+                <a:gridCol w="4206240"/>
+                <a:gridCol w="4480560"/>
+              </a:tblGrid>
+              <a:tr h="566928">
+                <a:tc>
+                  <a:txBody>
+                    <a:bodyPr/>
+                    <a:lstStyle/>
+                    <a:p>
+                      <a:r>
+                        <a:rPr sz="1600" b="1" i="0">
                           <a:solidFill>
                             <a:srgbClr val="FFFFFF"/>
                           </a:solidFill>
@@ -7482,13 +10418,13 @@
                     <a:lstStyle/>
                     <a:p>
                       <a:r>
-                        <a:rPr sz="1500" b="1" i="0">
+                        <a:rPr sz="1600" b="1" i="0">
                           <a:solidFill>
                             <a:srgbClr val="FFFFFF"/>
                           </a:solidFill>
                           <a:latin typeface="Calibri"/>
                         </a:rPr>
-                        <a:t>Dabar</a:t>
+                        <a:t>Ką keičiame</a:t>
                       </a:r>
                     </a:p>
                   </a:txBody>
@@ -7504,29 +10440,7 @@
                     <a:lstStyle/>
                     <a:p>
                       <a:r>
-                        <a:rPr sz="1500" b="1" i="0">
-                          <a:solidFill>
-                            <a:srgbClr val="FFFFFF"/>
-                          </a:solidFill>
-                          <a:latin typeface="Calibri"/>
-                        </a:rPr>
-                        <a:t>Siūloma</a:t>
-                      </a:r>
-                    </a:p>
-                  </a:txBody>
-                  <a:tcPr marL="73152" marR="73152" anchor="ctr">
-                    <a:solidFill>
-                      <a:srgbClr val="1F4E79"/>
-                    </a:solidFill>
-                  </a:tcPr>
-                </a:tc>
-                <a:tc>
-                  <a:txBody>
-                    <a:bodyPr/>
-                    <a:lstStyle/>
-                    <a:p>
-                      <a:r>
-                        <a:rPr sz="1500" b="1" i="0">
+                        <a:rPr sz="1600" b="1" i="0">
                           <a:solidFill>
                             <a:srgbClr val="FFFFFF"/>
                           </a:solidFill>
@@ -7543,20 +10457,20 @@
                   </a:tcPr>
                 </a:tc>
               </a:tr>
-              <a:tr h="585216">
+              <a:tr h="566928">
                 <a:tc>
                   <a:txBody>
                     <a:bodyPr/>
                     <a:lstStyle/>
                     <a:p>
                       <a:r>
-                        <a:rPr sz="1500" b="1" i="0">
+                        <a:rPr sz="1600" b="1" i="0">
                           <a:solidFill>
                             <a:srgbClr val="222222"/>
                           </a:solidFill>
                           <a:latin typeface="Calibri"/>
                         </a:rPr>
-                        <a:t>Pavara</a:t>
+                        <a:t>Pagrindas</a:t>
                       </a:r>
                     </a:p>
                   </a:txBody>
@@ -7572,13 +10486,13 @@
                     <a:lstStyle/>
                     <a:p>
                       <a:r>
-                        <a:rPr sz="1500" b="0" i="0">
+                        <a:rPr sz="1600" b="0" i="0">
                           <a:solidFill>
                             <a:srgbClr val="222222"/>
                           </a:solidFill>
                           <a:latin typeface="Calibri"/>
                         </a:rPr>
-                        <a:t>Rankinė rankena</a:t>
+                        <a:t>Platesnis, su guminiu padu</a:t>
                       </a:r>
                     </a:p>
                   </a:txBody>
@@ -7594,13 +10508,37 @@
                     <a:lstStyle/>
                     <a:p>
                       <a:r>
-                        <a:rPr sz="1500" b="0" i="0">
+                        <a:rPr sz="1600" b="0" i="0">
                           <a:solidFill>
                             <a:srgbClr val="222222"/>
                           </a:solidFill>
                           <a:latin typeface="Calibri"/>
                         </a:rPr>
-                        <a:t>12 V variklis (~100 W) su reduktoriumi</a:t>
+                        <a:t>Neslysta ir nesmenga į minkštą paviršių</a:t>
+                      </a:r>
+                    </a:p>
+                  </a:txBody>
+                  <a:tcPr marL="73152" marR="73152" anchor="ctr">
+                    <a:solidFill>
+                      <a:srgbClr val="FFFFFF"/>
+                    </a:solidFill>
+                  </a:tcPr>
+                </a:tc>
+              </a:tr>
+              <a:tr h="566928">
+                <a:tc>
+                  <a:txBody>
+                    <a:bodyPr/>
+                    <a:lstStyle/>
+                    <a:p>
+                      <a:r>
+                        <a:rPr sz="1600" b="1" i="0">
+                          <a:solidFill>
+                            <a:srgbClr val="222222"/>
+                          </a:solidFill>
+                          <a:latin typeface="Calibri"/>
+                        </a:rPr>
+                        <a:t>Sraigtas ir veržlė</a:t>
                       </a:r>
                     </a:p>
                   </a:txBody>
@@ -7616,37 +10554,13 @@
                     <a:lstStyle/>
                     <a:p>
                       <a:r>
-                        <a:rPr sz="1500" b="0" i="0">
+                        <a:rPr sz="1600" b="0" i="0">
                           <a:solidFill>
                             <a:srgbClr val="222222"/>
                           </a:solidFill>
                           <a:latin typeface="Calibri"/>
                         </a:rPr>
-                        <a:t>Greitai ir be fizinių pastangų</a:t>
-                      </a:r>
-                    </a:p>
-                  </a:txBody>
-                  <a:tcPr marL="73152" marR="73152" anchor="ctr">
-                    <a:solidFill>
-                      <a:srgbClr val="FFFFFF"/>
-                    </a:solidFill>
-                  </a:tcPr>
-                </a:tc>
-              </a:tr>
-              <a:tr h="585216">
-                <a:tc>
-                  <a:txBody>
-                    <a:bodyPr/>
-                    <a:lstStyle/>
-                    <a:p>
-                      <a:r>
-                        <a:rPr sz="1500" b="1" i="0">
-                          <a:solidFill>
-                            <a:srgbClr val="222222"/>
-                          </a:solidFill>
-                          <a:latin typeface="Calibri"/>
-                        </a:rPr>
-                        <a:t>Sraigtas</a:t>
+                        <a:t>Trapecinis sraigtas iš plieno 42CrMo4, veržlė iš bronzos CuSn12</a:t>
                       </a:r>
                     </a:p>
                   </a:txBody>
@@ -7662,57 +10576,13 @@
                     <a:lstStyle/>
                     <a:p>
                       <a:r>
-                        <a:rPr sz="1500" b="0" i="0">
+                        <a:rPr sz="1600" b="0" i="0">
                           <a:solidFill>
                             <a:srgbClr val="222222"/>
                           </a:solidFill>
                           <a:latin typeface="Calibri"/>
                         </a:rPr>
-                        <a:t>Paprastas plienas</a:t>
-                      </a:r>
-                    </a:p>
-                  </a:txBody>
-                  <a:tcPr marL="73152" marR="73152" anchor="ctr">
-                    <a:solidFill>
-                      <a:srgbClr val="FFFFFF"/>
-                    </a:solidFill>
-                  </a:tcPr>
-                </a:tc>
-                <a:tc>
-                  <a:txBody>
-                    <a:bodyPr/>
-                    <a:lstStyle/>
-                    <a:p>
-                      <a:r>
-                        <a:rPr sz="1500" b="0" i="0">
-                          <a:solidFill>
-                            <a:srgbClr val="222222"/>
-                          </a:solidFill>
-                          <a:latin typeface="Calibri"/>
-                        </a:rPr>
-                        <a:t>Trapecinis sraigtas, plienas 42CrMo4</a:t>
-                      </a:r>
-                    </a:p>
-                  </a:txBody>
-                  <a:tcPr marL="73152" marR="73152" anchor="ctr">
-                    <a:solidFill>
-                      <a:srgbClr val="FFFFFF"/>
-                    </a:solidFill>
-                  </a:tcPr>
-                </a:tc>
-                <a:tc>
-                  <a:txBody>
-                    <a:bodyPr/>
-                    <a:lstStyle/>
-                    <a:p>
-                      <a:r>
-                        <a:rPr sz="1500" b="0" i="0">
-                          <a:solidFill>
-                            <a:srgbClr val="222222"/>
-                          </a:solidFill>
-                          <a:latin typeface="Calibri"/>
-                        </a:rPr>
-                        <a:t>Savistabdis; plienas stiprus ir atsparus nuovargiui</a:t>
+                        <a:t>Savistabdis, mažiau dyla, maža trintis</a:t>
                       </a:r>
                     </a:p>
                   </a:txBody>
@@ -7723,104 +10593,14 @@
                   </a:tcPr>
                 </a:tc>
               </a:tr>
-              <a:tr h="585216">
+              <a:tr h="566928">
                 <a:tc>
                   <a:txBody>
                     <a:bodyPr/>
                     <a:lstStyle/>
                     <a:p>
                       <a:r>
-                        <a:rPr sz="1500" b="1" i="0">
-                          <a:solidFill>
-                            <a:srgbClr val="222222"/>
-                          </a:solidFill>
-                          <a:latin typeface="Calibri"/>
-                        </a:rPr>
-                        <a:t>Veržlė</a:t>
-                      </a:r>
-                    </a:p>
-                  </a:txBody>
-                  <a:tcPr marL="73152" marR="73152" anchor="ctr">
-                    <a:solidFill>
-                      <a:srgbClr val="FFFFFF"/>
-                    </a:solidFill>
-                  </a:tcPr>
-                </a:tc>
-                <a:tc>
-                  <a:txBody>
-                    <a:bodyPr/>
-                    <a:lstStyle/>
-                    <a:p>
-                      <a:r>
-                        <a:rPr sz="1500" b="0" i="0">
-                          <a:solidFill>
-                            <a:srgbClr val="222222"/>
-                          </a:solidFill>
-                          <a:latin typeface="Calibri"/>
-                        </a:rPr>
-                        <a:t>Plieninė</a:t>
-                      </a:r>
-                    </a:p>
-                  </a:txBody>
-                  <a:tcPr marL="73152" marR="73152" anchor="ctr">
-                    <a:solidFill>
-                      <a:srgbClr val="FFFFFF"/>
-                    </a:solidFill>
-                  </a:tcPr>
-                </a:tc>
-                <a:tc>
-                  <a:txBody>
-                    <a:bodyPr/>
-                    <a:lstStyle/>
-                    <a:p>
-                      <a:r>
-                        <a:rPr sz="1500" b="0" i="0">
-                          <a:solidFill>
-                            <a:srgbClr val="222222"/>
-                          </a:solidFill>
-                          <a:latin typeface="Calibri"/>
-                        </a:rPr>
-                        <a:t>Bronza CuSn12</a:t>
-                      </a:r>
-                    </a:p>
-                  </a:txBody>
-                  <a:tcPr marL="73152" marR="73152" anchor="ctr">
-                    <a:solidFill>
-                      <a:srgbClr val="FFFFFF"/>
-                    </a:solidFill>
-                  </a:tcPr>
-                </a:tc>
-                <a:tc>
-                  <a:txBody>
-                    <a:bodyPr/>
-                    <a:lstStyle/>
-                    <a:p>
-                      <a:r>
-                        <a:rPr sz="1500" b="0" i="0">
-                          <a:solidFill>
-                            <a:srgbClr val="222222"/>
-                          </a:solidFill>
-                          <a:latin typeface="Calibri"/>
-                        </a:rPr>
-                        <a:t>Maža trintis, atspari dilimui</a:t>
-                      </a:r>
-                    </a:p>
-                  </a:txBody>
-                  <a:tcPr marL="73152" marR="73152" anchor="ctr">
-                    <a:solidFill>
-                      <a:srgbClr val="FFFFFF"/>
-                    </a:solidFill>
-                  </a:tcPr>
-                </a:tc>
-              </a:tr>
-              <a:tr h="585216">
-                <a:tc>
-                  <a:txBody>
-                    <a:bodyPr/>
-                    <a:lstStyle/>
-                    <a:p>
-                      <a:r>
-                        <a:rPr sz="1500" b="1" i="0">
+                        <a:rPr sz="1600" b="1" i="0">
                           <a:solidFill>
                             <a:srgbClr val="222222"/>
                           </a:solidFill>
@@ -7842,13 +10622,13 @@
                     <a:lstStyle/>
                     <a:p>
                       <a:r>
-                        <a:rPr sz="1500" b="0" i="0">
+                        <a:rPr sz="1600" b="0" i="0">
                           <a:solidFill>
                             <a:srgbClr val="222222"/>
                           </a:solidFill>
                           <a:latin typeface="Calibri"/>
                         </a:rPr>
-                        <a:t>Plienas S235 (235 MPa)</a:t>
+                        <a:t>Plienas S420MC vietoj S235</a:t>
                       </a:r>
                     </a:p>
                   </a:txBody>
@@ -7864,13 +10644,37 @@
                     <a:lstStyle/>
                     <a:p>
                       <a:r>
-                        <a:rPr sz="1500" b="0" i="0">
+                        <a:rPr sz="1600" b="0" i="0">
                           <a:solidFill>
                             <a:srgbClr val="222222"/>
                           </a:solidFill>
                           <a:latin typeface="Calibri"/>
                         </a:rPr>
-                        <a:t>Plienas S420MC (420 MPa)</a:t>
+                        <a:t>Takumo riba 420 vs 235 MPa – apie 1,8 karto stipresnės</a:t>
+                      </a:r>
+                    </a:p>
+                  </a:txBody>
+                  <a:tcPr marL="73152" marR="73152" anchor="ctr">
+                    <a:solidFill>
+                      <a:srgbClr val="FFFFFF"/>
+                    </a:solidFill>
+                  </a:tcPr>
+                </a:tc>
+              </a:tr>
+              <a:tr h="566928">
+                <a:tc>
+                  <a:txBody>
+                    <a:bodyPr/>
+                    <a:lstStyle/>
+                    <a:p>
+                      <a:r>
+                        <a:rPr sz="1600" b="1" i="0">
+                          <a:solidFill>
+                            <a:srgbClr val="222222"/>
+                          </a:solidFill>
+                          <a:latin typeface="Calibri"/>
+                        </a:rPr>
+                        <a:t>Rankena</a:t>
                       </a:r>
                     </a:p>
                   </a:txBody>
@@ -7886,37 +10690,13 @@
                     <a:lstStyle/>
                     <a:p>
                       <a:r>
-                        <a:rPr sz="1500" b="0" i="0">
+                        <a:rPr sz="1600" b="0" i="0">
                           <a:solidFill>
                             <a:srgbClr val="222222"/>
                           </a:solidFill>
                           <a:latin typeface="Calibri"/>
                         </a:rPr>
-                        <a:t>Takumo riba ~1,8 karto didesnė</a:t>
-                      </a:r>
-                    </a:p>
-                  </a:txBody>
-                  <a:tcPr marL="73152" marR="73152" anchor="ctr">
-                    <a:solidFill>
-                      <a:srgbClr val="FFFFFF"/>
-                    </a:solidFill>
-                  </a:tcPr>
-                </a:tc>
-              </a:tr>
-              <a:tr h="585216">
-                <a:tc>
-                  <a:txBody>
-                    <a:bodyPr/>
-                    <a:lstStyle/>
-                    <a:p>
-                      <a:r>
-                        <a:rPr sz="1500" b="1" i="0">
-                          <a:solidFill>
-                            <a:srgbClr val="222222"/>
-                          </a:solidFill>
-                          <a:latin typeface="Calibri"/>
-                        </a:rPr>
-                        <a:t>Pagrindas</a:t>
+                        <a:t>Ilgesnė, sulankstoma rankena</a:t>
                       </a:r>
                     </a:p>
                   </a:txBody>
@@ -7932,147 +10712,13 @@
                     <a:lstStyle/>
                     <a:p>
                       <a:r>
-                        <a:rPr sz="1500" b="0" i="0">
+                        <a:rPr sz="1600" b="0" i="0">
                           <a:solidFill>
                             <a:srgbClr val="222222"/>
                           </a:solidFill>
                           <a:latin typeface="Calibri"/>
                         </a:rPr>
-                        <a:t>Siauras</a:t>
-                      </a:r>
-                    </a:p>
-                  </a:txBody>
-                  <a:tcPr marL="73152" marR="73152" anchor="ctr">
-                    <a:solidFill>
-                      <a:srgbClr val="FFFFFF"/>
-                    </a:solidFill>
-                  </a:tcPr>
-                </a:tc>
-                <a:tc>
-                  <a:txBody>
-                    <a:bodyPr/>
-                    <a:lstStyle/>
-                    <a:p>
-                      <a:r>
-                        <a:rPr sz="1500" b="0" i="0">
-                          <a:solidFill>
-                            <a:srgbClr val="222222"/>
-                          </a:solidFill>
-                          <a:latin typeface="Calibri"/>
-                        </a:rPr>
-                        <a:t>Platesnis, su guminiu padu</a:t>
-                      </a:r>
-                    </a:p>
-                  </a:txBody>
-                  <a:tcPr marL="73152" marR="73152" anchor="ctr">
-                    <a:solidFill>
-                      <a:srgbClr val="FFFFFF"/>
-                    </a:solidFill>
-                  </a:tcPr>
-                </a:tc>
-                <a:tc>
-                  <a:txBody>
-                    <a:bodyPr/>
-                    <a:lstStyle/>
-                    <a:p>
-                      <a:r>
-                        <a:rPr sz="1500" b="0" i="0">
-                          <a:solidFill>
-                            <a:srgbClr val="222222"/>
-                          </a:solidFill>
-                          <a:latin typeface="Calibri"/>
-                        </a:rPr>
-                        <a:t>Stabilesnis, neslysta</a:t>
-                      </a:r>
-                    </a:p>
-                  </a:txBody>
-                  <a:tcPr marL="73152" marR="73152" anchor="ctr">
-                    <a:solidFill>
-                      <a:srgbClr val="FFFFFF"/>
-                    </a:solidFill>
-                  </a:tcPr>
-                </a:tc>
-              </a:tr>
-              <a:tr h="585216">
-                <a:tc>
-                  <a:txBody>
-                    <a:bodyPr/>
-                    <a:lstStyle/>
-                    <a:p>
-                      <a:r>
-                        <a:rPr sz="1500" b="1" i="0">
-                          <a:solidFill>
-                            <a:srgbClr val="222222"/>
-                          </a:solidFill>
-                          <a:latin typeface="Calibri"/>
-                        </a:rPr>
-                        <a:t>Sauga</a:t>
-                      </a:r>
-                    </a:p>
-                  </a:txBody>
-                  <a:tcPr marL="73152" marR="73152" anchor="ctr">
-                    <a:solidFill>
-                      <a:srgbClr val="FFFFFF"/>
-                    </a:solidFill>
-                  </a:tcPr>
-                </a:tc>
-                <a:tc>
-                  <a:txBody>
-                    <a:bodyPr/>
-                    <a:lstStyle/>
-                    <a:p>
-                      <a:r>
-                        <a:rPr sz="1500" b="0" i="0">
-                          <a:solidFill>
-                            <a:srgbClr val="222222"/>
-                          </a:solidFill>
-                          <a:latin typeface="Calibri"/>
-                        </a:rPr>
-                        <a:t>—</a:t>
-                      </a:r>
-                    </a:p>
-                  </a:txBody>
-                  <a:tcPr marL="73152" marR="73152" anchor="ctr">
-                    <a:solidFill>
-                      <a:srgbClr val="FFFFFF"/>
-                    </a:solidFill>
-                  </a:tcPr>
-                </a:tc>
-                <a:tc>
-                  <a:txBody>
-                    <a:bodyPr/>
-                    <a:lstStyle/>
-                    <a:p>
-                      <a:r>
-                        <a:rPr sz="1500" b="0" i="0">
-                          <a:solidFill>
-                            <a:srgbClr val="222222"/>
-                          </a:solidFill>
-                          <a:latin typeface="Calibri"/>
-                        </a:rPr>
-                        <a:t>Galiniai jungikliai, avarinis rankinis sukimas</a:t>
-                      </a:r>
-                    </a:p>
-                  </a:txBody>
-                  <a:tcPr marL="73152" marR="73152" anchor="ctr">
-                    <a:solidFill>
-                      <a:srgbClr val="FFFFFF"/>
-                    </a:solidFill>
-                  </a:tcPr>
-                </a:tc>
-                <a:tc>
-                  <a:txBody>
-                    <a:bodyPr/>
-                    <a:lstStyle/>
-                    <a:p>
-                      <a:r>
-                        <a:rPr sz="1500" b="0" i="0">
-                          <a:solidFill>
-                            <a:srgbClr val="222222"/>
-                          </a:solidFill>
-                          <a:latin typeface="Calibri"/>
-                        </a:rPr>
-                        <a:t>Variklis sustoja kraštinėse padėtyse</a:t>
+                        <a:t>Sukti galima nesilenkiant prie pat rato (mūsų idėja)</a:t>
                       </a:r>
                     </a:p>
                   </a:txBody>
@@ -8089,13 +10735,13 @@
       </p:graphicFrame>
       <p:sp>
         <p:nvSpPr>
-          <p:cNvPr id="7" name="TextBox 6"/>
+          <p:cNvPr id="9" name="TextBox 8"/>
           <p:cNvSpPr txBox="1"/>
           <p:nvPr/>
         </p:nvSpPr>
         <p:spPr>
           <a:xfrm>
-            <a:off x="640080" y="5760720"/>
+            <a:off x="640080" y="5897880"/>
             <a:ext cx="10881360" cy="457200"/>
           </a:xfrm>
           <a:prstGeom prst="rect">
@@ -8121,1756 +10767,7 @@
                 </a:solidFill>
                 <a:latin typeface="Calibri"/>
               </a:rPr>
-              <a:t>Šaltiniai: Roton Products (n.d.); Sider Ticino (n.d.); Hengli Automation (n.d.); The World Material (n.d.); Gnee Steel (n.d.); Mickael (2004). Variklio galia – mūsų skaičiavimas.</a:t>
-            </a:r>
-          </a:p>
-        </p:txBody>
-      </p:sp>
-    </p:spTree>
-  </p:cSld>
-  <p:clrMapOvr>
-    <a:masterClrMapping/>
-  </p:clrMapOvr>
-</p:sld>
-</file>
-
-<file path=ppt/slides/slide7.xml><?xml version="1.0" encoding="utf-8"?>
-<p:sld xmlns:a="http://schemas.openxmlformats.org/drawingml/2006/main" xmlns:p="http://schemas.openxmlformats.org/presentationml/2006/main" xmlns:r="http://schemas.openxmlformats.org/officeDocument/2006/relationships">
-  <p:cSld>
-    <p:spTree>
-      <p:nvGrpSpPr>
-        <p:cNvPr id="1" name=""/>
-        <p:cNvGrpSpPr/>
-        <p:nvPr/>
-      </p:nvGrpSpPr>
-      <p:grpSpPr/>
-      <p:sp>
-        <p:nvSpPr>
-          <p:cNvPr id="2" name="TextBox 1"/>
-          <p:cNvSpPr txBox="1"/>
-          <p:nvPr/>
-        </p:nvSpPr>
-        <p:spPr>
-          <a:xfrm>
-            <a:off x="548640" y="320040"/>
-            <a:ext cx="11064240" cy="822960"/>
-          </a:xfrm>
-          <a:prstGeom prst="rect">
-            <a:avLst/>
-          </a:prstGeom>
-          <a:noFill/>
-        </p:spPr>
-        <p:txBody>
-          <a:bodyPr wrap="square" anchor="b" lIns="45720" rIns="45720">
-            <a:spAutoFit/>
-          </a:bodyPr>
-          <a:lstStyle/>
-          <a:p>
-            <a:pPr algn="l">
-              <a:spcAft>
-                <a:spcPts val="600"/>
-              </a:spcAft>
-            </a:pPr>
-            <a:r>
-              <a:rPr sz="3200" b="1">
-                <a:solidFill>
-                  <a:srgbClr val="1F4E79"/>
-                </a:solidFill>
-                <a:latin typeface="Calibri"/>
-              </a:rPr>
-              <a:t>Įprastas ir patobulintas domkratas</a:t>
-            </a:r>
-          </a:p>
-        </p:txBody>
-      </p:sp>
-      <p:sp>
-        <p:nvSpPr>
-          <p:cNvPr id="3" name="Rectangle 2"/>
-          <p:cNvSpPr/>
-          <p:nvPr/>
-        </p:nvSpPr>
-        <p:spPr>
-          <a:xfrm>
-            <a:off x="594360" y="1207008"/>
-            <a:ext cx="10972800" cy="27432"/>
-          </a:xfrm>
-          <a:prstGeom prst="rect">
-            <a:avLst/>
-          </a:prstGeom>
-          <a:solidFill>
-            <a:srgbClr val="1F4E79"/>
-          </a:solidFill>
-          <a:ln>
-            <a:noFill/>
-          </a:ln>
-          <a:effectLst/>
-        </p:spPr>
-        <p:style>
-          <a:lnRef idx="1">
-            <a:schemeClr val="accent1"/>
-          </a:lnRef>
-          <a:fillRef idx="3">
-            <a:schemeClr val="accent1"/>
-          </a:fillRef>
-          <a:effectRef idx="2">
-            <a:schemeClr val="accent1"/>
-          </a:effectRef>
-          <a:fontRef idx="minor">
-            <a:schemeClr val="lt1"/>
-          </a:fontRef>
-        </p:style>
-        <p:txBody>
-          <a:bodyPr rtlCol="0" anchor="ctr"/>
-          <a:lstStyle/>
-          <a:p>
-            <a:pPr algn="ctr"/>
-          </a:p>
-        </p:txBody>
-      </p:sp>
-      <p:sp>
-        <p:nvSpPr>
-          <p:cNvPr id="4" name="TextBox 3"/>
-          <p:cNvSpPr txBox="1"/>
-          <p:nvPr/>
-        </p:nvSpPr>
-        <p:spPr>
-          <a:xfrm>
-            <a:off x="10698480" y="6355080"/>
-            <a:ext cx="1005840" cy="365760"/>
-          </a:xfrm>
-          <a:prstGeom prst="rect">
-            <a:avLst/>
-          </a:prstGeom>
-          <a:noFill/>
-        </p:spPr>
-        <p:txBody>
-          <a:bodyPr wrap="square" anchor="t" lIns="45720" rIns="45720">
-            <a:spAutoFit/>
-          </a:bodyPr>
-          <a:lstStyle/>
-          <a:p>
-            <a:pPr algn="r">
-              <a:spcAft>
-                <a:spcPts val="600"/>
-              </a:spcAft>
-            </a:pPr>
-            <a:r>
-              <a:rPr sz="1200" b="0">
-                <a:solidFill>
-                  <a:srgbClr val="595959"/>
-                </a:solidFill>
-                <a:latin typeface="Calibri"/>
-              </a:rPr>
-              <a:t>7 / 10</a:t>
-            </a:r>
-          </a:p>
-        </p:txBody>
-      </p:sp>
-      <p:sp>
-        <p:nvSpPr>
-          <p:cNvPr id="5" name="TextBox 4"/>
-          <p:cNvSpPr txBox="1"/>
-          <p:nvPr/>
-        </p:nvSpPr>
-        <p:spPr>
-          <a:xfrm>
-            <a:off x="548640" y="6355080"/>
-            <a:ext cx="7315200" cy="365760"/>
-          </a:xfrm>
-          <a:prstGeom prst="rect">
-            <a:avLst/>
-          </a:prstGeom>
-          <a:noFill/>
-        </p:spPr>
-        <p:txBody>
-          <a:bodyPr wrap="square" anchor="t" lIns="45720" rIns="45720">
-            <a:spAutoFit/>
-          </a:bodyPr>
-          <a:lstStyle/>
-          <a:p>
-            <a:pPr algn="l">
-              <a:spcAft>
-                <a:spcPts val="600"/>
-              </a:spcAft>
-            </a:pPr>
-            <a:r>
-              <a:rPr sz="1200" b="0">
-                <a:solidFill>
-                  <a:srgbClr val="595959"/>
-                </a:solidFill>
-                <a:latin typeface="Calibri"/>
-              </a:rPr>
-              <a:t>PBL · Domkratas</a:t>
-            </a:r>
-          </a:p>
-        </p:txBody>
-      </p:sp>
-      <p:graphicFrame>
-        <p:nvGraphicFramePr>
-          <p:cNvPr id="6" name="Table 5"/>
-          <p:cNvGraphicFramePr>
-            <a:graphicFrameLocks noGrp="1"/>
-          </p:cNvGraphicFramePr>
-          <p:nvPr/>
-        </p:nvGraphicFramePr>
-        <p:xfrm>
-          <a:off x="640080" y="1463040"/>
-          <a:ext cx="6766560" cy="3566160"/>
-        </p:xfrm>
-        <a:graphic>
-          <a:graphicData uri="http://schemas.openxmlformats.org/drawingml/2006/table">
-            <a:tbl>
-              <a:tblPr firstRow="1" bandRow="1">
-                <a:tableStyleId>{5C22544A-7EE6-4342-B048-85BDC9FD1C3A}</a:tableStyleId>
-              </a:tblPr>
-              <a:tblGrid>
-                <a:gridCol w="2377440"/>
-                <a:gridCol w="2194560"/>
-                <a:gridCol w="2194560"/>
-              </a:tblGrid>
-              <a:tr h="594360">
-                <a:tc>
-                  <a:txBody>
-                    <a:bodyPr/>
-                    <a:lstStyle/>
-                    <a:p>
-                      <a:r>
-                        <a:rPr sz="1700" b="1" i="0">
-                          <a:solidFill>
-                            <a:srgbClr val="FFFFFF"/>
-                          </a:solidFill>
-                          <a:latin typeface="Calibri"/>
-                        </a:rPr>
-                        <a:t>Parametras</a:t>
-                      </a:r>
-                    </a:p>
-                  </a:txBody>
-                  <a:tcPr marL="73152" marR="73152" anchor="ctr">
-                    <a:solidFill>
-                      <a:srgbClr val="1F4E79"/>
-                    </a:solidFill>
-                  </a:tcPr>
-                </a:tc>
-                <a:tc>
-                  <a:txBody>
-                    <a:bodyPr/>
-                    <a:lstStyle/>
-                    <a:p>
-                      <a:r>
-                        <a:rPr sz="1700" b="1" i="0">
-                          <a:solidFill>
-                            <a:srgbClr val="FFFFFF"/>
-                          </a:solidFill>
-                          <a:latin typeface="Calibri"/>
-                        </a:rPr>
-                        <a:t>Įprastas</a:t>
-                      </a:r>
-                    </a:p>
-                  </a:txBody>
-                  <a:tcPr marL="73152" marR="73152" anchor="ctr">
-                    <a:solidFill>
-                      <a:srgbClr val="1F4E79"/>
-                    </a:solidFill>
-                  </a:tcPr>
-                </a:tc>
-                <a:tc>
-                  <a:txBody>
-                    <a:bodyPr/>
-                    <a:lstStyle/>
-                    <a:p>
-                      <a:r>
-                        <a:rPr sz="1700" b="1" i="0">
-                          <a:solidFill>
-                            <a:srgbClr val="FFFFFF"/>
-                          </a:solidFill>
-                          <a:latin typeface="Calibri"/>
-                        </a:rPr>
-                        <a:t>Patobulintas</a:t>
-                      </a:r>
-                    </a:p>
-                  </a:txBody>
-                  <a:tcPr marL="73152" marR="73152" anchor="ctr">
-                    <a:solidFill>
-                      <a:srgbClr val="1F4E79"/>
-                    </a:solidFill>
-                  </a:tcPr>
-                </a:tc>
-              </a:tr>
-              <a:tr h="594360">
-                <a:tc>
-                  <a:txBody>
-                    <a:bodyPr/>
-                    <a:lstStyle/>
-                    <a:p>
-                      <a:r>
-                        <a:rPr sz="1700" b="1" i="0">
-                          <a:solidFill>
-                            <a:srgbClr val="222222"/>
-                          </a:solidFill>
-                          <a:latin typeface="Calibri"/>
-                        </a:rPr>
-                        <a:t>Kėlimo laikas</a:t>
-                      </a:r>
-                    </a:p>
-                  </a:txBody>
-                  <a:tcPr marL="73152" marR="73152" anchor="ctr">
-                    <a:solidFill>
-                      <a:srgbClr val="FFFFFF"/>
-                    </a:solidFill>
-                  </a:tcPr>
-                </a:tc>
-                <a:tc>
-                  <a:txBody>
-                    <a:bodyPr/>
-                    <a:lstStyle/>
-                    <a:p>
-                      <a:r>
-                        <a:rPr sz="1700" b="0" i="0">
-                          <a:solidFill>
-                            <a:srgbClr val="222222"/>
-                          </a:solidFill>
-                          <a:latin typeface="Calibri"/>
-                        </a:rPr>
-                        <a:t>~2–4 min</a:t>
-                      </a:r>
-                    </a:p>
-                  </a:txBody>
-                  <a:tcPr marL="73152" marR="73152" anchor="ctr">
-                    <a:solidFill>
-                      <a:srgbClr val="FFFFFF"/>
-                    </a:solidFill>
-                  </a:tcPr>
-                </a:tc>
-                <a:tc>
-                  <a:txBody>
-                    <a:bodyPr/>
-                    <a:lstStyle/>
-                    <a:p>
-                      <a:r>
-                        <a:rPr sz="1700" b="0" i="0">
-                          <a:solidFill>
-                            <a:srgbClr val="222222"/>
-                          </a:solidFill>
-                          <a:latin typeface="Calibri"/>
-                        </a:rPr>
-                        <a:t>≤ 60 s</a:t>
-                      </a:r>
-                    </a:p>
-                  </a:txBody>
-                  <a:tcPr marL="73152" marR="73152" anchor="ctr">
-                    <a:solidFill>
-                      <a:srgbClr val="FFFFFF"/>
-                    </a:solidFill>
-                  </a:tcPr>
-                </a:tc>
-              </a:tr>
-              <a:tr h="594360">
-                <a:tc>
-                  <a:txBody>
-                    <a:bodyPr/>
-                    <a:lstStyle/>
-                    <a:p>
-                      <a:r>
-                        <a:rPr sz="1700" b="1" i="0">
-                          <a:solidFill>
-                            <a:srgbClr val="222222"/>
-                          </a:solidFill>
-                          <a:latin typeface="Calibri"/>
-                        </a:rPr>
-                        <a:t>Rankos jėga</a:t>
-                      </a:r>
-                    </a:p>
-                  </a:txBody>
-                  <a:tcPr marL="73152" marR="73152" anchor="ctr">
-                    <a:solidFill>
-                      <a:srgbClr val="FFFFFF"/>
-                    </a:solidFill>
-                  </a:tcPr>
-                </a:tc>
-                <a:tc>
-                  <a:txBody>
-                    <a:bodyPr/>
-                    <a:lstStyle/>
-                    <a:p>
-                      <a:r>
-                        <a:rPr sz="1700" b="0" i="0">
-                          <a:solidFill>
-                            <a:srgbClr val="222222"/>
-                          </a:solidFill>
-                          <a:latin typeface="Calibri"/>
-                        </a:rPr>
-                        <a:t>~100–200 N</a:t>
-                      </a:r>
-                    </a:p>
-                  </a:txBody>
-                  <a:tcPr marL="73152" marR="73152" anchor="ctr">
-                    <a:solidFill>
-                      <a:srgbClr val="FFFFFF"/>
-                    </a:solidFill>
-                  </a:tcPr>
-                </a:tc>
-                <a:tc>
-                  <a:txBody>
-                    <a:bodyPr/>
-                    <a:lstStyle/>
-                    <a:p>
-                      <a:r>
-                        <a:rPr sz="1700" b="0" i="0">
-                          <a:solidFill>
-                            <a:srgbClr val="222222"/>
-                          </a:solidFill>
-                          <a:latin typeface="Calibri"/>
-                        </a:rPr>
-                        <a:t>nereikia</a:t>
-                      </a:r>
-                    </a:p>
-                  </a:txBody>
-                  <a:tcPr marL="73152" marR="73152" anchor="ctr">
-                    <a:solidFill>
-                      <a:srgbClr val="FFFFFF"/>
-                    </a:solidFill>
-                  </a:tcPr>
-                </a:tc>
-              </a:tr>
-              <a:tr h="594360">
-                <a:tc>
-                  <a:txBody>
-                    <a:bodyPr/>
-                    <a:lstStyle/>
-                    <a:p>
-                      <a:r>
-                        <a:rPr sz="1700" b="1" i="0">
-                          <a:solidFill>
-                            <a:srgbClr val="222222"/>
-                          </a:solidFill>
-                          <a:latin typeface="Calibri"/>
-                        </a:rPr>
-                        <a:t>Pagrindo plotas</a:t>
-                      </a:r>
-                    </a:p>
-                  </a:txBody>
-                  <a:tcPr marL="73152" marR="73152" anchor="ctr">
-                    <a:solidFill>
-                      <a:srgbClr val="FFFFFF"/>
-                    </a:solidFill>
-                  </a:tcPr>
-                </a:tc>
-                <a:tc>
-                  <a:txBody>
-                    <a:bodyPr/>
-                    <a:lstStyle/>
-                    <a:p>
-                      <a:r>
-                        <a:rPr sz="1700" b="0" i="0">
-                          <a:solidFill>
-                            <a:srgbClr val="222222"/>
-                          </a:solidFill>
-                          <a:latin typeface="Calibri"/>
-                        </a:rPr>
-                        <a:t>~100 cm²</a:t>
-                      </a:r>
-                    </a:p>
-                  </a:txBody>
-                  <a:tcPr marL="73152" marR="73152" anchor="ctr">
-                    <a:solidFill>
-                      <a:srgbClr val="FFFFFF"/>
-                    </a:solidFill>
-                  </a:tcPr>
-                </a:tc>
-                <a:tc>
-                  <a:txBody>
-                    <a:bodyPr/>
-                    <a:lstStyle/>
-                    <a:p>
-                      <a:r>
-                        <a:rPr sz="1700" b="0" i="0">
-                          <a:solidFill>
-                            <a:srgbClr val="222222"/>
-                          </a:solidFill>
-                          <a:latin typeface="Calibri"/>
-                        </a:rPr>
-                        <a:t>~240 cm²</a:t>
-                      </a:r>
-                    </a:p>
-                  </a:txBody>
-                  <a:tcPr marL="73152" marR="73152" anchor="ctr">
-                    <a:solidFill>
-                      <a:srgbClr val="FFFFFF"/>
-                    </a:solidFill>
-                  </a:tcPr>
-                </a:tc>
-              </a:tr>
-              <a:tr h="594360">
-                <a:tc>
-                  <a:txBody>
-                    <a:bodyPr/>
-                    <a:lstStyle/>
-                    <a:p>
-                      <a:r>
-                        <a:rPr sz="1700" b="1" i="0">
-                          <a:solidFill>
-                            <a:srgbClr val="222222"/>
-                          </a:solidFill>
-                          <a:latin typeface="Calibri"/>
-                        </a:rPr>
-                        <a:t>Masė</a:t>
-                      </a:r>
-                    </a:p>
-                  </a:txBody>
-                  <a:tcPr marL="73152" marR="73152" anchor="ctr">
-                    <a:solidFill>
-                      <a:srgbClr val="FFFFFF"/>
-                    </a:solidFill>
-                  </a:tcPr>
-                </a:tc>
-                <a:tc>
-                  <a:txBody>
-                    <a:bodyPr/>
-                    <a:lstStyle/>
-                    <a:p>
-                      <a:r>
-                        <a:rPr sz="1700" b="0" i="0">
-                          <a:solidFill>
-                            <a:srgbClr val="222222"/>
-                          </a:solidFill>
-                          <a:latin typeface="Calibri"/>
-                        </a:rPr>
-                        <a:t>~3 kg</a:t>
-                      </a:r>
-                    </a:p>
-                  </a:txBody>
-                  <a:tcPr marL="73152" marR="73152" anchor="ctr">
-                    <a:solidFill>
-                      <a:srgbClr val="FFFFFF"/>
-                    </a:solidFill>
-                  </a:tcPr>
-                </a:tc>
-                <a:tc>
-                  <a:txBody>
-                    <a:bodyPr/>
-                    <a:lstStyle/>
-                    <a:p>
-                      <a:r>
-                        <a:rPr sz="1700" b="0" i="0">
-                          <a:solidFill>
-                            <a:srgbClr val="222222"/>
-                          </a:solidFill>
-                          <a:latin typeface="Calibri"/>
-                        </a:rPr>
-                        <a:t>~4,5 kg</a:t>
-                      </a:r>
-                    </a:p>
-                  </a:txBody>
-                  <a:tcPr marL="73152" marR="73152" anchor="ctr">
-                    <a:solidFill>
-                      <a:srgbClr val="FFFFFF"/>
-                    </a:solidFill>
-                  </a:tcPr>
-                </a:tc>
-              </a:tr>
-              <a:tr h="594360">
-                <a:tc>
-                  <a:txBody>
-                    <a:bodyPr/>
-                    <a:lstStyle/>
-                    <a:p>
-                      <a:r>
-                        <a:rPr sz="1700" b="1" i="0">
-                          <a:solidFill>
-                            <a:srgbClr val="222222"/>
-                          </a:solidFill>
-                          <a:latin typeface="Calibri"/>
-                        </a:rPr>
-                        <a:t>Kaina</a:t>
-                      </a:r>
-                    </a:p>
-                  </a:txBody>
-                  <a:tcPr marL="73152" marR="73152" anchor="ctr">
-                    <a:solidFill>
-                      <a:srgbClr val="FFFFFF"/>
-                    </a:solidFill>
-                  </a:tcPr>
-                </a:tc>
-                <a:tc>
-                  <a:txBody>
-                    <a:bodyPr/>
-                    <a:lstStyle/>
-                    <a:p>
-                      <a:r>
-                        <a:rPr sz="1700" b="0" i="0">
-                          <a:solidFill>
-                            <a:srgbClr val="222222"/>
-                          </a:solidFill>
-                          <a:latin typeface="Calibri"/>
-                        </a:rPr>
-                        <a:t>~20–30 €</a:t>
-                      </a:r>
-                    </a:p>
-                  </a:txBody>
-                  <a:tcPr marL="73152" marR="73152" anchor="ctr">
-                    <a:solidFill>
-                      <a:srgbClr val="FFFFFF"/>
-                    </a:solidFill>
-                  </a:tcPr>
-                </a:tc>
-                <a:tc>
-                  <a:txBody>
-                    <a:bodyPr/>
-                    <a:lstStyle/>
-                    <a:p>
-                      <a:r>
-                        <a:rPr sz="1700" b="0" i="0">
-                          <a:solidFill>
-                            <a:srgbClr val="222222"/>
-                          </a:solidFill>
-                          <a:latin typeface="Calibri"/>
-                        </a:rPr>
-                        <a:t>~60–80 €</a:t>
-                      </a:r>
-                    </a:p>
-                  </a:txBody>
-                  <a:tcPr marL="73152" marR="73152" anchor="ctr">
-                    <a:solidFill>
-                      <a:srgbClr val="FFFFFF"/>
-                    </a:solidFill>
-                  </a:tcPr>
-                </a:tc>
-              </a:tr>
-            </a:tbl>
-          </a:graphicData>
-        </a:graphic>
-      </p:graphicFrame>
-      <p:sp>
-        <p:nvSpPr>
-          <p:cNvPr id="7" name="TextBox 6"/>
-          <p:cNvSpPr txBox="1"/>
-          <p:nvPr/>
-        </p:nvSpPr>
-        <p:spPr>
-          <a:xfrm>
-            <a:off x="7772400" y="1463040"/>
-            <a:ext cx="3840480" cy="4206240"/>
-          </a:xfrm>
-          <a:prstGeom prst="rect">
-            <a:avLst/>
-          </a:prstGeom>
-          <a:noFill/>
-        </p:spPr>
-        <p:txBody>
-          <a:bodyPr wrap="square" anchor="t" lIns="45720" rIns="45720">
-            <a:spAutoFit/>
-          </a:bodyPr>
-          <a:lstStyle/>
-          <a:p>
-            <a:pPr algn="l">
-              <a:spcAft>
-                <a:spcPts val="1000"/>
-              </a:spcAft>
-            </a:pPr>
-            <a:r>
-              <a:rPr sz="2100" b="1">
-                <a:solidFill>
-                  <a:srgbClr val="1F4E79"/>
-                </a:solidFill>
-                <a:latin typeface="Calibri"/>
-              </a:rPr>
-              <a:t>Preliminarus skaičiavimas</a:t>
-            </a:r>
-          </a:p>
-          <a:p>
-            <a:pPr>
-              <a:spcAft>
-                <a:spcPts val="200"/>
-              </a:spcAft>
-            </a:pPr>
-            <a:r>
-              <a:rPr sz="1800" b="1">
-                <a:solidFill>
-                  <a:srgbClr val="222222"/>
-                </a:solidFill>
-                <a:latin typeface="Calibri"/>
-              </a:rPr>
-              <a:t>Variklio galia:</a:t>
-            </a:r>
-          </a:p>
-          <a:p>
-            <a:pPr>
-              <a:spcAft>
-                <a:spcPts val="1200"/>
-              </a:spcAft>
-            </a:pPr>
-            <a:r>
-              <a:rPr sz="1800" b="0">
-                <a:solidFill>
-                  <a:srgbClr val="222222"/>
-                </a:solidFill>
-                <a:latin typeface="Calibri"/>
-              </a:rPr>
-              <a:t>P ≈ Q·h / (t·η) = 5000·0,25 / (45·0,3) ≈ 93 W</a:t>
-            </a:r>
-          </a:p>
-          <a:p>
-            <a:pPr>
-              <a:spcAft>
-                <a:spcPts val="200"/>
-              </a:spcAft>
-            </a:pPr>
-            <a:r>
-              <a:rPr sz="1800" b="1">
-                <a:solidFill>
-                  <a:srgbClr val="222222"/>
-                </a:solidFill>
-                <a:latin typeface="Calibri"/>
-              </a:rPr>
-              <a:t>Srovė iš 12 V lizdo:</a:t>
-            </a:r>
-          </a:p>
-          <a:p>
-            <a:pPr>
-              <a:spcAft>
-                <a:spcPts val="1200"/>
-              </a:spcAft>
-            </a:pPr>
-            <a:r>
-              <a:rPr sz="1800" b="0">
-                <a:solidFill>
-                  <a:srgbClr val="222222"/>
-                </a:solidFill>
-                <a:latin typeface="Calibri"/>
-              </a:rPr>
-              <a:t>I = P / U ≈ 93 / 12 ≈ 8 A</a:t>
-            </a:r>
-          </a:p>
-          <a:p>
-            <a:pPr>
-              <a:spcAft>
-                <a:spcPts val="200"/>
-              </a:spcAft>
-            </a:pPr>
-            <a:r>
-              <a:rPr sz="1800" b="1">
-                <a:solidFill>
-                  <a:srgbClr val="222222"/>
-                </a:solidFill>
-                <a:latin typeface="Calibri"/>
-              </a:rPr>
-              <a:t>Savistabdumo sąlyga:</a:t>
-            </a:r>
-          </a:p>
-          <a:p>
-            <a:pPr>
-              <a:spcAft>
-                <a:spcPts val="1200"/>
-              </a:spcAft>
-            </a:pPr>
-            <a:r>
-              <a:rPr sz="1800" b="0">
-                <a:solidFill>
-                  <a:srgbClr val="222222"/>
-                </a:solidFill>
-                <a:latin typeface="Calibri"/>
-              </a:rPr>
-              <a:t>sriegio pakilimo kampas turi būti mažesnis už trinties kampą – tada krovinys nenusileidžia savaime.</a:t>
-            </a:r>
-          </a:p>
-        </p:txBody>
-      </p:sp>
-      <p:sp>
-        <p:nvSpPr>
-          <p:cNvPr id="8" name="TextBox 7"/>
-          <p:cNvSpPr txBox="1"/>
-          <p:nvPr/>
-        </p:nvSpPr>
-        <p:spPr>
-          <a:xfrm>
-            <a:off x="640080" y="5897880"/>
-            <a:ext cx="10881360" cy="457200"/>
-          </a:xfrm>
-          <a:prstGeom prst="rect">
-            <a:avLst/>
-          </a:prstGeom>
-          <a:noFill/>
-        </p:spPr>
-        <p:txBody>
-          <a:bodyPr wrap="square" anchor="t" lIns="45720" rIns="45720">
-            <a:spAutoFit/>
-          </a:bodyPr>
-          <a:lstStyle/>
-          <a:p>
-            <a:pPr algn="l">
-              <a:spcAft>
-                <a:spcPts val="600"/>
-              </a:spcAft>
-            </a:pPr>
-            <a:r>
-              <a:rPr sz="1300" b="0">
-                <a:solidFill>
-                  <a:srgbClr val="595959"/>
-                </a:solidFill>
-                <a:latin typeface="Calibri"/>
-              </a:rPr>
-              <a:t>Šaltiniai: Roton Products (n.d.) – savistabdumo sąlyga. Lentelės vertės ir skaičiavimas – mūsų apytiksliai įvertinimai.</a:t>
-            </a:r>
-          </a:p>
-        </p:txBody>
-      </p:sp>
-    </p:spTree>
-  </p:cSld>
-  <p:clrMapOvr>
-    <a:masterClrMapping/>
-  </p:clrMapOvr>
-</p:sld>
-</file>
-
-<file path=ppt/slides/slide8.xml><?xml version="1.0" encoding="utf-8"?>
-<p:sld xmlns:a="http://schemas.openxmlformats.org/drawingml/2006/main" xmlns:p="http://schemas.openxmlformats.org/presentationml/2006/main" xmlns:r="http://schemas.openxmlformats.org/officeDocument/2006/relationships">
-  <p:cSld>
-    <p:spTree>
-      <p:nvGrpSpPr>
-        <p:cNvPr id="1" name=""/>
-        <p:cNvGrpSpPr/>
-        <p:nvPr/>
-      </p:nvGrpSpPr>
-      <p:grpSpPr/>
-      <p:sp>
-        <p:nvSpPr>
-          <p:cNvPr id="2" name="TextBox 1"/>
-          <p:cNvSpPr txBox="1"/>
-          <p:nvPr/>
-        </p:nvSpPr>
-        <p:spPr>
-          <a:xfrm>
-            <a:off x="548640" y="320040"/>
-            <a:ext cx="11064240" cy="822960"/>
-          </a:xfrm>
-          <a:prstGeom prst="rect">
-            <a:avLst/>
-          </a:prstGeom>
-          <a:noFill/>
-        </p:spPr>
-        <p:txBody>
-          <a:bodyPr wrap="square" anchor="b" lIns="45720" rIns="45720">
-            <a:spAutoFit/>
-          </a:bodyPr>
-          <a:lstStyle/>
-          <a:p>
-            <a:pPr algn="l">
-              <a:spcAft>
-                <a:spcPts val="600"/>
-              </a:spcAft>
-            </a:pPr>
-            <a:r>
-              <a:rPr sz="3200" b="1">
-                <a:solidFill>
-                  <a:srgbClr val="1F4E79"/>
-                </a:solidFill>
-                <a:latin typeface="Calibri"/>
-              </a:rPr>
-              <a:t>Išvados</a:t>
-            </a:r>
-          </a:p>
-        </p:txBody>
-      </p:sp>
-      <p:sp>
-        <p:nvSpPr>
-          <p:cNvPr id="3" name="Rectangle 2"/>
-          <p:cNvSpPr/>
-          <p:nvPr/>
-        </p:nvSpPr>
-        <p:spPr>
-          <a:xfrm>
-            <a:off x="594360" y="1207008"/>
-            <a:ext cx="10972800" cy="27432"/>
-          </a:xfrm>
-          <a:prstGeom prst="rect">
-            <a:avLst/>
-          </a:prstGeom>
-          <a:solidFill>
-            <a:srgbClr val="1F4E79"/>
-          </a:solidFill>
-          <a:ln>
-            <a:noFill/>
-          </a:ln>
-          <a:effectLst/>
-        </p:spPr>
-        <p:style>
-          <a:lnRef idx="1">
-            <a:schemeClr val="accent1"/>
-          </a:lnRef>
-          <a:fillRef idx="3">
-            <a:schemeClr val="accent1"/>
-          </a:fillRef>
-          <a:effectRef idx="2">
-            <a:schemeClr val="accent1"/>
-          </a:effectRef>
-          <a:fontRef idx="minor">
-            <a:schemeClr val="lt1"/>
-          </a:fontRef>
-        </p:style>
-        <p:txBody>
-          <a:bodyPr rtlCol="0" anchor="ctr"/>
-          <a:lstStyle/>
-          <a:p>
-            <a:pPr algn="ctr"/>
-          </a:p>
-        </p:txBody>
-      </p:sp>
-      <p:sp>
-        <p:nvSpPr>
-          <p:cNvPr id="4" name="TextBox 3"/>
-          <p:cNvSpPr txBox="1"/>
-          <p:nvPr/>
-        </p:nvSpPr>
-        <p:spPr>
-          <a:xfrm>
-            <a:off x="10698480" y="6355080"/>
-            <a:ext cx="1005840" cy="365760"/>
-          </a:xfrm>
-          <a:prstGeom prst="rect">
-            <a:avLst/>
-          </a:prstGeom>
-          <a:noFill/>
-        </p:spPr>
-        <p:txBody>
-          <a:bodyPr wrap="square" anchor="t" lIns="45720" rIns="45720">
-            <a:spAutoFit/>
-          </a:bodyPr>
-          <a:lstStyle/>
-          <a:p>
-            <a:pPr algn="r">
-              <a:spcAft>
-                <a:spcPts val="600"/>
-              </a:spcAft>
-            </a:pPr>
-            <a:r>
-              <a:rPr sz="1200" b="0">
-                <a:solidFill>
-                  <a:srgbClr val="595959"/>
-                </a:solidFill>
-                <a:latin typeface="Calibri"/>
-              </a:rPr>
-              <a:t>8 / 10</a:t>
-            </a:r>
-          </a:p>
-        </p:txBody>
-      </p:sp>
-      <p:sp>
-        <p:nvSpPr>
-          <p:cNvPr id="5" name="TextBox 4"/>
-          <p:cNvSpPr txBox="1"/>
-          <p:nvPr/>
-        </p:nvSpPr>
-        <p:spPr>
-          <a:xfrm>
-            <a:off x="548640" y="6355080"/>
-            <a:ext cx="7315200" cy="365760"/>
-          </a:xfrm>
-          <a:prstGeom prst="rect">
-            <a:avLst/>
-          </a:prstGeom>
-          <a:noFill/>
-        </p:spPr>
-        <p:txBody>
-          <a:bodyPr wrap="square" anchor="t" lIns="45720" rIns="45720">
-            <a:spAutoFit/>
-          </a:bodyPr>
-          <a:lstStyle/>
-          <a:p>
-            <a:pPr algn="l">
-              <a:spcAft>
-                <a:spcPts val="600"/>
-              </a:spcAft>
-            </a:pPr>
-            <a:r>
-              <a:rPr sz="1200" b="0">
-                <a:solidFill>
-                  <a:srgbClr val="595959"/>
-                </a:solidFill>
-                <a:latin typeface="Calibri"/>
-              </a:rPr>
-              <a:t>PBL · Domkratas</a:t>
-            </a:r>
-          </a:p>
-        </p:txBody>
-      </p:sp>
-      <p:sp>
-        <p:nvSpPr>
-          <p:cNvPr id="6" name="TextBox 5"/>
-          <p:cNvSpPr txBox="1"/>
-          <p:nvPr/>
-        </p:nvSpPr>
-        <p:spPr>
-          <a:xfrm>
-            <a:off x="640080" y="1554480"/>
-            <a:ext cx="6766560" cy="4206240"/>
-          </a:xfrm>
-          <a:prstGeom prst="rect">
-            <a:avLst/>
-          </a:prstGeom>
-          <a:noFill/>
-        </p:spPr>
-        <p:txBody>
-          <a:bodyPr wrap="square" anchor="t" lIns="45720" rIns="45720">
-            <a:spAutoFit/>
-          </a:bodyPr>
-          <a:lstStyle/>
-          <a:p>
-            <a:pPr algn="l">
-              <a:spcAft>
-                <a:spcPts val="1800"/>
-              </a:spcAft>
-            </a:pPr>
-            <a:r>
-              <a:rPr sz="2100" b="1">
-                <a:solidFill>
-                  <a:srgbClr val="222222"/>
-                </a:solidFill>
-                <a:latin typeface="Calibri"/>
-              </a:rPr>
-              <a:t>• Raida</a:t>
-            </a:r>
-            <a:r>
-              <a:rPr sz="2100" b="0" i="0">
-                <a:solidFill>
-                  <a:srgbClr val="222222"/>
-                </a:solidFill>
-                <a:latin typeface="Calibri"/>
-              </a:rPr>
-              <a:t> – nuo jėgos laimėjimo (svertas, sraigtas) per hidrauliką iki elektrinių domkratų.</a:t>
-            </a:r>
-          </a:p>
-          <a:p>
-            <a:pPr>
-              <a:spcAft>
-                <a:spcPts val="1800"/>
-              </a:spcAft>
-            </a:pPr>
-            <a:r>
-              <a:rPr sz="2100" b="1">
-                <a:solidFill>
-                  <a:srgbClr val="222222"/>
-                </a:solidFill>
-                <a:latin typeface="Calibri"/>
-              </a:rPr>
-              <a:t>• Problema</a:t>
-            </a:r>
-            <a:r>
-              <a:rPr sz="2100" b="0" i="0">
-                <a:solidFill>
-                  <a:srgbClr val="222222"/>
-                </a:solidFill>
-                <a:latin typeface="Calibri"/>
-              </a:rPr>
-              <a:t> – žirklinis domkratas kompaktiškas ir savistabdis, bet lėtas, sunkiai sukamas ir nestabilus.</a:t>
-            </a:r>
-          </a:p>
-          <a:p>
-            <a:pPr>
-              <a:spcAft>
-                <a:spcPts val="1800"/>
-              </a:spcAft>
-            </a:pPr>
-            <a:r>
-              <a:rPr sz="2100" b="1">
-                <a:solidFill>
-                  <a:srgbClr val="222222"/>
-                </a:solidFill>
-                <a:latin typeface="Calibri"/>
-              </a:rPr>
-              <a:t>• Sprendimas</a:t>
-            </a:r>
-            <a:r>
-              <a:rPr sz="2100" b="0" i="0">
-                <a:solidFill>
-                  <a:srgbClr val="222222"/>
-                </a:solidFill>
-                <a:latin typeface="Calibri"/>
-              </a:rPr>
-              <a:t> – 12 V elektrinė pavara, trapecinis sraigtas su bronzine veržle, stipresnės svirtys, platesnis pagrindas.</a:t>
-            </a:r>
-          </a:p>
-          <a:p>
-            <a:pPr>
-              <a:spcAft>
-                <a:spcPts val="1800"/>
-              </a:spcAft>
-            </a:pPr>
-            <a:r>
-              <a:rPr sz="2100" b="1">
-                <a:solidFill>
-                  <a:srgbClr val="222222"/>
-                </a:solidFill>
-                <a:latin typeface="Calibri"/>
-              </a:rPr>
-              <a:t>• Kompromisas</a:t>
-            </a:r>
-            <a:r>
-              <a:rPr sz="2100" b="0" i="0">
-                <a:solidFill>
-                  <a:srgbClr val="222222"/>
-                </a:solidFill>
-                <a:latin typeface="Calibri"/>
-              </a:rPr>
-              <a:t> – šiek tiek didesnė masė ir kaina.</a:t>
-            </a:r>
-          </a:p>
-        </p:txBody>
-      </p:sp>
-      <p:sp>
-        <p:nvSpPr>
-          <p:cNvPr id="7" name="Rectangle 6"/>
-          <p:cNvSpPr/>
-          <p:nvPr/>
-        </p:nvSpPr>
-        <p:spPr>
-          <a:xfrm>
-            <a:off x="7772400" y="2377440"/>
-            <a:ext cx="3749039" cy="1828800"/>
-          </a:xfrm>
-          <a:prstGeom prst="rect">
-            <a:avLst/>
-          </a:prstGeom>
-          <a:solidFill>
-            <a:srgbClr val="DEEAF6"/>
-          </a:solidFill>
-          <a:ln>
-            <a:noFill/>
-          </a:ln>
-          <a:effectLst/>
-        </p:spPr>
-        <p:style>
-          <a:lnRef idx="1">
-            <a:schemeClr val="accent1"/>
-          </a:lnRef>
-          <a:fillRef idx="3">
-            <a:schemeClr val="accent1"/>
-          </a:fillRef>
-          <a:effectRef idx="2">
-            <a:schemeClr val="accent1"/>
-          </a:effectRef>
-          <a:fontRef idx="minor">
-            <a:schemeClr val="lt1"/>
-          </a:fontRef>
-        </p:style>
-        <p:txBody>
-          <a:bodyPr rtlCol="0" anchor="ctr"/>
-          <a:lstStyle/>
-          <a:p>
-            <a:pPr algn="ctr"/>
-          </a:p>
-        </p:txBody>
-      </p:sp>
-      <p:sp>
-        <p:nvSpPr>
-          <p:cNvPr id="8" name="TextBox 7"/>
-          <p:cNvSpPr txBox="1"/>
-          <p:nvPr/>
-        </p:nvSpPr>
-        <p:spPr>
-          <a:xfrm>
-            <a:off x="7772400" y="2377440"/>
-            <a:ext cx="3749039" cy="1828800"/>
-          </a:xfrm>
-          <a:prstGeom prst="rect">
-            <a:avLst/>
-          </a:prstGeom>
-          <a:noFill/>
-        </p:spPr>
-        <p:txBody>
-          <a:bodyPr wrap="square" anchor="ctr" lIns="45720" rIns="45720">
-            <a:spAutoFit/>
-          </a:bodyPr>
-          <a:lstStyle/>
-          <a:p>
-            <a:pPr algn="ctr">
-              <a:spcAft>
-                <a:spcPts val="600"/>
-              </a:spcAft>
-            </a:pPr>
-            <a:r>
-              <a:rPr sz="3600" b="1">
-                <a:solidFill>
-                  <a:srgbClr val="1F4E79"/>
-                </a:solidFill>
-                <a:latin typeface="Calibri"/>
-              </a:rPr>
-              <a:t>Klausimai?</a:t>
-            </a:r>
-          </a:p>
-        </p:txBody>
-      </p:sp>
-    </p:spTree>
-  </p:cSld>
-  <p:clrMapOvr>
-    <a:masterClrMapping/>
-  </p:clrMapOvr>
-</p:sld>
-</file>
-
-<file path=ppt/slides/slide9.xml><?xml version="1.0" encoding="utf-8"?>
-<p:sld xmlns:a="http://schemas.openxmlformats.org/drawingml/2006/main" xmlns:p="http://schemas.openxmlformats.org/presentationml/2006/main" xmlns:r="http://schemas.openxmlformats.org/officeDocument/2006/relationships">
-  <p:cSld>
-    <p:spTree>
-      <p:nvGrpSpPr>
-        <p:cNvPr id="1" name=""/>
-        <p:cNvGrpSpPr/>
-        <p:nvPr/>
-      </p:nvGrpSpPr>
-      <p:grpSpPr/>
-      <p:sp>
-        <p:nvSpPr>
-          <p:cNvPr id="2" name="TextBox 1"/>
-          <p:cNvSpPr txBox="1"/>
-          <p:nvPr/>
-        </p:nvSpPr>
-        <p:spPr>
-          <a:xfrm>
-            <a:off x="548640" y="320040"/>
-            <a:ext cx="11064240" cy="822960"/>
-          </a:xfrm>
-          <a:prstGeom prst="rect">
-            <a:avLst/>
-          </a:prstGeom>
-          <a:noFill/>
-        </p:spPr>
-        <p:txBody>
-          <a:bodyPr wrap="square" anchor="b" lIns="45720" rIns="45720">
-            <a:spAutoFit/>
-          </a:bodyPr>
-          <a:lstStyle/>
-          <a:p>
-            <a:pPr algn="l">
-              <a:spcAft>
-                <a:spcPts val="600"/>
-              </a:spcAft>
-            </a:pPr>
-            <a:r>
-              <a:rPr sz="3200" b="1">
-                <a:solidFill>
-                  <a:srgbClr val="1F4E79"/>
-                </a:solidFill>
-                <a:latin typeface="Calibri"/>
-              </a:rPr>
-              <a:t>Šaltiniai (1/2)</a:t>
-            </a:r>
-          </a:p>
-        </p:txBody>
-      </p:sp>
-      <p:sp>
-        <p:nvSpPr>
-          <p:cNvPr id="3" name="Rectangle 2"/>
-          <p:cNvSpPr/>
-          <p:nvPr/>
-        </p:nvSpPr>
-        <p:spPr>
-          <a:xfrm>
-            <a:off x="594360" y="1207008"/>
-            <a:ext cx="10972800" cy="27432"/>
-          </a:xfrm>
-          <a:prstGeom prst="rect">
-            <a:avLst/>
-          </a:prstGeom>
-          <a:solidFill>
-            <a:srgbClr val="1F4E79"/>
-          </a:solidFill>
-          <a:ln>
-            <a:noFill/>
-          </a:ln>
-          <a:effectLst/>
-        </p:spPr>
-        <p:style>
-          <a:lnRef idx="1">
-            <a:schemeClr val="accent1"/>
-          </a:lnRef>
-          <a:fillRef idx="3">
-            <a:schemeClr val="accent1"/>
-          </a:fillRef>
-          <a:effectRef idx="2">
-            <a:schemeClr val="accent1"/>
-          </a:effectRef>
-          <a:fontRef idx="minor">
-            <a:schemeClr val="lt1"/>
-          </a:fontRef>
-        </p:style>
-        <p:txBody>
-          <a:bodyPr rtlCol="0" anchor="ctr"/>
-          <a:lstStyle/>
-          <a:p>
-            <a:pPr algn="ctr"/>
-          </a:p>
-        </p:txBody>
-      </p:sp>
-      <p:sp>
-        <p:nvSpPr>
-          <p:cNvPr id="4" name="TextBox 3"/>
-          <p:cNvSpPr txBox="1"/>
-          <p:nvPr/>
-        </p:nvSpPr>
-        <p:spPr>
-          <a:xfrm>
-            <a:off x="10698480" y="6355080"/>
-            <a:ext cx="1005840" cy="365760"/>
-          </a:xfrm>
-          <a:prstGeom prst="rect">
-            <a:avLst/>
-          </a:prstGeom>
-          <a:noFill/>
-        </p:spPr>
-        <p:txBody>
-          <a:bodyPr wrap="square" anchor="t" lIns="45720" rIns="45720">
-            <a:spAutoFit/>
-          </a:bodyPr>
-          <a:lstStyle/>
-          <a:p>
-            <a:pPr algn="r">
-              <a:spcAft>
-                <a:spcPts val="600"/>
-              </a:spcAft>
-            </a:pPr>
-            <a:r>
-              <a:rPr sz="1200" b="0">
-                <a:solidFill>
-                  <a:srgbClr val="595959"/>
-                </a:solidFill>
-                <a:latin typeface="Calibri"/>
-              </a:rPr>
-              <a:t>9 / 10</a:t>
-            </a:r>
-          </a:p>
-        </p:txBody>
-      </p:sp>
-      <p:sp>
-        <p:nvSpPr>
-          <p:cNvPr id="5" name="TextBox 4"/>
-          <p:cNvSpPr txBox="1"/>
-          <p:nvPr/>
-        </p:nvSpPr>
-        <p:spPr>
-          <a:xfrm>
-            <a:off x="548640" y="6355080"/>
-            <a:ext cx="7315200" cy="365760"/>
-          </a:xfrm>
-          <a:prstGeom prst="rect">
-            <a:avLst/>
-          </a:prstGeom>
-          <a:noFill/>
-        </p:spPr>
-        <p:txBody>
-          <a:bodyPr wrap="square" anchor="t" lIns="45720" rIns="45720">
-            <a:spAutoFit/>
-          </a:bodyPr>
-          <a:lstStyle/>
-          <a:p>
-            <a:pPr algn="l">
-              <a:spcAft>
-                <a:spcPts val="600"/>
-              </a:spcAft>
-            </a:pPr>
-            <a:r>
-              <a:rPr sz="1200" b="0">
-                <a:solidFill>
-                  <a:srgbClr val="595959"/>
-                </a:solidFill>
-                <a:latin typeface="Calibri"/>
-              </a:rPr>
-              <a:t>PBL · Domkratas</a:t>
-            </a:r>
-          </a:p>
-        </p:txBody>
-      </p:sp>
-      <p:sp>
-        <p:nvSpPr>
-          <p:cNvPr id="6" name="TextBox 5"/>
-          <p:cNvSpPr txBox="1"/>
-          <p:nvPr/>
-        </p:nvSpPr>
-        <p:spPr>
-          <a:xfrm>
-            <a:off x="640080" y="1463040"/>
-            <a:ext cx="10881360" cy="4754880"/>
-          </a:xfrm>
-          <a:prstGeom prst="rect">
-            <a:avLst/>
-          </a:prstGeom>
-          <a:noFill/>
-        </p:spPr>
-        <p:txBody>
-          <a:bodyPr wrap="square" anchor="t" lIns="45720" rIns="45720">
-            <a:spAutoFit/>
-          </a:bodyPr>
-          <a:lstStyle/>
-          <a:p>
-            <a:pPr algn="l">
-              <a:spcAft>
-                <a:spcPts val="700"/>
-              </a:spcAft>
-            </a:pPr>
-            <a:r>
-              <a:rPr sz="1400" b="0">
-                <a:solidFill>
-                  <a:srgbClr val="222222"/>
-                </a:solidFill>
-                <a:latin typeface="Calibri"/>
-              </a:rPr>
-              <a:t>AutoIndustriya. (n.d.). </a:t>
-            </a:r>
-            <a:r>
-              <a:rPr sz="1400" b="0" i="1">
-                <a:solidFill>
-                  <a:srgbClr val="222222"/>
-                </a:solidFill>
-                <a:latin typeface="Calibri"/>
-              </a:rPr>
-              <a:t>Auto essentials: The story of the humble car jack</a:t>
-            </a:r>
-            <a:r>
-              <a:rPr sz="1400" b="0" i="0">
-                <a:solidFill>
-                  <a:srgbClr val="222222"/>
-                </a:solidFill>
-                <a:latin typeface="Calibri"/>
-              </a:rPr>
-              <a:t>. https://www.autoindustriya.com/features/auto-essentials-the-story-of-the-humble-car-jack.html</a:t>
-            </a:r>
-          </a:p>
-          <a:p>
-            <a:pPr>
-              <a:spcAft>
-                <a:spcPts val="700"/>
-              </a:spcAft>
-            </a:pPr>
-            <a:r>
-              <a:rPr sz="1400" b="0">
-                <a:solidFill>
-                  <a:srgbClr val="222222"/>
-                </a:solidFill>
-                <a:latin typeface="Calibri"/>
-              </a:rPr>
-              <a:t>CJ Pony Parts. (n.d.). </a:t>
-            </a:r>
-            <a:r>
-              <a:rPr sz="1400" b="0" i="1">
-                <a:solidFill>
-                  <a:srgbClr val="222222"/>
-                </a:solidFill>
-                <a:latin typeface="Calibri"/>
-              </a:rPr>
-              <a:t>Types of car jacks</a:t>
-            </a:r>
-            <a:r>
-              <a:rPr sz="1400" b="0" i="0">
-                <a:solidFill>
-                  <a:srgbClr val="222222"/>
-                </a:solidFill>
-                <a:latin typeface="Calibri"/>
-              </a:rPr>
-              <a:t>. https://www.cjponyparts.com/resources/types-of-car-jacks</a:t>
-            </a:r>
-          </a:p>
-          <a:p>
-            <a:pPr>
-              <a:spcAft>
-                <a:spcPts val="700"/>
-              </a:spcAft>
-            </a:pPr>
-            <a:r>
-              <a:rPr sz="1400" b="0">
-                <a:solidFill>
-                  <a:srgbClr val="222222"/>
-                </a:solidFill>
-                <a:latin typeface="Calibri"/>
-              </a:rPr>
-              <a:t>CN Trailer Parts. (n.d.). </a:t>
-            </a:r>
-            <a:r>
-              <a:rPr sz="1400" b="0" i="1">
-                <a:solidFill>
-                  <a:srgbClr val="222222"/>
-                </a:solidFill>
-                <a:latin typeface="Calibri"/>
-              </a:rPr>
-              <a:t>What are the disadvantages of a scissor jack?</a:t>
-            </a:r>
-            <a:r>
-              <a:rPr sz="1400" b="0" i="0">
-                <a:solidFill>
-                  <a:srgbClr val="222222"/>
-                </a:solidFill>
-                <a:latin typeface="Calibri"/>
-              </a:rPr>
-              <a:t> https://www.cntrailerparts.com/blog/what-are-the-disadvantages-of-a-scissor-jack-372667.html</a:t>
-            </a:r>
-          </a:p>
-          <a:p>
-            <a:pPr>
-              <a:spcAft>
-                <a:spcPts val="700"/>
-              </a:spcAft>
-            </a:pPr>
-            <a:r>
-              <a:rPr sz="1400" b="0">
-                <a:solidFill>
-                  <a:srgbClr val="222222"/>
-                </a:solidFill>
-                <a:latin typeface="Calibri"/>
-              </a:rPr>
-              <a:t>Gnee Steel. (n.d.). </a:t>
-            </a:r>
-            <a:r>
-              <a:rPr sz="1400" b="0" i="1">
-                <a:solidFill>
-                  <a:srgbClr val="222222"/>
-                </a:solidFill>
-                <a:latin typeface="Calibri"/>
-              </a:rPr>
-              <a:t>EN 10149-2 S420MC hot rolled automotive steel</a:t>
-            </a:r>
-            <a:r>
-              <a:rPr sz="1400" b="0" i="0">
-                <a:solidFill>
-                  <a:srgbClr val="222222"/>
-                </a:solidFill>
-                <a:latin typeface="Calibri"/>
-              </a:rPr>
-              <a:t>. https://www.gneesteel.com/products/automotive-steel/en-10149-2-s420mc-hot-rolled-automotive-steel.html</a:t>
-            </a:r>
-          </a:p>
-          <a:p>
-            <a:pPr>
-              <a:spcAft>
-                <a:spcPts val="700"/>
-              </a:spcAft>
-            </a:pPr>
-            <a:r>
-              <a:rPr sz="1400" b="0">
-                <a:solidFill>
-                  <a:srgbClr val="222222"/>
-                </a:solidFill>
-                <a:latin typeface="Calibri"/>
-              </a:rPr>
-              <a:t>Hengli Automation. (n.d.). </a:t>
-            </a:r>
-            <a:r>
-              <a:rPr sz="1400" b="0" i="1">
-                <a:solidFill>
-                  <a:srgbClr val="222222"/>
-                </a:solidFill>
-                <a:latin typeface="Calibri"/>
-              </a:rPr>
-              <a:t>What is the material of the nut for a T lead screw?</a:t>
-            </a:r>
-            <a:r>
-              <a:rPr sz="1400" b="0" i="0">
-                <a:solidFill>
-                  <a:srgbClr val="222222"/>
-                </a:solidFill>
-                <a:latin typeface="Calibri"/>
-              </a:rPr>
-              <a:t> https://www.hlt-cnc.com/blog/what-is-the-material-of-the-nut-for-a-t-lead-screw-1318622.html</a:t>
-            </a:r>
-          </a:p>
-          <a:p>
-            <a:pPr>
-              <a:spcAft>
-                <a:spcPts val="700"/>
-              </a:spcAft>
-            </a:pPr>
-            <a:r>
-              <a:rPr sz="1400" b="0">
-                <a:solidFill>
-                  <a:srgbClr val="222222"/>
-                </a:solidFill>
-                <a:latin typeface="Calibri"/>
-              </a:rPr>
-              <a:t>Hi-Lift Jack Company. (n.d.-a). </a:t>
-            </a:r>
-            <a:r>
-              <a:rPr sz="1400" b="0" i="1">
-                <a:solidFill>
-                  <a:srgbClr val="222222"/>
-                </a:solidFill>
-                <a:latin typeface="Calibri"/>
-              </a:rPr>
-              <a:t>Our history</a:t>
-            </a:r>
-            <a:r>
-              <a:rPr sz="1400" b="0" i="0">
-                <a:solidFill>
-                  <a:srgbClr val="222222"/>
-                </a:solidFill>
-                <a:latin typeface="Calibri"/>
-              </a:rPr>
-              <a:t>. https://hi-lift.com/company/our-history/</a:t>
-            </a:r>
-          </a:p>
-          <a:p>
-            <a:pPr>
-              <a:spcAft>
-                <a:spcPts val="700"/>
-              </a:spcAft>
-            </a:pPr>
-            <a:r>
-              <a:rPr sz="1400" b="0">
-                <a:solidFill>
-                  <a:srgbClr val="222222"/>
-                </a:solidFill>
-                <a:latin typeface="Calibri"/>
-              </a:rPr>
-              <a:t>Hi-Lift Jack Company. (n.d.-b). </a:t>
-            </a:r>
-            <a:r>
-              <a:rPr sz="1400" b="0" i="1">
-                <a:solidFill>
-                  <a:srgbClr val="222222"/>
-                </a:solidFill>
-                <a:latin typeface="Calibri"/>
-              </a:rPr>
-              <a:t>Hi-Lift jack instructions</a:t>
-            </a:r>
-            <a:r>
-              <a:rPr sz="1400" b="0" i="0">
-                <a:solidFill>
-                  <a:srgbClr val="222222"/>
-                </a:solidFill>
-                <a:latin typeface="Calibri"/>
-              </a:rPr>
-              <a:t> [PDF]. https://hi-lift.com/wp-content/uploads/2016/07/jack_instructions.pdf</a:t>
-            </a:r>
-          </a:p>
-          <a:p>
-            <a:pPr>
-              <a:spcAft>
-                <a:spcPts val="700"/>
-              </a:spcAft>
-            </a:pPr>
-            <a:r>
-              <a:rPr sz="1400" b="0">
-                <a:solidFill>
-                  <a:srgbClr val="222222"/>
-                </a:solidFill>
-                <a:latin typeface="Calibri"/>
-              </a:rPr>
-              <a:t>Joyce/Dayton. (n.d.). </a:t>
-            </a:r>
-            <a:r>
-              <a:rPr sz="1400" b="0" i="1">
-                <a:solidFill>
-                  <a:srgbClr val="222222"/>
-                </a:solidFill>
-                <a:latin typeface="Calibri"/>
-              </a:rPr>
-              <a:t>Machine screw jacks vs. ball screw jacks</a:t>
-            </a:r>
-            <a:r>
-              <a:rPr sz="1400" b="0" i="0">
-                <a:solidFill>
-                  <a:srgbClr val="222222"/>
-                </a:solidFill>
-                <a:latin typeface="Calibri"/>
-              </a:rPr>
-              <a:t>. https://www.joycedayton.com/blog/machine-screw-jacks-vs-ball-screw-jacks</a:t>
-            </a:r>
-          </a:p>
-          <a:p>
-            <a:pPr>
-              <a:spcAft>
-                <a:spcPts val="700"/>
-              </a:spcAft>
-            </a:pPr>
-            <a:r>
-              <a:rPr sz="1400" b="0">
-                <a:solidFill>
-                  <a:srgbClr val="222222"/>
-                </a:solidFill>
-                <a:latin typeface="Calibri"/>
-              </a:rPr>
-              <a:t>LibreTexts. (n.d.). </a:t>
-            </a:r>
-            <a:r>
-              <a:rPr sz="1400" b="0" i="1">
-                <a:solidFill>
-                  <a:srgbClr val="222222"/>
-                </a:solidFill>
-                <a:latin typeface="Calibri"/>
-              </a:rPr>
-              <a:t>10.2: Force multiplication</a:t>
-            </a:r>
-            <a:r>
-              <a:rPr sz="1400" b="0" i="0">
-                <a:solidFill>
-                  <a:srgbClr val="222222"/>
-                </a:solidFill>
-                <a:latin typeface="Calibri"/>
-              </a:rPr>
-              <a:t>. https://eng.libretexts.org/Courses/Northeast_Wisconsin_Technical_College/Fluids_1:_Fluid_Power_and_Pneumatics_(NWTC)/10:_Pascal's_Law/10.02:_Force_Multiplication</a:t>
-            </a:r>
-          </a:p>
-          <a:p>
-            <a:pPr>
-              <a:spcAft>
-                <a:spcPts val="700"/>
-              </a:spcAft>
-            </a:pPr>
-            <a:r>
-              <a:rPr sz="1400" b="0">
-                <a:solidFill>
-                  <a:srgbClr val="222222"/>
-                </a:solidFill>
-                <a:latin typeface="Calibri"/>
-              </a:rPr>
-              <a:t>Mickael, E. (2004). </a:t>
-            </a:r>
-            <a:r>
-              <a:rPr sz="1400" b="0" i="1">
-                <a:solidFill>
-                  <a:srgbClr val="222222"/>
-                </a:solidFill>
-                <a:latin typeface="Calibri"/>
-              </a:rPr>
-              <a:t>Motor driven scissor jack with limit switches</a:t>
-            </a:r>
-            <a:r>
-              <a:rPr sz="1400" b="0" i="0">
-                <a:solidFill>
-                  <a:srgbClr val="222222"/>
-                </a:solidFill>
-                <a:latin typeface="Calibri"/>
-              </a:rPr>
-              <a:t> (U.S. Patent No. 6,695,289). https://patents.google.com/patent/US6695289B1/en</a:t>
-            </a:r>
-          </a:p>
-          <a:p>
-            <a:pPr>
-              <a:spcAft>
-                <a:spcPts val="700"/>
-              </a:spcAft>
-            </a:pPr>
-            <a:r>
-              <a:rPr sz="1400" b="0">
-                <a:solidFill>
-                  <a:srgbClr val="222222"/>
-                </a:solidFill>
-                <a:latin typeface="Calibri"/>
-              </a:rPr>
-              <a:t>Pro-Lift-Montagetechnik. (n.d.). </a:t>
-            </a:r>
-            <a:r>
-              <a:rPr sz="1400" b="0" i="1">
-                <a:solidFill>
-                  <a:srgbClr val="222222"/>
-                </a:solidFill>
-                <a:latin typeface="Calibri"/>
-              </a:rPr>
-              <a:t>12V electric scissor jack, car jack, 123 mm – 345 mm</a:t>
-            </a:r>
-            <a:r>
-              <a:rPr sz="1400" b="0" i="0">
-                <a:solidFill>
-                  <a:srgbClr val="222222"/>
-                </a:solidFill>
-                <a:latin typeface="Calibri"/>
-              </a:rPr>
-              <a:t>. https://www.pro-lift-montagetechnik.com/12-volt-electric-scissor-jack-car-jack-123mm-345mm-002</a:t>
+              <a:t>Šaltiniai: Roton Products (n.d.); Sider Ticino (n.d.); Hengli Automation (n.d.); Gnee Steel (n.d.); The World Material (n.d.); CN Trailer Parts (n.d.).</a:t>
             </a:r>
           </a:p>
         </p:txBody>

--- a/domkratas-ta1/domkratas-ta1.pptx
+++ b/domkratas-ta1/domkratas-ta1.pptx
@@ -583,6 +583,76 @@
           <a:lstStyle/>
           <a:p>
             <a:r>
+              <a:t>Šiandien automobilyje dažniausiai rasime žirklinį domkratą. Jo trūkumai – lėtas, siauro pagrindo, nestabilus ant minkšto paviršiaus ir nepatogus sukti. Siūlome platesnį pagrindą su guminiu padu, savistabdį trapecinį sraigtą su bronzine veržle, stipresnes svirtis ir patogesnę rankeną.</a:t>
+            </a:r>
+          </a:p>
+        </p:txBody>
+      </p:sp>
+      <p:sp>
+        <p:nvSpPr>
+          <p:cNvPr id="4" name="Slide Number Placeholder 3"/>
+          <p:cNvSpPr>
+            <a:spLocks noGrp="1"/>
+          </p:cNvSpPr>
+          <p:nvPr>
+            <p:ph type="sldNum" idx="5" sz="quarter"/>
+          </p:nvPr>
+        </p:nvSpPr>
+        <p:spPr/>
+      </p:sp>
+    </p:spTree>
+  </p:cSld>
+  <p:clrMapOvr>
+    <a:masterClrMapping/>
+  </p:clrMapOvr>
+</p:notes>
+</file>
+
+<file path=ppt/notesSlides/notesSlide11.xml><?xml version="1.0" encoding="utf-8"?>
+<p:notes xmlns:a="http://schemas.openxmlformats.org/drawingml/2006/main" xmlns:p="http://schemas.openxmlformats.org/presentationml/2006/main" xmlns:r="http://schemas.openxmlformats.org/officeDocument/2006/relationships">
+  <p:cSld>
+    <p:spTree>
+      <p:nvGrpSpPr>
+        <p:cNvPr id="1" name=""/>
+        <p:cNvGrpSpPr/>
+        <p:nvPr/>
+      </p:nvGrpSpPr>
+      <p:grpSpPr>
+        <a:xfrm>
+          <a:off x="0" y="0"/>
+          <a:ext cx="0" cy="0"/>
+          <a:chOff x="0" y="0"/>
+          <a:chExt cx="0" cy="0"/>
+        </a:xfrm>
+      </p:grpSpPr>
+      <p:sp>
+        <p:nvSpPr>
+          <p:cNvPr id="2" name="Slide Image Placeholder 1"/>
+          <p:cNvSpPr>
+            <a:spLocks noGrp="1"/>
+          </p:cNvSpPr>
+          <p:nvPr>
+            <p:ph type="sldImg" idx="2"/>
+          </p:nvPr>
+        </p:nvSpPr>
+        <p:spPr/>
+      </p:sp>
+      <p:sp>
+        <p:nvSpPr>
+          <p:cNvPr id="3" name="Notes Placeholder 2"/>
+          <p:cNvSpPr>
+            <a:spLocks noGrp="1"/>
+          </p:cNvSpPr>
+          <p:nvPr>
+            <p:ph type="body" idx="3" sz="quarter"/>
+          </p:nvPr>
+        </p:nvSpPr>
+        <p:spPr/>
+        <p:txBody>
+          <a:bodyPr/>
+          <a:lstStyle/>
+          <a:p>
+            <a:r>
               <a:t>Apibendrinant: domkratas keitėsi nuo sraigtinio iki pneumohidraulinio, ir kiekvienas žingsnis sprendė ankstesniojo problemą. Mūsų idėja – stabilesnis ir patvaresnis žirklinis domkratas. Ačiū, laukiame klausimų.</a:t>
             </a:r>
           </a:p>
@@ -653,7 +723,7 @@
           <a:lstStyle/>
           <a:p>
             <a:r>
-              <a:t>Domkratai buvo naudojami dar vežimams. Atsiradus automobiliams, padangos prakiurdavo labai dažnai, nes keliuose buvo daug pasagų vinių. Kad pakeistum ar užklijuotum padangą, reikia pakelti automobilį – todėl gamintojai pradėjo į kiekvieną automobilį dėti nešiojamą domkratą.</a:t>
+              <a:t>Domkrato funkcija – nedidele žmogaus jėga pakelti sunkų krovinį, pavyzdžiui, automobilio kampą. Tai pavyksta dėl sverto ir sraigto arba dėl hidraulikos. Domkratai buvo naudojami dar vežimams, o atsiradus automobiliams, padangos prakiurdavo labai dažnai, todėl domkrato reikėjo kiekviename automobilyje.</a:t>
             </a:r>
           </a:p>
         </p:txBody>
@@ -723,7 +793,7 @@
           <a:lstStyle/>
           <a:p>
             <a:r>
-              <a:t>Čia visi domkratų tipai surikiuoti pagal atsiradimo laiką. Paryškinti keturi, kuriuos pristatysime išsamiai – kiekvienas iš mūsų po vieną. Kiti trumpai aptarti bus pabaigoje.</a:t>
+              <a:t>Čia visi domkratų tipai surikiuoti pagal atsiradimo laiką. Paryškinti keturi, kuriuos pristatysime išsamiai – kiekvienas iš mūsų po vieną. Kitų tipų panaudojimą aptarsime skaidrėje „Pritaikymas“.</a:t>
             </a:r>
           </a:p>
         </p:txBody>
@@ -1073,7 +1143,7 @@
           <a:lstStyle/>
           <a:p>
             <a:r>
-              <a:t>Trumpai apie kitus domkratus, surikiuotus pagal laiką. Krumpliastiebinis kelia labai aukštai, bet pavojingas dėl rankenos atatrankos. Vežimėlinis – servisų domkratas: greitas, bet sunkus. Elektrinis žirklinis nereikalauja sukti rankos, bet reikia elektros.</a:t>
+              <a:t>Kiekvienas domkratų tipas rado savo vietą. Žirklinis – automobilio bagažinėje, vežimėlinis ir pneumohidraulinis – servisuose, butelinis – sunkiai technikai, krumpliastiebinis – visureigiams ir ūkiams, elektrinis – tiems, kam sunku sukti rankena.</a:t>
             </a:r>
           </a:p>
         </p:txBody>
@@ -1143,7 +1213,7 @@
           <a:lstStyle/>
           <a:p>
             <a:r>
-              <a:t>Tobuliname žirklinį domkratą, nes jis yra kiekvieno automobilio komplekte. Jo problemos – siauras pagrindas, dylantis sraigtas ir nepatogus sukimas. Siūlome platesnį pagrindą su guminiu padu, savistabdį trapecinį sraigtą su bronzine veržle, stipresnes svirtis ir patogesnę rankeną.</a:t>
+              <a:t>Kelios kompanijos sukūrė svarbiausius domkratus ir kai kurios veikia iki šiol. Dudgeon įmonė įkurta 1849 m. ir tebeveikia, Hi-Lift domkratai iki šiol gaminami Indianoje, o Blackhawk prekės ženklas dabar priklauso Stanley.</a:t>
             </a:r>
           </a:p>
         </p:txBody>
@@ -4394,7 +4464,7 @@
                 </a:solidFill>
                 <a:latin typeface="Calibri"/>
               </a:rPr>
-              <a:t>Išvados</a:t>
+              <a:t>Trūkumai ir mūsų patobulinimas</a:t>
             </a:r>
           </a:p>
         </p:txBody>
@@ -4523,6 +4593,683 @@
       </p:sp>
       <p:sp>
         <p:nvSpPr>
+          <p:cNvPr id="6" name="Rectangle 5"/>
+          <p:cNvSpPr/>
+          <p:nvPr/>
+        </p:nvSpPr>
+        <p:spPr>
+          <a:xfrm>
+            <a:off x="640080" y="1463040"/>
+            <a:ext cx="10881360" cy="914400"/>
+          </a:xfrm>
+          <a:prstGeom prst="rect">
+            <a:avLst/>
+          </a:prstGeom>
+          <a:solidFill>
+            <a:srgbClr val="DEEAF6"/>
+          </a:solidFill>
+          <a:ln>
+            <a:noFill/>
+          </a:ln>
+          <a:effectLst/>
+        </p:spPr>
+        <p:style>
+          <a:lnRef idx="1">
+            <a:schemeClr val="accent1"/>
+          </a:lnRef>
+          <a:fillRef idx="3">
+            <a:schemeClr val="accent1"/>
+          </a:fillRef>
+          <a:effectRef idx="2">
+            <a:schemeClr val="accent1"/>
+          </a:effectRef>
+          <a:fontRef idx="minor">
+            <a:schemeClr val="lt1"/>
+          </a:fontRef>
+        </p:style>
+        <p:txBody>
+          <a:bodyPr rtlCol="0" anchor="ctr"/>
+          <a:lstStyle/>
+          <a:p>
+            <a:pPr algn="ctr"/>
+          </a:p>
+        </p:txBody>
+      </p:sp>
+      <p:sp>
+        <p:nvSpPr>
+          <p:cNvPr id="7" name="TextBox 6"/>
+          <p:cNvSpPr txBox="1"/>
+          <p:nvPr/>
+        </p:nvSpPr>
+        <p:spPr>
+          <a:xfrm>
+            <a:off x="822960" y="1508760"/>
+            <a:ext cx="10515600" cy="822960"/>
+          </a:xfrm>
+          <a:prstGeom prst="rect">
+            <a:avLst/>
+          </a:prstGeom>
+          <a:noFill/>
+        </p:spPr>
+        <p:txBody>
+          <a:bodyPr wrap="square" anchor="ctr" lIns="45720" rIns="45720">
+            <a:spAutoFit/>
+          </a:bodyPr>
+          <a:lstStyle/>
+          <a:p>
+            <a:pPr algn="l">
+              <a:spcAft>
+                <a:spcPts val="600"/>
+              </a:spcAft>
+            </a:pPr>
+            <a:r>
+              <a:rPr sz="1800" b="1">
+                <a:solidFill>
+                  <a:srgbClr val="1F4E79"/>
+                </a:solidFill>
+                <a:latin typeface="Calibri"/>
+              </a:rPr>
+              <a:t>Žirklinio domkrato trūkumai: </a:t>
+            </a:r>
+            <a:r>
+              <a:rPr sz="1800" b="0" i="0">
+                <a:solidFill>
+                  <a:srgbClr val="222222"/>
+                </a:solidFill>
+                <a:latin typeface="Calibri"/>
+              </a:rPr>
+              <a:t>lėtas (daug apsisukimų), siauras pagrindas – nestabilus ant minkšto ar nelygaus paviršiaus, sukti tenka nepatogioje padėtyje.</a:t>
+            </a:r>
+          </a:p>
+        </p:txBody>
+      </p:sp>
+      <p:graphicFrame>
+        <p:nvGraphicFramePr>
+          <p:cNvPr id="8" name="Table 7"/>
+          <p:cNvGraphicFramePr>
+            <a:graphicFrameLocks noGrp="1"/>
+          </p:cNvGraphicFramePr>
+          <p:nvPr/>
+        </p:nvGraphicFramePr>
+        <p:xfrm>
+          <a:off x="640080" y="2606040"/>
+          <a:ext cx="10881360" cy="2834640"/>
+        </p:xfrm>
+        <a:graphic>
+          <a:graphicData uri="http://schemas.openxmlformats.org/drawingml/2006/table">
+            <a:tbl>
+              <a:tblPr firstRow="1" bandRow="1">
+                <a:tableStyleId>{5C22544A-7EE6-4342-B048-85BDC9FD1C3A}</a:tableStyleId>
+              </a:tblPr>
+              <a:tblGrid>
+                <a:gridCol w="2194560"/>
+                <a:gridCol w="4206240"/>
+                <a:gridCol w="4480560"/>
+              </a:tblGrid>
+              <a:tr h="566928">
+                <a:tc>
+                  <a:txBody>
+                    <a:bodyPr/>
+                    <a:lstStyle/>
+                    <a:p>
+                      <a:r>
+                        <a:rPr sz="1600" b="1" i="0">
+                          <a:solidFill>
+                            <a:srgbClr val="FFFFFF"/>
+                          </a:solidFill>
+                          <a:latin typeface="Calibri"/>
+                        </a:rPr>
+                        <a:t>Elementas</a:t>
+                      </a:r>
+                    </a:p>
+                  </a:txBody>
+                  <a:tcPr marL="73152" marR="73152" anchor="ctr">
+                    <a:solidFill>
+                      <a:srgbClr val="1F4E79"/>
+                    </a:solidFill>
+                  </a:tcPr>
+                </a:tc>
+                <a:tc>
+                  <a:txBody>
+                    <a:bodyPr/>
+                    <a:lstStyle/>
+                    <a:p>
+                      <a:r>
+                        <a:rPr sz="1600" b="1" i="0">
+                          <a:solidFill>
+                            <a:srgbClr val="FFFFFF"/>
+                          </a:solidFill>
+                          <a:latin typeface="Calibri"/>
+                        </a:rPr>
+                        <a:t>Ką keičiame</a:t>
+                      </a:r>
+                    </a:p>
+                  </a:txBody>
+                  <a:tcPr marL="73152" marR="73152" anchor="ctr">
+                    <a:solidFill>
+                      <a:srgbClr val="1F4E79"/>
+                    </a:solidFill>
+                  </a:tcPr>
+                </a:tc>
+                <a:tc>
+                  <a:txBody>
+                    <a:bodyPr/>
+                    <a:lstStyle/>
+                    <a:p>
+                      <a:r>
+                        <a:rPr sz="1600" b="1" i="0">
+                          <a:solidFill>
+                            <a:srgbClr val="FFFFFF"/>
+                          </a:solidFill>
+                          <a:latin typeface="Calibri"/>
+                        </a:rPr>
+                        <a:t>Kodėl</a:t>
+                      </a:r>
+                    </a:p>
+                  </a:txBody>
+                  <a:tcPr marL="73152" marR="73152" anchor="ctr">
+                    <a:solidFill>
+                      <a:srgbClr val="1F4E79"/>
+                    </a:solidFill>
+                  </a:tcPr>
+                </a:tc>
+              </a:tr>
+              <a:tr h="566928">
+                <a:tc>
+                  <a:txBody>
+                    <a:bodyPr/>
+                    <a:lstStyle/>
+                    <a:p>
+                      <a:r>
+                        <a:rPr sz="1600" b="1" i="0">
+                          <a:solidFill>
+                            <a:srgbClr val="222222"/>
+                          </a:solidFill>
+                          <a:latin typeface="Calibri"/>
+                        </a:rPr>
+                        <a:t>Pagrindas</a:t>
+                      </a:r>
+                    </a:p>
+                  </a:txBody>
+                  <a:tcPr marL="73152" marR="73152" anchor="ctr">
+                    <a:solidFill>
+                      <a:srgbClr val="FFFFFF"/>
+                    </a:solidFill>
+                  </a:tcPr>
+                </a:tc>
+                <a:tc>
+                  <a:txBody>
+                    <a:bodyPr/>
+                    <a:lstStyle/>
+                    <a:p>
+                      <a:r>
+                        <a:rPr sz="1600" b="0" i="0">
+                          <a:solidFill>
+                            <a:srgbClr val="222222"/>
+                          </a:solidFill>
+                          <a:latin typeface="Calibri"/>
+                        </a:rPr>
+                        <a:t>Platesnis, su guminiu padu</a:t>
+                      </a:r>
+                    </a:p>
+                  </a:txBody>
+                  <a:tcPr marL="73152" marR="73152" anchor="ctr">
+                    <a:solidFill>
+                      <a:srgbClr val="FFFFFF"/>
+                    </a:solidFill>
+                  </a:tcPr>
+                </a:tc>
+                <a:tc>
+                  <a:txBody>
+                    <a:bodyPr/>
+                    <a:lstStyle/>
+                    <a:p>
+                      <a:r>
+                        <a:rPr sz="1600" b="0" i="0">
+                          <a:solidFill>
+                            <a:srgbClr val="222222"/>
+                          </a:solidFill>
+                          <a:latin typeface="Calibri"/>
+                        </a:rPr>
+                        <a:t>Neslysta ir nesmenga į minkštą paviršių</a:t>
+                      </a:r>
+                    </a:p>
+                  </a:txBody>
+                  <a:tcPr marL="73152" marR="73152" anchor="ctr">
+                    <a:solidFill>
+                      <a:srgbClr val="FFFFFF"/>
+                    </a:solidFill>
+                  </a:tcPr>
+                </a:tc>
+              </a:tr>
+              <a:tr h="566928">
+                <a:tc>
+                  <a:txBody>
+                    <a:bodyPr/>
+                    <a:lstStyle/>
+                    <a:p>
+                      <a:r>
+                        <a:rPr sz="1600" b="1" i="0">
+                          <a:solidFill>
+                            <a:srgbClr val="222222"/>
+                          </a:solidFill>
+                          <a:latin typeface="Calibri"/>
+                        </a:rPr>
+                        <a:t>Sraigtas ir veržlė</a:t>
+                      </a:r>
+                    </a:p>
+                  </a:txBody>
+                  <a:tcPr marL="73152" marR="73152" anchor="ctr">
+                    <a:solidFill>
+                      <a:srgbClr val="FFFFFF"/>
+                    </a:solidFill>
+                  </a:tcPr>
+                </a:tc>
+                <a:tc>
+                  <a:txBody>
+                    <a:bodyPr/>
+                    <a:lstStyle/>
+                    <a:p>
+                      <a:r>
+                        <a:rPr sz="1600" b="0" i="0">
+                          <a:solidFill>
+                            <a:srgbClr val="222222"/>
+                          </a:solidFill>
+                          <a:latin typeface="Calibri"/>
+                        </a:rPr>
+                        <a:t>Trapecinis sraigtas iš plieno 42CrMo4, veržlė iš bronzos CuSn12</a:t>
+                      </a:r>
+                    </a:p>
+                  </a:txBody>
+                  <a:tcPr marL="73152" marR="73152" anchor="ctr">
+                    <a:solidFill>
+                      <a:srgbClr val="FFFFFF"/>
+                    </a:solidFill>
+                  </a:tcPr>
+                </a:tc>
+                <a:tc>
+                  <a:txBody>
+                    <a:bodyPr/>
+                    <a:lstStyle/>
+                    <a:p>
+                      <a:r>
+                        <a:rPr sz="1600" b="0" i="0">
+                          <a:solidFill>
+                            <a:srgbClr val="222222"/>
+                          </a:solidFill>
+                          <a:latin typeface="Calibri"/>
+                        </a:rPr>
+                        <a:t>Savistabdis, mažiau dyla, maža trintis</a:t>
+                      </a:r>
+                    </a:p>
+                  </a:txBody>
+                  <a:tcPr marL="73152" marR="73152" anchor="ctr">
+                    <a:solidFill>
+                      <a:srgbClr val="FFFFFF"/>
+                    </a:solidFill>
+                  </a:tcPr>
+                </a:tc>
+              </a:tr>
+              <a:tr h="566928">
+                <a:tc>
+                  <a:txBody>
+                    <a:bodyPr/>
+                    <a:lstStyle/>
+                    <a:p>
+                      <a:r>
+                        <a:rPr sz="1600" b="1" i="0">
+                          <a:solidFill>
+                            <a:srgbClr val="222222"/>
+                          </a:solidFill>
+                          <a:latin typeface="Calibri"/>
+                        </a:rPr>
+                        <a:t>Svirtys</a:t>
+                      </a:r>
+                    </a:p>
+                  </a:txBody>
+                  <a:tcPr marL="73152" marR="73152" anchor="ctr">
+                    <a:solidFill>
+                      <a:srgbClr val="FFFFFF"/>
+                    </a:solidFill>
+                  </a:tcPr>
+                </a:tc>
+                <a:tc>
+                  <a:txBody>
+                    <a:bodyPr/>
+                    <a:lstStyle/>
+                    <a:p>
+                      <a:r>
+                        <a:rPr sz="1600" b="0" i="0">
+                          <a:solidFill>
+                            <a:srgbClr val="222222"/>
+                          </a:solidFill>
+                          <a:latin typeface="Calibri"/>
+                        </a:rPr>
+                        <a:t>Plienas S420MC vietoj S235</a:t>
+                      </a:r>
+                    </a:p>
+                  </a:txBody>
+                  <a:tcPr marL="73152" marR="73152" anchor="ctr">
+                    <a:solidFill>
+                      <a:srgbClr val="FFFFFF"/>
+                    </a:solidFill>
+                  </a:tcPr>
+                </a:tc>
+                <a:tc>
+                  <a:txBody>
+                    <a:bodyPr/>
+                    <a:lstStyle/>
+                    <a:p>
+                      <a:r>
+                        <a:rPr sz="1600" b="0" i="0">
+                          <a:solidFill>
+                            <a:srgbClr val="222222"/>
+                          </a:solidFill>
+                          <a:latin typeface="Calibri"/>
+                        </a:rPr>
+                        <a:t>Takumo riba 420 vs 235 MPa – apie 1,8 karto stipresnės</a:t>
+                      </a:r>
+                    </a:p>
+                  </a:txBody>
+                  <a:tcPr marL="73152" marR="73152" anchor="ctr">
+                    <a:solidFill>
+                      <a:srgbClr val="FFFFFF"/>
+                    </a:solidFill>
+                  </a:tcPr>
+                </a:tc>
+              </a:tr>
+              <a:tr h="566928">
+                <a:tc>
+                  <a:txBody>
+                    <a:bodyPr/>
+                    <a:lstStyle/>
+                    <a:p>
+                      <a:r>
+                        <a:rPr sz="1600" b="1" i="0">
+                          <a:solidFill>
+                            <a:srgbClr val="222222"/>
+                          </a:solidFill>
+                          <a:latin typeface="Calibri"/>
+                        </a:rPr>
+                        <a:t>Rankena</a:t>
+                      </a:r>
+                    </a:p>
+                  </a:txBody>
+                  <a:tcPr marL="73152" marR="73152" anchor="ctr">
+                    <a:solidFill>
+                      <a:srgbClr val="FFFFFF"/>
+                    </a:solidFill>
+                  </a:tcPr>
+                </a:tc>
+                <a:tc>
+                  <a:txBody>
+                    <a:bodyPr/>
+                    <a:lstStyle/>
+                    <a:p>
+                      <a:r>
+                        <a:rPr sz="1600" b="0" i="0">
+                          <a:solidFill>
+                            <a:srgbClr val="222222"/>
+                          </a:solidFill>
+                          <a:latin typeface="Calibri"/>
+                        </a:rPr>
+                        <a:t>Ilgesnė, sulankstoma rankena</a:t>
+                      </a:r>
+                    </a:p>
+                  </a:txBody>
+                  <a:tcPr marL="73152" marR="73152" anchor="ctr">
+                    <a:solidFill>
+                      <a:srgbClr val="FFFFFF"/>
+                    </a:solidFill>
+                  </a:tcPr>
+                </a:tc>
+                <a:tc>
+                  <a:txBody>
+                    <a:bodyPr/>
+                    <a:lstStyle/>
+                    <a:p>
+                      <a:r>
+                        <a:rPr sz="1600" b="0" i="0">
+                          <a:solidFill>
+                            <a:srgbClr val="222222"/>
+                          </a:solidFill>
+                          <a:latin typeface="Calibri"/>
+                        </a:rPr>
+                        <a:t>Sukti galima nesilenkiant prie pat rato (mūsų idėja)</a:t>
+                      </a:r>
+                    </a:p>
+                  </a:txBody>
+                  <a:tcPr marL="73152" marR="73152" anchor="ctr">
+                    <a:solidFill>
+                      <a:srgbClr val="FFFFFF"/>
+                    </a:solidFill>
+                  </a:tcPr>
+                </a:tc>
+              </a:tr>
+            </a:tbl>
+          </a:graphicData>
+        </a:graphic>
+      </p:graphicFrame>
+      <p:sp>
+        <p:nvSpPr>
+          <p:cNvPr id="9" name="TextBox 8"/>
+          <p:cNvSpPr txBox="1"/>
+          <p:nvPr/>
+        </p:nvSpPr>
+        <p:spPr>
+          <a:xfrm>
+            <a:off x="640080" y="5897880"/>
+            <a:ext cx="10881360" cy="457200"/>
+          </a:xfrm>
+          <a:prstGeom prst="rect">
+            <a:avLst/>
+          </a:prstGeom>
+          <a:noFill/>
+        </p:spPr>
+        <p:txBody>
+          <a:bodyPr wrap="square" anchor="t" lIns="45720" rIns="45720">
+            <a:spAutoFit/>
+          </a:bodyPr>
+          <a:lstStyle/>
+          <a:p>
+            <a:pPr algn="l">
+              <a:spcAft>
+                <a:spcPts val="600"/>
+              </a:spcAft>
+            </a:pPr>
+            <a:r>
+              <a:rPr sz="1300" b="0">
+                <a:solidFill>
+                  <a:srgbClr val="595959"/>
+                </a:solidFill>
+                <a:latin typeface="Calibri"/>
+              </a:rPr>
+              <a:t>Šaltiniai: CN Trailer Parts (n.d.); Roton Products (n.d.); Sider Ticino (n.d.); Hengli Automation (n.d.); Gnee Steel (n.d.); The World Material (n.d.).</a:t>
+            </a:r>
+          </a:p>
+        </p:txBody>
+      </p:sp>
+    </p:spTree>
+  </p:cSld>
+  <p:clrMapOvr>
+    <a:masterClrMapping/>
+  </p:clrMapOvr>
+</p:sld>
+</file>
+
+<file path=ppt/slides/slide11.xml><?xml version="1.0" encoding="utf-8"?>
+<p:sld xmlns:a="http://schemas.openxmlformats.org/drawingml/2006/main" xmlns:p="http://schemas.openxmlformats.org/presentationml/2006/main" xmlns:r="http://schemas.openxmlformats.org/officeDocument/2006/relationships">
+  <p:cSld>
+    <p:spTree>
+      <p:nvGrpSpPr>
+        <p:cNvPr id="1" name=""/>
+        <p:cNvGrpSpPr/>
+        <p:nvPr/>
+      </p:nvGrpSpPr>
+      <p:grpSpPr/>
+      <p:sp>
+        <p:nvSpPr>
+          <p:cNvPr id="2" name="TextBox 1"/>
+          <p:cNvSpPr txBox="1"/>
+          <p:nvPr/>
+        </p:nvSpPr>
+        <p:spPr>
+          <a:xfrm>
+            <a:off x="548640" y="320040"/>
+            <a:ext cx="11064240" cy="822960"/>
+          </a:xfrm>
+          <a:prstGeom prst="rect">
+            <a:avLst/>
+          </a:prstGeom>
+          <a:noFill/>
+        </p:spPr>
+        <p:txBody>
+          <a:bodyPr wrap="square" anchor="b" lIns="45720" rIns="45720">
+            <a:spAutoFit/>
+          </a:bodyPr>
+          <a:lstStyle/>
+          <a:p>
+            <a:pPr algn="l">
+              <a:spcAft>
+                <a:spcPts val="600"/>
+              </a:spcAft>
+            </a:pPr>
+            <a:r>
+              <a:rPr sz="3200" b="1">
+                <a:solidFill>
+                  <a:srgbClr val="1F4E79"/>
+                </a:solidFill>
+                <a:latin typeface="Calibri"/>
+              </a:rPr>
+              <a:t>Išvados</a:t>
+            </a:r>
+          </a:p>
+        </p:txBody>
+      </p:sp>
+      <p:sp>
+        <p:nvSpPr>
+          <p:cNvPr id="3" name="Rectangle 2"/>
+          <p:cNvSpPr/>
+          <p:nvPr/>
+        </p:nvSpPr>
+        <p:spPr>
+          <a:xfrm>
+            <a:off x="594360" y="1207008"/>
+            <a:ext cx="10972800" cy="27432"/>
+          </a:xfrm>
+          <a:prstGeom prst="rect">
+            <a:avLst/>
+          </a:prstGeom>
+          <a:solidFill>
+            <a:srgbClr val="1F4E79"/>
+          </a:solidFill>
+          <a:ln>
+            <a:noFill/>
+          </a:ln>
+          <a:effectLst/>
+        </p:spPr>
+        <p:style>
+          <a:lnRef idx="1">
+            <a:schemeClr val="accent1"/>
+          </a:lnRef>
+          <a:fillRef idx="3">
+            <a:schemeClr val="accent1"/>
+          </a:fillRef>
+          <a:effectRef idx="2">
+            <a:schemeClr val="accent1"/>
+          </a:effectRef>
+          <a:fontRef idx="minor">
+            <a:schemeClr val="lt1"/>
+          </a:fontRef>
+        </p:style>
+        <p:txBody>
+          <a:bodyPr rtlCol="0" anchor="ctr"/>
+          <a:lstStyle/>
+          <a:p>
+            <a:pPr algn="ctr"/>
+          </a:p>
+        </p:txBody>
+      </p:sp>
+      <p:sp>
+        <p:nvSpPr>
+          <p:cNvPr id="4" name="TextBox 3"/>
+          <p:cNvSpPr txBox="1"/>
+          <p:nvPr/>
+        </p:nvSpPr>
+        <p:spPr>
+          <a:xfrm>
+            <a:off x="10698480" y="6355080"/>
+            <a:ext cx="1005840" cy="365760"/>
+          </a:xfrm>
+          <a:prstGeom prst="rect">
+            <a:avLst/>
+          </a:prstGeom>
+          <a:noFill/>
+        </p:spPr>
+        <p:txBody>
+          <a:bodyPr wrap="square" anchor="t" lIns="45720" rIns="45720">
+            <a:spAutoFit/>
+          </a:bodyPr>
+          <a:lstStyle/>
+          <a:p>
+            <a:pPr algn="r">
+              <a:spcAft>
+                <a:spcPts val="600"/>
+              </a:spcAft>
+            </a:pPr>
+            <a:r>
+              <a:rPr sz="1200" b="0">
+                <a:solidFill>
+                  <a:srgbClr val="595959"/>
+                </a:solidFill>
+                <a:latin typeface="Calibri"/>
+              </a:rPr>
+              <a:t>11 / 12</a:t>
+            </a:r>
+          </a:p>
+        </p:txBody>
+      </p:sp>
+      <p:sp>
+        <p:nvSpPr>
+          <p:cNvPr id="5" name="TextBox 4"/>
+          <p:cNvSpPr txBox="1"/>
+          <p:nvPr/>
+        </p:nvSpPr>
+        <p:spPr>
+          <a:xfrm>
+            <a:off x="548640" y="6355080"/>
+            <a:ext cx="7315200" cy="365760"/>
+          </a:xfrm>
+          <a:prstGeom prst="rect">
+            <a:avLst/>
+          </a:prstGeom>
+          <a:noFill/>
+        </p:spPr>
+        <p:txBody>
+          <a:bodyPr wrap="square" anchor="t" lIns="45720" rIns="45720">
+            <a:spAutoFit/>
+          </a:bodyPr>
+          <a:lstStyle/>
+          <a:p>
+            <a:pPr algn="l">
+              <a:spcAft>
+                <a:spcPts val="600"/>
+              </a:spcAft>
+            </a:pPr>
+            <a:r>
+              <a:rPr sz="1200" b="0">
+                <a:solidFill>
+                  <a:srgbClr val="595959"/>
+                </a:solidFill>
+                <a:latin typeface="Calibri"/>
+              </a:rPr>
+              <a:t>PBL · Automobilinis domkratas</a:t>
+            </a:r>
+          </a:p>
+        </p:txBody>
+      </p:sp>
+      <p:sp>
+        <p:nvSpPr>
           <p:cNvPr id="6" name="TextBox 5"/>
           <p:cNvSpPr txBox="1"/>
           <p:nvPr/>
@@ -4615,6 +5362,31 @@
                 <a:latin typeface="Calibri"/>
               </a:rPr>
               <a:t> – kiekvienas naujas domkratas išsprendė ankstesniojo problemą, bet atnešė naujų.</a:t>
+            </a:r>
+          </a:p>
+          <a:p>
+            <a:pPr>
+              <a:spcAft>
+                <a:spcPts val="1800"/>
+              </a:spcAft>
+            </a:pPr>
+            <a:r>
+              <a:rPr sz="2100" b="1">
+                <a:solidFill>
+                  <a:srgbClr val="222222"/>
+                </a:solidFill>
+                <a:latin typeface="Calibri"/>
+              </a:rPr>
+              <a:t>• Pritaikymas</a:t>
+            </a:r>
+            <a:r>
+              <a:rPr sz="2100" b="0" i="0">
+                <a:solidFill>
+                  <a:srgbClr val="222222"/>
+                </a:solidFill>
+                <a:latin typeface="Calibri"/>
+              </a:rPr>
+              <a:t> – kiekvienas tipas rado savo vietą: nuo automobilio bagažinės iki serviso ir statybų.</a:t>
             </a:r>
           </a:p>
           <a:p>
@@ -4735,7 +5507,7 @@
 </p:sld>
 </file>
 
-<file path=ppt/slides/slide11.xml><?xml version="1.0" encoding="utf-8"?>
+<file path=ppt/slides/slide12.xml><?xml version="1.0" encoding="utf-8"?>
 <p:sld xmlns:a="http://schemas.openxmlformats.org/drawingml/2006/main" xmlns:p="http://schemas.openxmlformats.org/presentationml/2006/main" xmlns:r="http://schemas.openxmlformats.org/officeDocument/2006/relationships">
   <p:cSld>
     <p:spTree>
@@ -4779,7 +5551,7 @@
                 </a:solidFill>
                 <a:latin typeface="Calibri"/>
               </a:rPr>
-              <a:t>Šaltiniai (1/2)</a:t>
+              <a:t>Šaltiniai</a:t>
             </a:r>
           </a:p>
         </p:txBody>
@@ -4862,7 +5634,7 @@
                 </a:solidFill>
                 <a:latin typeface="Calibri"/>
               </a:rPr>
-              <a:t>11 / 12</a:t>
+              <a:t>12 / 12</a:t>
             </a:r>
           </a:p>
         </p:txBody>
@@ -4914,8 +5686,8 @@
         </p:nvSpPr>
         <p:spPr>
           <a:xfrm>
-            <a:off x="640080" y="1463040"/>
-            <a:ext cx="10881360" cy="4754880"/>
+            <a:off x="548640" y="1325880"/>
+            <a:ext cx="5440680" cy="4937760"/>
           </a:xfrm>
           <a:prstGeom prst="rect">
             <a:avLst/>
@@ -4930,11 +5702,11 @@
           <a:p>
             <a:pPr algn="l">
               <a:spcAft>
-                <a:spcPts val="600"/>
-              </a:spcAft>
-            </a:pPr>
-            <a:r>
-              <a:rPr sz="1300" b="0">
+                <a:spcPts val="200"/>
+              </a:spcAft>
+            </a:pPr>
+            <a:r>
+              <a:rPr sz="900" b="0">
                 <a:solidFill>
                   <a:srgbClr val="222222"/>
                 </a:solidFill>
@@ -4943,7 +5715,7 @@
               <a:t>Bovey, G. O. (1882). </a:t>
             </a:r>
             <a:r>
-              <a:rPr sz="1300" b="0" i="1">
+              <a:rPr sz="900" b="0" i="1">
                 <a:solidFill>
                   <a:srgbClr val="222222"/>
                 </a:solidFill>
@@ -4952,7 +5724,7 @@
               <a:t>Carriage-jack</a:t>
             </a:r>
             <a:r>
-              <a:rPr sz="1300" b="0" i="0">
+              <a:rPr sz="900" b="0" i="0">
                 <a:solidFill>
                   <a:srgbClr val="222222"/>
                 </a:solidFill>
@@ -4964,11 +5736,11 @@
           <a:p>
             <a:pPr>
               <a:spcAft>
-                <a:spcPts val="600"/>
-              </a:spcAft>
-            </a:pPr>
-            <a:r>
-              <a:rPr sz="1300" b="0">
+                <a:spcPts val="200"/>
+              </a:spcAft>
+            </a:pPr>
+            <a:r>
+              <a:rPr sz="900" b="0">
                 <a:solidFill>
                   <a:srgbClr val="222222"/>
                 </a:solidFill>
@@ -4977,7 +5749,7 @@
               <a:t>Brown, W. P. (1949). </a:t>
             </a:r>
             <a:r>
-              <a:rPr sz="1300" b="0" i="1">
+              <a:rPr sz="900" b="0" i="1">
                 <a:solidFill>
                   <a:srgbClr val="222222"/>
                 </a:solidFill>
@@ -4986,7 +5758,7 @@
               <a:t>Scissors jack</a:t>
             </a:r>
             <a:r>
-              <a:rPr sz="1300" b="0" i="0">
+              <a:rPr sz="900" b="0" i="0">
                 <a:solidFill>
                   <a:srgbClr val="222222"/>
                 </a:solidFill>
@@ -4998,11 +5770,11 @@
           <a:p>
             <a:pPr>
               <a:spcAft>
-                <a:spcPts val="600"/>
-              </a:spcAft>
-            </a:pPr>
-            <a:r>
-              <a:rPr sz="1300" b="0">
+                <a:spcPts val="200"/>
+              </a:spcAft>
+            </a:pPr>
+            <a:r>
+              <a:rPr sz="900" b="0">
                 <a:solidFill>
                   <a:srgbClr val="222222"/>
                 </a:solidFill>
@@ -5011,7 +5783,7 @@
               <a:t>Castle Equipment. (n.d.). </a:t>
             </a:r>
             <a:r>
-              <a:rPr sz="1300" b="0" i="1">
+              <a:rPr sz="900" b="0" i="1">
                 <a:solidFill>
                   <a:srgbClr val="222222"/>
                 </a:solidFill>
@@ -5020,7 +5792,7 @@
               <a:t>Weaver hydraulic &amp; mechanical jacks history</a:t>
             </a:r>
             <a:r>
-              <a:rPr sz="1300" b="0" i="0">
+              <a:rPr sz="900" b="0" i="0">
                 <a:solidFill>
                   <a:srgbClr val="222222"/>
                 </a:solidFill>
@@ -5032,11 +5804,11 @@
           <a:p>
             <a:pPr>
               <a:spcAft>
-                <a:spcPts val="600"/>
-              </a:spcAft>
-            </a:pPr>
-            <a:r>
-              <a:rPr sz="1300" b="0">
+                <a:spcPts val="200"/>
+              </a:spcAft>
+            </a:pPr>
+            <a:r>
+              <a:rPr sz="900" b="0">
                 <a:solidFill>
                   <a:srgbClr val="222222"/>
                 </a:solidFill>
@@ -5045,7 +5817,7 @@
               <a:t>CJ Pony Parts. (n.d.). </a:t>
             </a:r>
             <a:r>
-              <a:rPr sz="1300" b="0" i="1">
+              <a:rPr sz="900" b="0" i="1">
                 <a:solidFill>
                   <a:srgbClr val="222222"/>
                 </a:solidFill>
@@ -5054,7 +5826,7 @@
               <a:t>Types of car jacks</a:t>
             </a:r>
             <a:r>
-              <a:rPr sz="1300" b="0" i="0">
+              <a:rPr sz="900" b="0" i="0">
                 <a:solidFill>
                   <a:srgbClr val="222222"/>
                 </a:solidFill>
@@ -5066,11 +5838,11 @@
           <a:p>
             <a:pPr>
               <a:spcAft>
-                <a:spcPts val="600"/>
-              </a:spcAft>
-            </a:pPr>
-            <a:r>
-              <a:rPr sz="1300" b="0">
+                <a:spcPts val="200"/>
+              </a:spcAft>
+            </a:pPr>
+            <a:r>
+              <a:rPr sz="900" b="0">
                 <a:solidFill>
                   <a:srgbClr val="222222"/>
                 </a:solidFill>
@@ -5079,7 +5851,7 @@
               <a:t>CN Trailer Parts. (n.d.). </a:t>
             </a:r>
             <a:r>
-              <a:rPr sz="1300" b="0" i="1">
+              <a:rPr sz="900" b="0" i="1">
                 <a:solidFill>
                   <a:srgbClr val="222222"/>
                 </a:solidFill>
@@ -5088,7 +5860,7 @@
               <a:t>What are the disadvantages of a scissor jack?</a:t>
             </a:r>
             <a:r>
-              <a:rPr sz="1300" b="0" i="0">
+              <a:rPr sz="900" b="0" i="0">
                 <a:solidFill>
                   <a:srgbClr val="222222"/>
                 </a:solidFill>
@@ -5100,11 +5872,11 @@
           <a:p>
             <a:pPr>
               <a:spcAft>
-                <a:spcPts val="600"/>
-              </a:spcAft>
-            </a:pPr>
-            <a:r>
-              <a:rPr sz="1300" b="0">
+                <a:spcPts val="200"/>
+              </a:spcAft>
+            </a:pPr>
+            <a:r>
+              <a:rPr sz="900" b="0">
                 <a:solidFill>
                   <a:srgbClr val="222222"/>
                 </a:solidFill>
@@ -5113,7 +5885,7 @@
               <a:t>Dudgeon, R. (1851). </a:t>
             </a:r>
             <a:r>
-              <a:rPr sz="1300" b="0" i="1">
+              <a:rPr sz="900" b="0" i="1">
                 <a:solidFill>
                   <a:srgbClr val="222222"/>
                 </a:solidFill>
@@ -5122,7 +5894,7 @@
               <a:t>Portable hydraulic press</a:t>
             </a:r>
             <a:r>
-              <a:rPr sz="1300" b="0" i="0">
+              <a:rPr sz="900" b="0" i="0">
                 <a:solidFill>
                   <a:srgbClr val="222222"/>
                 </a:solidFill>
@@ -5134,11 +5906,11 @@
           <a:p>
             <a:pPr>
               <a:spcAft>
-                <a:spcPts val="600"/>
-              </a:spcAft>
-            </a:pPr>
-            <a:r>
-              <a:rPr sz="1300" b="0">
+                <a:spcPts val="200"/>
+              </a:spcAft>
+            </a:pPr>
+            <a:r>
+              <a:rPr sz="900" b="0">
                 <a:solidFill>
                   <a:srgbClr val="222222"/>
                 </a:solidFill>
@@ -5147,7 +5919,7 @@
               <a:t>Gnee Steel. (n.d.). </a:t>
             </a:r>
             <a:r>
-              <a:rPr sz="1300" b="0" i="1">
+              <a:rPr sz="900" b="0" i="1">
                 <a:solidFill>
                   <a:srgbClr val="222222"/>
                 </a:solidFill>
@@ -5156,7 +5928,7 @@
               <a:t>EN 10149-2 S420MC hot rolled automotive steel</a:t>
             </a:r>
             <a:r>
-              <a:rPr sz="1300" b="0" i="0">
+              <a:rPr sz="900" b="0" i="0">
                 <a:solidFill>
                   <a:srgbClr val="222222"/>
                 </a:solidFill>
@@ -5168,11 +5940,11 @@
           <a:p>
             <a:pPr>
               <a:spcAft>
-                <a:spcPts val="600"/>
-              </a:spcAft>
-            </a:pPr>
-            <a:r>
-              <a:rPr sz="1300" b="0">
+                <a:spcPts val="200"/>
+              </a:spcAft>
+            </a:pPr>
+            <a:r>
+              <a:rPr sz="900" b="0">
                 <a:solidFill>
                   <a:srgbClr val="222222"/>
                 </a:solidFill>
@@ -5181,7 +5953,7 @@
               <a:t>Hengli Automation. (n.d.). </a:t>
             </a:r>
             <a:r>
-              <a:rPr sz="1300" b="0" i="1">
+              <a:rPr sz="900" b="0" i="1">
                 <a:solidFill>
                   <a:srgbClr val="222222"/>
                 </a:solidFill>
@@ -5190,7 +5962,7 @@
               <a:t>What is the material of the nut for a T lead screw?</a:t>
             </a:r>
             <a:r>
-              <a:rPr sz="1300" b="0" i="0">
+              <a:rPr sz="900" b="0" i="0">
                 <a:solidFill>
                   <a:srgbClr val="222222"/>
                 </a:solidFill>
@@ -5202,11 +5974,11 @@
           <a:p>
             <a:pPr>
               <a:spcAft>
-                <a:spcPts val="600"/>
-              </a:spcAft>
-            </a:pPr>
-            <a:r>
-              <a:rPr sz="1300" b="0">
+                <a:spcPts val="200"/>
+              </a:spcAft>
+            </a:pPr>
+            <a:r>
+              <a:rPr sz="900" b="0">
                 <a:solidFill>
                   <a:srgbClr val="222222"/>
                 </a:solidFill>
@@ -5215,7 +5987,7 @@
               <a:t>Hi-Lift Jack Company. (n.d.-a). </a:t>
             </a:r>
             <a:r>
-              <a:rPr sz="1300" b="0" i="1">
+              <a:rPr sz="900" b="0" i="1">
                 <a:solidFill>
                   <a:srgbClr val="222222"/>
                 </a:solidFill>
@@ -5224,7 +5996,7 @@
               <a:t>Our history</a:t>
             </a:r>
             <a:r>
-              <a:rPr sz="1300" b="0" i="0">
+              <a:rPr sz="900" b="0" i="0">
                 <a:solidFill>
                   <a:srgbClr val="222222"/>
                 </a:solidFill>
@@ -5236,11 +6008,11 @@
           <a:p>
             <a:pPr>
               <a:spcAft>
-                <a:spcPts val="600"/>
-              </a:spcAft>
-            </a:pPr>
-            <a:r>
-              <a:rPr sz="1300" b="0">
+                <a:spcPts val="200"/>
+              </a:spcAft>
+            </a:pPr>
+            <a:r>
+              <a:rPr sz="900" b="0">
                 <a:solidFill>
                   <a:srgbClr val="222222"/>
                 </a:solidFill>
@@ -5249,7 +6021,7 @@
               <a:t>Hi-Lift Jack Company. (n.d.-b). </a:t>
             </a:r>
             <a:r>
-              <a:rPr sz="1300" b="0" i="1">
+              <a:rPr sz="900" b="0" i="1">
                 <a:solidFill>
                   <a:srgbClr val="222222"/>
                 </a:solidFill>
@@ -5258,7 +6030,7 @@
               <a:t>Hi-Lift jack instructions</a:t>
             </a:r>
             <a:r>
-              <a:rPr sz="1300" b="0" i="0">
+              <a:rPr sz="900" b="0" i="0">
                 <a:solidFill>
                   <a:srgbClr val="222222"/>
                 </a:solidFill>
@@ -5270,11 +6042,11 @@
           <a:p>
             <a:pPr>
               <a:spcAft>
-                <a:spcPts val="600"/>
-              </a:spcAft>
-            </a:pPr>
-            <a:r>
-              <a:rPr sz="1300" b="0">
+                <a:spcPts val="200"/>
+              </a:spcAft>
+            </a:pPr>
+            <a:r>
+              <a:rPr sz="900" b="0">
                 <a:solidFill>
                   <a:srgbClr val="222222"/>
                 </a:solidFill>
@@ -5283,7 +6055,7 @@
               <a:t>Joyce/Dayton. (n.d.). </a:t>
             </a:r>
             <a:r>
-              <a:rPr sz="1300" b="0" i="1">
+              <a:rPr sz="900" b="0" i="1">
                 <a:solidFill>
                   <a:srgbClr val="222222"/>
                 </a:solidFill>
@@ -5292,7 +6064,7 @@
               <a:t>Machine screw jacks vs. ball screw jacks</a:t>
             </a:r>
             <a:r>
-              <a:rPr sz="1300" b="0" i="0">
+              <a:rPr sz="900" b="0" i="0">
                 <a:solidFill>
                   <a:srgbClr val="222222"/>
                 </a:solidFill>
@@ -5304,11 +6076,11 @@
           <a:p>
             <a:pPr>
               <a:spcAft>
-                <a:spcPts val="600"/>
-              </a:spcAft>
-            </a:pPr>
-            <a:r>
-              <a:rPr sz="1300" b="0">
+                <a:spcPts val="200"/>
+              </a:spcAft>
+            </a:pPr>
+            <a:r>
+              <a:rPr sz="900" b="0">
                 <a:solidFill>
                   <a:srgbClr val="222222"/>
                 </a:solidFill>
@@ -5317,7 +6089,7 @@
               <a:t>Juds, D. H. (1967). </a:t>
             </a:r>
             <a:r>
-              <a:rPr sz="1300" b="0" i="1">
+              <a:rPr sz="900" b="0" i="1">
                 <a:solidFill>
                   <a:srgbClr val="222222"/>
                 </a:solidFill>
@@ -5326,7 +6098,7 @@
               <a:t>Combination hydraulic and pneumatic jacks</a:t>
             </a:r>
             <a:r>
-              <a:rPr sz="1300" b="0" i="0">
+              <a:rPr sz="900" b="0" i="0">
                 <a:solidFill>
                   <a:srgbClr val="222222"/>
                 </a:solidFill>
@@ -5338,11 +6110,11 @@
           <a:p>
             <a:pPr>
               <a:spcAft>
-                <a:spcPts val="600"/>
-              </a:spcAft>
-            </a:pPr>
-            <a:r>
-              <a:rPr sz="1300" b="0">
+                <a:spcPts val="200"/>
+              </a:spcAft>
+            </a:pPr>
+            <a:r>
+              <a:rPr sz="900" b="0">
                 <a:solidFill>
                   <a:srgbClr val="222222"/>
                 </a:solidFill>
@@ -5351,7 +6123,7 @@
               <a:t>Junkyard Mob. (n.d.). </a:t>
             </a:r>
             <a:r>
-              <a:rPr sz="1300" b="0" i="1">
+              <a:rPr sz="900" b="0" i="1">
                 <a:solidFill>
                   <a:srgbClr val="222222"/>
                 </a:solidFill>
@@ -5360,13 +6132,580 @@
               <a:t>Car jack history and how to identify antique models</a:t>
             </a:r>
             <a:r>
-              <a:rPr sz="1300" b="0" i="0">
+              <a:rPr sz="900" b="0" i="0">
                 <a:solidFill>
                   <a:srgbClr val="222222"/>
                 </a:solidFill>
                 <a:latin typeface="Calibri"/>
               </a:rPr>
               <a:t>. https://www.junkyardmob.com/misc/antique-car-jack-identification/</a:t>
+            </a:r>
+          </a:p>
+          <a:p>
+            <a:pPr>
+              <a:spcAft>
+                <a:spcPts val="200"/>
+              </a:spcAft>
+            </a:pPr>
+            <a:r>
+              <a:rPr sz="900" b="0">
+                <a:solidFill>
+                  <a:srgbClr val="222222"/>
+                </a:solidFill>
+                <a:latin typeface="Calibri"/>
+              </a:rPr>
+              <a:t>LaFrance, J. (1920). </a:t>
+            </a:r>
+            <a:r>
+              <a:rPr sz="900" b="0" i="1">
+                <a:solidFill>
+                  <a:srgbClr val="222222"/>
+                </a:solidFill>
+                <a:latin typeface="Calibri"/>
+              </a:rPr>
+              <a:t>Jack</a:t>
+            </a:r>
+            <a:r>
+              <a:rPr sz="900" b="0" i="0">
+                <a:solidFill>
+                  <a:srgbClr val="222222"/>
+                </a:solidFill>
+                <a:latin typeface="Calibri"/>
+              </a:rPr>
+              <a:t> (U.S. Patent No. 1,362,630). https://patents.google.com/patent/US1362630A/en</a:t>
+            </a:r>
+          </a:p>
+          <a:p>
+            <a:pPr>
+              <a:spcAft>
+                <a:spcPts val="200"/>
+              </a:spcAft>
+            </a:pPr>
+            <a:r>
+              <a:rPr sz="900" b="0">
+                <a:solidFill>
+                  <a:srgbClr val="222222"/>
+                </a:solidFill>
+                <a:latin typeface="Calibri"/>
+              </a:rPr>
+              <a:t>LibreTexts. (n.d.). </a:t>
+            </a:r>
+            <a:r>
+              <a:rPr sz="900" b="0" i="1">
+                <a:solidFill>
+                  <a:srgbClr val="222222"/>
+                </a:solidFill>
+                <a:latin typeface="Calibri"/>
+              </a:rPr>
+              <a:t>10.2: Force multiplication</a:t>
+            </a:r>
+            <a:r>
+              <a:rPr sz="900" b="0" i="0">
+                <a:solidFill>
+                  <a:srgbClr val="222222"/>
+                </a:solidFill>
+                <a:latin typeface="Calibri"/>
+              </a:rPr>
+              <a:t>. https://eng.libretexts.org/Courses/Northeast_Wisconsin_Technical_College/Fluids_1:_Fluid_Power_and_Pneumatics_(NWTC)/10:_Pascal's_Law/10.02:_Force_Multiplication</a:t>
+            </a:r>
+          </a:p>
+        </p:txBody>
+      </p:sp>
+      <p:sp>
+        <p:nvSpPr>
+          <p:cNvPr id="7" name="TextBox 6"/>
+          <p:cNvSpPr txBox="1"/>
+          <p:nvPr/>
+        </p:nvSpPr>
+        <p:spPr>
+          <a:xfrm>
+            <a:off x="6126479" y="1325880"/>
+            <a:ext cx="5440680" cy="4937760"/>
+          </a:xfrm>
+          <a:prstGeom prst="rect">
+            <a:avLst/>
+          </a:prstGeom>
+          <a:noFill/>
+        </p:spPr>
+        <p:txBody>
+          <a:bodyPr wrap="square" anchor="t" lIns="45720" rIns="45720">
+            <a:spAutoFit/>
+          </a:bodyPr>
+          <a:lstStyle/>
+          <a:p>
+            <a:pPr algn="l">
+              <a:spcAft>
+                <a:spcPts val="200"/>
+              </a:spcAft>
+            </a:pPr>
+            <a:r>
+              <a:rPr sz="900" b="0">
+                <a:solidFill>
+                  <a:srgbClr val="222222"/>
+                </a:solidFill>
+                <a:latin typeface="Calibri"/>
+              </a:rPr>
+              <a:t>Mickael, E. (2004). </a:t>
+            </a:r>
+            <a:r>
+              <a:rPr sz="900" b="0" i="1">
+                <a:solidFill>
+                  <a:srgbClr val="222222"/>
+                </a:solidFill>
+                <a:latin typeface="Calibri"/>
+              </a:rPr>
+              <a:t>Motor driven scissor jack with limit switches</a:t>
+            </a:r>
+            <a:r>
+              <a:rPr sz="900" b="0" i="0">
+                <a:solidFill>
+                  <a:srgbClr val="222222"/>
+                </a:solidFill>
+                <a:latin typeface="Calibri"/>
+              </a:rPr>
+              <a:t> (U.S. Patent No. 6,695,289). https://patents.google.com/patent/US6695289B1/en</a:t>
+            </a:r>
+          </a:p>
+          <a:p>
+            <a:pPr>
+              <a:spcAft>
+                <a:spcPts val="200"/>
+              </a:spcAft>
+            </a:pPr>
+            <a:r>
+              <a:rPr sz="900" b="0">
+                <a:solidFill>
+                  <a:srgbClr val="222222"/>
+                </a:solidFill>
+                <a:latin typeface="Calibri"/>
+              </a:rPr>
+              <a:t>Pro-Lift-Montagetechnik. (n.d.). </a:t>
+            </a:r>
+            <a:r>
+              <a:rPr sz="900" b="0" i="1">
+                <a:solidFill>
+                  <a:srgbClr val="222222"/>
+                </a:solidFill>
+                <a:latin typeface="Calibri"/>
+              </a:rPr>
+              <a:t>12V electric scissor jack, car jack, 123 mm – 345 mm</a:t>
+            </a:r>
+            <a:r>
+              <a:rPr sz="900" b="0" i="0">
+                <a:solidFill>
+                  <a:srgbClr val="222222"/>
+                </a:solidFill>
+                <a:latin typeface="Calibri"/>
+              </a:rPr>
+              <a:t>. https://www.pro-lift-montagetechnik.com/12-volt-electric-scissor-jack-car-jack-123mm-345mm-002</a:t>
+            </a:r>
+          </a:p>
+          <a:p>
+            <a:pPr>
+              <a:spcAft>
+                <a:spcPts val="200"/>
+              </a:spcAft>
+            </a:pPr>
+            <a:r>
+              <a:rPr sz="900" b="0">
+                <a:solidFill>
+                  <a:srgbClr val="222222"/>
+                </a:solidFill>
+                <a:latin typeface="Calibri"/>
+              </a:rPr>
+              <a:t>Redline Stands. (n.d.). </a:t>
+            </a:r>
+            <a:r>
+              <a:rPr sz="900" b="0" i="1">
+                <a:solidFill>
+                  <a:srgbClr val="222222"/>
+                </a:solidFill>
+                <a:latin typeface="Calibri"/>
+              </a:rPr>
+              <a:t>Bottle jack vs. floor jack: Differences, pros, and cons</a:t>
+            </a:r>
+            <a:r>
+              <a:rPr sz="900" b="0" i="0">
+                <a:solidFill>
+                  <a:srgbClr val="222222"/>
+                </a:solidFill>
+                <a:latin typeface="Calibri"/>
+              </a:rPr>
+              <a:t>. https://www.redlinestands.com/blog/bottle-jack-vs-floor-jack/</a:t>
+            </a:r>
+          </a:p>
+          <a:p>
+            <a:pPr>
+              <a:spcAft>
+                <a:spcPts val="200"/>
+              </a:spcAft>
+            </a:pPr>
+            <a:r>
+              <a:rPr sz="900" b="0">
+                <a:solidFill>
+                  <a:srgbClr val="222222"/>
+                </a:solidFill>
+                <a:latin typeface="Calibri"/>
+              </a:rPr>
+              <a:t>Richard Dudgeon, Inc. (n.d.). </a:t>
+            </a:r>
+            <a:r>
+              <a:rPr sz="900" b="0" i="1">
+                <a:solidFill>
+                  <a:srgbClr val="222222"/>
+                </a:solidFill>
+                <a:latin typeface="Calibri"/>
+              </a:rPr>
+              <a:t>History</a:t>
+            </a:r>
+            <a:r>
+              <a:rPr sz="900" b="0" i="0">
+                <a:solidFill>
+                  <a:srgbClr val="222222"/>
+                </a:solidFill>
+                <a:latin typeface="Calibri"/>
+              </a:rPr>
+              <a:t>. https://www.dudgeonjacks.com/history.html</a:t>
+            </a:r>
+          </a:p>
+          <a:p>
+            <a:pPr>
+              <a:spcAft>
+                <a:spcPts val="200"/>
+              </a:spcAft>
+            </a:pPr>
+            <a:r>
+              <a:rPr sz="900" b="0">
+                <a:solidFill>
+                  <a:srgbClr val="222222"/>
+                </a:solidFill>
+                <a:latin typeface="Calibri"/>
+              </a:rPr>
+              <a:t>Roton Products. (n.d.). </a:t>
+            </a:r>
+            <a:r>
+              <a:rPr sz="900" b="0" i="1">
+                <a:solidFill>
+                  <a:srgbClr val="222222"/>
+                </a:solidFill>
+                <a:latin typeface="Calibri"/>
+              </a:rPr>
+              <a:t>Trapezoidal lead screws: General information</a:t>
+            </a:r>
+            <a:r>
+              <a:rPr sz="900" b="0" i="0">
+                <a:solidFill>
+                  <a:srgbClr val="222222"/>
+                </a:solidFill>
+                <a:latin typeface="Calibri"/>
+              </a:rPr>
+              <a:t>. https://www.roton.com/products/trapezoidal-lead-screws-nuts/general-information/</a:t>
+            </a:r>
+          </a:p>
+          <a:p>
+            <a:pPr>
+              <a:spcAft>
+                <a:spcPts val="200"/>
+              </a:spcAft>
+            </a:pPr>
+            <a:r>
+              <a:rPr sz="900" b="0">
+                <a:solidFill>
+                  <a:srgbClr val="222222"/>
+                </a:solidFill>
+                <a:latin typeface="Calibri"/>
+              </a:rPr>
+              <a:t>Sider Ticino. (n.d.). </a:t>
+            </a:r>
+            <a:r>
+              <a:rPr sz="900" b="0" i="1">
+                <a:solidFill>
+                  <a:srgbClr val="222222"/>
+                </a:solidFill>
+                <a:latin typeface="Calibri"/>
+              </a:rPr>
+              <a:t>42CrMo4 technical specifications</a:t>
+            </a:r>
+            <a:r>
+              <a:rPr sz="900" b="0" i="0">
+                <a:solidFill>
+                  <a:srgbClr val="222222"/>
+                </a:solidFill>
+                <a:latin typeface="Calibri"/>
+              </a:rPr>
+              <a:t>. https://siderticino.it/en/steel-datasheets/42crmo4/</a:t>
+            </a:r>
+          </a:p>
+          <a:p>
+            <a:pPr>
+              <a:spcAft>
+                <a:spcPts val="200"/>
+              </a:spcAft>
+            </a:pPr>
+            <a:r>
+              <a:rPr sz="900" b="0">
+                <a:solidFill>
+                  <a:srgbClr val="222222"/>
+                </a:solidFill>
+                <a:latin typeface="Calibri"/>
+              </a:rPr>
+              <a:t>Stevenson, H. M. (1898). </a:t>
+            </a:r>
+            <a:r>
+              <a:rPr sz="900" b="0" i="1">
+                <a:solidFill>
+                  <a:srgbClr val="222222"/>
+                </a:solidFill>
+                <a:latin typeface="Calibri"/>
+              </a:rPr>
+              <a:t>Lifting-jack</a:t>
+            </a:r>
+            <a:r>
+              <a:rPr sz="900" b="0" i="0">
+                <a:solidFill>
+                  <a:srgbClr val="222222"/>
+                </a:solidFill>
+                <a:latin typeface="Calibri"/>
+              </a:rPr>
+              <a:t> (U.S. Patent No. 601,451). https://patents.google.com/patent/US601451A/en</a:t>
+            </a:r>
+          </a:p>
+          <a:p>
+            <a:pPr>
+              <a:spcAft>
+                <a:spcPts val="200"/>
+              </a:spcAft>
+            </a:pPr>
+            <a:r>
+              <a:rPr sz="900" b="0">
+                <a:solidFill>
+                  <a:srgbClr val="222222"/>
+                </a:solidFill>
+                <a:latin typeface="Calibri"/>
+              </a:rPr>
+              <a:t>The World Material. (n.d.). </a:t>
+            </a:r>
+            <a:r>
+              <a:rPr sz="900" b="0" i="1">
+                <a:solidFill>
+                  <a:srgbClr val="222222"/>
+                </a:solidFill>
+                <a:latin typeface="Calibri"/>
+              </a:rPr>
+              <a:t>EN 10025-2 S235 steel properties</a:t>
+            </a:r>
+            <a:r>
+              <a:rPr sz="900" b="0" i="0">
+                <a:solidFill>
+                  <a:srgbClr val="222222"/>
+                </a:solidFill>
+                <a:latin typeface="Calibri"/>
+              </a:rPr>
+              <a:t>. https://www.theworldmaterial.com/en-10025-2-material-s235-steel/</a:t>
+            </a:r>
+          </a:p>
+          <a:p>
+            <a:pPr>
+              <a:spcAft>
+                <a:spcPts val="200"/>
+              </a:spcAft>
+            </a:pPr>
+            <a:r>
+              <a:rPr sz="900" b="0">
+                <a:solidFill>
+                  <a:srgbClr val="222222"/>
+                </a:solidFill>
+                <a:latin typeface="Calibri"/>
+              </a:rPr>
+              <a:t>TMG Industrial. (n.d.). </a:t>
+            </a:r>
+            <a:r>
+              <a:rPr sz="900" b="0" i="1">
+                <a:solidFill>
+                  <a:srgbClr val="222222"/>
+                </a:solidFill>
+                <a:latin typeface="Calibri"/>
+              </a:rPr>
+              <a:t>Air hydraulic bottle jacks: How they work and safety tips for use</a:t>
+            </a:r>
+            <a:r>
+              <a:rPr sz="900" b="0" i="0">
+                <a:solidFill>
+                  <a:srgbClr val="222222"/>
+                </a:solidFill>
+                <a:latin typeface="Calibri"/>
+              </a:rPr>
+              <a:t>. https://tmgindustrial.ca/blogs/news/air-hydraulic-bottle-jacks-how-they-work-and-safety-tips-for-use</a:t>
+            </a:r>
+          </a:p>
+          <a:p>
+            <a:pPr>
+              <a:spcAft>
+                <a:spcPts val="200"/>
+              </a:spcAft>
+            </a:pPr>
+            <a:r>
+              <a:rPr sz="900" b="0">
+                <a:solidFill>
+                  <a:srgbClr val="222222"/>
+                </a:solidFill>
+                <a:latin typeface="Calibri"/>
+              </a:rPr>
+              <a:t>VEVOR. (n.d.). </a:t>
+            </a:r>
+            <a:r>
+              <a:rPr sz="900" b="0" i="1">
+                <a:solidFill>
+                  <a:srgbClr val="222222"/>
+                </a:solidFill>
+                <a:latin typeface="Calibri"/>
+              </a:rPr>
+              <a:t>Things to know before buying a pneumatic bottle jack</a:t>
+            </a:r>
+            <a:r>
+              <a:rPr sz="900" b="0" i="0">
+                <a:solidFill>
+                  <a:srgbClr val="222222"/>
+                </a:solidFill>
+                <a:latin typeface="Calibri"/>
+              </a:rPr>
+              <a:t>. https://www.vevor.com/diy-ideas/things-to-know-before-buying-a-pneumatic-bottle-jack/</a:t>
+            </a:r>
+          </a:p>
+          <a:p>
+            <a:pPr>
+              <a:spcAft>
+                <a:spcPts val="200"/>
+              </a:spcAft>
+            </a:pPr>
+            <a:r>
+              <a:rPr sz="900" b="0">
+                <a:solidFill>
+                  <a:srgbClr val="222222"/>
+                </a:solidFill>
+                <a:latin typeface="Calibri"/>
+              </a:rPr>
+              <a:t>Wikipedia. (n.d.-a). </a:t>
+            </a:r>
+            <a:r>
+              <a:rPr sz="900" b="0" i="1">
+                <a:solidFill>
+                  <a:srgbClr val="222222"/>
+                </a:solidFill>
+                <a:latin typeface="Calibri"/>
+              </a:rPr>
+              <a:t>Blackhawk (tools)</a:t>
+            </a:r>
+            <a:r>
+              <a:rPr sz="900" b="0" i="0">
+                <a:solidFill>
+                  <a:srgbClr val="222222"/>
+                </a:solidFill>
+                <a:latin typeface="Calibri"/>
+              </a:rPr>
+              <a:t>. https://en.wikipedia.org/wiki/Blackhawk_(tools)</a:t>
+            </a:r>
+          </a:p>
+          <a:p>
+            <a:pPr>
+              <a:spcAft>
+                <a:spcPts val="200"/>
+              </a:spcAft>
+            </a:pPr>
+            <a:r>
+              <a:rPr sz="900" b="0">
+                <a:solidFill>
+                  <a:srgbClr val="222222"/>
+                </a:solidFill>
+                <a:latin typeface="Calibri"/>
+              </a:rPr>
+              <a:t>Wikipedia. (n.d.-b). </a:t>
+            </a:r>
+            <a:r>
+              <a:rPr sz="900" b="0" i="1">
+                <a:solidFill>
+                  <a:srgbClr val="222222"/>
+                </a:solidFill>
+                <a:latin typeface="Calibri"/>
+              </a:rPr>
+              <a:t>Jackscrew</a:t>
+            </a:r>
+            <a:r>
+              <a:rPr sz="900" b="0" i="0">
+                <a:solidFill>
+                  <a:srgbClr val="222222"/>
+                </a:solidFill>
+                <a:latin typeface="Calibri"/>
+              </a:rPr>
+              <a:t>. https://en.wikipedia.org/wiki/Jackscrew</a:t>
+            </a:r>
+          </a:p>
+          <a:p>
+            <a:pPr>
+              <a:spcAft>
+                <a:spcPts val="200"/>
+              </a:spcAft>
+            </a:pPr>
+            <a:r>
+              <a:rPr sz="900" b="0">
+                <a:solidFill>
+                  <a:srgbClr val="222222"/>
+                </a:solidFill>
+                <a:latin typeface="Calibri"/>
+              </a:rPr>
+              <a:t>Wikipedia. (n.d.-c). </a:t>
+            </a:r>
+            <a:r>
+              <a:rPr sz="900" b="0" i="1">
+                <a:solidFill>
+                  <a:srgbClr val="222222"/>
+                </a:solidFill>
+                <a:latin typeface="Calibri"/>
+              </a:rPr>
+              <a:t>Richard Dudgeon</a:t>
+            </a:r>
+            <a:r>
+              <a:rPr sz="900" b="0" i="0">
+                <a:solidFill>
+                  <a:srgbClr val="222222"/>
+                </a:solidFill>
+                <a:latin typeface="Calibri"/>
+              </a:rPr>
+              <a:t>. https://en.wikipedia.org/wiki/Richard_Dudgeon</a:t>
+            </a:r>
+          </a:p>
+          <a:p>
+            <a:pPr>
+              <a:spcAft>
+                <a:spcPts val="200"/>
+              </a:spcAft>
+            </a:pPr>
+            <a:r>
+              <a:rPr sz="900" b="0">
+                <a:solidFill>
+                  <a:srgbClr val="222222"/>
+                </a:solidFill>
+                <a:latin typeface="Calibri"/>
+              </a:rPr>
+              <a:t>Wikipedia. (n.d.-d). </a:t>
+            </a:r>
+            <a:r>
+              <a:rPr sz="900" b="0" i="1">
+                <a:solidFill>
+                  <a:srgbClr val="222222"/>
+                </a:solidFill>
+                <a:latin typeface="Calibri"/>
+              </a:rPr>
+              <a:t>Spare tire</a:t>
+            </a:r>
+            <a:r>
+              <a:rPr sz="900" b="0" i="0">
+                <a:solidFill>
+                  <a:srgbClr val="222222"/>
+                </a:solidFill>
+                <a:latin typeface="Calibri"/>
+              </a:rPr>
+              <a:t>. https://en.wikipedia.org/wiki/Spare_tire</a:t>
             </a:r>
           </a:p>
         </p:txBody>
@@ -5379,7 +6718,7 @@
 </p:sld>
 </file>
 
-<file path=ppt/slides/slide12.xml><?xml version="1.0" encoding="utf-8"?>
+<file path=ppt/slides/slide2.xml><?xml version="1.0" encoding="utf-8"?>
 <p:sld xmlns:a="http://schemas.openxmlformats.org/drawingml/2006/main" xmlns:p="http://schemas.openxmlformats.org/presentationml/2006/main" xmlns:r="http://schemas.openxmlformats.org/officeDocument/2006/relationships">
   <p:cSld>
     <p:spTree>
@@ -5423,7 +6762,7 @@
                 </a:solidFill>
                 <a:latin typeface="Calibri"/>
               </a:rPr>
-              <a:t>Šaltiniai (2/2)</a:t>
+              <a:t>Funkcija: kam reikalingas domkratas?</a:t>
             </a:r>
           </a:p>
         </p:txBody>
@@ -5506,7 +6845,7 @@
                 </a:solidFill>
                 <a:latin typeface="Calibri"/>
               </a:rPr>
-              <a:t>12 / 12</a:t>
+              <a:t>2 / 12</a:t>
             </a:r>
           </a:p>
         </p:txBody>
@@ -5558,650 +6897,6 @@
         </p:nvSpPr>
         <p:spPr>
           <a:xfrm>
-            <a:off x="640080" y="1463040"/>
-            <a:ext cx="10881360" cy="4754880"/>
-          </a:xfrm>
-          <a:prstGeom prst="rect">
-            <a:avLst/>
-          </a:prstGeom>
-          <a:noFill/>
-        </p:spPr>
-        <p:txBody>
-          <a:bodyPr wrap="square" anchor="t" lIns="45720" rIns="45720">
-            <a:spAutoFit/>
-          </a:bodyPr>
-          <a:lstStyle/>
-          <a:p>
-            <a:pPr algn="l">
-              <a:spcAft>
-                <a:spcPts val="600"/>
-              </a:spcAft>
-            </a:pPr>
-            <a:r>
-              <a:rPr sz="1300" b="0">
-                <a:solidFill>
-                  <a:srgbClr val="222222"/>
-                </a:solidFill>
-                <a:latin typeface="Calibri"/>
-              </a:rPr>
-              <a:t>LaFrance, J. (1920). </a:t>
-            </a:r>
-            <a:r>
-              <a:rPr sz="1300" b="0" i="1">
-                <a:solidFill>
-                  <a:srgbClr val="222222"/>
-                </a:solidFill>
-                <a:latin typeface="Calibri"/>
-              </a:rPr>
-              <a:t>Jack</a:t>
-            </a:r>
-            <a:r>
-              <a:rPr sz="1300" b="0" i="0">
-                <a:solidFill>
-                  <a:srgbClr val="222222"/>
-                </a:solidFill>
-                <a:latin typeface="Calibri"/>
-              </a:rPr>
-              <a:t> (U.S. Patent No. 1,362,630). https://patents.google.com/patent/US1362630A/en</a:t>
-            </a:r>
-          </a:p>
-          <a:p>
-            <a:pPr>
-              <a:spcAft>
-                <a:spcPts val="600"/>
-              </a:spcAft>
-            </a:pPr>
-            <a:r>
-              <a:rPr sz="1300" b="0">
-                <a:solidFill>
-                  <a:srgbClr val="222222"/>
-                </a:solidFill>
-                <a:latin typeface="Calibri"/>
-              </a:rPr>
-              <a:t>LibreTexts. (n.d.). </a:t>
-            </a:r>
-            <a:r>
-              <a:rPr sz="1300" b="0" i="1">
-                <a:solidFill>
-                  <a:srgbClr val="222222"/>
-                </a:solidFill>
-                <a:latin typeface="Calibri"/>
-              </a:rPr>
-              <a:t>10.2: Force multiplication</a:t>
-            </a:r>
-            <a:r>
-              <a:rPr sz="1300" b="0" i="0">
-                <a:solidFill>
-                  <a:srgbClr val="222222"/>
-                </a:solidFill>
-                <a:latin typeface="Calibri"/>
-              </a:rPr>
-              <a:t>. https://eng.libretexts.org/Courses/Northeast_Wisconsin_Technical_College/Fluids_1:_Fluid_Power_and_Pneumatics_(NWTC)/10:_Pascal's_Law/10.02:_Force_Multiplication</a:t>
-            </a:r>
-          </a:p>
-          <a:p>
-            <a:pPr>
-              <a:spcAft>
-                <a:spcPts val="600"/>
-              </a:spcAft>
-            </a:pPr>
-            <a:r>
-              <a:rPr sz="1300" b="0">
-                <a:solidFill>
-                  <a:srgbClr val="222222"/>
-                </a:solidFill>
-                <a:latin typeface="Calibri"/>
-              </a:rPr>
-              <a:t>Mickael, E. (2004). </a:t>
-            </a:r>
-            <a:r>
-              <a:rPr sz="1300" b="0" i="1">
-                <a:solidFill>
-                  <a:srgbClr val="222222"/>
-                </a:solidFill>
-                <a:latin typeface="Calibri"/>
-              </a:rPr>
-              <a:t>Motor driven scissor jack with limit switches</a:t>
-            </a:r>
-            <a:r>
-              <a:rPr sz="1300" b="0" i="0">
-                <a:solidFill>
-                  <a:srgbClr val="222222"/>
-                </a:solidFill>
-                <a:latin typeface="Calibri"/>
-              </a:rPr>
-              <a:t> (U.S. Patent No. 6,695,289). https://patents.google.com/patent/US6695289B1/en</a:t>
-            </a:r>
-          </a:p>
-          <a:p>
-            <a:pPr>
-              <a:spcAft>
-                <a:spcPts val="600"/>
-              </a:spcAft>
-            </a:pPr>
-            <a:r>
-              <a:rPr sz="1300" b="0">
-                <a:solidFill>
-                  <a:srgbClr val="222222"/>
-                </a:solidFill>
-                <a:latin typeface="Calibri"/>
-              </a:rPr>
-              <a:t>Pro-Lift-Montagetechnik. (n.d.). </a:t>
-            </a:r>
-            <a:r>
-              <a:rPr sz="1300" b="0" i="1">
-                <a:solidFill>
-                  <a:srgbClr val="222222"/>
-                </a:solidFill>
-                <a:latin typeface="Calibri"/>
-              </a:rPr>
-              <a:t>12V electric scissor jack, car jack, 123 mm – 345 mm</a:t>
-            </a:r>
-            <a:r>
-              <a:rPr sz="1300" b="0" i="0">
-                <a:solidFill>
-                  <a:srgbClr val="222222"/>
-                </a:solidFill>
-                <a:latin typeface="Calibri"/>
-              </a:rPr>
-              <a:t>. https://www.pro-lift-montagetechnik.com/12-volt-electric-scissor-jack-car-jack-123mm-345mm-002</a:t>
-            </a:r>
-          </a:p>
-          <a:p>
-            <a:pPr>
-              <a:spcAft>
-                <a:spcPts val="600"/>
-              </a:spcAft>
-            </a:pPr>
-            <a:r>
-              <a:rPr sz="1300" b="0">
-                <a:solidFill>
-                  <a:srgbClr val="222222"/>
-                </a:solidFill>
-                <a:latin typeface="Calibri"/>
-              </a:rPr>
-              <a:t>Redline Stands. (n.d.). </a:t>
-            </a:r>
-            <a:r>
-              <a:rPr sz="1300" b="0" i="1">
-                <a:solidFill>
-                  <a:srgbClr val="222222"/>
-                </a:solidFill>
-                <a:latin typeface="Calibri"/>
-              </a:rPr>
-              <a:t>Bottle jack vs. floor jack: Differences, pros, and cons</a:t>
-            </a:r>
-            <a:r>
-              <a:rPr sz="1300" b="0" i="0">
-                <a:solidFill>
-                  <a:srgbClr val="222222"/>
-                </a:solidFill>
-                <a:latin typeface="Calibri"/>
-              </a:rPr>
-              <a:t>. https://www.redlinestands.com/blog/bottle-jack-vs-floor-jack/</a:t>
-            </a:r>
-          </a:p>
-          <a:p>
-            <a:pPr>
-              <a:spcAft>
-                <a:spcPts val="600"/>
-              </a:spcAft>
-            </a:pPr>
-            <a:r>
-              <a:rPr sz="1300" b="0">
-                <a:solidFill>
-                  <a:srgbClr val="222222"/>
-                </a:solidFill>
-                <a:latin typeface="Calibri"/>
-              </a:rPr>
-              <a:t>Roton Products. (n.d.). </a:t>
-            </a:r>
-            <a:r>
-              <a:rPr sz="1300" b="0" i="1">
-                <a:solidFill>
-                  <a:srgbClr val="222222"/>
-                </a:solidFill>
-                <a:latin typeface="Calibri"/>
-              </a:rPr>
-              <a:t>Trapezoidal lead screws: General information</a:t>
-            </a:r>
-            <a:r>
-              <a:rPr sz="1300" b="0" i="0">
-                <a:solidFill>
-                  <a:srgbClr val="222222"/>
-                </a:solidFill>
-                <a:latin typeface="Calibri"/>
-              </a:rPr>
-              <a:t>. https://www.roton.com/products/trapezoidal-lead-screws-nuts/general-information/</a:t>
-            </a:r>
-          </a:p>
-          <a:p>
-            <a:pPr>
-              <a:spcAft>
-                <a:spcPts val="600"/>
-              </a:spcAft>
-            </a:pPr>
-            <a:r>
-              <a:rPr sz="1300" b="0">
-                <a:solidFill>
-                  <a:srgbClr val="222222"/>
-                </a:solidFill>
-                <a:latin typeface="Calibri"/>
-              </a:rPr>
-              <a:t>Sider Ticino. (n.d.). </a:t>
-            </a:r>
-            <a:r>
-              <a:rPr sz="1300" b="0" i="1">
-                <a:solidFill>
-                  <a:srgbClr val="222222"/>
-                </a:solidFill>
-                <a:latin typeface="Calibri"/>
-              </a:rPr>
-              <a:t>42CrMo4 technical specifications</a:t>
-            </a:r>
-            <a:r>
-              <a:rPr sz="1300" b="0" i="0">
-                <a:solidFill>
-                  <a:srgbClr val="222222"/>
-                </a:solidFill>
-                <a:latin typeface="Calibri"/>
-              </a:rPr>
-              <a:t>. https://siderticino.it/en/steel-datasheets/42crmo4/</a:t>
-            </a:r>
-          </a:p>
-          <a:p>
-            <a:pPr>
-              <a:spcAft>
-                <a:spcPts val="600"/>
-              </a:spcAft>
-            </a:pPr>
-            <a:r>
-              <a:rPr sz="1300" b="0">
-                <a:solidFill>
-                  <a:srgbClr val="222222"/>
-                </a:solidFill>
-                <a:latin typeface="Calibri"/>
-              </a:rPr>
-              <a:t>Stevenson, H. M. (1898). </a:t>
-            </a:r>
-            <a:r>
-              <a:rPr sz="1300" b="0" i="1">
-                <a:solidFill>
-                  <a:srgbClr val="222222"/>
-                </a:solidFill>
-                <a:latin typeface="Calibri"/>
-              </a:rPr>
-              <a:t>Lifting-jack</a:t>
-            </a:r>
-            <a:r>
-              <a:rPr sz="1300" b="0" i="0">
-                <a:solidFill>
-                  <a:srgbClr val="222222"/>
-                </a:solidFill>
-                <a:latin typeface="Calibri"/>
-              </a:rPr>
-              <a:t> (U.S. Patent No. 601,451). https://patents.google.com/patent/US601451A/en</a:t>
-            </a:r>
-          </a:p>
-          <a:p>
-            <a:pPr>
-              <a:spcAft>
-                <a:spcPts val="600"/>
-              </a:spcAft>
-            </a:pPr>
-            <a:r>
-              <a:rPr sz="1300" b="0">
-                <a:solidFill>
-                  <a:srgbClr val="222222"/>
-                </a:solidFill>
-                <a:latin typeface="Calibri"/>
-              </a:rPr>
-              <a:t>The World Material. (n.d.). </a:t>
-            </a:r>
-            <a:r>
-              <a:rPr sz="1300" b="0" i="1">
-                <a:solidFill>
-                  <a:srgbClr val="222222"/>
-                </a:solidFill>
-                <a:latin typeface="Calibri"/>
-              </a:rPr>
-              <a:t>EN 10025-2 S235 steel properties</a:t>
-            </a:r>
-            <a:r>
-              <a:rPr sz="1300" b="0" i="0">
-                <a:solidFill>
-                  <a:srgbClr val="222222"/>
-                </a:solidFill>
-                <a:latin typeface="Calibri"/>
-              </a:rPr>
-              <a:t>. https://www.theworldmaterial.com/en-10025-2-material-s235-steel/</a:t>
-            </a:r>
-          </a:p>
-          <a:p>
-            <a:pPr>
-              <a:spcAft>
-                <a:spcPts val="600"/>
-              </a:spcAft>
-            </a:pPr>
-            <a:r>
-              <a:rPr sz="1300" b="0">
-                <a:solidFill>
-                  <a:srgbClr val="222222"/>
-                </a:solidFill>
-                <a:latin typeface="Calibri"/>
-              </a:rPr>
-              <a:t>TMG Industrial. (n.d.). </a:t>
-            </a:r>
-            <a:r>
-              <a:rPr sz="1300" b="0" i="1">
-                <a:solidFill>
-                  <a:srgbClr val="222222"/>
-                </a:solidFill>
-                <a:latin typeface="Calibri"/>
-              </a:rPr>
-              <a:t>Air hydraulic bottle jacks: How they work and safety tips for use</a:t>
-            </a:r>
-            <a:r>
-              <a:rPr sz="1300" b="0" i="0">
-                <a:solidFill>
-                  <a:srgbClr val="222222"/>
-                </a:solidFill>
-                <a:latin typeface="Calibri"/>
-              </a:rPr>
-              <a:t>. https://tmgindustrial.ca/blogs/news/air-hydraulic-bottle-jacks-how-they-work-and-safety-tips-for-use</a:t>
-            </a:r>
-          </a:p>
-          <a:p>
-            <a:pPr>
-              <a:spcAft>
-                <a:spcPts val="600"/>
-              </a:spcAft>
-            </a:pPr>
-            <a:r>
-              <a:rPr sz="1300" b="0">
-                <a:solidFill>
-                  <a:srgbClr val="222222"/>
-                </a:solidFill>
-                <a:latin typeface="Calibri"/>
-              </a:rPr>
-              <a:t>VEVOR. (n.d.). </a:t>
-            </a:r>
-            <a:r>
-              <a:rPr sz="1300" b="0" i="1">
-                <a:solidFill>
-                  <a:srgbClr val="222222"/>
-                </a:solidFill>
-                <a:latin typeface="Calibri"/>
-              </a:rPr>
-              <a:t>Things to know before buying a pneumatic bottle jack</a:t>
-            </a:r>
-            <a:r>
-              <a:rPr sz="1300" b="0" i="0">
-                <a:solidFill>
-                  <a:srgbClr val="222222"/>
-                </a:solidFill>
-                <a:latin typeface="Calibri"/>
-              </a:rPr>
-              <a:t>. https://www.vevor.com/diy-ideas/things-to-know-before-buying-a-pneumatic-bottle-jack/</a:t>
-            </a:r>
-          </a:p>
-          <a:p>
-            <a:pPr>
-              <a:spcAft>
-                <a:spcPts val="600"/>
-              </a:spcAft>
-            </a:pPr>
-            <a:r>
-              <a:rPr sz="1300" b="0">
-                <a:solidFill>
-                  <a:srgbClr val="222222"/>
-                </a:solidFill>
-                <a:latin typeface="Calibri"/>
-              </a:rPr>
-              <a:t>Wikipedia. (n.d.-a). </a:t>
-            </a:r>
-            <a:r>
-              <a:rPr sz="1300" b="0" i="1">
-                <a:solidFill>
-                  <a:srgbClr val="222222"/>
-                </a:solidFill>
-                <a:latin typeface="Calibri"/>
-              </a:rPr>
-              <a:t>Jackscrew</a:t>
-            </a:r>
-            <a:r>
-              <a:rPr sz="1300" b="0" i="0">
-                <a:solidFill>
-                  <a:srgbClr val="222222"/>
-                </a:solidFill>
-                <a:latin typeface="Calibri"/>
-              </a:rPr>
-              <a:t>. https://en.wikipedia.org/wiki/Jackscrew</a:t>
-            </a:r>
-          </a:p>
-          <a:p>
-            <a:pPr>
-              <a:spcAft>
-                <a:spcPts val="600"/>
-              </a:spcAft>
-            </a:pPr>
-            <a:r>
-              <a:rPr sz="1300" b="0">
-                <a:solidFill>
-                  <a:srgbClr val="222222"/>
-                </a:solidFill>
-                <a:latin typeface="Calibri"/>
-              </a:rPr>
-              <a:t>Wikipedia. (n.d.-b). </a:t>
-            </a:r>
-            <a:r>
-              <a:rPr sz="1300" b="0" i="1">
-                <a:solidFill>
-                  <a:srgbClr val="222222"/>
-                </a:solidFill>
-                <a:latin typeface="Calibri"/>
-              </a:rPr>
-              <a:t>Spare tire</a:t>
-            </a:r>
-            <a:r>
-              <a:rPr sz="1300" b="0" i="0">
-                <a:solidFill>
-                  <a:srgbClr val="222222"/>
-                </a:solidFill>
-                <a:latin typeface="Calibri"/>
-              </a:rPr>
-              <a:t>. https://en.wikipedia.org/wiki/Spare_tire</a:t>
-            </a:r>
-          </a:p>
-        </p:txBody>
-      </p:sp>
-    </p:spTree>
-  </p:cSld>
-  <p:clrMapOvr>
-    <a:masterClrMapping/>
-  </p:clrMapOvr>
-</p:sld>
-</file>
-
-<file path=ppt/slides/slide2.xml><?xml version="1.0" encoding="utf-8"?>
-<p:sld xmlns:a="http://schemas.openxmlformats.org/drawingml/2006/main" xmlns:p="http://schemas.openxmlformats.org/presentationml/2006/main" xmlns:r="http://schemas.openxmlformats.org/officeDocument/2006/relationships">
-  <p:cSld>
-    <p:spTree>
-      <p:nvGrpSpPr>
-        <p:cNvPr id="1" name=""/>
-        <p:cNvGrpSpPr/>
-        <p:nvPr/>
-      </p:nvGrpSpPr>
-      <p:grpSpPr/>
-      <p:sp>
-        <p:nvSpPr>
-          <p:cNvPr id="2" name="TextBox 1"/>
-          <p:cNvSpPr txBox="1"/>
-          <p:nvPr/>
-        </p:nvSpPr>
-        <p:spPr>
-          <a:xfrm>
-            <a:off x="548640" y="320040"/>
-            <a:ext cx="11064240" cy="822960"/>
-          </a:xfrm>
-          <a:prstGeom prst="rect">
-            <a:avLst/>
-          </a:prstGeom>
-          <a:noFill/>
-        </p:spPr>
-        <p:txBody>
-          <a:bodyPr wrap="square" anchor="b" lIns="45720" rIns="45720">
-            <a:spAutoFit/>
-          </a:bodyPr>
-          <a:lstStyle/>
-          <a:p>
-            <a:pPr algn="l">
-              <a:spcAft>
-                <a:spcPts val="600"/>
-              </a:spcAft>
-            </a:pPr>
-            <a:r>
-              <a:rPr sz="3200" b="1">
-                <a:solidFill>
-                  <a:srgbClr val="1F4E79"/>
-                </a:solidFill>
-                <a:latin typeface="Calibri"/>
-              </a:rPr>
-              <a:t>Kodėl prireikė domkrato?</a:t>
-            </a:r>
-          </a:p>
-        </p:txBody>
-      </p:sp>
-      <p:sp>
-        <p:nvSpPr>
-          <p:cNvPr id="3" name="Rectangle 2"/>
-          <p:cNvSpPr/>
-          <p:nvPr/>
-        </p:nvSpPr>
-        <p:spPr>
-          <a:xfrm>
-            <a:off x="594360" y="1207008"/>
-            <a:ext cx="10972800" cy="27432"/>
-          </a:xfrm>
-          <a:prstGeom prst="rect">
-            <a:avLst/>
-          </a:prstGeom>
-          <a:solidFill>
-            <a:srgbClr val="1F4E79"/>
-          </a:solidFill>
-          <a:ln>
-            <a:noFill/>
-          </a:ln>
-          <a:effectLst/>
-        </p:spPr>
-        <p:style>
-          <a:lnRef idx="1">
-            <a:schemeClr val="accent1"/>
-          </a:lnRef>
-          <a:fillRef idx="3">
-            <a:schemeClr val="accent1"/>
-          </a:fillRef>
-          <a:effectRef idx="2">
-            <a:schemeClr val="accent1"/>
-          </a:effectRef>
-          <a:fontRef idx="minor">
-            <a:schemeClr val="lt1"/>
-          </a:fontRef>
-        </p:style>
-        <p:txBody>
-          <a:bodyPr rtlCol="0" anchor="ctr"/>
-          <a:lstStyle/>
-          <a:p>
-            <a:pPr algn="ctr"/>
-          </a:p>
-        </p:txBody>
-      </p:sp>
-      <p:sp>
-        <p:nvSpPr>
-          <p:cNvPr id="4" name="TextBox 3"/>
-          <p:cNvSpPr txBox="1"/>
-          <p:nvPr/>
-        </p:nvSpPr>
-        <p:spPr>
-          <a:xfrm>
-            <a:off x="10698480" y="6355080"/>
-            <a:ext cx="1005840" cy="365760"/>
-          </a:xfrm>
-          <a:prstGeom prst="rect">
-            <a:avLst/>
-          </a:prstGeom>
-          <a:noFill/>
-        </p:spPr>
-        <p:txBody>
-          <a:bodyPr wrap="square" anchor="t" lIns="45720" rIns="45720">
-            <a:spAutoFit/>
-          </a:bodyPr>
-          <a:lstStyle/>
-          <a:p>
-            <a:pPr algn="r">
-              <a:spcAft>
-                <a:spcPts val="600"/>
-              </a:spcAft>
-            </a:pPr>
-            <a:r>
-              <a:rPr sz="1200" b="0">
-                <a:solidFill>
-                  <a:srgbClr val="595959"/>
-                </a:solidFill>
-                <a:latin typeface="Calibri"/>
-              </a:rPr>
-              <a:t>2 / 12</a:t>
-            </a:r>
-          </a:p>
-        </p:txBody>
-      </p:sp>
-      <p:sp>
-        <p:nvSpPr>
-          <p:cNvPr id="5" name="TextBox 4"/>
-          <p:cNvSpPr txBox="1"/>
-          <p:nvPr/>
-        </p:nvSpPr>
-        <p:spPr>
-          <a:xfrm>
-            <a:off x="548640" y="6355080"/>
-            <a:ext cx="7315200" cy="365760"/>
-          </a:xfrm>
-          <a:prstGeom prst="rect">
-            <a:avLst/>
-          </a:prstGeom>
-          <a:noFill/>
-        </p:spPr>
-        <p:txBody>
-          <a:bodyPr wrap="square" anchor="t" lIns="45720" rIns="45720">
-            <a:spAutoFit/>
-          </a:bodyPr>
-          <a:lstStyle/>
-          <a:p>
-            <a:pPr algn="l">
-              <a:spcAft>
-                <a:spcPts val="600"/>
-              </a:spcAft>
-            </a:pPr>
-            <a:r>
-              <a:rPr sz="1200" b="0">
-                <a:solidFill>
-                  <a:srgbClr val="595959"/>
-                </a:solidFill>
-                <a:latin typeface="Calibri"/>
-              </a:rPr>
-              <a:t>PBL · Automobilinis domkratas</a:t>
-            </a:r>
-          </a:p>
-        </p:txBody>
-      </p:sp>
-      <p:sp>
-        <p:nvSpPr>
-          <p:cNvPr id="6" name="TextBox 5"/>
-          <p:cNvSpPr txBox="1"/>
-          <p:nvPr/>
-        </p:nvSpPr>
-        <p:spPr>
-          <a:xfrm>
             <a:off x="640080" y="1554480"/>
             <a:ext cx="6400800" cy="4206240"/>
           </a:xfrm>
@@ -6218,101 +6913,101 @@
           <a:p>
             <a:pPr algn="l">
               <a:spcAft>
-                <a:spcPts val="1600"/>
-              </a:spcAft>
-            </a:pPr>
-            <a:r>
-              <a:rPr sz="2100" b="1">
+                <a:spcPts val="1400"/>
+              </a:spcAft>
+            </a:pPr>
+            <a:r>
+              <a:rPr sz="2000" b="1">
                 <a:solidFill>
                   <a:srgbClr val="222222"/>
                 </a:solidFill>
                 <a:latin typeface="Calibri"/>
               </a:rPr>
+              <a:t>• Funkcija</a:t>
+            </a:r>
+            <a:r>
+              <a:rPr sz="2000" b="0" i="0">
+                <a:solidFill>
+                  <a:srgbClr val="222222"/>
+                </a:solidFill>
+                <a:latin typeface="Calibri"/>
+              </a:rPr>
+              <a:t> – nedidele žmogaus jėga pakelti sunkų krovinį, pvz., automobilio kampą, kad būtų galima pakeisti ratą.</a:t>
+            </a:r>
+          </a:p>
+          <a:p>
+            <a:pPr>
+              <a:spcAft>
+                <a:spcPts val="1400"/>
+              </a:spcAft>
+            </a:pPr>
+            <a:r>
+              <a:rPr sz="2000" b="1">
+                <a:solidFill>
+                  <a:srgbClr val="222222"/>
+                </a:solidFill>
+                <a:latin typeface="Calibri"/>
+              </a:rPr>
+              <a:t>• Kaip tai pavyksta</a:t>
+            </a:r>
+            <a:r>
+              <a:rPr sz="2000" b="0" i="0">
+                <a:solidFill>
+                  <a:srgbClr val="222222"/>
+                </a:solidFill>
+                <a:latin typeface="Calibri"/>
+              </a:rPr>
+              <a:t> – sraigtas ar svirtis: maža jėga, bet ilgas kelias; hidraulika: pagal Paskalio dėsnį didesnis stūmoklis duoda didesnę jėgą.</a:t>
+            </a:r>
+          </a:p>
+          <a:p>
+            <a:pPr>
+              <a:spcAft>
+                <a:spcPts val="1400"/>
+              </a:spcAft>
+            </a:pPr>
+            <a:r>
+              <a:rPr sz="2000" b="1">
+                <a:solidFill>
+                  <a:srgbClr val="222222"/>
+                </a:solidFill>
+                <a:latin typeface="Calibri"/>
+              </a:rPr>
               <a:t>• Prieš automobilius</a:t>
             </a:r>
             <a:r>
-              <a:rPr sz="2100" b="0" i="0">
+              <a:rPr sz="2000" b="0" i="0">
                 <a:solidFill>
                   <a:srgbClr val="222222"/>
                 </a:solidFill>
                 <a:latin typeface="Calibri"/>
               </a:rPr>
-              <a:t> – vežimams kelti naudoti paprasti svertiniai domkratai (dešinėje – 1882 m. vežimo domkratas).</a:t>
+              <a:t> – vežimams kelti naudoti svertiniai domkratai (dešinėje – 1882 m. vežimo domkratas).</a:t>
             </a:r>
           </a:p>
           <a:p>
             <a:pPr>
               <a:spcAft>
-                <a:spcPts val="1600"/>
-              </a:spcAft>
-            </a:pPr>
-            <a:r>
-              <a:rPr sz="2100" b="1">
+                <a:spcPts val="1400"/>
+              </a:spcAft>
+            </a:pPr>
+            <a:r>
+              <a:rPr sz="2000" b="1">
                 <a:solidFill>
                   <a:srgbClr val="222222"/>
                 </a:solidFill>
                 <a:latin typeface="Calibri"/>
               </a:rPr>
-              <a:t>• Pirmieji automobiliai</a:t>
-            </a:r>
-            <a:r>
-              <a:rPr sz="2100" b="0" i="0">
+              <a:t>• Kodėl prireikė automobiliams</a:t>
+            </a:r>
+            <a:r>
+              <a:rPr sz="2000" b="0" i="0">
                 <a:solidFill>
                   <a:srgbClr val="222222"/>
                 </a:solidFill>
                 <a:latin typeface="Calibri"/>
               </a:rPr>
-              <a:t> – keliuose gulėjo daug pasagų vinių, todėl padangos prakiurdavo labai dažnai, kartais kelis kartus per vieną išvyką.</a:t>
-            </a:r>
-          </a:p>
-          <a:p>
-            <a:pPr>
-              <a:spcAft>
-                <a:spcPts val="1600"/>
-              </a:spcAft>
-            </a:pPr>
-            <a:r>
-              <a:rPr sz="2100" b="1">
-                <a:solidFill>
-                  <a:srgbClr val="222222"/>
-                </a:solidFill>
-                <a:latin typeface="Calibri"/>
-              </a:rPr>
-              <a:t>• Ką tekdavo daryti</a:t>
-            </a:r>
-            <a:r>
-              <a:rPr sz="2100" b="0" i="0">
-                <a:solidFill>
-                  <a:srgbClr val="222222"/>
-                </a:solidFill>
-                <a:latin typeface="Calibri"/>
-              </a:rPr>
-              <a:t> – pakelti automobilį, nuimti ratą, užklijuoti kamerą ir vėl viską surinkti.</a:t>
-            </a:r>
-          </a:p>
-          <a:p>
-            <a:pPr>
-              <a:spcAft>
-                <a:spcPts val="1600"/>
-              </a:spcAft>
-            </a:pPr>
-            <a:r>
-              <a:rPr sz="2100" b="1">
-                <a:solidFill>
-                  <a:srgbClr val="222222"/>
-                </a:solidFill>
-                <a:latin typeface="Calibri"/>
-              </a:rPr>
-              <a:t>• Išvada gamintojams</a:t>
-            </a:r>
-            <a:r>
-              <a:rPr sz="2100" b="0" i="0">
-                <a:solidFill>
-                  <a:srgbClr val="222222"/>
-                </a:solidFill>
-                <a:latin typeface="Calibri"/>
-              </a:rPr>
-              <a:t> – kiekviename automobilyje reikia nešiojamo, paprasto ir pakankamai stipraus domkrato.</a:t>
+              <a:t> – keliuose gulėjo daug pasagų vinių, padangos prakiurdavo labai dažnai, todėl domkrato reikėjo kiekviename automobilyje.</a:t>
             </a:r>
           </a:p>
         </p:txBody>
@@ -6458,7 +7153,7 @@
                 </a:solidFill>
                 <a:latin typeface="Calibri"/>
               </a:rPr>
-              <a:t>Šaltiniai: Bovey (1882); Wikipedia (n.d.-b); Junkyard Mob (n.d.).</a:t>
+              <a:t>Šaltiniai: Joyce/Dayton (n.d.); LibreTexts (n.d.); Bovey (1882); Wikipedia (n.d.-d); Junkyard Mob (n.d.).</a:t>
             </a:r>
           </a:p>
         </p:txBody>
@@ -6515,7 +7210,7 @@
                 </a:solidFill>
                 <a:latin typeface="Calibri"/>
               </a:rPr>
-              <a:t>Domkratų raida laiko juostoje</a:t>
+              <a:t>Istorija: domkratų raida laiko juostoje</a:t>
             </a:r>
           </a:p>
         </p:txBody>
@@ -7939,7 +8634,7 @@
                 </a:solidFill>
                 <a:latin typeface="Calibri"/>
               </a:rPr>
-              <a:t>Šaltiniai: Stevenson (1898); Wikipedia (n.d.-a); Joyce/Dayton (n.d.).</a:t>
+              <a:t>Šaltiniai: Stevenson (1898); Wikipedia (n.d.-b); Joyce/Dayton (n.d.).</a:t>
             </a:r>
           </a:p>
         </p:txBody>
@@ -9541,7 +10236,7 @@
                 </a:solidFill>
                 <a:latin typeface="Calibri"/>
               </a:rPr>
-              <a:t>Kiti domkratų tipai</a:t>
+              <a:t>Pritaikymas: kur naudojami domkratai</a:t>
             </a:r>
           </a:p>
         </p:txBody>
@@ -9677,8 +10372,8 @@
           <p:nvPr/>
         </p:nvGraphicFramePr>
         <p:xfrm>
-          <a:off x="640080" y="1554480"/>
-          <a:ext cx="10881360" cy="3474720"/>
+          <a:off x="640080" y="1463040"/>
+          <a:ext cx="10881360" cy="3968496"/>
         </p:xfrm>
         <a:graphic>
           <a:graphicData uri="http://schemas.openxmlformats.org/drawingml/2006/table">
@@ -9687,25 +10382,24 @@
                 <a:tableStyleId>{5C22544A-7EE6-4342-B048-85BDC9FD1C3A}</a:tableStyleId>
               </a:tblPr>
               <a:tblGrid>
-                <a:gridCol w="2377440"/>
-                <a:gridCol w="1737360"/>
-                <a:gridCol w="3383280"/>
-                <a:gridCol w="3383280"/>
+                <a:gridCol w="2926080"/>
+                <a:gridCol w="3017520"/>
+                <a:gridCol w="4937760"/>
               </a:tblGrid>
-              <a:tr h="868680">
+              <a:tr h="566928">
                 <a:tc>
                   <a:txBody>
                     <a:bodyPr/>
                     <a:lstStyle/>
                     <a:p>
                       <a:r>
-                        <a:rPr sz="1700" b="1" i="0">
+                        <a:rPr sz="1600" b="1" i="0">
                           <a:solidFill>
                             <a:srgbClr val="FFFFFF"/>
                           </a:solidFill>
                           <a:latin typeface="Calibri"/>
                         </a:rPr>
-                        <a:t>Tipas</a:t>
+                        <a:t>Kur naudojama</a:t>
                       </a:r>
                     </a:p>
                   </a:txBody>
@@ -9721,13 +10415,13 @@
                     <a:lstStyle/>
                     <a:p>
                       <a:r>
-                        <a:rPr sz="1700" b="1" i="0">
+                        <a:rPr sz="1600" b="1" i="0">
                           <a:solidFill>
                             <a:srgbClr val="FFFFFF"/>
                           </a:solidFill>
                           <a:latin typeface="Calibri"/>
                         </a:rPr>
-                        <a:t>Atsiradimas</a:t>
+                        <a:t>Domkrato tipas</a:t>
                       </a:r>
                     </a:p>
                   </a:txBody>
@@ -9743,35 +10437,13 @@
                     <a:lstStyle/>
                     <a:p>
                       <a:r>
-                        <a:rPr sz="1700" b="1" i="0">
+                        <a:rPr sz="1600" b="1" i="0">
                           <a:solidFill>
                             <a:srgbClr val="FFFFFF"/>
                           </a:solidFill>
                           <a:latin typeface="Calibri"/>
                         </a:rPr>
-                        <a:t>Privalumai</a:t>
-                      </a:r>
-                    </a:p>
-                  </a:txBody>
-                  <a:tcPr marL="73152" marR="73152" anchor="ctr">
-                    <a:solidFill>
-                      <a:srgbClr val="1F4E79"/>
-                    </a:solidFill>
-                  </a:tcPr>
-                </a:tc>
-                <a:tc>
-                  <a:txBody>
-                    <a:bodyPr/>
-                    <a:lstStyle/>
-                    <a:p>
-                      <a:r>
-                        <a:rPr sz="1700" b="1" i="0">
-                          <a:solidFill>
-                            <a:srgbClr val="FFFFFF"/>
-                          </a:solidFill>
-                          <a:latin typeface="Calibri"/>
-                        </a:rPr>
-                        <a:t>Trūkumai</a:t>
+                        <a:t>Kodėl tinka</a:t>
                       </a:r>
                     </a:p>
                   </a:txBody>
@@ -9782,14 +10454,240 @@
                   </a:tcPr>
                 </a:tc>
               </a:tr>
-              <a:tr h="868680">
+              <a:tr h="566928">
                 <a:tc>
                   <a:txBody>
                     <a:bodyPr/>
                     <a:lstStyle/>
                     <a:p>
                       <a:r>
-                        <a:rPr sz="1700" b="1" i="0">
+                        <a:rPr sz="1600" b="1" i="0">
+                          <a:solidFill>
+                            <a:srgbClr val="222222"/>
+                          </a:solidFill>
+                          <a:latin typeface="Calibri"/>
+                        </a:rPr>
+                        <a:t>Lengvasis automobilis (ratui keisti)</a:t>
+                      </a:r>
+                    </a:p>
+                  </a:txBody>
+                  <a:tcPr marL="73152" marR="73152" anchor="ctr">
+                    <a:solidFill>
+                      <a:srgbClr val="FFFFFF"/>
+                    </a:solidFill>
+                  </a:tcPr>
+                </a:tc>
+                <a:tc>
+                  <a:txBody>
+                    <a:bodyPr/>
+                    <a:lstStyle/>
+                    <a:p>
+                      <a:r>
+                        <a:rPr sz="1600" b="0" i="0">
+                          <a:solidFill>
+                            <a:srgbClr val="222222"/>
+                          </a:solidFill>
+                          <a:latin typeface="Calibri"/>
+                        </a:rPr>
+                        <a:t>Žirklinis</a:t>
+                      </a:r>
+                    </a:p>
+                  </a:txBody>
+                  <a:tcPr marL="73152" marR="73152" anchor="ctr">
+                    <a:solidFill>
+                      <a:srgbClr val="FFFFFF"/>
+                    </a:solidFill>
+                  </a:tcPr>
+                </a:tc>
+                <a:tc>
+                  <a:txBody>
+                    <a:bodyPr/>
+                    <a:lstStyle/>
+                    <a:p>
+                      <a:r>
+                        <a:rPr sz="1600" b="0" i="0">
+                          <a:solidFill>
+                            <a:srgbClr val="222222"/>
+                          </a:solidFill>
+                          <a:latin typeface="Calibri"/>
+                        </a:rPr>
+                        <a:t>Lengvas ir pigus – gamintojai deda į naujus automobilius</a:t>
+                      </a:r>
+                    </a:p>
+                  </a:txBody>
+                  <a:tcPr marL="73152" marR="73152" anchor="ctr">
+                    <a:solidFill>
+                      <a:srgbClr val="FFFFFF"/>
+                    </a:solidFill>
+                  </a:tcPr>
+                </a:tc>
+              </a:tr>
+              <a:tr h="566928">
+                <a:tc>
+                  <a:txBody>
+                    <a:bodyPr/>
+                    <a:lstStyle/>
+                    <a:p>
+                      <a:r>
+                        <a:rPr sz="1600" b="1" i="0">
+                          <a:solidFill>
+                            <a:srgbClr val="222222"/>
+                          </a:solidFill>
+                          <a:latin typeface="Calibri"/>
+                        </a:rPr>
+                        <a:t>Autoservisai ir garažai</a:t>
+                      </a:r>
+                    </a:p>
+                  </a:txBody>
+                  <a:tcPr marL="73152" marR="73152" anchor="ctr">
+                    <a:solidFill>
+                      <a:srgbClr val="FFFFFF"/>
+                    </a:solidFill>
+                  </a:tcPr>
+                </a:tc>
+                <a:tc>
+                  <a:txBody>
+                    <a:bodyPr/>
+                    <a:lstStyle/>
+                    <a:p>
+                      <a:r>
+                        <a:rPr sz="1600" b="0" i="0">
+                          <a:solidFill>
+                            <a:srgbClr val="222222"/>
+                          </a:solidFill>
+                          <a:latin typeface="Calibri"/>
+                        </a:rPr>
+                        <a:t>Vežimėlinis, pneumohidraulinis</a:t>
+                      </a:r>
+                    </a:p>
+                  </a:txBody>
+                  <a:tcPr marL="73152" marR="73152" anchor="ctr">
+                    <a:solidFill>
+                      <a:srgbClr val="FFFFFF"/>
+                    </a:solidFill>
+                  </a:tcPr>
+                </a:tc>
+                <a:tc>
+                  <a:txBody>
+                    <a:bodyPr/>
+                    <a:lstStyle/>
+                    <a:p>
+                      <a:r>
+                        <a:rPr sz="1600" b="0" i="0">
+                          <a:solidFill>
+                            <a:srgbClr val="222222"/>
+                          </a:solidFill>
+                          <a:latin typeface="Calibri"/>
+                        </a:rPr>
+                        <a:t>Greitas ir stabilus; servisuose yra suslėgto oro linija</a:t>
+                      </a:r>
+                    </a:p>
+                  </a:txBody>
+                  <a:tcPr marL="73152" marR="73152" anchor="ctr">
+                    <a:solidFill>
+                      <a:srgbClr val="FFFFFF"/>
+                    </a:solidFill>
+                  </a:tcPr>
+                </a:tc>
+              </a:tr>
+              <a:tr h="566928">
+                <a:tc>
+                  <a:txBody>
+                    <a:bodyPr/>
+                    <a:lstStyle/>
+                    <a:p>
+                      <a:r>
+                        <a:rPr sz="1600" b="1" i="0">
+                          <a:solidFill>
+                            <a:srgbClr val="222222"/>
+                          </a:solidFill>
+                          <a:latin typeface="Calibri"/>
+                        </a:rPr>
+                        <a:t>Sunkvežimiai ir pramonė</a:t>
+                      </a:r>
+                    </a:p>
+                  </a:txBody>
+                  <a:tcPr marL="73152" marR="73152" anchor="ctr">
+                    <a:solidFill>
+                      <a:srgbClr val="FFFFFF"/>
+                    </a:solidFill>
+                  </a:tcPr>
+                </a:tc>
+                <a:tc>
+                  <a:txBody>
+                    <a:bodyPr/>
+                    <a:lstStyle/>
+                    <a:p>
+                      <a:r>
+                        <a:rPr sz="1600" b="0" i="0">
+                          <a:solidFill>
+                            <a:srgbClr val="222222"/>
+                          </a:solidFill>
+                          <a:latin typeface="Calibri"/>
+                        </a:rPr>
+                        <a:t>Hidraulinis butelinis</a:t>
+                      </a:r>
+                    </a:p>
+                  </a:txBody>
+                  <a:tcPr marL="73152" marR="73152" anchor="ctr">
+                    <a:solidFill>
+                      <a:srgbClr val="FFFFFF"/>
+                    </a:solidFill>
+                  </a:tcPr>
+                </a:tc>
+                <a:tc>
+                  <a:txBody>
+                    <a:bodyPr/>
+                    <a:lstStyle/>
+                    <a:p>
+                      <a:r>
+                        <a:rPr sz="1600" b="0" i="0">
+                          <a:solidFill>
+                            <a:srgbClr val="222222"/>
+                          </a:solidFill>
+                          <a:latin typeface="Calibri"/>
+                        </a:rPr>
+                        <a:t>Didelė keliamoji galia – nuo 3 iki 50 t</a:t>
+                      </a:r>
+                    </a:p>
+                  </a:txBody>
+                  <a:tcPr marL="73152" marR="73152" anchor="ctr">
+                    <a:solidFill>
+                      <a:srgbClr val="FFFFFF"/>
+                    </a:solidFill>
+                  </a:tcPr>
+                </a:tc>
+              </a:tr>
+              <a:tr h="566928">
+                <a:tc>
+                  <a:txBody>
+                    <a:bodyPr/>
+                    <a:lstStyle/>
+                    <a:p>
+                      <a:r>
+                        <a:rPr sz="1600" b="1" i="0">
+                          <a:solidFill>
+                            <a:srgbClr val="222222"/>
+                          </a:solidFill>
+                          <a:latin typeface="Calibri"/>
+                        </a:rPr>
+                        <a:t>Visureigiai ir ūkiai</a:t>
+                      </a:r>
+                    </a:p>
+                  </a:txBody>
+                  <a:tcPr marL="73152" marR="73152" anchor="ctr">
+                    <a:solidFill>
+                      <a:srgbClr val="FFFFFF"/>
+                    </a:solidFill>
+                  </a:tcPr>
+                </a:tc>
+                <a:tc>
+                  <a:txBody>
+                    <a:bodyPr/>
+                    <a:lstStyle/>
+                    <a:p>
+                      <a:r>
+                        <a:rPr sz="1600" b="0" i="0">
                           <a:solidFill>
                             <a:srgbClr val="222222"/>
                           </a:solidFill>
@@ -9811,13 +10709,37 @@
                     <a:lstStyle/>
                     <a:p>
                       <a:r>
-                        <a:rPr sz="1700" b="0" i="0">
+                        <a:rPr sz="1600" b="0" i="0">
                           <a:solidFill>
                             <a:srgbClr val="222222"/>
                           </a:solidFill>
                           <a:latin typeface="Calibri"/>
                         </a:rPr>
-                        <a:t>1905 m.</a:t>
+                        <a:t>Kelia labai aukštai, tinka ir traukti, spausti</a:t>
+                      </a:r>
+                    </a:p>
+                  </a:txBody>
+                  <a:tcPr marL="73152" marR="73152" anchor="ctr">
+                    <a:solidFill>
+                      <a:srgbClr val="FFFFFF"/>
+                    </a:solidFill>
+                  </a:tcPr>
+                </a:tc>
+              </a:tr>
+              <a:tr h="566928">
+                <a:tc>
+                  <a:txBody>
+                    <a:bodyPr/>
+                    <a:lstStyle/>
+                    <a:p>
+                      <a:r>
+                        <a:rPr sz="1600" b="1" i="0">
+                          <a:solidFill>
+                            <a:srgbClr val="222222"/>
+                          </a:solidFill>
+                          <a:latin typeface="Calibri"/>
+                        </a:rPr>
+                        <a:t>Statyba ir sunkūs kroviniai</a:t>
                       </a:r>
                     </a:p>
                   </a:txBody>
@@ -9833,13 +10755,13 @@
                     <a:lstStyle/>
                     <a:p>
                       <a:r>
-                        <a:rPr sz="1700" b="0" i="0">
+                        <a:rPr sz="1600" b="0" i="0">
                           <a:solidFill>
                             <a:srgbClr val="222222"/>
                           </a:solidFill>
                           <a:latin typeface="Calibri"/>
                         </a:rPr>
-                        <a:t>Kelia labai aukštai (iki ~1,5 m), tinka ir traukti, spausti</a:t>
+                        <a:t>Hidraulinės kėlimo sistemos</a:t>
                       </a:r>
                     </a:p>
                   </a:txBody>
@@ -9855,13 +10777,13 @@
                     <a:lstStyle/>
                     <a:p>
                       <a:r>
-                        <a:rPr sz="1700" b="0" i="0">
+                        <a:rPr sz="1600" b="0" i="0">
                           <a:solidFill>
                             <a:srgbClr val="222222"/>
                           </a:solidFill>
                           <a:latin typeface="Calibri"/>
                         </a:rPr>
-                        <a:t>Pavojinga rankenos atatranka, mažiau stabilus</a:t>
+                        <a:t>Daug domkratų kartu kelia didelius objektus</a:t>
                       </a:r>
                     </a:p>
                   </a:txBody>
@@ -9872,20 +10794,20 @@
                   </a:tcPr>
                 </a:tc>
               </a:tr>
-              <a:tr h="868680">
+              <a:tr h="566928">
                 <a:tc>
                   <a:txBody>
                     <a:bodyPr/>
                     <a:lstStyle/>
                     <a:p>
                       <a:r>
-                        <a:rPr sz="1700" b="1" i="0">
+                        <a:rPr sz="1600" b="1" i="0">
                           <a:solidFill>
                             <a:srgbClr val="222222"/>
                           </a:solidFill>
                           <a:latin typeface="Calibri"/>
                         </a:rPr>
-                        <a:t>Vežimėlinis (garažinis)</a:t>
+                        <a:t>Kas nenori sukti rankenos</a:t>
                       </a:r>
                     </a:p>
                   </a:txBody>
@@ -9901,75 +10823,7 @@
                     <a:lstStyle/>
                     <a:p>
                       <a:r>
-                        <a:rPr sz="1700" b="0" i="0">
-                          <a:solidFill>
-                            <a:srgbClr val="222222"/>
-                          </a:solidFill>
-                          <a:latin typeface="Calibri"/>
-                        </a:rPr>
-                        <a:t>1910 m. mechaninis, 1928 m. hidraulinis</a:t>
-                      </a:r>
-                    </a:p>
-                  </a:txBody>
-                  <a:tcPr marL="73152" marR="73152" anchor="ctr">
-                    <a:solidFill>
-                      <a:srgbClr val="FFFFFF"/>
-                    </a:solidFill>
-                  </a:tcPr>
-                </a:tc>
-                <a:tc>
-                  <a:txBody>
-                    <a:bodyPr/>
-                    <a:lstStyle/>
-                    <a:p>
-                      <a:r>
-                        <a:rPr sz="1700" b="0" i="0">
-                          <a:solidFill>
-                            <a:srgbClr val="222222"/>
-                          </a:solidFill>
-                          <a:latin typeface="Calibri"/>
-                        </a:rPr>
-                        <a:t>Greitas ir stabilus, platus pagrindas</a:t>
-                      </a:r>
-                    </a:p>
-                  </a:txBody>
-                  <a:tcPr marL="73152" marR="73152" anchor="ctr">
-                    <a:solidFill>
-                      <a:srgbClr val="FFFFFF"/>
-                    </a:solidFill>
-                  </a:tcPr>
-                </a:tc>
-                <a:tc>
-                  <a:txBody>
-                    <a:bodyPr/>
-                    <a:lstStyle/>
-                    <a:p>
-                      <a:r>
-                        <a:rPr sz="1700" b="0" i="0">
-                          <a:solidFill>
-                            <a:srgbClr val="222222"/>
-                          </a:solidFill>
-                          <a:latin typeface="Calibri"/>
-                        </a:rPr>
-                        <a:t>Didelis ir sunkus, sunku pernešti</a:t>
-                      </a:r>
-                    </a:p>
-                  </a:txBody>
-                  <a:tcPr marL="73152" marR="73152" anchor="ctr">
-                    <a:solidFill>
-                      <a:srgbClr val="FFFFFF"/>
-                    </a:solidFill>
-                  </a:tcPr>
-                </a:tc>
-              </a:tr>
-              <a:tr h="868680">
-                <a:tc>
-                  <a:txBody>
-                    <a:bodyPr/>
-                    <a:lstStyle/>
-                    <a:p>
-                      <a:r>
-                        <a:rPr sz="1700" b="1" i="0">
+                        <a:rPr sz="1600" b="0" i="0">
                           <a:solidFill>
                             <a:srgbClr val="222222"/>
                           </a:solidFill>
@@ -9991,29 +10845,7 @@
                     <a:lstStyle/>
                     <a:p>
                       <a:r>
-                        <a:rPr sz="1700" b="0" i="0">
-                          <a:solidFill>
-                            <a:srgbClr val="222222"/>
-                          </a:solidFill>
-                          <a:latin typeface="Calibri"/>
-                        </a:rPr>
-                        <a:t>2004 m. (patentas)</a:t>
-                      </a:r>
-                    </a:p>
-                  </a:txBody>
-                  <a:tcPr marL="73152" marR="73152" anchor="ctr">
-                    <a:solidFill>
-                      <a:srgbClr val="FFFFFF"/>
-                    </a:solidFill>
-                  </a:tcPr>
-                </a:tc>
-                <a:tc>
-                  <a:txBody>
-                    <a:bodyPr/>
-                    <a:lstStyle/>
-                    <a:p>
-                      <a:r>
-                        <a:rPr sz="1700" b="0" i="0">
+                        <a:rPr sz="1600" b="0" i="0">
                           <a:solidFill>
                             <a:srgbClr val="222222"/>
                           </a:solidFill>
@@ -10029,28 +10861,6 @@
                     </a:solidFill>
                   </a:tcPr>
                 </a:tc>
-                <a:tc>
-                  <a:txBody>
-                    <a:bodyPr/>
-                    <a:lstStyle/>
-                    <a:p>
-                      <a:r>
-                        <a:rPr sz="1700" b="0" i="0">
-                          <a:solidFill>
-                            <a:srgbClr val="222222"/>
-                          </a:solidFill>
-                          <a:latin typeface="Calibri"/>
-                        </a:rPr>
-                        <a:t>Reikia elektros, brangesnis ir sunkesnis</a:t>
-                      </a:r>
-                    </a:p>
-                  </a:txBody>
-                  <a:tcPr marL="73152" marR="73152" anchor="ctr">
-                    <a:solidFill>
-                      <a:srgbClr val="FFFFFF"/>
-                    </a:solidFill>
-                  </a:tcPr>
-                </a:tc>
               </a:tr>
             </a:tbl>
           </a:graphicData>
@@ -10064,7 +10874,7 @@
         </p:nvSpPr>
         <p:spPr>
           <a:xfrm>
-            <a:off x="640080" y="5760720"/>
+            <a:off x="640080" y="5897880"/>
             <a:ext cx="10881360" cy="457200"/>
           </a:xfrm>
           <a:prstGeom prst="rect">
@@ -10090,7 +10900,7 @@
                 </a:solidFill>
                 <a:latin typeface="Calibri"/>
               </a:rPr>
-              <a:t>Šaltiniai: Hi-Lift Jack Company (n.d.-a, n.d.-b); CJ Pony Parts (n.d.); Castle Equipment (n.d.); Redline Stands (n.d.); Mickael (2004); Pro-Lift-Montagetechnik (n.d.).</a:t>
+              <a:t>Šaltiniai: CJ Pony Parts (n.d.); Juds (1967); Hi-Lift Jack Company (n.d.-a); Richard Dudgeon, Inc. (n.d.); Pro-Lift-Montagetechnik (n.d.).</a:t>
             </a:r>
           </a:p>
         </p:txBody>
@@ -10147,7 +10957,7 @@
                 </a:solidFill>
                 <a:latin typeface="Calibri"/>
               </a:rPr>
-              <a:t>Ką siūlome patobulinti</a:t>
+              <a:t>Kompanijos, kūrusios domkratus</a:t>
             </a:r>
           </a:p>
         </p:txBody>
@@ -10274,109 +11084,17 @@
           </a:p>
         </p:txBody>
       </p:sp>
-      <p:sp>
-        <p:nvSpPr>
-          <p:cNvPr id="6" name="Rectangle 5"/>
-          <p:cNvSpPr/>
-          <p:nvPr/>
-        </p:nvSpPr>
-        <p:spPr>
-          <a:xfrm>
-            <a:off x="640080" y="1463040"/>
-            <a:ext cx="10881360" cy="914400"/>
-          </a:xfrm>
-          <a:prstGeom prst="rect">
-            <a:avLst/>
-          </a:prstGeom>
-          <a:solidFill>
-            <a:srgbClr val="DEEAF6"/>
-          </a:solidFill>
-          <a:ln>
-            <a:noFill/>
-          </a:ln>
-          <a:effectLst/>
-        </p:spPr>
-        <p:style>
-          <a:lnRef idx="1">
-            <a:schemeClr val="accent1"/>
-          </a:lnRef>
-          <a:fillRef idx="3">
-            <a:schemeClr val="accent1"/>
-          </a:fillRef>
-          <a:effectRef idx="2">
-            <a:schemeClr val="accent1"/>
-          </a:effectRef>
-          <a:fontRef idx="minor">
-            <a:schemeClr val="lt1"/>
-          </a:fontRef>
-        </p:style>
-        <p:txBody>
-          <a:bodyPr rtlCol="0" anchor="ctr"/>
-          <a:lstStyle/>
-          <a:p>
-            <a:pPr algn="ctr"/>
-          </a:p>
-        </p:txBody>
-      </p:sp>
-      <p:sp>
-        <p:nvSpPr>
-          <p:cNvPr id="7" name="TextBox 6"/>
-          <p:cNvSpPr txBox="1"/>
-          <p:nvPr/>
-        </p:nvSpPr>
-        <p:spPr>
-          <a:xfrm>
-            <a:off x="822960" y="1508760"/>
-            <a:ext cx="10515600" cy="822960"/>
-          </a:xfrm>
-          <a:prstGeom prst="rect">
-            <a:avLst/>
-          </a:prstGeom>
-          <a:noFill/>
-        </p:spPr>
-        <p:txBody>
-          <a:bodyPr wrap="square" anchor="ctr" lIns="45720" rIns="45720">
-            <a:spAutoFit/>
-          </a:bodyPr>
-          <a:lstStyle/>
-          <a:p>
-            <a:pPr algn="l">
-              <a:spcAft>
-                <a:spcPts val="600"/>
-              </a:spcAft>
-            </a:pPr>
-            <a:r>
-              <a:rPr sz="1900" b="1">
-                <a:solidFill>
-                  <a:srgbClr val="1F4E79"/>
-                </a:solidFill>
-                <a:latin typeface="Calibri"/>
-              </a:rPr>
-              <a:t>Tikslas: </a:t>
-            </a:r>
-            <a:r>
-              <a:rPr sz="1900" b="0" i="0">
-                <a:solidFill>
-                  <a:srgbClr val="222222"/>
-                </a:solidFill>
-                <a:latin typeface="Calibri"/>
-              </a:rPr>
-              <a:t>žirklinis domkratas, kuris stabiliai stovi ant nelygaus pagrindo, mažiau dyla ir yra patogiau sukamas.</a:t>
-            </a:r>
-          </a:p>
-        </p:txBody>
-      </p:sp>
       <p:graphicFrame>
         <p:nvGraphicFramePr>
-          <p:cNvPr id="8" name="Table 7"/>
+          <p:cNvPr id="6" name="Table 5"/>
           <p:cNvGraphicFramePr>
             <a:graphicFrameLocks noGrp="1"/>
           </p:cNvGraphicFramePr>
           <p:nvPr/>
         </p:nvGraphicFramePr>
         <p:xfrm>
-          <a:off x="640080" y="2606040"/>
-          <a:ext cx="10881360" cy="2834640"/>
+          <a:off x="640080" y="1463040"/>
+          <a:ext cx="10881360" cy="3950208"/>
         </p:xfrm>
         <a:graphic>
           <a:graphicData uri="http://schemas.openxmlformats.org/drawingml/2006/table">
@@ -10385,11 +11103,12 @@
                 <a:tableStyleId>{5C22544A-7EE6-4342-B048-85BDC9FD1C3A}</a:tableStyleId>
               </a:tblPr>
               <a:tblGrid>
-                <a:gridCol w="2194560"/>
-                <a:gridCol w="4206240"/>
-                <a:gridCol w="4480560"/>
+                <a:gridCol w="2743200"/>
+                <a:gridCol w="1554480"/>
+                <a:gridCol w="4023360"/>
+                <a:gridCol w="2560320"/>
               </a:tblGrid>
-              <a:tr h="566928">
+              <a:tr h="658368">
                 <a:tc>
                   <a:txBody>
                     <a:bodyPr/>
@@ -10402,7 +11121,7 @@
                           </a:solidFill>
                           <a:latin typeface="Calibri"/>
                         </a:rPr>
-                        <a:t>Elementas</a:t>
+                        <a:t>Kompanija</a:t>
                       </a:r>
                     </a:p>
                   </a:txBody>
@@ -10424,7 +11143,7 @@
                           </a:solidFill>
                           <a:latin typeface="Calibri"/>
                         </a:rPr>
-                        <a:t>Ką keičiame</a:t>
+                        <a:t>Įkurta</a:t>
                       </a:r>
                     </a:p>
                   </a:txBody>
@@ -10446,7 +11165,29 @@
                           </a:solidFill>
                           <a:latin typeface="Calibri"/>
                         </a:rPr>
-                        <a:t>Kodėl</a:t>
+                        <a:t>Ką sukūrė</a:t>
+                      </a:r>
+                    </a:p>
+                  </a:txBody>
+                  <a:tcPr marL="73152" marR="73152" anchor="ctr">
+                    <a:solidFill>
+                      <a:srgbClr val="1F4E79"/>
+                    </a:solidFill>
+                  </a:tcPr>
+                </a:tc>
+                <a:tc>
+                  <a:txBody>
+                    <a:bodyPr/>
+                    <a:lstStyle/>
+                    <a:p>
+                      <a:r>
+                        <a:rPr sz="1600" b="1" i="0">
+                          <a:solidFill>
+                            <a:srgbClr val="FFFFFF"/>
+                          </a:solidFill>
+                          <a:latin typeface="Calibri"/>
+                        </a:rPr>
+                        <a:t>Šiandien</a:t>
                       </a:r>
                     </a:p>
                   </a:txBody>
@@ -10457,7 +11198,7 @@
                   </a:tcPr>
                 </a:tc>
               </a:tr>
-              <a:tr h="566928">
+              <a:tr h="658368">
                 <a:tc>
                   <a:txBody>
                     <a:bodyPr/>
@@ -10470,7 +11211,7 @@
                           </a:solidFill>
                           <a:latin typeface="Calibri"/>
                         </a:rPr>
-                        <a:t>Pagrindas</a:t>
+                        <a:t>Richard Dudgeon, Inc. (Niujorkas)</a:t>
                       </a:r>
                     </a:p>
                   </a:txBody>
@@ -10492,7 +11233,7 @@
                           </a:solidFill>
                           <a:latin typeface="Calibri"/>
                         </a:rPr>
-                        <a:t>Platesnis, su guminiu padu</a:t>
+                        <a:t>1849 m.</a:t>
                       </a:r>
                     </a:p>
                   </a:txBody>
@@ -10514,31 +11255,7 @@
                           </a:solidFill>
                           <a:latin typeface="Calibri"/>
                         </a:rPr>
-                        <a:t>Neslysta ir nesmenga į minkštą paviršių</a:t>
-                      </a:r>
-                    </a:p>
-                  </a:txBody>
-                  <a:tcPr marL="73152" marR="73152" anchor="ctr">
-                    <a:solidFill>
-                      <a:srgbClr val="FFFFFF"/>
-                    </a:solidFill>
-                  </a:tcPr>
-                </a:tc>
-              </a:tr>
-              <a:tr h="566928">
-                <a:tc>
-                  <a:txBody>
-                    <a:bodyPr/>
-                    <a:lstStyle/>
-                    <a:p>
-                      <a:r>
-                        <a:rPr sz="1600" b="1" i="0">
-                          <a:solidFill>
-                            <a:srgbClr val="222222"/>
-                          </a:solidFill>
-                          <a:latin typeface="Calibri"/>
-                        </a:rPr>
-                        <a:t>Sraigtas ir veržlė</a:t>
+                        <a:t>Pirmasis nešiojamas hidraulinis domkratas (1851 m.)</a:t>
                       </a:r>
                     </a:p>
                   </a:txBody>
@@ -10560,7 +11277,31 @@
                           </a:solidFill>
                           <a:latin typeface="Calibri"/>
                         </a:rPr>
-                        <a:t>Trapecinis sraigtas iš plieno 42CrMo4, veržlė iš bronzos CuSn12</a:t>
+                        <a:t>Tebeveikia (Konektikutas)</a:t>
+                      </a:r>
+                    </a:p>
+                  </a:txBody>
+                  <a:tcPr marL="73152" marR="73152" anchor="ctr">
+                    <a:solidFill>
+                      <a:srgbClr val="FFFFFF"/>
+                    </a:solidFill>
+                  </a:tcPr>
+                </a:tc>
+              </a:tr>
+              <a:tr h="658368">
+                <a:tc>
+                  <a:txBody>
+                    <a:bodyPr/>
+                    <a:lstStyle/>
+                    <a:p>
+                      <a:r>
+                        <a:rPr sz="1600" b="1" i="0">
+                          <a:solidFill>
+                            <a:srgbClr val="222222"/>
+                          </a:solidFill>
+                          <a:latin typeface="Calibri"/>
+                        </a:rPr>
+                        <a:t>Hi-Lift Jack Company (Indiana)</a:t>
                       </a:r>
                     </a:p>
                   </a:txBody>
@@ -10582,31 +11323,7 @@
                           </a:solidFill>
                           <a:latin typeface="Calibri"/>
                         </a:rPr>
-                        <a:t>Savistabdis, mažiau dyla, maža trintis</a:t>
-                      </a:r>
-                    </a:p>
-                  </a:txBody>
-                  <a:tcPr marL="73152" marR="73152" anchor="ctr">
-                    <a:solidFill>
-                      <a:srgbClr val="FFFFFF"/>
-                    </a:solidFill>
-                  </a:tcPr>
-                </a:tc>
-              </a:tr>
-              <a:tr h="566928">
-                <a:tc>
-                  <a:txBody>
-                    <a:bodyPr/>
-                    <a:lstStyle/>
-                    <a:p>
-                      <a:r>
-                        <a:rPr sz="1600" b="1" i="0">
-                          <a:solidFill>
-                            <a:srgbClr val="222222"/>
-                          </a:solidFill>
-                          <a:latin typeface="Calibri"/>
-                        </a:rPr>
-                        <a:t>Svirtys</a:t>
+                        <a:t>1895 m.</a:t>
                       </a:r>
                     </a:p>
                   </a:txBody>
@@ -10628,7 +11345,7 @@
                           </a:solidFill>
                           <a:latin typeface="Calibri"/>
                         </a:rPr>
-                        <a:t>Plienas S420MC vietoj S235</a:t>
+                        <a:t>Krumpliastiebinis „Hi-Lift“ domkratas (1905 m.)</a:t>
                       </a:r>
                     </a:p>
                   </a:txBody>
@@ -10650,7 +11367,7 @@
                           </a:solidFill>
                           <a:latin typeface="Calibri"/>
                         </a:rPr>
-                        <a:t>Takumo riba 420 vs 235 MPa – apie 1,8 karto stipresnės</a:t>
+                        <a:t>Gamina iki šiol</a:t>
                       </a:r>
                     </a:p>
                   </a:txBody>
@@ -10661,7 +11378,7 @@
                   </a:tcPr>
                 </a:tc>
               </a:tr>
-              <a:tr h="566928">
+              <a:tr h="658368">
                 <a:tc>
                   <a:txBody>
                     <a:bodyPr/>
@@ -10674,7 +11391,7 @@
                           </a:solidFill>
                           <a:latin typeface="Calibri"/>
                         </a:rPr>
-                        <a:t>Rankena</a:t>
+                        <a:t>Weaver Manufacturing</a:t>
                       </a:r>
                     </a:p>
                   </a:txBody>
@@ -10696,7 +11413,7 @@
                           </a:solidFill>
                           <a:latin typeface="Calibri"/>
                         </a:rPr>
-                        <a:t>Ilgesnė, sulankstoma rankena</a:t>
+                        <a:t>—</a:t>
                       </a:r>
                     </a:p>
                   </a:txBody>
@@ -10718,7 +11435,209 @@
                           </a:solidFill>
                           <a:latin typeface="Calibri"/>
                         </a:rPr>
-                        <a:t>Sukti galima nesilenkiant prie pat rato (mūsų idėja)</a:t>
+                        <a:t>Vežimėlinis „Auto-Twin“ (1910 m.), pirmasis hidraulinis (1928 m.)</a:t>
+                      </a:r>
+                    </a:p>
+                  </a:txBody>
+                  <a:tcPr marL="73152" marR="73152" anchor="ctr">
+                    <a:solidFill>
+                      <a:srgbClr val="FFFFFF"/>
+                    </a:solidFill>
+                  </a:tcPr>
+                </a:tc>
+                <a:tc>
+                  <a:txBody>
+                    <a:bodyPr/>
+                    <a:lstStyle/>
+                    <a:p>
+                      <a:r>
+                        <a:rPr sz="1600" b="0" i="0">
+                          <a:solidFill>
+                            <a:srgbClr val="222222"/>
+                          </a:solidFill>
+                          <a:latin typeface="Calibri"/>
+                        </a:rPr>
+                        <a:t>—</a:t>
+                      </a:r>
+                    </a:p>
+                  </a:txBody>
+                  <a:tcPr marL="73152" marR="73152" anchor="ctr">
+                    <a:solidFill>
+                      <a:srgbClr val="FFFFFF"/>
+                    </a:solidFill>
+                  </a:tcPr>
+                </a:tc>
+              </a:tr>
+              <a:tr h="658368">
+                <a:tc>
+                  <a:txBody>
+                    <a:bodyPr/>
+                    <a:lstStyle/>
+                    <a:p>
+                      <a:r>
+                        <a:rPr sz="1600" b="1" i="0">
+                          <a:solidFill>
+                            <a:srgbClr val="222222"/>
+                          </a:solidFill>
+                          <a:latin typeface="Calibri"/>
+                        </a:rPr>
+                        <a:t>Blackhawk (Milvokis)</a:t>
+                      </a:r>
+                    </a:p>
+                  </a:txBody>
+                  <a:tcPr marL="73152" marR="73152" anchor="ctr">
+                    <a:solidFill>
+                      <a:srgbClr val="FFFFFF"/>
+                    </a:solidFill>
+                  </a:tcPr>
+                </a:tc>
+                <a:tc>
+                  <a:txBody>
+                    <a:bodyPr/>
+                    <a:lstStyle/>
+                    <a:p>
+                      <a:r>
+                        <a:rPr sz="1600" b="0" i="0">
+                          <a:solidFill>
+                            <a:srgbClr val="222222"/>
+                          </a:solidFill>
+                          <a:latin typeface="Calibri"/>
+                        </a:rPr>
+                        <a:t>1919 m.</a:t>
+                      </a:r>
+                    </a:p>
+                  </a:txBody>
+                  <a:tcPr marL="73152" marR="73152" anchor="ctr">
+                    <a:solidFill>
+                      <a:srgbClr val="FFFFFF"/>
+                    </a:solidFill>
+                  </a:tcPr>
+                </a:tc>
+                <a:tc>
+                  <a:txBody>
+                    <a:bodyPr/>
+                    <a:lstStyle/>
+                    <a:p>
+                      <a:r>
+                        <a:rPr sz="1600" b="0" i="0">
+                          <a:solidFill>
+                            <a:srgbClr val="222222"/>
+                          </a:solidFill>
+                          <a:latin typeface="Calibri"/>
+                        </a:rPr>
+                        <a:t>Įrankiai ir vežimėliniai domkratai</a:t>
+                      </a:r>
+                    </a:p>
+                  </a:txBody>
+                  <a:tcPr marL="73152" marR="73152" anchor="ctr">
+                    <a:solidFill>
+                      <a:srgbClr val="FFFFFF"/>
+                    </a:solidFill>
+                  </a:tcPr>
+                </a:tc>
+                <a:tc>
+                  <a:txBody>
+                    <a:bodyPr/>
+                    <a:lstStyle/>
+                    <a:p>
+                      <a:r>
+                        <a:rPr sz="1600" b="0" i="0">
+                          <a:solidFill>
+                            <a:srgbClr val="222222"/>
+                          </a:solidFill>
+                          <a:latin typeface="Calibri"/>
+                        </a:rPr>
+                        <a:t>Prekės ženklas priklauso Stanley</a:t>
+                      </a:r>
+                    </a:p>
+                  </a:txBody>
+                  <a:tcPr marL="73152" marR="73152" anchor="ctr">
+                    <a:solidFill>
+                      <a:srgbClr val="FFFFFF"/>
+                    </a:solidFill>
+                  </a:tcPr>
+                </a:tc>
+              </a:tr>
+              <a:tr h="658368">
+                <a:tc>
+                  <a:txBody>
+                    <a:bodyPr/>
+                    <a:lstStyle/>
+                    <a:p>
+                      <a:r>
+                        <a:rPr sz="1600" b="1" i="0">
+                          <a:solidFill>
+                            <a:srgbClr val="222222"/>
+                          </a:solidFill>
+                          <a:latin typeface="Calibri"/>
+                        </a:rPr>
+                        <a:t>Milwaukee Hydraulic Products</a:t>
+                      </a:r>
+                    </a:p>
+                  </a:txBody>
+                  <a:tcPr marL="73152" marR="73152" anchor="ctr">
+                    <a:solidFill>
+                      <a:srgbClr val="FFFFFF"/>
+                    </a:solidFill>
+                  </a:tcPr>
+                </a:tc>
+                <a:tc>
+                  <a:txBody>
+                    <a:bodyPr/>
+                    <a:lstStyle/>
+                    <a:p>
+                      <a:r>
+                        <a:rPr sz="1600" b="0" i="0">
+                          <a:solidFill>
+                            <a:srgbClr val="222222"/>
+                          </a:solidFill>
+                          <a:latin typeface="Calibri"/>
+                        </a:rPr>
+                        <a:t>—</a:t>
+                      </a:r>
+                    </a:p>
+                  </a:txBody>
+                  <a:tcPr marL="73152" marR="73152" anchor="ctr">
+                    <a:solidFill>
+                      <a:srgbClr val="FFFFFF"/>
+                    </a:solidFill>
+                  </a:tcPr>
+                </a:tc>
+                <a:tc>
+                  <a:txBody>
+                    <a:bodyPr/>
+                    <a:lstStyle/>
+                    <a:p>
+                      <a:r>
+                        <a:rPr sz="1600" b="0" i="0">
+                          <a:solidFill>
+                            <a:srgbClr val="222222"/>
+                          </a:solidFill>
+                          <a:latin typeface="Calibri"/>
+                        </a:rPr>
+                        <a:t>Kombinuotas pneumohidraulinis domkratas (1967 m. patentas)</a:t>
+                      </a:r>
+                    </a:p>
+                  </a:txBody>
+                  <a:tcPr marL="73152" marR="73152" anchor="ctr">
+                    <a:solidFill>
+                      <a:srgbClr val="FFFFFF"/>
+                    </a:solidFill>
+                  </a:tcPr>
+                </a:tc>
+                <a:tc>
+                  <a:txBody>
+                    <a:bodyPr/>
+                    <a:lstStyle/>
+                    <a:p>
+                      <a:r>
+                        <a:rPr sz="1600" b="0" i="0">
+                          <a:solidFill>
+                            <a:srgbClr val="222222"/>
+                          </a:solidFill>
+                          <a:latin typeface="Calibri"/>
+                        </a:rPr>
+                        <a:t>—</a:t>
                       </a:r>
                     </a:p>
                   </a:txBody>
@@ -10735,7 +11654,7 @@
       </p:graphicFrame>
       <p:sp>
         <p:nvSpPr>
-          <p:cNvPr id="9" name="TextBox 8"/>
+          <p:cNvPr id="7" name="TextBox 6"/>
           <p:cNvSpPr txBox="1"/>
           <p:nvPr/>
         </p:nvSpPr>
@@ -10767,7 +11686,7 @@
                 </a:solidFill>
                 <a:latin typeface="Calibri"/>
               </a:rPr>
-              <a:t>Šaltiniai: Roton Products (n.d.); Sider Ticino (n.d.); Hengli Automation (n.d.); Gnee Steel (n.d.); The World Material (n.d.); CN Trailer Parts (n.d.).</a:t>
+              <a:t>Šaltiniai: Wikipedia (n.d.-c); Richard Dudgeon, Inc. (n.d.); Hi-Lift Jack Company (n.d.-a); Castle Equipment (n.d.); Wikipedia (n.d.-a); Juds (1967).</a:t>
             </a:r>
           </a:p>
         </p:txBody>
